--- a/Arduino Blinky Workshop.pptx
+++ b/Arduino Blinky Workshop.pptx
@@ -1,42 +1,42 @@
 
 <file path=ppt/presentation.xml><?xml version="1.0" encoding="utf-8"?>
-<p:presentation xmlns:a="http://schemas.openxmlformats.org/drawingml/2006/main" xmlns:r="http://schemas.openxmlformats.org/officeDocument/2006/relationships" xmlns:mc="http://schemas.openxmlformats.org/markup-compatibility/2006" xmlns:mv="urn:schemas-microsoft-com:mac:vml" xmlns:p="http://schemas.openxmlformats.org/presentationml/2006/main" xmlns:c="http://schemas.openxmlformats.org/drawingml/2006/chart" xmlns:dgm="http://schemas.openxmlformats.org/drawingml/2006/diagram" xmlns:o="urn:schemas-microsoft-com:office:office" xmlns:v="urn:schemas-microsoft-com:vml" xmlns:pvml="urn:schemas-microsoft-com:office:powerpoint" xmlns:com="http://schemas.openxmlformats.org/drawingml/2006/compatibility" xmlns:p14="http://schemas.microsoft.com/office/powerpoint/2010/main" xmlns:p15="http://schemas.microsoft.com/office/powerpoint/2012/main" xmlns:ahyp="http://schemas.microsoft.com/office/drawing/2018/hyperlinkcolor" autoCompressPictures="0" strictFirstAndLastChars="0" saveSubsetFonts="1">
+<p:presentation xmlns:a="http://schemas.openxmlformats.org/drawingml/2006/main" xmlns:r="http://schemas.openxmlformats.org/officeDocument/2006/relationships" xmlns:p="http://schemas.openxmlformats.org/presentationml/2006/main" strictFirstAndLastChars="0" saveSubsetFonts="1" autoCompressPictures="0">
   <p:sldMasterIdLst>
-    <p:sldMasterId id="2147483659" r:id="rId4"/>
+    <p:sldMasterId id="2147483659" r:id="rId1"/>
   </p:sldMasterIdLst>
   <p:notesMasterIdLst>
-    <p:notesMasterId r:id="rId5"/>
+    <p:notesMasterId r:id="rId26"/>
   </p:notesMasterIdLst>
   <p:sldIdLst>
-    <p:sldId id="256" r:id="rId6"/>
-    <p:sldId id="257" r:id="rId7"/>
-    <p:sldId id="258" r:id="rId8"/>
-    <p:sldId id="259" r:id="rId9"/>
-    <p:sldId id="260" r:id="rId10"/>
-    <p:sldId id="261" r:id="rId11"/>
-    <p:sldId id="262" r:id="rId12"/>
-    <p:sldId id="263" r:id="rId13"/>
-    <p:sldId id="264" r:id="rId14"/>
-    <p:sldId id="265" r:id="rId15"/>
-    <p:sldId id="266" r:id="rId16"/>
-    <p:sldId id="267" r:id="rId17"/>
-    <p:sldId id="268" r:id="rId18"/>
-    <p:sldId id="269" r:id="rId19"/>
-    <p:sldId id="270" r:id="rId20"/>
-    <p:sldId id="271" r:id="rId21"/>
-    <p:sldId id="272" r:id="rId22"/>
-    <p:sldId id="273" r:id="rId23"/>
-    <p:sldId id="274" r:id="rId24"/>
-    <p:sldId id="275" r:id="rId25"/>
-    <p:sldId id="276" r:id="rId26"/>
-    <p:sldId id="277" r:id="rId27"/>
-    <p:sldId id="278" r:id="rId28"/>
-    <p:sldId id="279" r:id="rId29"/>
+    <p:sldId id="256" r:id="rId2"/>
+    <p:sldId id="257" r:id="rId3"/>
+    <p:sldId id="258" r:id="rId4"/>
+    <p:sldId id="259" r:id="rId5"/>
+    <p:sldId id="260" r:id="rId6"/>
+    <p:sldId id="261" r:id="rId7"/>
+    <p:sldId id="262" r:id="rId8"/>
+    <p:sldId id="263" r:id="rId9"/>
+    <p:sldId id="264" r:id="rId10"/>
+    <p:sldId id="265" r:id="rId11"/>
+    <p:sldId id="266" r:id="rId12"/>
+    <p:sldId id="267" r:id="rId13"/>
+    <p:sldId id="268" r:id="rId14"/>
+    <p:sldId id="269" r:id="rId15"/>
+    <p:sldId id="270" r:id="rId16"/>
+    <p:sldId id="271" r:id="rId17"/>
+    <p:sldId id="272" r:id="rId18"/>
+    <p:sldId id="273" r:id="rId19"/>
+    <p:sldId id="274" r:id="rId20"/>
+    <p:sldId id="275" r:id="rId21"/>
+    <p:sldId id="276" r:id="rId22"/>
+    <p:sldId id="277" r:id="rId23"/>
+    <p:sldId id="278" r:id="rId24"/>
+    <p:sldId id="279" r:id="rId25"/>
   </p:sldIdLst>
-  <p:sldSz cy="5143500" cx="9144000"/>
+  <p:sldSz cx="9144000" cy="5143500" type="screen16x9"/>
   <p:notesSz cx="6858000" cy="9144000"/>
   <p:defaultTextStyle>
-    <a:defPPr lvl="0" marR="0" rtl="0" algn="l">
+    <a:defPPr marR="0" lvl="0" algn="l" rtl="0">
       <a:lnSpc>
         <a:spcPct val="100000"/>
       </a:lnSpc>
@@ -47,7 +47,7 @@
         <a:spcPts val="0"/>
       </a:spcAft>
     </a:defPPr>
-    <a:lvl1pPr lvl="0" marR="0" rtl="0" algn="l">
+    <a:lvl1pPr marR="0" lvl="0" algn="l" rtl="0">
       <a:lnSpc>
         <a:spcPct val="100000"/>
       </a:lnSpc>
@@ -61,7 +61,7 @@
         <a:srgbClr val="000000"/>
       </a:buClr>
       <a:buFont typeface="Arial"/>
-      <a:defRPr b="0" i="0" sz="1400" u="none" cap="none" strike="noStrike">
+      <a:defRPr sz="1400" b="0" i="0" u="none" strike="noStrike" cap="none">
         <a:solidFill>
           <a:srgbClr val="000000"/>
         </a:solidFill>
@@ -71,7 +71,7 @@
         <a:sym typeface="Arial"/>
       </a:defRPr>
     </a:lvl1pPr>
-    <a:lvl2pPr lvl="1" marR="0" rtl="0" algn="l">
+    <a:lvl2pPr marR="0" lvl="1" algn="l" rtl="0">
       <a:lnSpc>
         <a:spcPct val="100000"/>
       </a:lnSpc>
@@ -85,7 +85,7 @@
         <a:srgbClr val="000000"/>
       </a:buClr>
       <a:buFont typeface="Arial"/>
-      <a:defRPr b="0" i="0" sz="1400" u="none" cap="none" strike="noStrike">
+      <a:defRPr sz="1400" b="0" i="0" u="none" strike="noStrike" cap="none">
         <a:solidFill>
           <a:srgbClr val="000000"/>
         </a:solidFill>
@@ -95,7 +95,7 @@
         <a:sym typeface="Arial"/>
       </a:defRPr>
     </a:lvl2pPr>
-    <a:lvl3pPr lvl="2" marR="0" rtl="0" algn="l">
+    <a:lvl3pPr marR="0" lvl="2" algn="l" rtl="0">
       <a:lnSpc>
         <a:spcPct val="100000"/>
       </a:lnSpc>
@@ -109,7 +109,7 @@
         <a:srgbClr val="000000"/>
       </a:buClr>
       <a:buFont typeface="Arial"/>
-      <a:defRPr b="0" i="0" sz="1400" u="none" cap="none" strike="noStrike">
+      <a:defRPr sz="1400" b="0" i="0" u="none" strike="noStrike" cap="none">
         <a:solidFill>
           <a:srgbClr val="000000"/>
         </a:solidFill>
@@ -119,7 +119,7 @@
         <a:sym typeface="Arial"/>
       </a:defRPr>
     </a:lvl3pPr>
-    <a:lvl4pPr lvl="3" marR="0" rtl="0" algn="l">
+    <a:lvl4pPr marR="0" lvl="3" algn="l" rtl="0">
       <a:lnSpc>
         <a:spcPct val="100000"/>
       </a:lnSpc>
@@ -133,7 +133,7 @@
         <a:srgbClr val="000000"/>
       </a:buClr>
       <a:buFont typeface="Arial"/>
-      <a:defRPr b="0" i="0" sz="1400" u="none" cap="none" strike="noStrike">
+      <a:defRPr sz="1400" b="0" i="0" u="none" strike="noStrike" cap="none">
         <a:solidFill>
           <a:srgbClr val="000000"/>
         </a:solidFill>
@@ -143,7 +143,7 @@
         <a:sym typeface="Arial"/>
       </a:defRPr>
     </a:lvl4pPr>
-    <a:lvl5pPr lvl="4" marR="0" rtl="0" algn="l">
+    <a:lvl5pPr marR="0" lvl="4" algn="l" rtl="0">
       <a:lnSpc>
         <a:spcPct val="100000"/>
       </a:lnSpc>
@@ -157,7 +157,7 @@
         <a:srgbClr val="000000"/>
       </a:buClr>
       <a:buFont typeface="Arial"/>
-      <a:defRPr b="0" i="0" sz="1400" u="none" cap="none" strike="noStrike">
+      <a:defRPr sz="1400" b="0" i="0" u="none" strike="noStrike" cap="none">
         <a:solidFill>
           <a:srgbClr val="000000"/>
         </a:solidFill>
@@ -167,7 +167,7 @@
         <a:sym typeface="Arial"/>
       </a:defRPr>
     </a:lvl5pPr>
-    <a:lvl6pPr lvl="5" marR="0" rtl="0" algn="l">
+    <a:lvl6pPr marR="0" lvl="5" algn="l" rtl="0">
       <a:lnSpc>
         <a:spcPct val="100000"/>
       </a:lnSpc>
@@ -181,7 +181,7 @@
         <a:srgbClr val="000000"/>
       </a:buClr>
       <a:buFont typeface="Arial"/>
-      <a:defRPr b="0" i="0" sz="1400" u="none" cap="none" strike="noStrike">
+      <a:defRPr sz="1400" b="0" i="0" u="none" strike="noStrike" cap="none">
         <a:solidFill>
           <a:srgbClr val="000000"/>
         </a:solidFill>
@@ -191,7 +191,7 @@
         <a:sym typeface="Arial"/>
       </a:defRPr>
     </a:lvl6pPr>
-    <a:lvl7pPr lvl="6" marR="0" rtl="0" algn="l">
+    <a:lvl7pPr marR="0" lvl="6" algn="l" rtl="0">
       <a:lnSpc>
         <a:spcPct val="100000"/>
       </a:lnSpc>
@@ -205,7 +205,7 @@
         <a:srgbClr val="000000"/>
       </a:buClr>
       <a:buFont typeface="Arial"/>
-      <a:defRPr b="0" i="0" sz="1400" u="none" cap="none" strike="noStrike">
+      <a:defRPr sz="1400" b="0" i="0" u="none" strike="noStrike" cap="none">
         <a:solidFill>
           <a:srgbClr val="000000"/>
         </a:solidFill>
@@ -215,7 +215,7 @@
         <a:sym typeface="Arial"/>
       </a:defRPr>
     </a:lvl7pPr>
-    <a:lvl8pPr lvl="7" marR="0" rtl="0" algn="l">
+    <a:lvl8pPr marR="0" lvl="7" algn="l" rtl="0">
       <a:lnSpc>
         <a:spcPct val="100000"/>
       </a:lnSpc>
@@ -229,7 +229,7 @@
         <a:srgbClr val="000000"/>
       </a:buClr>
       <a:buFont typeface="Arial"/>
-      <a:defRPr b="0" i="0" sz="1400" u="none" cap="none" strike="noStrike">
+      <a:defRPr sz="1400" b="0" i="0" u="none" strike="noStrike" cap="none">
         <a:solidFill>
           <a:srgbClr val="000000"/>
         </a:solidFill>
@@ -239,7 +239,7 @@
         <a:sym typeface="Arial"/>
       </a:defRPr>
     </a:lvl8pPr>
-    <a:lvl9pPr lvl="8" marR="0" rtl="0" algn="l">
+    <a:lvl9pPr marR="0" lvl="8" algn="l" rtl="0">
       <a:lnSpc>
         <a:spcPct val="100000"/>
       </a:lnSpc>
@@ -253,7 +253,7 @@
         <a:srgbClr val="000000"/>
       </a:buClr>
       <a:buFont typeface="Arial"/>
-      <a:defRPr b="0" i="0" sz="1400" u="none" cap="none" strike="noStrike">
+      <a:defRPr sz="1400" b="0" i="0" u="none" strike="noStrike" cap="none">
         <a:solidFill>
           <a:srgbClr val="000000"/>
         </a:solidFill>
@@ -266,7 +266,7 @@
   </p:defaultTextStyle>
   <p:extLst>
     <p:ext uri="{EFAFB233-063F-42B5-8137-9DF3F51BA10A}">
-      <p15:sldGuideLst>
+      <p15:sldGuideLst xmlns:p15="http://schemas.microsoft.com/office/powerpoint/2012/main">
         <p15:guide id="1" orient="horz" pos="1620">
           <p15:clr>
             <a:srgbClr val="747775"/>
@@ -284,11 +284,16 @@
 </file>
 
 <file path=ppt/notesMasters/notesMaster1.xml><?xml version="1.0" encoding="utf-8"?>
-<p:notesMaster xmlns:a="http://schemas.openxmlformats.org/drawingml/2006/main" xmlns:r="http://schemas.openxmlformats.org/officeDocument/2006/relationships" xmlns:mc="http://schemas.openxmlformats.org/markup-compatibility/2006" xmlns:mv="urn:schemas-microsoft-com:mac:vml" xmlns:p="http://schemas.openxmlformats.org/presentationml/2006/main" xmlns:c="http://schemas.openxmlformats.org/drawingml/2006/chart" xmlns:dgm="http://schemas.openxmlformats.org/drawingml/2006/diagram" xmlns:o="urn:schemas-microsoft-com:office:office" xmlns:v="urn:schemas-microsoft-com:vml" xmlns:pvml="urn:schemas-microsoft-com:office:powerpoint" xmlns:com="http://schemas.openxmlformats.org/drawingml/2006/compatibility" xmlns:p14="http://schemas.microsoft.com/office/powerpoint/2010/main" xmlns:p15="http://schemas.microsoft.com/office/powerpoint/2012/main" xmlns:ahyp="http://schemas.microsoft.com/office/drawing/2018/hyperlinkcolor">
+<p:notesMaster xmlns:a="http://schemas.openxmlformats.org/drawingml/2006/main" xmlns:r="http://schemas.openxmlformats.org/officeDocument/2006/relationships" xmlns:p="http://schemas.openxmlformats.org/presentationml/2006/main">
   <p:cSld>
+    <p:bg>
+      <p:bgRef idx="1001">
+        <a:schemeClr val="bg1"/>
+      </p:bgRef>
+    </p:bg>
     <p:spTree>
       <p:nvGrpSpPr>
-        <p:cNvPr id="2" name="Shape 2"/>
+        <p:cNvPr id="1" name="Shape 2"/>
         <p:cNvGrpSpPr/>
         <p:nvPr/>
       </p:nvGrpSpPr>
@@ -303,9 +308,11 @@
       <p:sp>
         <p:nvSpPr>
           <p:cNvPr id="3" name="Google Shape;3;n"/>
-          <p:cNvSpPr/>
+          <p:cNvSpPr>
+            <a:spLocks noGrp="1" noRot="1" noChangeAspect="1"/>
+          </p:cNvSpPr>
           <p:nvPr>
-            <p:ph idx="2" type="sldImg"/>
+            <p:ph type="sldImg" idx="2"/>
           </p:nvPr>
         </p:nvSpPr>
         <p:spPr>
@@ -314,9 +321,13 @@
             <a:ext cx="6096075" cy="3429000"/>
           </a:xfrm>
           <a:custGeom>
-            <a:rect b="b" l="l" r="r" t="t"/>
+            <a:avLst/>
+            <a:gdLst/>
+            <a:ahLst/>
+            <a:cxnLst/>
+            <a:rect l="l" t="t" r="r" b="b"/>
             <a:pathLst>
-              <a:path extrusionOk="0" h="120000" w="120000">
+              <a:path w="120000" h="120000" extrusionOk="0">
                 <a:moveTo>
                   <a:pt x="0" y="0"/>
                 </a:moveTo>
@@ -334,23 +345,25 @@
             </a:pathLst>
           </a:custGeom>
           <a:noFill/>
-          <a:ln cap="flat" cmpd="sng" w="9525">
+          <a:ln w="9525" cap="flat" cmpd="sng">
             <a:solidFill>
               <a:srgbClr val="000000"/>
             </a:solidFill>
             <a:prstDash val="solid"/>
             <a:round/>
-            <a:headEnd len="sm" w="sm" type="none"/>
-            <a:tailEnd len="sm" w="sm" type="none"/>
+            <a:headEnd type="none" w="sm" len="sm"/>
+            <a:tailEnd type="none" w="sm" len="sm"/>
           </a:ln>
         </p:spPr>
       </p:sp>
       <p:sp>
         <p:nvSpPr>
           <p:cNvPr id="4" name="Google Shape;4;n"/>
-          <p:cNvSpPr txBox="1"/>
+          <p:cNvSpPr txBox="1">
+            <a:spLocks noGrp="1"/>
+          </p:cNvSpPr>
           <p:nvPr>
-            <p:ph idx="1" type="body"/>
+            <p:ph type="body" idx="1"/>
           </p:nvPr>
         </p:nvSpPr>
         <p:spPr>
@@ -367,11 +380,11 @@
           </a:ln>
         </p:spPr>
         <p:txBody>
-          <a:bodyPr anchorCtr="0" anchor="t" bIns="91425" lIns="91425" spcFirstLastPara="1" rIns="91425" wrap="square" tIns="91425">
+          <a:bodyPr spcFirstLastPara="1" wrap="square" lIns="91425" tIns="91425" rIns="91425" bIns="91425" anchor="t" anchorCtr="0">
             <a:noAutofit/>
           </a:bodyPr>
           <a:lstStyle>
-            <a:lvl1pPr indent="-298450" lvl="0" marL="457200">
+            <a:lvl1pPr marL="457200" lvl="0" indent="-298450">
               <a:spcBef>
                 <a:spcPts val="0"/>
               </a:spcBef>
@@ -382,7 +395,7 @@
               <a:buChar char="●"/>
               <a:defRPr sz="1100"/>
             </a:lvl1pPr>
-            <a:lvl2pPr indent="-298450" lvl="1" marL="914400">
+            <a:lvl2pPr marL="914400" lvl="1" indent="-298450">
               <a:spcBef>
                 <a:spcPts val="0"/>
               </a:spcBef>
@@ -393,7 +406,7 @@
               <a:buChar char="○"/>
               <a:defRPr sz="1100"/>
             </a:lvl2pPr>
-            <a:lvl3pPr indent="-298450" lvl="2" marL="1371600">
+            <a:lvl3pPr marL="1371600" lvl="2" indent="-298450">
               <a:spcBef>
                 <a:spcPts val="0"/>
               </a:spcBef>
@@ -404,7 +417,7 @@
               <a:buChar char="■"/>
               <a:defRPr sz="1100"/>
             </a:lvl3pPr>
-            <a:lvl4pPr indent="-298450" lvl="3" marL="1828800">
+            <a:lvl4pPr marL="1828800" lvl="3" indent="-298450">
               <a:spcBef>
                 <a:spcPts val="0"/>
               </a:spcBef>
@@ -415,7 +428,7 @@
               <a:buChar char="●"/>
               <a:defRPr sz="1100"/>
             </a:lvl4pPr>
-            <a:lvl5pPr indent="-298450" lvl="4" marL="2286000">
+            <a:lvl5pPr marL="2286000" lvl="4" indent="-298450">
               <a:spcBef>
                 <a:spcPts val="0"/>
               </a:spcBef>
@@ -426,7 +439,7 @@
               <a:buChar char="○"/>
               <a:defRPr sz="1100"/>
             </a:lvl5pPr>
-            <a:lvl6pPr indent="-298450" lvl="5" marL="2743200">
+            <a:lvl6pPr marL="2743200" lvl="5" indent="-298450">
               <a:spcBef>
                 <a:spcPts val="0"/>
               </a:spcBef>
@@ -437,7 +450,7 @@
               <a:buChar char="■"/>
               <a:defRPr sz="1100"/>
             </a:lvl6pPr>
-            <a:lvl7pPr indent="-298450" lvl="6" marL="3200400">
+            <a:lvl7pPr marL="3200400" lvl="6" indent="-298450">
               <a:spcBef>
                 <a:spcPts val="0"/>
               </a:spcBef>
@@ -448,7 +461,7 @@
               <a:buChar char="●"/>
               <a:defRPr sz="1100"/>
             </a:lvl7pPr>
-            <a:lvl8pPr indent="-298450" lvl="7" marL="3657600">
+            <a:lvl8pPr marL="3657600" lvl="7" indent="-298450">
               <a:spcBef>
                 <a:spcPts val="0"/>
               </a:spcBef>
@@ -459,7 +472,7 @@
               <a:buChar char="○"/>
               <a:defRPr sz="1100"/>
             </a:lvl8pPr>
-            <a:lvl9pPr indent="-298450" lvl="8" marL="4114800">
+            <a:lvl9pPr marL="4114800" lvl="8" indent="-298450">
               <a:spcBef>
                 <a:spcPts val="0"/>
               </a:spcBef>
@@ -471,14 +484,16 @@
               <a:defRPr sz="1100"/>
             </a:lvl9pPr>
           </a:lstStyle>
-          <a:p/>
+          <a:p>
+            <a:endParaRPr/>
+          </a:p>
         </p:txBody>
       </p:sp>
     </p:spTree>
   </p:cSld>
-  <p:clrMap accent1="accent1" accent2="accent2" accent3="accent3" accent4="accent4" accent5="accent5" accent6="accent6" bg1="lt1" bg2="dk2" tx1="dk1" tx2="lt2" folHlink="folHlink" hlink="hlink"/>
+  <p:clrMap bg1="lt1" tx1="dk1" bg2="dk2" tx2="lt2" accent1="accent1" accent2="accent2" accent3="accent3" accent4="accent4" accent5="accent5" accent6="accent6" hlink="hlink" folHlink="folHlink"/>
   <p:notesStyle>
-    <a:defPPr lvl="0" marR="0" rtl="0" algn="l">
+    <a:defPPr marR="0" lvl="0" algn="l" rtl="0">
       <a:lnSpc>
         <a:spcPct val="100000"/>
       </a:lnSpc>
@@ -489,7 +504,7 @@
         <a:spcPts val="0"/>
       </a:spcAft>
     </a:defPPr>
-    <a:lvl1pPr lvl="0" marR="0" rtl="0" algn="l">
+    <a:lvl1pPr marR="0" lvl="0" algn="l" rtl="0">
       <a:lnSpc>
         <a:spcPct val="100000"/>
       </a:lnSpc>
@@ -503,7 +518,7 @@
         <a:srgbClr val="000000"/>
       </a:buClr>
       <a:buFont typeface="Arial"/>
-      <a:defRPr b="0" i="0" sz="1400" u="none" cap="none" strike="noStrike">
+      <a:defRPr sz="1400" b="0" i="0" u="none" strike="noStrike" cap="none">
         <a:solidFill>
           <a:srgbClr val="000000"/>
         </a:solidFill>
@@ -513,7 +528,7 @@
         <a:sym typeface="Arial"/>
       </a:defRPr>
     </a:lvl1pPr>
-    <a:lvl2pPr lvl="1" marR="0" rtl="0" algn="l">
+    <a:lvl2pPr marR="0" lvl="1" algn="l" rtl="0">
       <a:lnSpc>
         <a:spcPct val="100000"/>
       </a:lnSpc>
@@ -527,7 +542,7 @@
         <a:srgbClr val="000000"/>
       </a:buClr>
       <a:buFont typeface="Arial"/>
-      <a:defRPr b="0" i="0" sz="1400" u="none" cap="none" strike="noStrike">
+      <a:defRPr sz="1400" b="0" i="0" u="none" strike="noStrike" cap="none">
         <a:solidFill>
           <a:srgbClr val="000000"/>
         </a:solidFill>
@@ -537,7 +552,7 @@
         <a:sym typeface="Arial"/>
       </a:defRPr>
     </a:lvl2pPr>
-    <a:lvl3pPr lvl="2" marR="0" rtl="0" algn="l">
+    <a:lvl3pPr marR="0" lvl="2" algn="l" rtl="0">
       <a:lnSpc>
         <a:spcPct val="100000"/>
       </a:lnSpc>
@@ -551,7 +566,7 @@
         <a:srgbClr val="000000"/>
       </a:buClr>
       <a:buFont typeface="Arial"/>
-      <a:defRPr b="0" i="0" sz="1400" u="none" cap="none" strike="noStrike">
+      <a:defRPr sz="1400" b="0" i="0" u="none" strike="noStrike" cap="none">
         <a:solidFill>
           <a:srgbClr val="000000"/>
         </a:solidFill>
@@ -561,7 +576,7 @@
         <a:sym typeface="Arial"/>
       </a:defRPr>
     </a:lvl3pPr>
-    <a:lvl4pPr lvl="3" marR="0" rtl="0" algn="l">
+    <a:lvl4pPr marR="0" lvl="3" algn="l" rtl="0">
       <a:lnSpc>
         <a:spcPct val="100000"/>
       </a:lnSpc>
@@ -575,7 +590,7 @@
         <a:srgbClr val="000000"/>
       </a:buClr>
       <a:buFont typeface="Arial"/>
-      <a:defRPr b="0" i="0" sz="1400" u="none" cap="none" strike="noStrike">
+      <a:defRPr sz="1400" b="0" i="0" u="none" strike="noStrike" cap="none">
         <a:solidFill>
           <a:srgbClr val="000000"/>
         </a:solidFill>
@@ -585,7 +600,7 @@
         <a:sym typeface="Arial"/>
       </a:defRPr>
     </a:lvl4pPr>
-    <a:lvl5pPr lvl="4" marR="0" rtl="0" algn="l">
+    <a:lvl5pPr marR="0" lvl="4" algn="l" rtl="0">
       <a:lnSpc>
         <a:spcPct val="100000"/>
       </a:lnSpc>
@@ -599,7 +614,7 @@
         <a:srgbClr val="000000"/>
       </a:buClr>
       <a:buFont typeface="Arial"/>
-      <a:defRPr b="0" i="0" sz="1400" u="none" cap="none" strike="noStrike">
+      <a:defRPr sz="1400" b="0" i="0" u="none" strike="noStrike" cap="none">
         <a:solidFill>
           <a:srgbClr val="000000"/>
         </a:solidFill>
@@ -609,7 +624,7 @@
         <a:sym typeface="Arial"/>
       </a:defRPr>
     </a:lvl5pPr>
-    <a:lvl6pPr lvl="5" marR="0" rtl="0" algn="l">
+    <a:lvl6pPr marR="0" lvl="5" algn="l" rtl="0">
       <a:lnSpc>
         <a:spcPct val="100000"/>
       </a:lnSpc>
@@ -623,7 +638,7 @@
         <a:srgbClr val="000000"/>
       </a:buClr>
       <a:buFont typeface="Arial"/>
-      <a:defRPr b="0" i="0" sz="1400" u="none" cap="none" strike="noStrike">
+      <a:defRPr sz="1400" b="0" i="0" u="none" strike="noStrike" cap="none">
         <a:solidFill>
           <a:srgbClr val="000000"/>
         </a:solidFill>
@@ -633,7 +648,7 @@
         <a:sym typeface="Arial"/>
       </a:defRPr>
     </a:lvl6pPr>
-    <a:lvl7pPr lvl="6" marR="0" rtl="0" algn="l">
+    <a:lvl7pPr marR="0" lvl="6" algn="l" rtl="0">
       <a:lnSpc>
         <a:spcPct val="100000"/>
       </a:lnSpc>
@@ -647,7 +662,7 @@
         <a:srgbClr val="000000"/>
       </a:buClr>
       <a:buFont typeface="Arial"/>
-      <a:defRPr b="0" i="0" sz="1400" u="none" cap="none" strike="noStrike">
+      <a:defRPr sz="1400" b="0" i="0" u="none" strike="noStrike" cap="none">
         <a:solidFill>
           <a:srgbClr val="000000"/>
         </a:solidFill>
@@ -657,7 +672,7 @@
         <a:sym typeface="Arial"/>
       </a:defRPr>
     </a:lvl7pPr>
-    <a:lvl8pPr lvl="7" marR="0" rtl="0" algn="l">
+    <a:lvl8pPr marR="0" lvl="7" algn="l" rtl="0">
       <a:lnSpc>
         <a:spcPct val="100000"/>
       </a:lnSpc>
@@ -671,7 +686,7 @@
         <a:srgbClr val="000000"/>
       </a:buClr>
       <a:buFont typeface="Arial"/>
-      <a:defRPr b="0" i="0" sz="1400" u="none" cap="none" strike="noStrike">
+      <a:defRPr sz="1400" b="0" i="0" u="none" strike="noStrike" cap="none">
         <a:solidFill>
           <a:srgbClr val="000000"/>
         </a:solidFill>
@@ -681,7 +696,7 @@
         <a:sym typeface="Arial"/>
       </a:defRPr>
     </a:lvl8pPr>
-    <a:lvl9pPr lvl="8" marR="0" rtl="0" algn="l">
+    <a:lvl9pPr marR="0" lvl="8" algn="l" rtl="0">
       <a:lnSpc>
         <a:spcPct val="100000"/>
       </a:lnSpc>
@@ -695,7 +710,7 @@
         <a:srgbClr val="000000"/>
       </a:buClr>
       <a:buFont typeface="Arial"/>
-      <a:defRPr b="0" i="0" sz="1400" u="none" cap="none" strike="noStrike">
+      <a:defRPr sz="1400" b="0" i="0" u="none" strike="noStrike" cap="none">
         <a:solidFill>
           <a:srgbClr val="000000"/>
         </a:solidFill>
@@ -710,11 +725,11 @@
 </file>
 
 <file path=ppt/notesSlides/notesSlide1.xml><?xml version="1.0" encoding="utf-8"?>
-<p:notes xmlns:a="http://schemas.openxmlformats.org/drawingml/2006/main" xmlns:r="http://schemas.openxmlformats.org/officeDocument/2006/relationships" xmlns:mc="http://schemas.openxmlformats.org/markup-compatibility/2006" xmlns:mv="urn:schemas-microsoft-com:mac:vml" xmlns:p="http://schemas.openxmlformats.org/presentationml/2006/main" xmlns:c="http://schemas.openxmlformats.org/drawingml/2006/chart" xmlns:dgm="http://schemas.openxmlformats.org/drawingml/2006/diagram" xmlns:o="urn:schemas-microsoft-com:office:office" xmlns:v="urn:schemas-microsoft-com:vml" xmlns:pvml="urn:schemas-microsoft-com:office:powerpoint" xmlns:com="http://schemas.openxmlformats.org/drawingml/2006/compatibility" xmlns:p14="http://schemas.microsoft.com/office/powerpoint/2010/main" xmlns:p15="http://schemas.microsoft.com/office/powerpoint/2012/main" xmlns:ahyp="http://schemas.microsoft.com/office/drawing/2018/hyperlinkcolor" showMasterPhAnim="0" showMasterSp="0">
+<p:notes xmlns:a="http://schemas.openxmlformats.org/drawingml/2006/main" xmlns:r="http://schemas.openxmlformats.org/officeDocument/2006/relationships" xmlns:p="http://schemas.openxmlformats.org/presentationml/2006/main" showMasterSp="0" showMasterPhAnim="0">
   <p:cSld>
     <p:spTree>
       <p:nvGrpSpPr>
-        <p:cNvPr id="50" name="Shape 50"/>
+        <p:cNvPr id="1" name="Shape 50"/>
         <p:cNvGrpSpPr/>
         <p:nvPr/>
       </p:nvGrpSpPr>
@@ -729,9 +744,11 @@
       <p:sp>
         <p:nvSpPr>
           <p:cNvPr id="51" name="Google Shape;51;p:notes"/>
-          <p:cNvSpPr/>
+          <p:cNvSpPr>
+            <a:spLocks noGrp="1" noRot="1" noChangeAspect="1"/>
+          </p:cNvSpPr>
           <p:nvPr>
-            <p:ph idx="2" type="sldImg"/>
+            <p:ph type="sldImg" idx="2"/>
           </p:nvPr>
         </p:nvSpPr>
         <p:spPr>
@@ -740,9 +757,13 @@
             <a:ext cx="6096075" cy="3429000"/>
           </a:xfrm>
           <a:custGeom>
-            <a:rect b="b" l="l" r="r" t="t"/>
+            <a:avLst/>
+            <a:gdLst/>
+            <a:ahLst/>
+            <a:cxnLst/>
+            <a:rect l="l" t="t" r="r" b="b"/>
             <a:pathLst>
-              <a:path extrusionOk="0" h="120000" w="120000">
+              <a:path w="120000" h="120000" extrusionOk="0">
                 <a:moveTo>
                   <a:pt x="0" y="0"/>
                 </a:moveTo>
@@ -764,9 +785,11 @@
       <p:sp>
         <p:nvSpPr>
           <p:cNvPr id="52" name="Google Shape;52;p:notes"/>
-          <p:cNvSpPr txBox="1"/>
+          <p:cNvSpPr txBox="1">
+            <a:spLocks noGrp="1"/>
+          </p:cNvSpPr>
           <p:nvPr>
-            <p:ph idx="1" type="body"/>
+            <p:ph type="body" idx="1"/>
           </p:nvPr>
         </p:nvSpPr>
         <p:spPr>
@@ -779,23 +802,20 @@
           </a:prstGeom>
         </p:spPr>
         <p:txBody>
-          <a:bodyPr anchorCtr="0" anchor="t" bIns="91425" lIns="91425" spcFirstLastPara="1" rIns="91425" wrap="square" tIns="91425">
+          <a:bodyPr spcFirstLastPara="1" wrap="square" lIns="91425" tIns="91425" rIns="91425" bIns="91425" anchor="t" anchorCtr="0">
             <a:noAutofit/>
           </a:bodyPr>
           <a:lstStyle/>
           <a:p>
-            <a:pPr indent="0" lvl="0" marL="0" rtl="0" algn="l">
-              <a:spcBef>
-                <a:spcPts val="0"/>
-              </a:spcBef>
-              <a:spcAft>
-                <a:spcPts val="0"/>
-              </a:spcAft>
-              <a:buNone/>
-            </a:pPr>
-            <a:r>
-              <a:t/>
-            </a:r>
+            <a:pPr marL="0" lvl="0" indent="0" algn="l" rtl="0">
+              <a:spcBef>
+                <a:spcPts val="0"/>
+              </a:spcBef>
+              <a:spcAft>
+                <a:spcPts val="0"/>
+              </a:spcAft>
+              <a:buNone/>
+            </a:pPr>
             <a:endParaRPr/>
           </a:p>
         </p:txBody>
@@ -809,11 +829,11 @@
 </file>
 
 <file path=ppt/notesSlides/notesSlide10.xml><?xml version="1.0" encoding="utf-8"?>
-<p:notes xmlns:a="http://schemas.openxmlformats.org/drawingml/2006/main" xmlns:r="http://schemas.openxmlformats.org/officeDocument/2006/relationships" xmlns:mc="http://schemas.openxmlformats.org/markup-compatibility/2006" xmlns:mv="urn:schemas-microsoft-com:mac:vml" xmlns:p="http://schemas.openxmlformats.org/presentationml/2006/main" xmlns:c="http://schemas.openxmlformats.org/drawingml/2006/chart" xmlns:dgm="http://schemas.openxmlformats.org/drawingml/2006/diagram" xmlns:o="urn:schemas-microsoft-com:office:office" xmlns:v="urn:schemas-microsoft-com:vml" xmlns:pvml="urn:schemas-microsoft-com:office:powerpoint" xmlns:com="http://schemas.openxmlformats.org/drawingml/2006/compatibility" xmlns:p14="http://schemas.microsoft.com/office/powerpoint/2010/main" xmlns:p15="http://schemas.microsoft.com/office/powerpoint/2012/main" xmlns:ahyp="http://schemas.microsoft.com/office/drawing/2018/hyperlinkcolor" showMasterPhAnim="0" showMasterSp="0">
+<p:notes xmlns:a="http://schemas.openxmlformats.org/drawingml/2006/main" xmlns:r="http://schemas.openxmlformats.org/officeDocument/2006/relationships" xmlns:p="http://schemas.openxmlformats.org/presentationml/2006/main" showMasterSp="0" showMasterPhAnim="0">
   <p:cSld>
     <p:spTree>
       <p:nvGrpSpPr>
-        <p:cNvPr id="110" name="Shape 110"/>
+        <p:cNvPr id="1" name="Shape 110"/>
         <p:cNvGrpSpPr/>
         <p:nvPr/>
       </p:nvGrpSpPr>
@@ -828,9 +848,11 @@
       <p:sp>
         <p:nvSpPr>
           <p:cNvPr id="111" name="Google Shape;111;g39c501ade2c_0_55:notes"/>
-          <p:cNvSpPr/>
+          <p:cNvSpPr>
+            <a:spLocks noGrp="1" noRot="1" noChangeAspect="1"/>
+          </p:cNvSpPr>
           <p:nvPr>
-            <p:ph idx="2" type="sldImg"/>
+            <p:ph type="sldImg" idx="2"/>
           </p:nvPr>
         </p:nvSpPr>
         <p:spPr>
@@ -839,9 +861,13 @@
             <a:ext cx="6096000" cy="3429000"/>
           </a:xfrm>
           <a:custGeom>
-            <a:rect b="b" l="l" r="r" t="t"/>
+            <a:avLst/>
+            <a:gdLst/>
+            <a:ahLst/>
+            <a:cxnLst/>
+            <a:rect l="l" t="t" r="r" b="b"/>
             <a:pathLst>
-              <a:path extrusionOk="0" h="120000" w="120000">
+              <a:path w="120000" h="120000" extrusionOk="0">
                 <a:moveTo>
                   <a:pt x="0" y="0"/>
                 </a:moveTo>
@@ -863,9 +889,11 @@
       <p:sp>
         <p:nvSpPr>
           <p:cNvPr id="112" name="Google Shape;112;g39c501ade2c_0_55:notes"/>
-          <p:cNvSpPr txBox="1"/>
+          <p:cNvSpPr txBox="1">
+            <a:spLocks noGrp="1"/>
+          </p:cNvSpPr>
           <p:nvPr>
-            <p:ph idx="1" type="body"/>
+            <p:ph type="body" idx="1"/>
           </p:nvPr>
         </p:nvSpPr>
         <p:spPr>
@@ -878,23 +906,20 @@
           </a:prstGeom>
         </p:spPr>
         <p:txBody>
-          <a:bodyPr anchorCtr="0" anchor="t" bIns="91425" lIns="91425" spcFirstLastPara="1" rIns="91425" wrap="square" tIns="91425">
+          <a:bodyPr spcFirstLastPara="1" wrap="square" lIns="91425" tIns="91425" rIns="91425" bIns="91425" anchor="t" anchorCtr="0">
             <a:noAutofit/>
           </a:bodyPr>
           <a:lstStyle/>
           <a:p>
-            <a:pPr indent="0" lvl="0" marL="0" rtl="0" algn="l">
-              <a:spcBef>
-                <a:spcPts val="0"/>
-              </a:spcBef>
-              <a:spcAft>
-                <a:spcPts val="0"/>
-              </a:spcAft>
-              <a:buNone/>
-            </a:pPr>
-            <a:r>
-              <a:t/>
-            </a:r>
+            <a:pPr marL="0" lvl="0" indent="0" algn="l" rtl="0">
+              <a:spcBef>
+                <a:spcPts val="0"/>
+              </a:spcBef>
+              <a:spcAft>
+                <a:spcPts val="0"/>
+              </a:spcAft>
+              <a:buNone/>
+            </a:pPr>
             <a:endParaRPr/>
           </a:p>
         </p:txBody>
@@ -908,11 +933,11 @@
 </file>
 
 <file path=ppt/notesSlides/notesSlide11.xml><?xml version="1.0" encoding="utf-8"?>
-<p:notes xmlns:a="http://schemas.openxmlformats.org/drawingml/2006/main" xmlns:r="http://schemas.openxmlformats.org/officeDocument/2006/relationships" xmlns:mc="http://schemas.openxmlformats.org/markup-compatibility/2006" xmlns:mv="urn:schemas-microsoft-com:mac:vml" xmlns:p="http://schemas.openxmlformats.org/presentationml/2006/main" xmlns:c="http://schemas.openxmlformats.org/drawingml/2006/chart" xmlns:dgm="http://schemas.openxmlformats.org/drawingml/2006/diagram" xmlns:o="urn:schemas-microsoft-com:office:office" xmlns:v="urn:schemas-microsoft-com:vml" xmlns:pvml="urn:schemas-microsoft-com:office:powerpoint" xmlns:com="http://schemas.openxmlformats.org/drawingml/2006/compatibility" xmlns:p14="http://schemas.microsoft.com/office/powerpoint/2010/main" xmlns:p15="http://schemas.microsoft.com/office/powerpoint/2012/main" xmlns:ahyp="http://schemas.microsoft.com/office/drawing/2018/hyperlinkcolor" showMasterPhAnim="0" showMasterSp="0">
+<p:notes xmlns:a="http://schemas.openxmlformats.org/drawingml/2006/main" xmlns:r="http://schemas.openxmlformats.org/officeDocument/2006/relationships" xmlns:p="http://schemas.openxmlformats.org/presentationml/2006/main" showMasterSp="0" showMasterPhAnim="0">
   <p:cSld>
     <p:spTree>
       <p:nvGrpSpPr>
-        <p:cNvPr id="117" name="Shape 117"/>
+        <p:cNvPr id="1" name="Shape 117"/>
         <p:cNvGrpSpPr/>
         <p:nvPr/>
       </p:nvGrpSpPr>
@@ -927,9 +952,11 @@
       <p:sp>
         <p:nvSpPr>
           <p:cNvPr id="118" name="Google Shape;118;g39c501ade2c_0_61:notes"/>
-          <p:cNvSpPr/>
+          <p:cNvSpPr>
+            <a:spLocks noGrp="1" noRot="1" noChangeAspect="1"/>
+          </p:cNvSpPr>
           <p:nvPr>
-            <p:ph idx="2" type="sldImg"/>
+            <p:ph type="sldImg" idx="2"/>
           </p:nvPr>
         </p:nvSpPr>
         <p:spPr>
@@ -938,9 +965,13 @@
             <a:ext cx="6096000" cy="3429000"/>
           </a:xfrm>
           <a:custGeom>
-            <a:rect b="b" l="l" r="r" t="t"/>
+            <a:avLst/>
+            <a:gdLst/>
+            <a:ahLst/>
+            <a:cxnLst/>
+            <a:rect l="l" t="t" r="r" b="b"/>
             <a:pathLst>
-              <a:path extrusionOk="0" h="120000" w="120000">
+              <a:path w="120000" h="120000" extrusionOk="0">
                 <a:moveTo>
                   <a:pt x="0" y="0"/>
                 </a:moveTo>
@@ -962,9 +993,11 @@
       <p:sp>
         <p:nvSpPr>
           <p:cNvPr id="119" name="Google Shape;119;g39c501ade2c_0_61:notes"/>
-          <p:cNvSpPr txBox="1"/>
+          <p:cNvSpPr txBox="1">
+            <a:spLocks noGrp="1"/>
+          </p:cNvSpPr>
           <p:nvPr>
-            <p:ph idx="1" type="body"/>
+            <p:ph type="body" idx="1"/>
           </p:nvPr>
         </p:nvSpPr>
         <p:spPr>
@@ -977,23 +1010,20 @@
           </a:prstGeom>
         </p:spPr>
         <p:txBody>
-          <a:bodyPr anchorCtr="0" anchor="t" bIns="91425" lIns="91425" spcFirstLastPara="1" rIns="91425" wrap="square" tIns="91425">
+          <a:bodyPr spcFirstLastPara="1" wrap="square" lIns="91425" tIns="91425" rIns="91425" bIns="91425" anchor="t" anchorCtr="0">
             <a:noAutofit/>
           </a:bodyPr>
           <a:lstStyle/>
           <a:p>
-            <a:pPr indent="0" lvl="0" marL="0" rtl="0" algn="l">
-              <a:spcBef>
-                <a:spcPts val="0"/>
-              </a:spcBef>
-              <a:spcAft>
-                <a:spcPts val="0"/>
-              </a:spcAft>
-              <a:buNone/>
-            </a:pPr>
-            <a:r>
-              <a:t/>
-            </a:r>
+            <a:pPr marL="0" lvl="0" indent="0" algn="l" rtl="0">
+              <a:spcBef>
+                <a:spcPts val="0"/>
+              </a:spcBef>
+              <a:spcAft>
+                <a:spcPts val="0"/>
+              </a:spcAft>
+              <a:buNone/>
+            </a:pPr>
             <a:endParaRPr/>
           </a:p>
         </p:txBody>
@@ -1007,11 +1037,11 @@
 </file>
 
 <file path=ppt/notesSlides/notesSlide12.xml><?xml version="1.0" encoding="utf-8"?>
-<p:notes xmlns:a="http://schemas.openxmlformats.org/drawingml/2006/main" xmlns:r="http://schemas.openxmlformats.org/officeDocument/2006/relationships" xmlns:mc="http://schemas.openxmlformats.org/markup-compatibility/2006" xmlns:mv="urn:schemas-microsoft-com:mac:vml" xmlns:p="http://schemas.openxmlformats.org/presentationml/2006/main" xmlns:c="http://schemas.openxmlformats.org/drawingml/2006/chart" xmlns:dgm="http://schemas.openxmlformats.org/drawingml/2006/diagram" xmlns:o="urn:schemas-microsoft-com:office:office" xmlns:v="urn:schemas-microsoft-com:vml" xmlns:pvml="urn:schemas-microsoft-com:office:powerpoint" xmlns:com="http://schemas.openxmlformats.org/drawingml/2006/compatibility" xmlns:p14="http://schemas.microsoft.com/office/powerpoint/2010/main" xmlns:p15="http://schemas.microsoft.com/office/powerpoint/2012/main" xmlns:ahyp="http://schemas.microsoft.com/office/drawing/2018/hyperlinkcolor" showMasterPhAnim="0" showMasterSp="0">
+<p:notes xmlns:a="http://schemas.openxmlformats.org/drawingml/2006/main" xmlns:r="http://schemas.openxmlformats.org/officeDocument/2006/relationships" xmlns:p="http://schemas.openxmlformats.org/presentationml/2006/main" showMasterSp="0" showMasterPhAnim="0">
   <p:cSld>
     <p:spTree>
       <p:nvGrpSpPr>
-        <p:cNvPr id="124" name="Shape 124"/>
+        <p:cNvPr id="1" name="Shape 124"/>
         <p:cNvGrpSpPr/>
         <p:nvPr/>
       </p:nvGrpSpPr>
@@ -1026,9 +1056,11 @@
       <p:sp>
         <p:nvSpPr>
           <p:cNvPr id="125" name="Google Shape;125;g39c501ade2c_0_68:notes"/>
-          <p:cNvSpPr/>
+          <p:cNvSpPr>
+            <a:spLocks noGrp="1" noRot="1" noChangeAspect="1"/>
+          </p:cNvSpPr>
           <p:nvPr>
-            <p:ph idx="2" type="sldImg"/>
+            <p:ph type="sldImg" idx="2"/>
           </p:nvPr>
         </p:nvSpPr>
         <p:spPr>
@@ -1037,9 +1069,13 @@
             <a:ext cx="6096000" cy="3429000"/>
           </a:xfrm>
           <a:custGeom>
-            <a:rect b="b" l="l" r="r" t="t"/>
+            <a:avLst/>
+            <a:gdLst/>
+            <a:ahLst/>
+            <a:cxnLst/>
+            <a:rect l="l" t="t" r="r" b="b"/>
             <a:pathLst>
-              <a:path extrusionOk="0" h="120000" w="120000">
+              <a:path w="120000" h="120000" extrusionOk="0">
                 <a:moveTo>
                   <a:pt x="0" y="0"/>
                 </a:moveTo>
@@ -1061,9 +1097,11 @@
       <p:sp>
         <p:nvSpPr>
           <p:cNvPr id="126" name="Google Shape;126;g39c501ade2c_0_68:notes"/>
-          <p:cNvSpPr txBox="1"/>
+          <p:cNvSpPr txBox="1">
+            <a:spLocks noGrp="1"/>
+          </p:cNvSpPr>
           <p:nvPr>
-            <p:ph idx="1" type="body"/>
+            <p:ph type="body" idx="1"/>
           </p:nvPr>
         </p:nvSpPr>
         <p:spPr>
@@ -1076,23 +1114,20 @@
           </a:prstGeom>
         </p:spPr>
         <p:txBody>
-          <a:bodyPr anchorCtr="0" anchor="t" bIns="91425" lIns="91425" spcFirstLastPara="1" rIns="91425" wrap="square" tIns="91425">
+          <a:bodyPr spcFirstLastPara="1" wrap="square" lIns="91425" tIns="91425" rIns="91425" bIns="91425" anchor="t" anchorCtr="0">
             <a:noAutofit/>
           </a:bodyPr>
           <a:lstStyle/>
           <a:p>
-            <a:pPr indent="0" lvl="0" marL="0" rtl="0" algn="l">
-              <a:spcBef>
-                <a:spcPts val="0"/>
-              </a:spcBef>
-              <a:spcAft>
-                <a:spcPts val="0"/>
-              </a:spcAft>
-              <a:buNone/>
-            </a:pPr>
-            <a:r>
-              <a:t/>
-            </a:r>
+            <a:pPr marL="0" lvl="0" indent="0" algn="l" rtl="0">
+              <a:spcBef>
+                <a:spcPts val="0"/>
+              </a:spcBef>
+              <a:spcAft>
+                <a:spcPts val="0"/>
+              </a:spcAft>
+              <a:buNone/>
+            </a:pPr>
             <a:endParaRPr/>
           </a:p>
         </p:txBody>
@@ -1106,11 +1141,11 @@
 </file>
 
 <file path=ppt/notesSlides/notesSlide13.xml><?xml version="1.0" encoding="utf-8"?>
-<p:notes xmlns:a="http://schemas.openxmlformats.org/drawingml/2006/main" xmlns:r="http://schemas.openxmlformats.org/officeDocument/2006/relationships" xmlns:mc="http://schemas.openxmlformats.org/markup-compatibility/2006" xmlns:mv="urn:schemas-microsoft-com:mac:vml" xmlns:p="http://schemas.openxmlformats.org/presentationml/2006/main" xmlns:c="http://schemas.openxmlformats.org/drawingml/2006/chart" xmlns:dgm="http://schemas.openxmlformats.org/drawingml/2006/diagram" xmlns:o="urn:schemas-microsoft-com:office:office" xmlns:v="urn:schemas-microsoft-com:vml" xmlns:pvml="urn:schemas-microsoft-com:office:powerpoint" xmlns:com="http://schemas.openxmlformats.org/drawingml/2006/compatibility" xmlns:p14="http://schemas.microsoft.com/office/powerpoint/2010/main" xmlns:p15="http://schemas.microsoft.com/office/powerpoint/2012/main" xmlns:ahyp="http://schemas.microsoft.com/office/drawing/2018/hyperlinkcolor" showMasterPhAnim="0" showMasterSp="0">
+<p:notes xmlns:a="http://schemas.openxmlformats.org/drawingml/2006/main" xmlns:r="http://schemas.openxmlformats.org/officeDocument/2006/relationships" xmlns:p="http://schemas.openxmlformats.org/presentationml/2006/main" showMasterSp="0" showMasterPhAnim="0">
   <p:cSld>
     <p:spTree>
       <p:nvGrpSpPr>
-        <p:cNvPr id="131" name="Shape 131"/>
+        <p:cNvPr id="1" name="Shape 131"/>
         <p:cNvGrpSpPr/>
         <p:nvPr/>
       </p:nvGrpSpPr>
@@ -1125,9 +1160,11 @@
       <p:sp>
         <p:nvSpPr>
           <p:cNvPr id="132" name="Google Shape;132;g39c501ade2c_0_74:notes"/>
-          <p:cNvSpPr/>
+          <p:cNvSpPr>
+            <a:spLocks noGrp="1" noRot="1" noChangeAspect="1"/>
+          </p:cNvSpPr>
           <p:nvPr>
-            <p:ph idx="2" type="sldImg"/>
+            <p:ph type="sldImg" idx="2"/>
           </p:nvPr>
         </p:nvSpPr>
         <p:spPr>
@@ -1136,9 +1173,13 @@
             <a:ext cx="6096000" cy="3429000"/>
           </a:xfrm>
           <a:custGeom>
-            <a:rect b="b" l="l" r="r" t="t"/>
+            <a:avLst/>
+            <a:gdLst/>
+            <a:ahLst/>
+            <a:cxnLst/>
+            <a:rect l="l" t="t" r="r" b="b"/>
             <a:pathLst>
-              <a:path extrusionOk="0" h="120000" w="120000">
+              <a:path w="120000" h="120000" extrusionOk="0">
                 <a:moveTo>
                   <a:pt x="0" y="0"/>
                 </a:moveTo>
@@ -1160,9 +1201,11 @@
       <p:sp>
         <p:nvSpPr>
           <p:cNvPr id="133" name="Google Shape;133;g39c501ade2c_0_74:notes"/>
-          <p:cNvSpPr txBox="1"/>
+          <p:cNvSpPr txBox="1">
+            <a:spLocks noGrp="1"/>
+          </p:cNvSpPr>
           <p:nvPr>
-            <p:ph idx="1" type="body"/>
+            <p:ph type="body" idx="1"/>
           </p:nvPr>
         </p:nvSpPr>
         <p:spPr>
@@ -1175,23 +1218,20 @@
           </a:prstGeom>
         </p:spPr>
         <p:txBody>
-          <a:bodyPr anchorCtr="0" anchor="t" bIns="91425" lIns="91425" spcFirstLastPara="1" rIns="91425" wrap="square" tIns="91425">
+          <a:bodyPr spcFirstLastPara="1" wrap="square" lIns="91425" tIns="91425" rIns="91425" bIns="91425" anchor="t" anchorCtr="0">
             <a:noAutofit/>
           </a:bodyPr>
           <a:lstStyle/>
           <a:p>
-            <a:pPr indent="0" lvl="0" marL="0" rtl="0" algn="l">
-              <a:spcBef>
-                <a:spcPts val="0"/>
-              </a:spcBef>
-              <a:spcAft>
-                <a:spcPts val="0"/>
-              </a:spcAft>
-              <a:buNone/>
-            </a:pPr>
-            <a:r>
-              <a:t/>
-            </a:r>
+            <a:pPr marL="0" lvl="0" indent="0" algn="l" rtl="0">
+              <a:spcBef>
+                <a:spcPts val="0"/>
+              </a:spcBef>
+              <a:spcAft>
+                <a:spcPts val="0"/>
+              </a:spcAft>
+              <a:buNone/>
+            </a:pPr>
             <a:endParaRPr/>
           </a:p>
         </p:txBody>
@@ -1205,11 +1245,11 @@
 </file>
 
 <file path=ppt/notesSlides/notesSlide14.xml><?xml version="1.0" encoding="utf-8"?>
-<p:notes xmlns:a="http://schemas.openxmlformats.org/drawingml/2006/main" xmlns:r="http://schemas.openxmlformats.org/officeDocument/2006/relationships" xmlns:mc="http://schemas.openxmlformats.org/markup-compatibility/2006" xmlns:mv="urn:schemas-microsoft-com:mac:vml" xmlns:p="http://schemas.openxmlformats.org/presentationml/2006/main" xmlns:c="http://schemas.openxmlformats.org/drawingml/2006/chart" xmlns:dgm="http://schemas.openxmlformats.org/drawingml/2006/diagram" xmlns:o="urn:schemas-microsoft-com:office:office" xmlns:v="urn:schemas-microsoft-com:vml" xmlns:pvml="urn:schemas-microsoft-com:office:powerpoint" xmlns:com="http://schemas.openxmlformats.org/drawingml/2006/compatibility" xmlns:p14="http://schemas.microsoft.com/office/powerpoint/2010/main" xmlns:p15="http://schemas.microsoft.com/office/powerpoint/2012/main" xmlns:ahyp="http://schemas.microsoft.com/office/drawing/2018/hyperlinkcolor" showMasterPhAnim="0" showMasterSp="0">
+<p:notes xmlns:a="http://schemas.openxmlformats.org/drawingml/2006/main" xmlns:r="http://schemas.openxmlformats.org/officeDocument/2006/relationships" xmlns:p="http://schemas.openxmlformats.org/presentationml/2006/main" showMasterSp="0" showMasterPhAnim="0">
   <p:cSld>
     <p:spTree>
       <p:nvGrpSpPr>
-        <p:cNvPr id="138" name="Shape 138"/>
+        <p:cNvPr id="1" name="Shape 138"/>
         <p:cNvGrpSpPr/>
         <p:nvPr/>
       </p:nvGrpSpPr>
@@ -1224,9 +1264,11 @@
       <p:sp>
         <p:nvSpPr>
           <p:cNvPr id="139" name="Google Shape;139;g39c501ade2c_0_81:notes"/>
-          <p:cNvSpPr/>
+          <p:cNvSpPr>
+            <a:spLocks noGrp="1" noRot="1" noChangeAspect="1"/>
+          </p:cNvSpPr>
           <p:nvPr>
-            <p:ph idx="2" type="sldImg"/>
+            <p:ph type="sldImg" idx="2"/>
           </p:nvPr>
         </p:nvSpPr>
         <p:spPr>
@@ -1235,9 +1277,13 @@
             <a:ext cx="6096000" cy="3429000"/>
           </a:xfrm>
           <a:custGeom>
-            <a:rect b="b" l="l" r="r" t="t"/>
+            <a:avLst/>
+            <a:gdLst/>
+            <a:ahLst/>
+            <a:cxnLst/>
+            <a:rect l="l" t="t" r="r" b="b"/>
             <a:pathLst>
-              <a:path extrusionOk="0" h="120000" w="120000">
+              <a:path w="120000" h="120000" extrusionOk="0">
                 <a:moveTo>
                   <a:pt x="0" y="0"/>
                 </a:moveTo>
@@ -1259,9 +1305,11 @@
       <p:sp>
         <p:nvSpPr>
           <p:cNvPr id="140" name="Google Shape;140;g39c501ade2c_0_81:notes"/>
-          <p:cNvSpPr txBox="1"/>
+          <p:cNvSpPr txBox="1">
+            <a:spLocks noGrp="1"/>
+          </p:cNvSpPr>
           <p:nvPr>
-            <p:ph idx="1" type="body"/>
+            <p:ph type="body" idx="1"/>
           </p:nvPr>
         </p:nvSpPr>
         <p:spPr>
@@ -1274,23 +1322,20 @@
           </a:prstGeom>
         </p:spPr>
         <p:txBody>
-          <a:bodyPr anchorCtr="0" anchor="t" bIns="91425" lIns="91425" spcFirstLastPara="1" rIns="91425" wrap="square" tIns="91425">
+          <a:bodyPr spcFirstLastPara="1" wrap="square" lIns="91425" tIns="91425" rIns="91425" bIns="91425" anchor="t" anchorCtr="0">
             <a:noAutofit/>
           </a:bodyPr>
           <a:lstStyle/>
           <a:p>
-            <a:pPr indent="0" lvl="0" marL="0" rtl="0" algn="l">
-              <a:spcBef>
-                <a:spcPts val="0"/>
-              </a:spcBef>
-              <a:spcAft>
-                <a:spcPts val="0"/>
-              </a:spcAft>
-              <a:buNone/>
-            </a:pPr>
-            <a:r>
-              <a:t/>
-            </a:r>
+            <a:pPr marL="0" lvl="0" indent="0" algn="l" rtl="0">
+              <a:spcBef>
+                <a:spcPts val="0"/>
+              </a:spcBef>
+              <a:spcAft>
+                <a:spcPts val="0"/>
+              </a:spcAft>
+              <a:buNone/>
+            </a:pPr>
             <a:endParaRPr/>
           </a:p>
         </p:txBody>
@@ -1304,11 +1349,11 @@
 </file>
 
 <file path=ppt/notesSlides/notesSlide15.xml><?xml version="1.0" encoding="utf-8"?>
-<p:notes xmlns:a="http://schemas.openxmlformats.org/drawingml/2006/main" xmlns:r="http://schemas.openxmlformats.org/officeDocument/2006/relationships" xmlns:mc="http://schemas.openxmlformats.org/markup-compatibility/2006" xmlns:mv="urn:schemas-microsoft-com:mac:vml" xmlns:p="http://schemas.openxmlformats.org/presentationml/2006/main" xmlns:c="http://schemas.openxmlformats.org/drawingml/2006/chart" xmlns:dgm="http://schemas.openxmlformats.org/drawingml/2006/diagram" xmlns:o="urn:schemas-microsoft-com:office:office" xmlns:v="urn:schemas-microsoft-com:vml" xmlns:pvml="urn:schemas-microsoft-com:office:powerpoint" xmlns:com="http://schemas.openxmlformats.org/drawingml/2006/compatibility" xmlns:p14="http://schemas.microsoft.com/office/powerpoint/2010/main" xmlns:p15="http://schemas.microsoft.com/office/powerpoint/2012/main" xmlns:ahyp="http://schemas.microsoft.com/office/drawing/2018/hyperlinkcolor" showMasterPhAnim="0" showMasterSp="0">
+<p:notes xmlns:a="http://schemas.openxmlformats.org/drawingml/2006/main" xmlns:r="http://schemas.openxmlformats.org/officeDocument/2006/relationships" xmlns:p="http://schemas.openxmlformats.org/presentationml/2006/main" showMasterSp="0" showMasterPhAnim="0">
   <p:cSld>
     <p:spTree>
       <p:nvGrpSpPr>
-        <p:cNvPr id="158" name="Shape 158"/>
+        <p:cNvPr id="1" name="Shape 158"/>
         <p:cNvGrpSpPr/>
         <p:nvPr/>
       </p:nvGrpSpPr>
@@ -1323,9 +1368,11 @@
       <p:sp>
         <p:nvSpPr>
           <p:cNvPr id="159" name="Google Shape;159;g39c501ade2c_0_106:notes"/>
-          <p:cNvSpPr/>
+          <p:cNvSpPr>
+            <a:spLocks noGrp="1" noRot="1" noChangeAspect="1"/>
+          </p:cNvSpPr>
           <p:nvPr>
-            <p:ph idx="2" type="sldImg"/>
+            <p:ph type="sldImg" idx="2"/>
           </p:nvPr>
         </p:nvSpPr>
         <p:spPr>
@@ -1334,9 +1381,13 @@
             <a:ext cx="6096000" cy="3429000"/>
           </a:xfrm>
           <a:custGeom>
-            <a:rect b="b" l="l" r="r" t="t"/>
+            <a:avLst/>
+            <a:gdLst/>
+            <a:ahLst/>
+            <a:cxnLst/>
+            <a:rect l="l" t="t" r="r" b="b"/>
             <a:pathLst>
-              <a:path extrusionOk="0" h="120000" w="120000">
+              <a:path w="120000" h="120000" extrusionOk="0">
                 <a:moveTo>
                   <a:pt x="0" y="0"/>
                 </a:moveTo>
@@ -1358,9 +1409,11 @@
       <p:sp>
         <p:nvSpPr>
           <p:cNvPr id="160" name="Google Shape;160;g39c501ade2c_0_106:notes"/>
-          <p:cNvSpPr txBox="1"/>
+          <p:cNvSpPr txBox="1">
+            <a:spLocks noGrp="1"/>
+          </p:cNvSpPr>
           <p:nvPr>
-            <p:ph idx="1" type="body"/>
+            <p:ph type="body" idx="1"/>
           </p:nvPr>
         </p:nvSpPr>
         <p:spPr>
@@ -1373,23 +1426,20 @@
           </a:prstGeom>
         </p:spPr>
         <p:txBody>
-          <a:bodyPr anchorCtr="0" anchor="t" bIns="91425" lIns="91425" spcFirstLastPara="1" rIns="91425" wrap="square" tIns="91425">
+          <a:bodyPr spcFirstLastPara="1" wrap="square" lIns="91425" tIns="91425" rIns="91425" bIns="91425" anchor="t" anchorCtr="0">
             <a:noAutofit/>
           </a:bodyPr>
           <a:lstStyle/>
           <a:p>
-            <a:pPr indent="0" lvl="0" marL="0" rtl="0" algn="l">
-              <a:spcBef>
-                <a:spcPts val="0"/>
-              </a:spcBef>
-              <a:spcAft>
-                <a:spcPts val="0"/>
-              </a:spcAft>
-              <a:buNone/>
-            </a:pPr>
-            <a:r>
-              <a:t/>
-            </a:r>
+            <a:pPr marL="0" lvl="0" indent="0" algn="l" rtl="0">
+              <a:spcBef>
+                <a:spcPts val="0"/>
+              </a:spcBef>
+              <a:spcAft>
+                <a:spcPts val="0"/>
+              </a:spcAft>
+              <a:buNone/>
+            </a:pPr>
             <a:endParaRPr/>
           </a:p>
         </p:txBody>
@@ -1403,11 +1453,11 @@
 </file>
 
 <file path=ppt/notesSlides/notesSlide16.xml><?xml version="1.0" encoding="utf-8"?>
-<p:notes xmlns:a="http://schemas.openxmlformats.org/drawingml/2006/main" xmlns:r="http://schemas.openxmlformats.org/officeDocument/2006/relationships" xmlns:mc="http://schemas.openxmlformats.org/markup-compatibility/2006" xmlns:mv="urn:schemas-microsoft-com:mac:vml" xmlns:p="http://schemas.openxmlformats.org/presentationml/2006/main" xmlns:c="http://schemas.openxmlformats.org/drawingml/2006/chart" xmlns:dgm="http://schemas.openxmlformats.org/drawingml/2006/diagram" xmlns:o="urn:schemas-microsoft-com:office:office" xmlns:v="urn:schemas-microsoft-com:vml" xmlns:pvml="urn:schemas-microsoft-com:office:powerpoint" xmlns:com="http://schemas.openxmlformats.org/drawingml/2006/compatibility" xmlns:p14="http://schemas.microsoft.com/office/powerpoint/2010/main" xmlns:p15="http://schemas.microsoft.com/office/powerpoint/2012/main" xmlns:ahyp="http://schemas.microsoft.com/office/drawing/2018/hyperlinkcolor" showMasterPhAnim="0" showMasterSp="0">
+<p:notes xmlns:a="http://schemas.openxmlformats.org/drawingml/2006/main" xmlns:r="http://schemas.openxmlformats.org/officeDocument/2006/relationships" xmlns:p="http://schemas.openxmlformats.org/presentationml/2006/main" showMasterSp="0" showMasterPhAnim="0">
   <p:cSld>
     <p:spTree>
       <p:nvGrpSpPr>
-        <p:cNvPr id="167" name="Shape 167"/>
+        <p:cNvPr id="1" name="Shape 167"/>
         <p:cNvGrpSpPr/>
         <p:nvPr/>
       </p:nvGrpSpPr>
@@ -1422,9 +1472,11 @@
       <p:sp>
         <p:nvSpPr>
           <p:cNvPr id="168" name="Google Shape;168;g39c501ade2c_0_113:notes"/>
-          <p:cNvSpPr/>
+          <p:cNvSpPr>
+            <a:spLocks noGrp="1" noRot="1" noChangeAspect="1"/>
+          </p:cNvSpPr>
           <p:nvPr>
-            <p:ph idx="2" type="sldImg"/>
+            <p:ph type="sldImg" idx="2"/>
           </p:nvPr>
         </p:nvSpPr>
         <p:spPr>
@@ -1433,9 +1485,13 @@
             <a:ext cx="6096000" cy="3429000"/>
           </a:xfrm>
           <a:custGeom>
-            <a:rect b="b" l="l" r="r" t="t"/>
+            <a:avLst/>
+            <a:gdLst/>
+            <a:ahLst/>
+            <a:cxnLst/>
+            <a:rect l="l" t="t" r="r" b="b"/>
             <a:pathLst>
-              <a:path extrusionOk="0" h="120000" w="120000">
+              <a:path w="120000" h="120000" extrusionOk="0">
                 <a:moveTo>
                   <a:pt x="0" y="0"/>
                 </a:moveTo>
@@ -1457,9 +1513,11 @@
       <p:sp>
         <p:nvSpPr>
           <p:cNvPr id="169" name="Google Shape;169;g39c501ade2c_0_113:notes"/>
-          <p:cNvSpPr txBox="1"/>
+          <p:cNvSpPr txBox="1">
+            <a:spLocks noGrp="1"/>
+          </p:cNvSpPr>
           <p:nvPr>
-            <p:ph idx="1" type="body"/>
+            <p:ph type="body" idx="1"/>
           </p:nvPr>
         </p:nvSpPr>
         <p:spPr>
@@ -1472,23 +1530,20 @@
           </a:prstGeom>
         </p:spPr>
         <p:txBody>
-          <a:bodyPr anchorCtr="0" anchor="t" bIns="91425" lIns="91425" spcFirstLastPara="1" rIns="91425" wrap="square" tIns="91425">
+          <a:bodyPr spcFirstLastPara="1" wrap="square" lIns="91425" tIns="91425" rIns="91425" bIns="91425" anchor="t" anchorCtr="0">
             <a:noAutofit/>
           </a:bodyPr>
           <a:lstStyle/>
           <a:p>
-            <a:pPr indent="0" lvl="0" marL="0" rtl="0" algn="l">
-              <a:spcBef>
-                <a:spcPts val="0"/>
-              </a:spcBef>
-              <a:spcAft>
-                <a:spcPts val="0"/>
-              </a:spcAft>
-              <a:buNone/>
-            </a:pPr>
-            <a:r>
-              <a:t/>
-            </a:r>
+            <a:pPr marL="0" lvl="0" indent="0" algn="l" rtl="0">
+              <a:spcBef>
+                <a:spcPts val="0"/>
+              </a:spcBef>
+              <a:spcAft>
+                <a:spcPts val="0"/>
+              </a:spcAft>
+              <a:buNone/>
+            </a:pPr>
             <a:endParaRPr/>
           </a:p>
         </p:txBody>
@@ -1502,11 +1557,11 @@
 </file>
 
 <file path=ppt/notesSlides/notesSlide17.xml><?xml version="1.0" encoding="utf-8"?>
-<p:notes xmlns:a="http://schemas.openxmlformats.org/drawingml/2006/main" xmlns:r="http://schemas.openxmlformats.org/officeDocument/2006/relationships" xmlns:mc="http://schemas.openxmlformats.org/markup-compatibility/2006" xmlns:mv="urn:schemas-microsoft-com:mac:vml" xmlns:p="http://schemas.openxmlformats.org/presentationml/2006/main" xmlns:c="http://schemas.openxmlformats.org/drawingml/2006/chart" xmlns:dgm="http://schemas.openxmlformats.org/drawingml/2006/diagram" xmlns:o="urn:schemas-microsoft-com:office:office" xmlns:v="urn:schemas-microsoft-com:vml" xmlns:pvml="urn:schemas-microsoft-com:office:powerpoint" xmlns:com="http://schemas.openxmlformats.org/drawingml/2006/compatibility" xmlns:p14="http://schemas.microsoft.com/office/powerpoint/2010/main" xmlns:p15="http://schemas.microsoft.com/office/powerpoint/2012/main" xmlns:ahyp="http://schemas.microsoft.com/office/drawing/2018/hyperlinkcolor" showMasterPhAnim="0" showMasterSp="0">
+<p:notes xmlns:a="http://schemas.openxmlformats.org/drawingml/2006/main" xmlns:r="http://schemas.openxmlformats.org/officeDocument/2006/relationships" xmlns:p="http://schemas.openxmlformats.org/presentationml/2006/main" showMasterSp="0" showMasterPhAnim="0">
   <p:cSld>
     <p:spTree>
       <p:nvGrpSpPr>
-        <p:cNvPr id="176" name="Shape 176"/>
+        <p:cNvPr id="1" name="Shape 176"/>
         <p:cNvGrpSpPr/>
         <p:nvPr/>
       </p:nvGrpSpPr>
@@ -1521,9 +1576,11 @@
       <p:sp>
         <p:nvSpPr>
           <p:cNvPr id="177" name="Google Shape;177;g39c501ade2c_0_122:notes"/>
-          <p:cNvSpPr/>
+          <p:cNvSpPr>
+            <a:spLocks noGrp="1" noRot="1" noChangeAspect="1"/>
+          </p:cNvSpPr>
           <p:nvPr>
-            <p:ph idx="2" type="sldImg"/>
+            <p:ph type="sldImg" idx="2"/>
           </p:nvPr>
         </p:nvSpPr>
         <p:spPr>
@@ -1532,9 +1589,13 @@
             <a:ext cx="6096000" cy="3429000"/>
           </a:xfrm>
           <a:custGeom>
-            <a:rect b="b" l="l" r="r" t="t"/>
+            <a:avLst/>
+            <a:gdLst/>
+            <a:ahLst/>
+            <a:cxnLst/>
+            <a:rect l="l" t="t" r="r" b="b"/>
             <a:pathLst>
-              <a:path extrusionOk="0" h="120000" w="120000">
+              <a:path w="120000" h="120000" extrusionOk="0">
                 <a:moveTo>
                   <a:pt x="0" y="0"/>
                 </a:moveTo>
@@ -1556,9 +1617,11 @@
       <p:sp>
         <p:nvSpPr>
           <p:cNvPr id="178" name="Google Shape;178;g39c501ade2c_0_122:notes"/>
-          <p:cNvSpPr txBox="1"/>
+          <p:cNvSpPr txBox="1">
+            <a:spLocks noGrp="1"/>
+          </p:cNvSpPr>
           <p:nvPr>
-            <p:ph idx="1" type="body"/>
+            <p:ph type="body" idx="1"/>
           </p:nvPr>
         </p:nvSpPr>
         <p:spPr>
@@ -1571,23 +1634,20 @@
           </a:prstGeom>
         </p:spPr>
         <p:txBody>
-          <a:bodyPr anchorCtr="0" anchor="t" bIns="91425" lIns="91425" spcFirstLastPara="1" rIns="91425" wrap="square" tIns="91425">
+          <a:bodyPr spcFirstLastPara="1" wrap="square" lIns="91425" tIns="91425" rIns="91425" bIns="91425" anchor="t" anchorCtr="0">
             <a:noAutofit/>
           </a:bodyPr>
           <a:lstStyle/>
           <a:p>
-            <a:pPr indent="0" lvl="0" marL="0" rtl="0" algn="l">
-              <a:spcBef>
-                <a:spcPts val="0"/>
-              </a:spcBef>
-              <a:spcAft>
-                <a:spcPts val="0"/>
-              </a:spcAft>
-              <a:buNone/>
-            </a:pPr>
-            <a:r>
-              <a:t/>
-            </a:r>
+            <a:pPr marL="0" lvl="0" indent="0" algn="l" rtl="0">
+              <a:spcBef>
+                <a:spcPts val="0"/>
+              </a:spcBef>
+              <a:spcAft>
+                <a:spcPts val="0"/>
+              </a:spcAft>
+              <a:buNone/>
+            </a:pPr>
             <a:endParaRPr/>
           </a:p>
         </p:txBody>
@@ -1601,11 +1661,11 @@
 </file>
 
 <file path=ppt/notesSlides/notesSlide18.xml><?xml version="1.0" encoding="utf-8"?>
-<p:notes xmlns:a="http://schemas.openxmlformats.org/drawingml/2006/main" xmlns:r="http://schemas.openxmlformats.org/officeDocument/2006/relationships" xmlns:mc="http://schemas.openxmlformats.org/markup-compatibility/2006" xmlns:mv="urn:schemas-microsoft-com:mac:vml" xmlns:p="http://schemas.openxmlformats.org/presentationml/2006/main" xmlns:c="http://schemas.openxmlformats.org/drawingml/2006/chart" xmlns:dgm="http://schemas.openxmlformats.org/drawingml/2006/diagram" xmlns:o="urn:schemas-microsoft-com:office:office" xmlns:v="urn:schemas-microsoft-com:vml" xmlns:pvml="urn:schemas-microsoft-com:office:powerpoint" xmlns:com="http://schemas.openxmlformats.org/drawingml/2006/compatibility" xmlns:p14="http://schemas.microsoft.com/office/powerpoint/2010/main" xmlns:p15="http://schemas.microsoft.com/office/powerpoint/2012/main" xmlns:ahyp="http://schemas.microsoft.com/office/drawing/2018/hyperlinkcolor" showMasterPhAnim="0" showMasterSp="0">
+<p:notes xmlns:a="http://schemas.openxmlformats.org/drawingml/2006/main" xmlns:r="http://schemas.openxmlformats.org/officeDocument/2006/relationships" xmlns:p="http://schemas.openxmlformats.org/presentationml/2006/main" showMasterSp="0" showMasterPhAnim="0">
   <p:cSld>
     <p:spTree>
       <p:nvGrpSpPr>
-        <p:cNvPr id="182" name="Shape 182"/>
+        <p:cNvPr id="1" name="Shape 182"/>
         <p:cNvGrpSpPr/>
         <p:nvPr/>
       </p:nvGrpSpPr>
@@ -1620,9 +1680,11 @@
       <p:sp>
         <p:nvSpPr>
           <p:cNvPr id="183" name="Google Shape;183;g39c501ade2c_0_128:notes"/>
-          <p:cNvSpPr/>
+          <p:cNvSpPr>
+            <a:spLocks noGrp="1" noRot="1" noChangeAspect="1"/>
+          </p:cNvSpPr>
           <p:nvPr>
-            <p:ph idx="2" type="sldImg"/>
+            <p:ph type="sldImg" idx="2"/>
           </p:nvPr>
         </p:nvSpPr>
         <p:spPr>
@@ -1631,9 +1693,13 @@
             <a:ext cx="6096000" cy="3429000"/>
           </a:xfrm>
           <a:custGeom>
-            <a:rect b="b" l="l" r="r" t="t"/>
+            <a:avLst/>
+            <a:gdLst/>
+            <a:ahLst/>
+            <a:cxnLst/>
+            <a:rect l="l" t="t" r="r" b="b"/>
             <a:pathLst>
-              <a:path extrusionOk="0" h="120000" w="120000">
+              <a:path w="120000" h="120000" extrusionOk="0">
                 <a:moveTo>
                   <a:pt x="0" y="0"/>
                 </a:moveTo>
@@ -1655,9 +1721,11 @@
       <p:sp>
         <p:nvSpPr>
           <p:cNvPr id="184" name="Google Shape;184;g39c501ade2c_0_128:notes"/>
-          <p:cNvSpPr txBox="1"/>
+          <p:cNvSpPr txBox="1">
+            <a:spLocks noGrp="1"/>
+          </p:cNvSpPr>
           <p:nvPr>
-            <p:ph idx="1" type="body"/>
+            <p:ph type="body" idx="1"/>
           </p:nvPr>
         </p:nvSpPr>
         <p:spPr>
@@ -1670,23 +1738,20 @@
           </a:prstGeom>
         </p:spPr>
         <p:txBody>
-          <a:bodyPr anchorCtr="0" anchor="t" bIns="91425" lIns="91425" spcFirstLastPara="1" rIns="91425" wrap="square" tIns="91425">
+          <a:bodyPr spcFirstLastPara="1" wrap="square" lIns="91425" tIns="91425" rIns="91425" bIns="91425" anchor="t" anchorCtr="0">
             <a:noAutofit/>
           </a:bodyPr>
           <a:lstStyle/>
           <a:p>
-            <a:pPr indent="0" lvl="0" marL="0" rtl="0" algn="l">
-              <a:spcBef>
-                <a:spcPts val="0"/>
-              </a:spcBef>
-              <a:spcAft>
-                <a:spcPts val="0"/>
-              </a:spcAft>
-              <a:buNone/>
-            </a:pPr>
-            <a:r>
-              <a:t/>
-            </a:r>
+            <a:pPr marL="0" lvl="0" indent="0" algn="l" rtl="0">
+              <a:spcBef>
+                <a:spcPts val="0"/>
+              </a:spcBef>
+              <a:spcAft>
+                <a:spcPts val="0"/>
+              </a:spcAft>
+              <a:buNone/>
+            </a:pPr>
             <a:endParaRPr/>
           </a:p>
         </p:txBody>
@@ -1700,11 +1765,11 @@
 </file>
 
 <file path=ppt/notesSlides/notesSlide19.xml><?xml version="1.0" encoding="utf-8"?>
-<p:notes xmlns:a="http://schemas.openxmlformats.org/drawingml/2006/main" xmlns:r="http://schemas.openxmlformats.org/officeDocument/2006/relationships" xmlns:mc="http://schemas.openxmlformats.org/markup-compatibility/2006" xmlns:mv="urn:schemas-microsoft-com:mac:vml" xmlns:p="http://schemas.openxmlformats.org/presentationml/2006/main" xmlns:c="http://schemas.openxmlformats.org/drawingml/2006/chart" xmlns:dgm="http://schemas.openxmlformats.org/drawingml/2006/diagram" xmlns:o="urn:schemas-microsoft-com:office:office" xmlns:v="urn:schemas-microsoft-com:vml" xmlns:pvml="urn:schemas-microsoft-com:office:powerpoint" xmlns:com="http://schemas.openxmlformats.org/drawingml/2006/compatibility" xmlns:p14="http://schemas.microsoft.com/office/powerpoint/2010/main" xmlns:p15="http://schemas.microsoft.com/office/powerpoint/2012/main" xmlns:ahyp="http://schemas.microsoft.com/office/drawing/2018/hyperlinkcolor" showMasterPhAnim="0" showMasterSp="0">
+<p:notes xmlns:a="http://schemas.openxmlformats.org/drawingml/2006/main" xmlns:r="http://schemas.openxmlformats.org/officeDocument/2006/relationships" xmlns:p="http://schemas.openxmlformats.org/presentationml/2006/main" showMasterSp="0" showMasterPhAnim="0">
   <p:cSld>
     <p:spTree>
       <p:nvGrpSpPr>
-        <p:cNvPr id="191" name="Shape 191"/>
+        <p:cNvPr id="1" name="Shape 191"/>
         <p:cNvGrpSpPr/>
         <p:nvPr/>
       </p:nvGrpSpPr>
@@ -1719,9 +1784,11 @@
       <p:sp>
         <p:nvSpPr>
           <p:cNvPr id="192" name="Google Shape;192;g39c501ade2c_0_139:notes"/>
-          <p:cNvSpPr/>
+          <p:cNvSpPr>
+            <a:spLocks noGrp="1" noRot="1" noChangeAspect="1"/>
+          </p:cNvSpPr>
           <p:nvPr>
-            <p:ph idx="2" type="sldImg"/>
+            <p:ph type="sldImg" idx="2"/>
           </p:nvPr>
         </p:nvSpPr>
         <p:spPr>
@@ -1730,9 +1797,13 @@
             <a:ext cx="6096000" cy="3429000"/>
           </a:xfrm>
           <a:custGeom>
-            <a:rect b="b" l="l" r="r" t="t"/>
+            <a:avLst/>
+            <a:gdLst/>
+            <a:ahLst/>
+            <a:cxnLst/>
+            <a:rect l="l" t="t" r="r" b="b"/>
             <a:pathLst>
-              <a:path extrusionOk="0" h="120000" w="120000">
+              <a:path w="120000" h="120000" extrusionOk="0">
                 <a:moveTo>
                   <a:pt x="0" y="0"/>
                 </a:moveTo>
@@ -1754,9 +1825,11 @@
       <p:sp>
         <p:nvSpPr>
           <p:cNvPr id="193" name="Google Shape;193;g39c501ade2c_0_139:notes"/>
-          <p:cNvSpPr txBox="1"/>
+          <p:cNvSpPr txBox="1">
+            <a:spLocks noGrp="1"/>
+          </p:cNvSpPr>
           <p:nvPr>
-            <p:ph idx="1" type="body"/>
+            <p:ph type="body" idx="1"/>
           </p:nvPr>
         </p:nvSpPr>
         <p:spPr>
@@ -1769,23 +1842,20 @@
           </a:prstGeom>
         </p:spPr>
         <p:txBody>
-          <a:bodyPr anchorCtr="0" anchor="t" bIns="91425" lIns="91425" spcFirstLastPara="1" rIns="91425" wrap="square" tIns="91425">
+          <a:bodyPr spcFirstLastPara="1" wrap="square" lIns="91425" tIns="91425" rIns="91425" bIns="91425" anchor="t" anchorCtr="0">
             <a:noAutofit/>
           </a:bodyPr>
           <a:lstStyle/>
           <a:p>
-            <a:pPr indent="0" lvl="0" marL="0" rtl="0" algn="l">
-              <a:spcBef>
-                <a:spcPts val="0"/>
-              </a:spcBef>
-              <a:spcAft>
-                <a:spcPts val="0"/>
-              </a:spcAft>
-              <a:buNone/>
-            </a:pPr>
-            <a:r>
-              <a:t/>
-            </a:r>
+            <a:pPr marL="0" lvl="0" indent="0" algn="l" rtl="0">
+              <a:spcBef>
+                <a:spcPts val="0"/>
+              </a:spcBef>
+              <a:spcAft>
+                <a:spcPts val="0"/>
+              </a:spcAft>
+              <a:buNone/>
+            </a:pPr>
             <a:endParaRPr/>
           </a:p>
         </p:txBody>
@@ -1799,11 +1869,11 @@
 </file>
 
 <file path=ppt/notesSlides/notesSlide2.xml><?xml version="1.0" encoding="utf-8"?>
-<p:notes xmlns:a="http://schemas.openxmlformats.org/drawingml/2006/main" xmlns:r="http://schemas.openxmlformats.org/officeDocument/2006/relationships" xmlns:mc="http://schemas.openxmlformats.org/markup-compatibility/2006" xmlns:mv="urn:schemas-microsoft-com:mac:vml" xmlns:p="http://schemas.openxmlformats.org/presentationml/2006/main" xmlns:c="http://schemas.openxmlformats.org/drawingml/2006/chart" xmlns:dgm="http://schemas.openxmlformats.org/drawingml/2006/diagram" xmlns:o="urn:schemas-microsoft-com:office:office" xmlns:v="urn:schemas-microsoft-com:vml" xmlns:pvml="urn:schemas-microsoft-com:office:powerpoint" xmlns:com="http://schemas.openxmlformats.org/drawingml/2006/compatibility" xmlns:p14="http://schemas.microsoft.com/office/powerpoint/2010/main" xmlns:p15="http://schemas.microsoft.com/office/powerpoint/2012/main" xmlns:ahyp="http://schemas.microsoft.com/office/drawing/2018/hyperlinkcolor" showMasterPhAnim="0" showMasterSp="0">
+<p:notes xmlns:a="http://schemas.openxmlformats.org/drawingml/2006/main" xmlns:r="http://schemas.openxmlformats.org/officeDocument/2006/relationships" xmlns:p="http://schemas.openxmlformats.org/presentationml/2006/main" showMasterSp="0" showMasterPhAnim="0">
   <p:cSld>
     <p:spTree>
       <p:nvGrpSpPr>
-        <p:cNvPr id="57" name="Shape 57"/>
+        <p:cNvPr id="1" name="Shape 57"/>
         <p:cNvGrpSpPr/>
         <p:nvPr/>
       </p:nvGrpSpPr>
@@ -1818,9 +1888,11 @@
       <p:sp>
         <p:nvSpPr>
           <p:cNvPr id="58" name="Google Shape;58;g39c501ade2c_0_19:notes"/>
-          <p:cNvSpPr/>
+          <p:cNvSpPr>
+            <a:spLocks noGrp="1" noRot="1" noChangeAspect="1"/>
+          </p:cNvSpPr>
           <p:nvPr>
-            <p:ph idx="2" type="sldImg"/>
+            <p:ph type="sldImg" idx="2"/>
           </p:nvPr>
         </p:nvSpPr>
         <p:spPr>
@@ -1829,9 +1901,13 @@
             <a:ext cx="6096000" cy="3429000"/>
           </a:xfrm>
           <a:custGeom>
-            <a:rect b="b" l="l" r="r" t="t"/>
+            <a:avLst/>
+            <a:gdLst/>
+            <a:ahLst/>
+            <a:cxnLst/>
+            <a:rect l="l" t="t" r="r" b="b"/>
             <a:pathLst>
-              <a:path extrusionOk="0" h="120000" w="120000">
+              <a:path w="120000" h="120000" extrusionOk="0">
                 <a:moveTo>
                   <a:pt x="0" y="0"/>
                 </a:moveTo>
@@ -1853,9 +1929,11 @@
       <p:sp>
         <p:nvSpPr>
           <p:cNvPr id="59" name="Google Shape;59;g39c501ade2c_0_19:notes"/>
-          <p:cNvSpPr txBox="1"/>
+          <p:cNvSpPr txBox="1">
+            <a:spLocks noGrp="1"/>
+          </p:cNvSpPr>
           <p:nvPr>
-            <p:ph idx="1" type="body"/>
+            <p:ph type="body" idx="1"/>
           </p:nvPr>
         </p:nvSpPr>
         <p:spPr>
@@ -1868,23 +1946,20 @@
           </a:prstGeom>
         </p:spPr>
         <p:txBody>
-          <a:bodyPr anchorCtr="0" anchor="t" bIns="91425" lIns="91425" spcFirstLastPara="1" rIns="91425" wrap="square" tIns="91425">
+          <a:bodyPr spcFirstLastPara="1" wrap="square" lIns="91425" tIns="91425" rIns="91425" bIns="91425" anchor="t" anchorCtr="0">
             <a:noAutofit/>
           </a:bodyPr>
           <a:lstStyle/>
           <a:p>
-            <a:pPr indent="0" lvl="0" marL="0" rtl="0" algn="l">
-              <a:spcBef>
-                <a:spcPts val="0"/>
-              </a:spcBef>
-              <a:spcAft>
-                <a:spcPts val="0"/>
-              </a:spcAft>
-              <a:buNone/>
-            </a:pPr>
-            <a:r>
-              <a:t/>
-            </a:r>
+            <a:pPr marL="0" lvl="0" indent="0" algn="l" rtl="0">
+              <a:spcBef>
+                <a:spcPts val="0"/>
+              </a:spcBef>
+              <a:spcAft>
+                <a:spcPts val="0"/>
+              </a:spcAft>
+              <a:buNone/>
+            </a:pPr>
             <a:endParaRPr/>
           </a:p>
         </p:txBody>
@@ -1898,11 +1973,11 @@
 </file>
 
 <file path=ppt/notesSlides/notesSlide20.xml><?xml version="1.0" encoding="utf-8"?>
-<p:notes xmlns:a="http://schemas.openxmlformats.org/drawingml/2006/main" xmlns:r="http://schemas.openxmlformats.org/officeDocument/2006/relationships" xmlns:mc="http://schemas.openxmlformats.org/markup-compatibility/2006" xmlns:mv="urn:schemas-microsoft-com:mac:vml" xmlns:p="http://schemas.openxmlformats.org/presentationml/2006/main" xmlns:c="http://schemas.openxmlformats.org/drawingml/2006/chart" xmlns:dgm="http://schemas.openxmlformats.org/drawingml/2006/diagram" xmlns:o="urn:schemas-microsoft-com:office:office" xmlns:v="urn:schemas-microsoft-com:vml" xmlns:pvml="urn:schemas-microsoft-com:office:powerpoint" xmlns:com="http://schemas.openxmlformats.org/drawingml/2006/compatibility" xmlns:p14="http://schemas.microsoft.com/office/powerpoint/2010/main" xmlns:p15="http://schemas.microsoft.com/office/powerpoint/2012/main" xmlns:ahyp="http://schemas.microsoft.com/office/drawing/2018/hyperlinkcolor" showMasterPhAnim="0" showMasterSp="0">
+<p:notes xmlns:a="http://schemas.openxmlformats.org/drawingml/2006/main" xmlns:r="http://schemas.openxmlformats.org/officeDocument/2006/relationships" xmlns:p="http://schemas.openxmlformats.org/presentationml/2006/main" showMasterSp="0" showMasterPhAnim="0">
   <p:cSld>
     <p:spTree>
       <p:nvGrpSpPr>
-        <p:cNvPr id="199" name="Shape 199"/>
+        <p:cNvPr id="1" name="Shape 199"/>
         <p:cNvGrpSpPr/>
         <p:nvPr/>
       </p:nvGrpSpPr>
@@ -1917,9 +1992,11 @@
       <p:sp>
         <p:nvSpPr>
           <p:cNvPr id="200" name="Google Shape;200;g39c501ade2c_0_151:notes"/>
-          <p:cNvSpPr/>
+          <p:cNvSpPr>
+            <a:spLocks noGrp="1" noRot="1" noChangeAspect="1"/>
+          </p:cNvSpPr>
           <p:nvPr>
-            <p:ph idx="2" type="sldImg"/>
+            <p:ph type="sldImg" idx="2"/>
           </p:nvPr>
         </p:nvSpPr>
         <p:spPr>
@@ -1928,9 +2005,13 @@
             <a:ext cx="6096000" cy="3429000"/>
           </a:xfrm>
           <a:custGeom>
-            <a:rect b="b" l="l" r="r" t="t"/>
+            <a:avLst/>
+            <a:gdLst/>
+            <a:ahLst/>
+            <a:cxnLst/>
+            <a:rect l="l" t="t" r="r" b="b"/>
             <a:pathLst>
-              <a:path extrusionOk="0" h="120000" w="120000">
+              <a:path w="120000" h="120000" extrusionOk="0">
                 <a:moveTo>
                   <a:pt x="0" y="0"/>
                 </a:moveTo>
@@ -1952,9 +2033,11 @@
       <p:sp>
         <p:nvSpPr>
           <p:cNvPr id="201" name="Google Shape;201;g39c501ade2c_0_151:notes"/>
-          <p:cNvSpPr txBox="1"/>
+          <p:cNvSpPr txBox="1">
+            <a:spLocks noGrp="1"/>
+          </p:cNvSpPr>
           <p:nvPr>
-            <p:ph idx="1" type="body"/>
+            <p:ph type="body" idx="1"/>
           </p:nvPr>
         </p:nvSpPr>
         <p:spPr>
@@ -1967,23 +2050,20 @@
           </a:prstGeom>
         </p:spPr>
         <p:txBody>
-          <a:bodyPr anchorCtr="0" anchor="t" bIns="91425" lIns="91425" spcFirstLastPara="1" rIns="91425" wrap="square" tIns="91425">
+          <a:bodyPr spcFirstLastPara="1" wrap="square" lIns="91425" tIns="91425" rIns="91425" bIns="91425" anchor="t" anchorCtr="0">
             <a:noAutofit/>
           </a:bodyPr>
           <a:lstStyle/>
           <a:p>
-            <a:pPr indent="0" lvl="0" marL="0" rtl="0" algn="l">
-              <a:spcBef>
-                <a:spcPts val="0"/>
-              </a:spcBef>
-              <a:spcAft>
-                <a:spcPts val="0"/>
-              </a:spcAft>
-              <a:buNone/>
-            </a:pPr>
-            <a:r>
-              <a:t/>
-            </a:r>
+            <a:pPr marL="0" lvl="0" indent="0" algn="l" rtl="0">
+              <a:spcBef>
+                <a:spcPts val="0"/>
+              </a:spcBef>
+              <a:spcAft>
+                <a:spcPts val="0"/>
+              </a:spcAft>
+              <a:buNone/>
+            </a:pPr>
             <a:endParaRPr/>
           </a:p>
         </p:txBody>
@@ -1997,11 +2077,11 @@
 </file>
 
 <file path=ppt/notesSlides/notesSlide21.xml><?xml version="1.0" encoding="utf-8"?>
-<p:notes xmlns:a="http://schemas.openxmlformats.org/drawingml/2006/main" xmlns:r="http://schemas.openxmlformats.org/officeDocument/2006/relationships" xmlns:mc="http://schemas.openxmlformats.org/markup-compatibility/2006" xmlns:mv="urn:schemas-microsoft-com:mac:vml" xmlns:p="http://schemas.openxmlformats.org/presentationml/2006/main" xmlns:c="http://schemas.openxmlformats.org/drawingml/2006/chart" xmlns:dgm="http://schemas.openxmlformats.org/drawingml/2006/diagram" xmlns:o="urn:schemas-microsoft-com:office:office" xmlns:v="urn:schemas-microsoft-com:vml" xmlns:pvml="urn:schemas-microsoft-com:office:powerpoint" xmlns:com="http://schemas.openxmlformats.org/drawingml/2006/compatibility" xmlns:p14="http://schemas.microsoft.com/office/powerpoint/2010/main" xmlns:p15="http://schemas.microsoft.com/office/powerpoint/2012/main" xmlns:ahyp="http://schemas.microsoft.com/office/drawing/2018/hyperlinkcolor" showMasterPhAnim="0" showMasterSp="0">
+<p:notes xmlns:a="http://schemas.openxmlformats.org/drawingml/2006/main" xmlns:r="http://schemas.openxmlformats.org/officeDocument/2006/relationships" xmlns:p="http://schemas.openxmlformats.org/presentationml/2006/main" showMasterSp="0" showMasterPhAnim="0">
   <p:cSld>
     <p:spTree>
       <p:nvGrpSpPr>
-        <p:cNvPr id="206" name="Shape 206"/>
+        <p:cNvPr id="1" name="Shape 206"/>
         <p:cNvGrpSpPr/>
         <p:nvPr/>
       </p:nvGrpSpPr>
@@ -2016,9 +2096,11 @@
       <p:sp>
         <p:nvSpPr>
           <p:cNvPr id="207" name="Google Shape;207;g39c501ade2c_0_146:notes"/>
-          <p:cNvSpPr/>
+          <p:cNvSpPr>
+            <a:spLocks noGrp="1" noRot="1" noChangeAspect="1"/>
+          </p:cNvSpPr>
           <p:nvPr>
-            <p:ph idx="2" type="sldImg"/>
+            <p:ph type="sldImg" idx="2"/>
           </p:nvPr>
         </p:nvSpPr>
         <p:spPr>
@@ -2027,9 +2109,13 @@
             <a:ext cx="6096000" cy="3429000"/>
           </a:xfrm>
           <a:custGeom>
-            <a:rect b="b" l="l" r="r" t="t"/>
+            <a:avLst/>
+            <a:gdLst/>
+            <a:ahLst/>
+            <a:cxnLst/>
+            <a:rect l="l" t="t" r="r" b="b"/>
             <a:pathLst>
-              <a:path extrusionOk="0" h="120000" w="120000">
+              <a:path w="120000" h="120000" extrusionOk="0">
                 <a:moveTo>
                   <a:pt x="0" y="0"/>
                 </a:moveTo>
@@ -2051,9 +2137,11 @@
       <p:sp>
         <p:nvSpPr>
           <p:cNvPr id="208" name="Google Shape;208;g39c501ade2c_0_146:notes"/>
-          <p:cNvSpPr txBox="1"/>
+          <p:cNvSpPr txBox="1">
+            <a:spLocks noGrp="1"/>
+          </p:cNvSpPr>
           <p:nvPr>
-            <p:ph idx="1" type="body"/>
+            <p:ph type="body" idx="1"/>
           </p:nvPr>
         </p:nvSpPr>
         <p:spPr>
@@ -2066,23 +2154,20 @@
           </a:prstGeom>
         </p:spPr>
         <p:txBody>
-          <a:bodyPr anchorCtr="0" anchor="t" bIns="91425" lIns="91425" spcFirstLastPara="1" rIns="91425" wrap="square" tIns="91425">
+          <a:bodyPr spcFirstLastPara="1" wrap="square" lIns="91425" tIns="91425" rIns="91425" bIns="91425" anchor="t" anchorCtr="0">
             <a:noAutofit/>
           </a:bodyPr>
           <a:lstStyle/>
           <a:p>
-            <a:pPr indent="0" lvl="0" marL="0" rtl="0" algn="l">
-              <a:spcBef>
-                <a:spcPts val="0"/>
-              </a:spcBef>
-              <a:spcAft>
-                <a:spcPts val="0"/>
-              </a:spcAft>
-              <a:buNone/>
-            </a:pPr>
-            <a:r>
-              <a:t/>
-            </a:r>
+            <a:pPr marL="0" lvl="0" indent="0" algn="l" rtl="0">
+              <a:spcBef>
+                <a:spcPts val="0"/>
+              </a:spcBef>
+              <a:spcAft>
+                <a:spcPts val="0"/>
+              </a:spcAft>
+              <a:buNone/>
+            </a:pPr>
             <a:endParaRPr/>
           </a:p>
         </p:txBody>
@@ -2096,11 +2181,11 @@
 </file>
 
 <file path=ppt/notesSlides/notesSlide22.xml><?xml version="1.0" encoding="utf-8"?>
-<p:notes xmlns:a="http://schemas.openxmlformats.org/drawingml/2006/main" xmlns:r="http://schemas.openxmlformats.org/officeDocument/2006/relationships" xmlns:mc="http://schemas.openxmlformats.org/markup-compatibility/2006" xmlns:mv="urn:schemas-microsoft-com:mac:vml" xmlns:p="http://schemas.openxmlformats.org/presentationml/2006/main" xmlns:c="http://schemas.openxmlformats.org/drawingml/2006/chart" xmlns:dgm="http://schemas.openxmlformats.org/drawingml/2006/diagram" xmlns:o="urn:schemas-microsoft-com:office:office" xmlns:v="urn:schemas-microsoft-com:vml" xmlns:pvml="urn:schemas-microsoft-com:office:powerpoint" xmlns:com="http://schemas.openxmlformats.org/drawingml/2006/compatibility" xmlns:p14="http://schemas.microsoft.com/office/powerpoint/2010/main" xmlns:p15="http://schemas.microsoft.com/office/powerpoint/2012/main" xmlns:ahyp="http://schemas.microsoft.com/office/drawing/2018/hyperlinkcolor" showMasterPhAnim="0" showMasterSp="0">
+<p:notes xmlns:a="http://schemas.openxmlformats.org/drawingml/2006/main" xmlns:r="http://schemas.openxmlformats.org/officeDocument/2006/relationships" xmlns:p="http://schemas.openxmlformats.org/presentationml/2006/main" showMasterSp="0" showMasterPhAnim="0">
   <p:cSld>
     <p:spTree>
       <p:nvGrpSpPr>
-        <p:cNvPr id="217" name="Shape 217"/>
+        <p:cNvPr id="1" name="Shape 217"/>
         <p:cNvGrpSpPr/>
         <p:nvPr/>
       </p:nvGrpSpPr>
@@ -2115,9 +2200,11 @@
       <p:sp>
         <p:nvSpPr>
           <p:cNvPr id="218" name="Google Shape;218;g39c501ade2c_0_167:notes"/>
-          <p:cNvSpPr/>
+          <p:cNvSpPr>
+            <a:spLocks noGrp="1" noRot="1" noChangeAspect="1"/>
+          </p:cNvSpPr>
           <p:nvPr>
-            <p:ph idx="2" type="sldImg"/>
+            <p:ph type="sldImg" idx="2"/>
           </p:nvPr>
         </p:nvSpPr>
         <p:spPr>
@@ -2126,9 +2213,13 @@
             <a:ext cx="6096000" cy="3429000"/>
           </a:xfrm>
           <a:custGeom>
-            <a:rect b="b" l="l" r="r" t="t"/>
+            <a:avLst/>
+            <a:gdLst/>
+            <a:ahLst/>
+            <a:cxnLst/>
+            <a:rect l="l" t="t" r="r" b="b"/>
             <a:pathLst>
-              <a:path extrusionOk="0" h="120000" w="120000">
+              <a:path w="120000" h="120000" extrusionOk="0">
                 <a:moveTo>
                   <a:pt x="0" y="0"/>
                 </a:moveTo>
@@ -2150,9 +2241,11 @@
       <p:sp>
         <p:nvSpPr>
           <p:cNvPr id="219" name="Google Shape;219;g39c501ade2c_0_167:notes"/>
-          <p:cNvSpPr txBox="1"/>
+          <p:cNvSpPr txBox="1">
+            <a:spLocks noGrp="1"/>
+          </p:cNvSpPr>
           <p:nvPr>
-            <p:ph idx="1" type="body"/>
+            <p:ph type="body" idx="1"/>
           </p:nvPr>
         </p:nvSpPr>
         <p:spPr>
@@ -2165,23 +2258,20 @@
           </a:prstGeom>
         </p:spPr>
         <p:txBody>
-          <a:bodyPr anchorCtr="0" anchor="t" bIns="91425" lIns="91425" spcFirstLastPara="1" rIns="91425" wrap="square" tIns="91425">
+          <a:bodyPr spcFirstLastPara="1" wrap="square" lIns="91425" tIns="91425" rIns="91425" bIns="91425" anchor="t" anchorCtr="0">
             <a:noAutofit/>
           </a:bodyPr>
           <a:lstStyle/>
           <a:p>
-            <a:pPr indent="0" lvl="0" marL="0" rtl="0" algn="l">
-              <a:spcBef>
-                <a:spcPts val="0"/>
-              </a:spcBef>
-              <a:spcAft>
-                <a:spcPts val="0"/>
-              </a:spcAft>
-              <a:buNone/>
-            </a:pPr>
-            <a:r>
-              <a:t/>
-            </a:r>
+            <a:pPr marL="0" lvl="0" indent="0" algn="l" rtl="0">
+              <a:spcBef>
+                <a:spcPts val="0"/>
+              </a:spcBef>
+              <a:spcAft>
+                <a:spcPts val="0"/>
+              </a:spcAft>
+              <a:buNone/>
+            </a:pPr>
             <a:endParaRPr/>
           </a:p>
         </p:txBody>
@@ -2195,11 +2285,11 @@
 </file>
 
 <file path=ppt/notesSlides/notesSlide23.xml><?xml version="1.0" encoding="utf-8"?>
-<p:notes xmlns:a="http://schemas.openxmlformats.org/drawingml/2006/main" xmlns:r="http://schemas.openxmlformats.org/officeDocument/2006/relationships" xmlns:mc="http://schemas.openxmlformats.org/markup-compatibility/2006" xmlns:mv="urn:schemas-microsoft-com:mac:vml" xmlns:p="http://schemas.openxmlformats.org/presentationml/2006/main" xmlns:c="http://schemas.openxmlformats.org/drawingml/2006/chart" xmlns:dgm="http://schemas.openxmlformats.org/drawingml/2006/diagram" xmlns:o="urn:schemas-microsoft-com:office:office" xmlns:v="urn:schemas-microsoft-com:vml" xmlns:pvml="urn:schemas-microsoft-com:office:powerpoint" xmlns:com="http://schemas.openxmlformats.org/drawingml/2006/compatibility" xmlns:p14="http://schemas.microsoft.com/office/powerpoint/2010/main" xmlns:p15="http://schemas.microsoft.com/office/powerpoint/2012/main" xmlns:ahyp="http://schemas.microsoft.com/office/drawing/2018/hyperlinkcolor" showMasterPhAnim="0" showMasterSp="0">
+<p:notes xmlns:a="http://schemas.openxmlformats.org/drawingml/2006/main" xmlns:r="http://schemas.openxmlformats.org/officeDocument/2006/relationships" xmlns:p="http://schemas.openxmlformats.org/presentationml/2006/main" showMasterSp="0" showMasterPhAnim="0">
   <p:cSld>
     <p:spTree>
       <p:nvGrpSpPr>
-        <p:cNvPr id="225" name="Shape 225"/>
+        <p:cNvPr id="1" name="Shape 225"/>
         <p:cNvGrpSpPr/>
         <p:nvPr/>
       </p:nvGrpSpPr>
@@ -2214,9 +2304,11 @@
       <p:sp>
         <p:nvSpPr>
           <p:cNvPr id="226" name="Google Shape;226;g39c501ade2c_0_174:notes"/>
-          <p:cNvSpPr/>
+          <p:cNvSpPr>
+            <a:spLocks noGrp="1" noRot="1" noChangeAspect="1"/>
+          </p:cNvSpPr>
           <p:nvPr>
-            <p:ph idx="2" type="sldImg"/>
+            <p:ph type="sldImg" idx="2"/>
           </p:nvPr>
         </p:nvSpPr>
         <p:spPr>
@@ -2225,9 +2317,13 @@
             <a:ext cx="6096000" cy="3429000"/>
           </a:xfrm>
           <a:custGeom>
-            <a:rect b="b" l="l" r="r" t="t"/>
+            <a:avLst/>
+            <a:gdLst/>
+            <a:ahLst/>
+            <a:cxnLst/>
+            <a:rect l="l" t="t" r="r" b="b"/>
             <a:pathLst>
-              <a:path extrusionOk="0" h="120000" w="120000">
+              <a:path w="120000" h="120000" extrusionOk="0">
                 <a:moveTo>
                   <a:pt x="0" y="0"/>
                 </a:moveTo>
@@ -2249,9 +2345,11 @@
       <p:sp>
         <p:nvSpPr>
           <p:cNvPr id="227" name="Google Shape;227;g39c501ade2c_0_174:notes"/>
-          <p:cNvSpPr txBox="1"/>
+          <p:cNvSpPr txBox="1">
+            <a:spLocks noGrp="1"/>
+          </p:cNvSpPr>
           <p:nvPr>
-            <p:ph idx="1" type="body"/>
+            <p:ph type="body" idx="1"/>
           </p:nvPr>
         </p:nvSpPr>
         <p:spPr>
@@ -2264,23 +2362,20 @@
           </a:prstGeom>
         </p:spPr>
         <p:txBody>
-          <a:bodyPr anchorCtr="0" anchor="t" bIns="91425" lIns="91425" spcFirstLastPara="1" rIns="91425" wrap="square" tIns="91425">
+          <a:bodyPr spcFirstLastPara="1" wrap="square" lIns="91425" tIns="91425" rIns="91425" bIns="91425" anchor="t" anchorCtr="0">
             <a:noAutofit/>
           </a:bodyPr>
           <a:lstStyle/>
           <a:p>
-            <a:pPr indent="0" lvl="0" marL="0" rtl="0" algn="l">
-              <a:spcBef>
-                <a:spcPts val="0"/>
-              </a:spcBef>
-              <a:spcAft>
-                <a:spcPts val="0"/>
-              </a:spcAft>
-              <a:buNone/>
-            </a:pPr>
-            <a:r>
-              <a:t/>
-            </a:r>
+            <a:pPr marL="0" lvl="0" indent="0" algn="l" rtl="0">
+              <a:spcBef>
+                <a:spcPts val="0"/>
+              </a:spcBef>
+              <a:spcAft>
+                <a:spcPts val="0"/>
+              </a:spcAft>
+              <a:buNone/>
+            </a:pPr>
             <a:endParaRPr/>
           </a:p>
         </p:txBody>
@@ -2294,11 +2389,11 @@
 </file>
 
 <file path=ppt/notesSlides/notesSlide24.xml><?xml version="1.0" encoding="utf-8"?>
-<p:notes xmlns:a="http://schemas.openxmlformats.org/drawingml/2006/main" xmlns:r="http://schemas.openxmlformats.org/officeDocument/2006/relationships" xmlns:mc="http://schemas.openxmlformats.org/markup-compatibility/2006" xmlns:mv="urn:schemas-microsoft-com:mac:vml" xmlns:p="http://schemas.openxmlformats.org/presentationml/2006/main" xmlns:c="http://schemas.openxmlformats.org/drawingml/2006/chart" xmlns:dgm="http://schemas.openxmlformats.org/drawingml/2006/diagram" xmlns:o="urn:schemas-microsoft-com:office:office" xmlns:v="urn:schemas-microsoft-com:vml" xmlns:pvml="urn:schemas-microsoft-com:office:powerpoint" xmlns:com="http://schemas.openxmlformats.org/drawingml/2006/compatibility" xmlns:p14="http://schemas.microsoft.com/office/powerpoint/2010/main" xmlns:p15="http://schemas.microsoft.com/office/powerpoint/2012/main" xmlns:ahyp="http://schemas.microsoft.com/office/drawing/2018/hyperlinkcolor" showMasterPhAnim="0" showMasterSp="0">
+<p:notes xmlns:a="http://schemas.openxmlformats.org/drawingml/2006/main" xmlns:r="http://schemas.openxmlformats.org/officeDocument/2006/relationships" xmlns:p="http://schemas.openxmlformats.org/presentationml/2006/main" showMasterSp="0" showMasterPhAnim="0">
   <p:cSld>
     <p:spTree>
       <p:nvGrpSpPr>
-        <p:cNvPr id="234" name="Shape 234"/>
+        <p:cNvPr id="1" name="Shape 234"/>
         <p:cNvGrpSpPr/>
         <p:nvPr/>
       </p:nvGrpSpPr>
@@ -2313,9 +2408,11 @@
       <p:sp>
         <p:nvSpPr>
           <p:cNvPr id="235" name="Google Shape;235;g39c501ade2c_0_181:notes"/>
-          <p:cNvSpPr/>
+          <p:cNvSpPr>
+            <a:spLocks noGrp="1" noRot="1" noChangeAspect="1"/>
+          </p:cNvSpPr>
           <p:nvPr>
-            <p:ph idx="2" type="sldImg"/>
+            <p:ph type="sldImg" idx="2"/>
           </p:nvPr>
         </p:nvSpPr>
         <p:spPr>
@@ -2324,9 +2421,13 @@
             <a:ext cx="6096000" cy="3429000"/>
           </a:xfrm>
           <a:custGeom>
-            <a:rect b="b" l="l" r="r" t="t"/>
+            <a:avLst/>
+            <a:gdLst/>
+            <a:ahLst/>
+            <a:cxnLst/>
+            <a:rect l="l" t="t" r="r" b="b"/>
             <a:pathLst>
-              <a:path extrusionOk="0" h="120000" w="120000">
+              <a:path w="120000" h="120000" extrusionOk="0">
                 <a:moveTo>
                   <a:pt x="0" y="0"/>
                 </a:moveTo>
@@ -2348,9 +2449,11 @@
       <p:sp>
         <p:nvSpPr>
           <p:cNvPr id="236" name="Google Shape;236;g39c501ade2c_0_181:notes"/>
-          <p:cNvSpPr txBox="1"/>
+          <p:cNvSpPr txBox="1">
+            <a:spLocks noGrp="1"/>
+          </p:cNvSpPr>
           <p:nvPr>
-            <p:ph idx="1" type="body"/>
+            <p:ph type="body" idx="1"/>
           </p:nvPr>
         </p:nvSpPr>
         <p:spPr>
@@ -2363,23 +2466,20 @@
           </a:prstGeom>
         </p:spPr>
         <p:txBody>
-          <a:bodyPr anchorCtr="0" anchor="t" bIns="91425" lIns="91425" spcFirstLastPara="1" rIns="91425" wrap="square" tIns="91425">
+          <a:bodyPr spcFirstLastPara="1" wrap="square" lIns="91425" tIns="91425" rIns="91425" bIns="91425" anchor="t" anchorCtr="0">
             <a:noAutofit/>
           </a:bodyPr>
           <a:lstStyle/>
           <a:p>
-            <a:pPr indent="0" lvl="0" marL="0" rtl="0" algn="l">
-              <a:spcBef>
-                <a:spcPts val="0"/>
-              </a:spcBef>
-              <a:spcAft>
-                <a:spcPts val="0"/>
-              </a:spcAft>
-              <a:buNone/>
-            </a:pPr>
-            <a:r>
-              <a:t/>
-            </a:r>
+            <a:pPr marL="0" lvl="0" indent="0" algn="l" rtl="0">
+              <a:spcBef>
+                <a:spcPts val="0"/>
+              </a:spcBef>
+              <a:spcAft>
+                <a:spcPts val="0"/>
+              </a:spcAft>
+              <a:buNone/>
+            </a:pPr>
             <a:endParaRPr/>
           </a:p>
         </p:txBody>
@@ -2393,11 +2493,11 @@
 </file>
 
 <file path=ppt/notesSlides/notesSlide3.xml><?xml version="1.0" encoding="utf-8"?>
-<p:notes xmlns:a="http://schemas.openxmlformats.org/drawingml/2006/main" xmlns:r="http://schemas.openxmlformats.org/officeDocument/2006/relationships" xmlns:mc="http://schemas.openxmlformats.org/markup-compatibility/2006" xmlns:mv="urn:schemas-microsoft-com:mac:vml" xmlns:p="http://schemas.openxmlformats.org/presentationml/2006/main" xmlns:c="http://schemas.openxmlformats.org/drawingml/2006/chart" xmlns:dgm="http://schemas.openxmlformats.org/drawingml/2006/diagram" xmlns:o="urn:schemas-microsoft-com:office:office" xmlns:v="urn:schemas-microsoft-com:vml" xmlns:pvml="urn:schemas-microsoft-com:office:powerpoint" xmlns:com="http://schemas.openxmlformats.org/drawingml/2006/compatibility" xmlns:p14="http://schemas.microsoft.com/office/powerpoint/2010/main" xmlns:p15="http://schemas.microsoft.com/office/powerpoint/2012/main" xmlns:ahyp="http://schemas.microsoft.com/office/drawing/2018/hyperlinkcolor" showMasterPhAnim="0" showMasterSp="0">
+<p:notes xmlns:a="http://schemas.openxmlformats.org/drawingml/2006/main" xmlns:r="http://schemas.openxmlformats.org/officeDocument/2006/relationships" xmlns:p="http://schemas.openxmlformats.org/presentationml/2006/main" showMasterSp="0" showMasterPhAnim="0">
   <p:cSld>
     <p:spTree>
       <p:nvGrpSpPr>
-        <p:cNvPr id="64" name="Shape 64"/>
+        <p:cNvPr id="1" name="Shape 64"/>
         <p:cNvGrpSpPr/>
         <p:nvPr/>
       </p:nvGrpSpPr>
@@ -2412,9 +2512,11 @@
       <p:sp>
         <p:nvSpPr>
           <p:cNvPr id="65" name="Google Shape;65;g39c501ade2c_0_0:notes"/>
-          <p:cNvSpPr/>
+          <p:cNvSpPr>
+            <a:spLocks noGrp="1" noRot="1" noChangeAspect="1"/>
+          </p:cNvSpPr>
           <p:nvPr>
-            <p:ph idx="2" type="sldImg"/>
+            <p:ph type="sldImg" idx="2"/>
           </p:nvPr>
         </p:nvSpPr>
         <p:spPr>
@@ -2423,9 +2525,13 @@
             <a:ext cx="6096000" cy="3429000"/>
           </a:xfrm>
           <a:custGeom>
-            <a:rect b="b" l="l" r="r" t="t"/>
+            <a:avLst/>
+            <a:gdLst/>
+            <a:ahLst/>
+            <a:cxnLst/>
+            <a:rect l="l" t="t" r="r" b="b"/>
             <a:pathLst>
-              <a:path extrusionOk="0" h="120000" w="120000">
+              <a:path w="120000" h="120000" extrusionOk="0">
                 <a:moveTo>
                   <a:pt x="0" y="0"/>
                 </a:moveTo>
@@ -2447,9 +2553,11 @@
       <p:sp>
         <p:nvSpPr>
           <p:cNvPr id="66" name="Google Shape;66;g39c501ade2c_0_0:notes"/>
-          <p:cNvSpPr txBox="1"/>
+          <p:cNvSpPr txBox="1">
+            <a:spLocks noGrp="1"/>
+          </p:cNvSpPr>
           <p:nvPr>
-            <p:ph idx="1" type="body"/>
+            <p:ph type="body" idx="1"/>
           </p:nvPr>
         </p:nvSpPr>
         <p:spPr>
@@ -2462,23 +2570,20 @@
           </a:prstGeom>
         </p:spPr>
         <p:txBody>
-          <a:bodyPr anchorCtr="0" anchor="t" bIns="91425" lIns="91425" spcFirstLastPara="1" rIns="91425" wrap="square" tIns="91425">
+          <a:bodyPr spcFirstLastPara="1" wrap="square" lIns="91425" tIns="91425" rIns="91425" bIns="91425" anchor="t" anchorCtr="0">
             <a:noAutofit/>
           </a:bodyPr>
           <a:lstStyle/>
           <a:p>
-            <a:pPr indent="0" lvl="0" marL="0" rtl="0" algn="l">
-              <a:spcBef>
-                <a:spcPts val="0"/>
-              </a:spcBef>
-              <a:spcAft>
-                <a:spcPts val="0"/>
-              </a:spcAft>
-              <a:buNone/>
-            </a:pPr>
-            <a:r>
-              <a:t/>
-            </a:r>
+            <a:pPr marL="0" lvl="0" indent="0" algn="l" rtl="0">
+              <a:spcBef>
+                <a:spcPts val="0"/>
+              </a:spcBef>
+              <a:spcAft>
+                <a:spcPts val="0"/>
+              </a:spcAft>
+              <a:buNone/>
+            </a:pPr>
             <a:endParaRPr/>
           </a:p>
         </p:txBody>
@@ -2492,11 +2597,11 @@
 </file>
 
 <file path=ppt/notesSlides/notesSlide4.xml><?xml version="1.0" encoding="utf-8"?>
-<p:notes xmlns:a="http://schemas.openxmlformats.org/drawingml/2006/main" xmlns:r="http://schemas.openxmlformats.org/officeDocument/2006/relationships" xmlns:mc="http://schemas.openxmlformats.org/markup-compatibility/2006" xmlns:mv="urn:schemas-microsoft-com:mac:vml" xmlns:p="http://schemas.openxmlformats.org/presentationml/2006/main" xmlns:c="http://schemas.openxmlformats.org/drawingml/2006/chart" xmlns:dgm="http://schemas.openxmlformats.org/drawingml/2006/diagram" xmlns:o="urn:schemas-microsoft-com:office:office" xmlns:v="urn:schemas-microsoft-com:vml" xmlns:pvml="urn:schemas-microsoft-com:office:powerpoint" xmlns:com="http://schemas.openxmlformats.org/drawingml/2006/compatibility" xmlns:p14="http://schemas.microsoft.com/office/powerpoint/2010/main" xmlns:p15="http://schemas.microsoft.com/office/powerpoint/2012/main" xmlns:ahyp="http://schemas.microsoft.com/office/drawing/2018/hyperlinkcolor" showMasterPhAnim="0" showMasterSp="0">
+<p:notes xmlns:a="http://schemas.openxmlformats.org/drawingml/2006/main" xmlns:r="http://schemas.openxmlformats.org/officeDocument/2006/relationships" xmlns:p="http://schemas.openxmlformats.org/presentationml/2006/main" showMasterSp="0" showMasterPhAnim="0">
   <p:cSld>
     <p:spTree>
       <p:nvGrpSpPr>
-        <p:cNvPr id="71" name="Shape 71"/>
+        <p:cNvPr id="1" name="Shape 71"/>
         <p:cNvGrpSpPr/>
         <p:nvPr/>
       </p:nvGrpSpPr>
@@ -2511,20 +2616,26 @@
       <p:sp>
         <p:nvSpPr>
           <p:cNvPr id="72" name="Google Shape;72;g39c501ade2c_0_5:notes"/>
-          <p:cNvSpPr/>
+          <p:cNvSpPr>
+            <a:spLocks noGrp="1" noRot="1" noChangeAspect="1"/>
+          </p:cNvSpPr>
           <p:nvPr>
-            <p:ph idx="2" type="sldImg"/>
+            <p:ph type="sldImg" idx="2"/>
           </p:nvPr>
         </p:nvSpPr>
         <p:spPr>
           <a:xfrm>
-            <a:off x="381300" y="685800"/>
+            <a:off x="381000" y="685800"/>
             <a:ext cx="6096000" cy="3429000"/>
           </a:xfrm>
           <a:custGeom>
-            <a:rect b="b" l="l" r="r" t="t"/>
+            <a:avLst/>
+            <a:gdLst/>
+            <a:ahLst/>
+            <a:cxnLst/>
+            <a:rect l="l" t="t" r="r" b="b"/>
             <a:pathLst>
-              <a:path extrusionOk="0" h="120000" w="120000">
+              <a:path w="120000" h="120000" extrusionOk="0">
                 <a:moveTo>
                   <a:pt x="0" y="0"/>
                 </a:moveTo>
@@ -2546,9 +2657,11 @@
       <p:sp>
         <p:nvSpPr>
           <p:cNvPr id="73" name="Google Shape;73;g39c501ade2c_0_5:notes"/>
-          <p:cNvSpPr txBox="1"/>
+          <p:cNvSpPr txBox="1">
+            <a:spLocks noGrp="1"/>
+          </p:cNvSpPr>
           <p:nvPr>
-            <p:ph idx="1" type="body"/>
+            <p:ph type="body" idx="1"/>
           </p:nvPr>
         </p:nvSpPr>
         <p:spPr>
@@ -2561,23 +2674,20 @@
           </a:prstGeom>
         </p:spPr>
         <p:txBody>
-          <a:bodyPr anchorCtr="0" anchor="t" bIns="91425" lIns="91425" spcFirstLastPara="1" rIns="91425" wrap="square" tIns="91425">
+          <a:bodyPr spcFirstLastPara="1" wrap="square" lIns="91425" tIns="91425" rIns="91425" bIns="91425" anchor="t" anchorCtr="0">
             <a:noAutofit/>
           </a:bodyPr>
           <a:lstStyle/>
           <a:p>
-            <a:pPr indent="0" lvl="0" marL="0" rtl="0" algn="l">
-              <a:spcBef>
-                <a:spcPts val="0"/>
-              </a:spcBef>
-              <a:spcAft>
-                <a:spcPts val="0"/>
-              </a:spcAft>
-              <a:buNone/>
-            </a:pPr>
-            <a:r>
-              <a:t/>
-            </a:r>
+            <a:pPr marL="0" lvl="0" indent="0" algn="l" rtl="0">
+              <a:spcBef>
+                <a:spcPts val="0"/>
+              </a:spcBef>
+              <a:spcAft>
+                <a:spcPts val="0"/>
+              </a:spcAft>
+              <a:buNone/>
+            </a:pPr>
             <a:endParaRPr/>
           </a:p>
         </p:txBody>
@@ -2591,11 +2701,11 @@
 </file>
 
 <file path=ppt/notesSlides/notesSlide5.xml><?xml version="1.0" encoding="utf-8"?>
-<p:notes xmlns:a="http://schemas.openxmlformats.org/drawingml/2006/main" xmlns:r="http://schemas.openxmlformats.org/officeDocument/2006/relationships" xmlns:mc="http://schemas.openxmlformats.org/markup-compatibility/2006" xmlns:mv="urn:schemas-microsoft-com:mac:vml" xmlns:p="http://schemas.openxmlformats.org/presentationml/2006/main" xmlns:c="http://schemas.openxmlformats.org/drawingml/2006/chart" xmlns:dgm="http://schemas.openxmlformats.org/drawingml/2006/diagram" xmlns:o="urn:schemas-microsoft-com:office:office" xmlns:v="urn:schemas-microsoft-com:vml" xmlns:pvml="urn:schemas-microsoft-com:office:powerpoint" xmlns:com="http://schemas.openxmlformats.org/drawingml/2006/compatibility" xmlns:p14="http://schemas.microsoft.com/office/powerpoint/2010/main" xmlns:p15="http://schemas.microsoft.com/office/powerpoint/2012/main" xmlns:ahyp="http://schemas.microsoft.com/office/drawing/2018/hyperlinkcolor" showMasterPhAnim="0" showMasterSp="0">
+<p:notes xmlns:a="http://schemas.openxmlformats.org/drawingml/2006/main" xmlns:r="http://schemas.openxmlformats.org/officeDocument/2006/relationships" xmlns:p="http://schemas.openxmlformats.org/presentationml/2006/main" showMasterSp="0" showMasterPhAnim="0">
   <p:cSld>
     <p:spTree>
       <p:nvGrpSpPr>
-        <p:cNvPr id="77" name="Shape 77"/>
+        <p:cNvPr id="1" name="Shape 77"/>
         <p:cNvGrpSpPr/>
         <p:nvPr/>
       </p:nvGrpSpPr>
@@ -2610,9 +2720,11 @@
       <p:sp>
         <p:nvSpPr>
           <p:cNvPr id="78" name="Google Shape;78;g39c501ade2c_0_25:notes"/>
-          <p:cNvSpPr/>
+          <p:cNvSpPr>
+            <a:spLocks noGrp="1" noRot="1" noChangeAspect="1"/>
+          </p:cNvSpPr>
           <p:nvPr>
-            <p:ph idx="2" type="sldImg"/>
+            <p:ph type="sldImg" idx="2"/>
           </p:nvPr>
         </p:nvSpPr>
         <p:spPr>
@@ -2621,9 +2733,13 @@
             <a:ext cx="6096000" cy="3429000"/>
           </a:xfrm>
           <a:custGeom>
-            <a:rect b="b" l="l" r="r" t="t"/>
+            <a:avLst/>
+            <a:gdLst/>
+            <a:ahLst/>
+            <a:cxnLst/>
+            <a:rect l="l" t="t" r="r" b="b"/>
             <a:pathLst>
-              <a:path extrusionOk="0" h="120000" w="120000">
+              <a:path w="120000" h="120000" extrusionOk="0">
                 <a:moveTo>
                   <a:pt x="0" y="0"/>
                 </a:moveTo>
@@ -2645,9 +2761,11 @@
       <p:sp>
         <p:nvSpPr>
           <p:cNvPr id="79" name="Google Shape;79;g39c501ade2c_0_25:notes"/>
-          <p:cNvSpPr txBox="1"/>
+          <p:cNvSpPr txBox="1">
+            <a:spLocks noGrp="1"/>
+          </p:cNvSpPr>
           <p:nvPr>
-            <p:ph idx="1" type="body"/>
+            <p:ph type="body" idx="1"/>
           </p:nvPr>
         </p:nvSpPr>
         <p:spPr>
@@ -2660,23 +2778,20 @@
           </a:prstGeom>
         </p:spPr>
         <p:txBody>
-          <a:bodyPr anchorCtr="0" anchor="t" bIns="91425" lIns="91425" spcFirstLastPara="1" rIns="91425" wrap="square" tIns="91425">
+          <a:bodyPr spcFirstLastPara="1" wrap="square" lIns="91425" tIns="91425" rIns="91425" bIns="91425" anchor="t" anchorCtr="0">
             <a:noAutofit/>
           </a:bodyPr>
           <a:lstStyle/>
           <a:p>
-            <a:pPr indent="0" lvl="0" marL="0" rtl="0" algn="l">
-              <a:spcBef>
-                <a:spcPts val="0"/>
-              </a:spcBef>
-              <a:spcAft>
-                <a:spcPts val="0"/>
-              </a:spcAft>
-              <a:buNone/>
-            </a:pPr>
-            <a:r>
-              <a:t/>
-            </a:r>
+            <a:pPr marL="0" lvl="0" indent="0" algn="l" rtl="0">
+              <a:spcBef>
+                <a:spcPts val="0"/>
+              </a:spcBef>
+              <a:spcAft>
+                <a:spcPts val="0"/>
+              </a:spcAft>
+              <a:buNone/>
+            </a:pPr>
             <a:endParaRPr/>
           </a:p>
         </p:txBody>
@@ -2690,11 +2805,11 @@
 </file>
 
 <file path=ppt/notesSlides/notesSlide6.xml><?xml version="1.0" encoding="utf-8"?>
-<p:notes xmlns:a="http://schemas.openxmlformats.org/drawingml/2006/main" xmlns:r="http://schemas.openxmlformats.org/officeDocument/2006/relationships" xmlns:mc="http://schemas.openxmlformats.org/markup-compatibility/2006" xmlns:mv="urn:schemas-microsoft-com:mac:vml" xmlns:p="http://schemas.openxmlformats.org/presentationml/2006/main" xmlns:c="http://schemas.openxmlformats.org/drawingml/2006/chart" xmlns:dgm="http://schemas.openxmlformats.org/drawingml/2006/diagram" xmlns:o="urn:schemas-microsoft-com:office:office" xmlns:v="urn:schemas-microsoft-com:vml" xmlns:pvml="urn:schemas-microsoft-com:office:powerpoint" xmlns:com="http://schemas.openxmlformats.org/drawingml/2006/compatibility" xmlns:p14="http://schemas.microsoft.com/office/powerpoint/2010/main" xmlns:p15="http://schemas.microsoft.com/office/powerpoint/2012/main" xmlns:ahyp="http://schemas.microsoft.com/office/drawing/2018/hyperlinkcolor" showMasterPhAnim="0" showMasterSp="0">
+<p:notes xmlns:a="http://schemas.openxmlformats.org/drawingml/2006/main" xmlns:r="http://schemas.openxmlformats.org/officeDocument/2006/relationships" xmlns:p="http://schemas.openxmlformats.org/presentationml/2006/main" showMasterSp="0" showMasterPhAnim="0">
   <p:cSld>
     <p:spTree>
       <p:nvGrpSpPr>
-        <p:cNvPr id="83" name="Shape 83"/>
+        <p:cNvPr id="1" name="Shape 83"/>
         <p:cNvGrpSpPr/>
         <p:nvPr/>
       </p:nvGrpSpPr>
@@ -2709,9 +2824,11 @@
       <p:sp>
         <p:nvSpPr>
           <p:cNvPr id="84" name="Google Shape;84;g39c501ade2c_0_30:notes"/>
-          <p:cNvSpPr/>
+          <p:cNvSpPr>
+            <a:spLocks noGrp="1" noRot="1" noChangeAspect="1"/>
+          </p:cNvSpPr>
           <p:nvPr>
-            <p:ph idx="2" type="sldImg"/>
+            <p:ph type="sldImg" idx="2"/>
           </p:nvPr>
         </p:nvSpPr>
         <p:spPr>
@@ -2720,9 +2837,13 @@
             <a:ext cx="6096000" cy="3429000"/>
           </a:xfrm>
           <a:custGeom>
-            <a:rect b="b" l="l" r="r" t="t"/>
+            <a:avLst/>
+            <a:gdLst/>
+            <a:ahLst/>
+            <a:cxnLst/>
+            <a:rect l="l" t="t" r="r" b="b"/>
             <a:pathLst>
-              <a:path extrusionOk="0" h="120000" w="120000">
+              <a:path w="120000" h="120000" extrusionOk="0">
                 <a:moveTo>
                   <a:pt x="0" y="0"/>
                 </a:moveTo>
@@ -2744,9 +2865,11 @@
       <p:sp>
         <p:nvSpPr>
           <p:cNvPr id="85" name="Google Shape;85;g39c501ade2c_0_30:notes"/>
-          <p:cNvSpPr txBox="1"/>
+          <p:cNvSpPr txBox="1">
+            <a:spLocks noGrp="1"/>
+          </p:cNvSpPr>
           <p:nvPr>
-            <p:ph idx="1" type="body"/>
+            <p:ph type="body" idx="1"/>
           </p:nvPr>
         </p:nvSpPr>
         <p:spPr>
@@ -2759,23 +2882,20 @@
           </a:prstGeom>
         </p:spPr>
         <p:txBody>
-          <a:bodyPr anchorCtr="0" anchor="t" bIns="91425" lIns="91425" spcFirstLastPara="1" rIns="91425" wrap="square" tIns="91425">
+          <a:bodyPr spcFirstLastPara="1" wrap="square" lIns="91425" tIns="91425" rIns="91425" bIns="91425" anchor="t" anchorCtr="0">
             <a:noAutofit/>
           </a:bodyPr>
           <a:lstStyle/>
           <a:p>
-            <a:pPr indent="0" lvl="0" marL="0" rtl="0" algn="l">
-              <a:spcBef>
-                <a:spcPts val="0"/>
-              </a:spcBef>
-              <a:spcAft>
-                <a:spcPts val="0"/>
-              </a:spcAft>
-              <a:buNone/>
-            </a:pPr>
-            <a:r>
-              <a:t/>
-            </a:r>
+            <a:pPr marL="0" lvl="0" indent="0" algn="l" rtl="0">
+              <a:spcBef>
+                <a:spcPts val="0"/>
+              </a:spcBef>
+              <a:spcAft>
+                <a:spcPts val="0"/>
+              </a:spcAft>
+              <a:buNone/>
+            </a:pPr>
             <a:endParaRPr/>
           </a:p>
         </p:txBody>
@@ -2789,11 +2909,11 @@
 </file>
 
 <file path=ppt/notesSlides/notesSlide7.xml><?xml version="1.0" encoding="utf-8"?>
-<p:notes xmlns:a="http://schemas.openxmlformats.org/drawingml/2006/main" xmlns:r="http://schemas.openxmlformats.org/officeDocument/2006/relationships" xmlns:mc="http://schemas.openxmlformats.org/markup-compatibility/2006" xmlns:mv="urn:schemas-microsoft-com:mac:vml" xmlns:p="http://schemas.openxmlformats.org/presentationml/2006/main" xmlns:c="http://schemas.openxmlformats.org/drawingml/2006/chart" xmlns:dgm="http://schemas.openxmlformats.org/drawingml/2006/diagram" xmlns:o="urn:schemas-microsoft-com:office:office" xmlns:v="urn:schemas-microsoft-com:vml" xmlns:pvml="urn:schemas-microsoft-com:office:powerpoint" xmlns:com="http://schemas.openxmlformats.org/drawingml/2006/compatibility" xmlns:p14="http://schemas.microsoft.com/office/powerpoint/2010/main" xmlns:p15="http://schemas.microsoft.com/office/powerpoint/2012/main" xmlns:ahyp="http://schemas.microsoft.com/office/drawing/2018/hyperlinkcolor" showMasterPhAnim="0" showMasterSp="0">
+<p:notes xmlns:a="http://schemas.openxmlformats.org/drawingml/2006/main" xmlns:r="http://schemas.openxmlformats.org/officeDocument/2006/relationships" xmlns:p="http://schemas.openxmlformats.org/presentationml/2006/main" showMasterSp="0" showMasterPhAnim="0">
   <p:cSld>
     <p:spTree>
       <p:nvGrpSpPr>
-        <p:cNvPr id="90" name="Shape 90"/>
+        <p:cNvPr id="1" name="Shape 90"/>
         <p:cNvGrpSpPr/>
         <p:nvPr/>
       </p:nvGrpSpPr>
@@ -2808,9 +2928,11 @@
       <p:sp>
         <p:nvSpPr>
           <p:cNvPr id="91" name="Google Shape;91;g39c501ade2c_0_37:notes"/>
-          <p:cNvSpPr/>
+          <p:cNvSpPr>
+            <a:spLocks noGrp="1" noRot="1" noChangeAspect="1"/>
+          </p:cNvSpPr>
           <p:nvPr>
-            <p:ph idx="2" type="sldImg"/>
+            <p:ph type="sldImg" idx="2"/>
           </p:nvPr>
         </p:nvSpPr>
         <p:spPr>
@@ -2819,9 +2941,13 @@
             <a:ext cx="6096000" cy="3429000"/>
           </a:xfrm>
           <a:custGeom>
-            <a:rect b="b" l="l" r="r" t="t"/>
+            <a:avLst/>
+            <a:gdLst/>
+            <a:ahLst/>
+            <a:cxnLst/>
+            <a:rect l="l" t="t" r="r" b="b"/>
             <a:pathLst>
-              <a:path extrusionOk="0" h="120000" w="120000">
+              <a:path w="120000" h="120000" extrusionOk="0">
                 <a:moveTo>
                   <a:pt x="0" y="0"/>
                 </a:moveTo>
@@ -2843,9 +2969,11 @@
       <p:sp>
         <p:nvSpPr>
           <p:cNvPr id="92" name="Google Shape;92;g39c501ade2c_0_37:notes"/>
-          <p:cNvSpPr txBox="1"/>
+          <p:cNvSpPr txBox="1">
+            <a:spLocks noGrp="1"/>
+          </p:cNvSpPr>
           <p:nvPr>
-            <p:ph idx="1" type="body"/>
+            <p:ph type="body" idx="1"/>
           </p:nvPr>
         </p:nvSpPr>
         <p:spPr>
@@ -2858,23 +2986,20 @@
           </a:prstGeom>
         </p:spPr>
         <p:txBody>
-          <a:bodyPr anchorCtr="0" anchor="t" bIns="91425" lIns="91425" spcFirstLastPara="1" rIns="91425" wrap="square" tIns="91425">
+          <a:bodyPr spcFirstLastPara="1" wrap="square" lIns="91425" tIns="91425" rIns="91425" bIns="91425" anchor="t" anchorCtr="0">
             <a:noAutofit/>
           </a:bodyPr>
           <a:lstStyle/>
           <a:p>
-            <a:pPr indent="0" lvl="0" marL="0" rtl="0" algn="l">
-              <a:spcBef>
-                <a:spcPts val="0"/>
-              </a:spcBef>
-              <a:spcAft>
-                <a:spcPts val="0"/>
-              </a:spcAft>
-              <a:buNone/>
-            </a:pPr>
-            <a:r>
-              <a:t/>
-            </a:r>
+            <a:pPr marL="0" lvl="0" indent="0" algn="l" rtl="0">
+              <a:spcBef>
+                <a:spcPts val="0"/>
+              </a:spcBef>
+              <a:spcAft>
+                <a:spcPts val="0"/>
+              </a:spcAft>
+              <a:buNone/>
+            </a:pPr>
             <a:endParaRPr/>
           </a:p>
         </p:txBody>
@@ -2888,11 +3013,11 @@
 </file>
 
 <file path=ppt/notesSlides/notesSlide8.xml><?xml version="1.0" encoding="utf-8"?>
-<p:notes xmlns:a="http://schemas.openxmlformats.org/drawingml/2006/main" xmlns:r="http://schemas.openxmlformats.org/officeDocument/2006/relationships" xmlns:mc="http://schemas.openxmlformats.org/markup-compatibility/2006" xmlns:mv="urn:schemas-microsoft-com:mac:vml" xmlns:p="http://schemas.openxmlformats.org/presentationml/2006/main" xmlns:c="http://schemas.openxmlformats.org/drawingml/2006/chart" xmlns:dgm="http://schemas.openxmlformats.org/drawingml/2006/diagram" xmlns:o="urn:schemas-microsoft-com:office:office" xmlns:v="urn:schemas-microsoft-com:vml" xmlns:pvml="urn:schemas-microsoft-com:office:powerpoint" xmlns:com="http://schemas.openxmlformats.org/drawingml/2006/compatibility" xmlns:p14="http://schemas.microsoft.com/office/powerpoint/2010/main" xmlns:p15="http://schemas.microsoft.com/office/powerpoint/2012/main" xmlns:ahyp="http://schemas.microsoft.com/office/drawing/2018/hyperlinkcolor" showMasterPhAnim="0" showMasterSp="0">
+<p:notes xmlns:a="http://schemas.openxmlformats.org/drawingml/2006/main" xmlns:r="http://schemas.openxmlformats.org/officeDocument/2006/relationships" xmlns:p="http://schemas.openxmlformats.org/presentationml/2006/main" showMasterSp="0" showMasterPhAnim="0">
   <p:cSld>
     <p:spTree>
       <p:nvGrpSpPr>
-        <p:cNvPr id="97" name="Shape 97"/>
+        <p:cNvPr id="1" name="Shape 97"/>
         <p:cNvGrpSpPr/>
         <p:nvPr/>
       </p:nvGrpSpPr>
@@ -2907,9 +3032,11 @@
       <p:sp>
         <p:nvSpPr>
           <p:cNvPr id="98" name="Google Shape;98;g39c501ade2c_0_43:notes"/>
-          <p:cNvSpPr/>
+          <p:cNvSpPr>
+            <a:spLocks noGrp="1" noRot="1" noChangeAspect="1"/>
+          </p:cNvSpPr>
           <p:nvPr>
-            <p:ph idx="2" type="sldImg"/>
+            <p:ph type="sldImg" idx="2"/>
           </p:nvPr>
         </p:nvSpPr>
         <p:spPr>
@@ -2918,9 +3045,13 @@
             <a:ext cx="6096000" cy="3429000"/>
           </a:xfrm>
           <a:custGeom>
-            <a:rect b="b" l="l" r="r" t="t"/>
+            <a:avLst/>
+            <a:gdLst/>
+            <a:ahLst/>
+            <a:cxnLst/>
+            <a:rect l="l" t="t" r="r" b="b"/>
             <a:pathLst>
-              <a:path extrusionOk="0" h="120000" w="120000">
+              <a:path w="120000" h="120000" extrusionOk="0">
                 <a:moveTo>
                   <a:pt x="0" y="0"/>
                 </a:moveTo>
@@ -2942,9 +3073,11 @@
       <p:sp>
         <p:nvSpPr>
           <p:cNvPr id="99" name="Google Shape;99;g39c501ade2c_0_43:notes"/>
-          <p:cNvSpPr txBox="1"/>
+          <p:cNvSpPr txBox="1">
+            <a:spLocks noGrp="1"/>
+          </p:cNvSpPr>
           <p:nvPr>
-            <p:ph idx="1" type="body"/>
+            <p:ph type="body" idx="1"/>
           </p:nvPr>
         </p:nvSpPr>
         <p:spPr>
@@ -2957,23 +3090,20 @@
           </a:prstGeom>
         </p:spPr>
         <p:txBody>
-          <a:bodyPr anchorCtr="0" anchor="t" bIns="91425" lIns="91425" spcFirstLastPara="1" rIns="91425" wrap="square" tIns="91425">
+          <a:bodyPr spcFirstLastPara="1" wrap="square" lIns="91425" tIns="91425" rIns="91425" bIns="91425" anchor="t" anchorCtr="0">
             <a:noAutofit/>
           </a:bodyPr>
           <a:lstStyle/>
           <a:p>
-            <a:pPr indent="0" lvl="0" marL="0" rtl="0" algn="l">
-              <a:spcBef>
-                <a:spcPts val="0"/>
-              </a:spcBef>
-              <a:spcAft>
-                <a:spcPts val="0"/>
-              </a:spcAft>
-              <a:buNone/>
-            </a:pPr>
-            <a:r>
-              <a:t/>
-            </a:r>
+            <a:pPr marL="0" lvl="0" indent="0" algn="l" rtl="0">
+              <a:spcBef>
+                <a:spcPts val="0"/>
+              </a:spcBef>
+              <a:spcAft>
+                <a:spcPts val="0"/>
+              </a:spcAft>
+              <a:buNone/>
+            </a:pPr>
             <a:endParaRPr/>
           </a:p>
         </p:txBody>
@@ -2987,11 +3117,11 @@
 </file>
 
 <file path=ppt/notesSlides/notesSlide9.xml><?xml version="1.0" encoding="utf-8"?>
-<p:notes xmlns:a="http://schemas.openxmlformats.org/drawingml/2006/main" xmlns:r="http://schemas.openxmlformats.org/officeDocument/2006/relationships" xmlns:mc="http://schemas.openxmlformats.org/markup-compatibility/2006" xmlns:mv="urn:schemas-microsoft-com:mac:vml" xmlns:p="http://schemas.openxmlformats.org/presentationml/2006/main" xmlns:c="http://schemas.openxmlformats.org/drawingml/2006/chart" xmlns:dgm="http://schemas.openxmlformats.org/drawingml/2006/diagram" xmlns:o="urn:schemas-microsoft-com:office:office" xmlns:v="urn:schemas-microsoft-com:vml" xmlns:pvml="urn:schemas-microsoft-com:office:powerpoint" xmlns:com="http://schemas.openxmlformats.org/drawingml/2006/compatibility" xmlns:p14="http://schemas.microsoft.com/office/powerpoint/2010/main" xmlns:p15="http://schemas.microsoft.com/office/powerpoint/2012/main" xmlns:ahyp="http://schemas.microsoft.com/office/drawing/2018/hyperlinkcolor" showMasterPhAnim="0" showMasterSp="0">
+<p:notes xmlns:a="http://schemas.openxmlformats.org/drawingml/2006/main" xmlns:r="http://schemas.openxmlformats.org/officeDocument/2006/relationships" xmlns:p="http://schemas.openxmlformats.org/presentationml/2006/main" showMasterSp="0" showMasterPhAnim="0">
   <p:cSld>
     <p:spTree>
       <p:nvGrpSpPr>
-        <p:cNvPr id="103" name="Shape 103"/>
+        <p:cNvPr id="1" name="Shape 103"/>
         <p:cNvGrpSpPr/>
         <p:nvPr/>
       </p:nvGrpSpPr>
@@ -3006,9 +3136,11 @@
       <p:sp>
         <p:nvSpPr>
           <p:cNvPr id="104" name="Google Shape;104;g39c501ade2c_0_49:notes"/>
-          <p:cNvSpPr/>
+          <p:cNvSpPr>
+            <a:spLocks noGrp="1" noRot="1" noChangeAspect="1"/>
+          </p:cNvSpPr>
           <p:nvPr>
-            <p:ph idx="2" type="sldImg"/>
+            <p:ph type="sldImg" idx="2"/>
           </p:nvPr>
         </p:nvSpPr>
         <p:spPr>
@@ -3017,9 +3149,13 @@
             <a:ext cx="6096000" cy="3429000"/>
           </a:xfrm>
           <a:custGeom>
-            <a:rect b="b" l="l" r="r" t="t"/>
+            <a:avLst/>
+            <a:gdLst/>
+            <a:ahLst/>
+            <a:cxnLst/>
+            <a:rect l="l" t="t" r="r" b="b"/>
             <a:pathLst>
-              <a:path extrusionOk="0" h="120000" w="120000">
+              <a:path w="120000" h="120000" extrusionOk="0">
                 <a:moveTo>
                   <a:pt x="0" y="0"/>
                 </a:moveTo>
@@ -3041,9 +3177,11 @@
       <p:sp>
         <p:nvSpPr>
           <p:cNvPr id="105" name="Google Shape;105;g39c501ade2c_0_49:notes"/>
-          <p:cNvSpPr txBox="1"/>
+          <p:cNvSpPr txBox="1">
+            <a:spLocks noGrp="1"/>
+          </p:cNvSpPr>
           <p:nvPr>
-            <p:ph idx="1" type="body"/>
+            <p:ph type="body" idx="1"/>
           </p:nvPr>
         </p:nvSpPr>
         <p:spPr>
@@ -3056,23 +3194,20 @@
           </a:prstGeom>
         </p:spPr>
         <p:txBody>
-          <a:bodyPr anchorCtr="0" anchor="t" bIns="91425" lIns="91425" spcFirstLastPara="1" rIns="91425" wrap="square" tIns="91425">
+          <a:bodyPr spcFirstLastPara="1" wrap="square" lIns="91425" tIns="91425" rIns="91425" bIns="91425" anchor="t" anchorCtr="0">
             <a:noAutofit/>
           </a:bodyPr>
           <a:lstStyle/>
           <a:p>
-            <a:pPr indent="0" lvl="0" marL="0" rtl="0" algn="l">
-              <a:spcBef>
-                <a:spcPts val="0"/>
-              </a:spcBef>
-              <a:spcAft>
-                <a:spcPts val="0"/>
-              </a:spcAft>
-              <a:buNone/>
-            </a:pPr>
-            <a:r>
-              <a:t/>
-            </a:r>
+            <a:pPr marL="0" lvl="0" indent="0" algn="l" rtl="0">
+              <a:spcBef>
+                <a:spcPts val="0"/>
+              </a:spcBef>
+              <a:spcAft>
+                <a:spcPts val="0"/>
+              </a:spcAft>
+              <a:buNone/>
+            </a:pPr>
             <a:endParaRPr/>
           </a:p>
         </p:txBody>
@@ -3086,11 +3221,11 @@
 </file>
 
 <file path=ppt/slideLayouts/slideLayout1.xml><?xml version="1.0" encoding="utf-8"?>
-<p:sldLayout xmlns:a="http://schemas.openxmlformats.org/drawingml/2006/main" xmlns:r="http://schemas.openxmlformats.org/officeDocument/2006/relationships" xmlns:mc="http://schemas.openxmlformats.org/markup-compatibility/2006" xmlns:mv="urn:schemas-microsoft-com:mac:vml" xmlns:p="http://schemas.openxmlformats.org/presentationml/2006/main" xmlns:c="http://schemas.openxmlformats.org/drawingml/2006/chart" xmlns:dgm="http://schemas.openxmlformats.org/drawingml/2006/diagram" xmlns:o="urn:schemas-microsoft-com:office:office" xmlns:v="urn:schemas-microsoft-com:vml" xmlns:pvml="urn:schemas-microsoft-com:office:powerpoint" xmlns:com="http://schemas.openxmlformats.org/drawingml/2006/compatibility" xmlns:p14="http://schemas.microsoft.com/office/powerpoint/2010/main" xmlns:p15="http://schemas.microsoft.com/office/powerpoint/2012/main" xmlns:ahyp="http://schemas.microsoft.com/office/drawing/2018/hyperlinkcolor" matchingName="Title slide" type="title">
+<p:sldLayout xmlns:a="http://schemas.openxmlformats.org/drawingml/2006/main" xmlns:r="http://schemas.openxmlformats.org/officeDocument/2006/relationships" xmlns:p="http://schemas.openxmlformats.org/presentationml/2006/main" matchingName="Title slide" type="title">
   <p:cSld name="TITLE">
     <p:spTree>
       <p:nvGrpSpPr>
-        <p:cNvPr id="9" name="Shape 9"/>
+        <p:cNvPr id="1" name="Shape 9"/>
         <p:cNvGrpSpPr/>
         <p:nvPr/>
       </p:nvGrpSpPr>
@@ -3105,7 +3240,9 @@
       <p:sp>
         <p:nvSpPr>
           <p:cNvPr id="10" name="Google Shape;10;p2"/>
-          <p:cNvSpPr txBox="1"/>
+          <p:cNvSpPr txBox="1">
+            <a:spLocks noGrp="1"/>
+          </p:cNvSpPr>
           <p:nvPr>
             <p:ph type="ctrTitle"/>
           </p:nvPr>
@@ -3120,7 +3257,7 @@
           </a:prstGeom>
         </p:spPr>
         <p:txBody>
-          <a:bodyPr anchorCtr="0" anchor="b" bIns="91425" lIns="91425" spcFirstLastPara="1" rIns="91425" wrap="square" tIns="91425">
+          <a:bodyPr spcFirstLastPara="1" wrap="square" lIns="91425" tIns="91425" rIns="91425" bIns="91425" anchor="b" anchorCtr="0">
             <a:normAutofit/>
           </a:bodyPr>
           <a:lstStyle>
@@ -3224,15 +3361,19 @@
               <a:defRPr sz="5200"/>
             </a:lvl9pPr>
           </a:lstStyle>
-          <a:p/>
+          <a:p>
+            <a:endParaRPr/>
+          </a:p>
         </p:txBody>
       </p:sp>
       <p:sp>
         <p:nvSpPr>
           <p:cNvPr id="11" name="Google Shape;11;p2"/>
-          <p:cNvSpPr txBox="1"/>
+          <p:cNvSpPr txBox="1">
+            <a:spLocks noGrp="1"/>
+          </p:cNvSpPr>
           <p:nvPr>
-            <p:ph idx="1" type="subTitle"/>
+            <p:ph type="subTitle" idx="1"/>
           </p:nvPr>
         </p:nvSpPr>
         <p:spPr>
@@ -3245,7 +3386,7 @@
           </a:prstGeom>
         </p:spPr>
         <p:txBody>
-          <a:bodyPr anchorCtr="0" anchor="t" bIns="91425" lIns="91425" spcFirstLastPara="1" rIns="91425" wrap="square" tIns="91425">
+          <a:bodyPr spcFirstLastPara="1" wrap="square" lIns="91425" tIns="91425" rIns="91425" bIns="91425" anchor="t" anchorCtr="0">
             <a:normAutofit/>
           </a:bodyPr>
           <a:lstStyle>
@@ -3376,15 +3517,19 @@
               <a:defRPr sz="2800"/>
             </a:lvl9pPr>
           </a:lstStyle>
-          <a:p/>
+          <a:p>
+            <a:endParaRPr/>
+          </a:p>
         </p:txBody>
       </p:sp>
       <p:sp>
         <p:nvSpPr>
           <p:cNvPr id="12" name="Google Shape;12;p2"/>
-          <p:cNvSpPr txBox="1"/>
+          <p:cNvSpPr txBox="1">
+            <a:spLocks noGrp="1"/>
+          </p:cNvSpPr>
           <p:nvPr>
-            <p:ph idx="12" type="sldNum"/>
+            <p:ph type="sldNum" idx="12"/>
           </p:nvPr>
         </p:nvSpPr>
         <p:spPr>
@@ -3397,7 +3542,7 @@
           </a:prstGeom>
         </p:spPr>
         <p:txBody>
-          <a:bodyPr anchorCtr="0" anchor="ctr" bIns="91425" lIns="91425" spcFirstLastPara="1" rIns="91425" wrap="square" tIns="91425">
+          <a:bodyPr spcFirstLastPara="1" wrap="square" lIns="91425" tIns="91425" rIns="91425" bIns="91425" anchor="ctr" anchorCtr="0">
             <a:normAutofit/>
           </a:bodyPr>
           <a:lstStyle>
@@ -3439,7 +3584,7 @@
             </a:lvl9pPr>
           </a:lstStyle>
           <a:p>
-            <a:pPr indent="0" lvl="0" marL="0" rtl="0" algn="r">
+            <a:pPr marL="0" lvl="0" indent="0" algn="r" rtl="0">
               <a:spcBef>
                 <a:spcPts val="0"/>
               </a:spcBef>
@@ -3465,11 +3610,11 @@
 </file>
 
 <file path=ppt/slideLayouts/slideLayout10.xml><?xml version="1.0" encoding="utf-8"?>
-<p:sldLayout xmlns:a="http://schemas.openxmlformats.org/drawingml/2006/main" xmlns:r="http://schemas.openxmlformats.org/officeDocument/2006/relationships" xmlns:mc="http://schemas.openxmlformats.org/markup-compatibility/2006" xmlns:mv="urn:schemas-microsoft-com:mac:vml" xmlns:p="http://schemas.openxmlformats.org/presentationml/2006/main" xmlns:c="http://schemas.openxmlformats.org/drawingml/2006/chart" xmlns:dgm="http://schemas.openxmlformats.org/drawingml/2006/diagram" xmlns:o="urn:schemas-microsoft-com:office:office" xmlns:v="urn:schemas-microsoft-com:vml" xmlns:pvml="urn:schemas-microsoft-com:office:powerpoint" xmlns:com="http://schemas.openxmlformats.org/drawingml/2006/compatibility" xmlns:p14="http://schemas.microsoft.com/office/powerpoint/2010/main" xmlns:p15="http://schemas.microsoft.com/office/powerpoint/2012/main" xmlns:ahyp="http://schemas.microsoft.com/office/drawing/2018/hyperlinkcolor" matchingName="Big number">
+<p:sldLayout xmlns:a="http://schemas.openxmlformats.org/drawingml/2006/main" xmlns:r="http://schemas.openxmlformats.org/officeDocument/2006/relationships" xmlns:p="http://schemas.openxmlformats.org/presentationml/2006/main" matchingName="Big number">
   <p:cSld name="BIG_NUMBER">
     <p:spTree>
       <p:nvGrpSpPr>
-        <p:cNvPr id="44" name="Shape 44"/>
+        <p:cNvPr id="1" name="Shape 44"/>
         <p:cNvGrpSpPr/>
         <p:nvPr/>
       </p:nvGrpSpPr>
@@ -3484,9 +3629,11 @@
       <p:sp>
         <p:nvSpPr>
           <p:cNvPr id="45" name="Google Shape;45;p11"/>
-          <p:cNvSpPr txBox="1"/>
+          <p:cNvSpPr txBox="1">
+            <a:spLocks noGrp="1"/>
+          </p:cNvSpPr>
           <p:nvPr>
-            <p:ph hasCustomPrompt="1" type="title"/>
+            <p:ph type="title" hasCustomPrompt="1"/>
           </p:nvPr>
         </p:nvSpPr>
         <p:spPr>
@@ -3499,7 +3646,7 @@
           </a:prstGeom>
         </p:spPr>
         <p:txBody>
-          <a:bodyPr anchorCtr="0" anchor="b" bIns="91425" lIns="91425" spcFirstLastPara="1" rIns="91425" wrap="square" tIns="91425">
+          <a:bodyPr spcFirstLastPara="1" wrap="square" lIns="91425" tIns="91425" rIns="91425" bIns="91425" anchor="b" anchorCtr="0">
             <a:normAutofit/>
           </a:bodyPr>
           <a:lstStyle>
@@ -3613,9 +3760,11 @@
       <p:sp>
         <p:nvSpPr>
           <p:cNvPr id="46" name="Google Shape;46;p11"/>
-          <p:cNvSpPr txBox="1"/>
+          <p:cNvSpPr txBox="1">
+            <a:spLocks noGrp="1"/>
+          </p:cNvSpPr>
           <p:nvPr>
-            <p:ph idx="1" type="body"/>
+            <p:ph type="body" idx="1"/>
           </p:nvPr>
         </p:nvSpPr>
         <p:spPr>
@@ -3628,11 +3777,11 @@
           </a:prstGeom>
         </p:spPr>
         <p:txBody>
-          <a:bodyPr anchorCtr="0" anchor="t" bIns="91425" lIns="91425" spcFirstLastPara="1" rIns="91425" wrap="square" tIns="91425">
+          <a:bodyPr spcFirstLastPara="1" wrap="square" lIns="91425" tIns="91425" rIns="91425" bIns="91425" anchor="t" anchorCtr="0">
             <a:normAutofit/>
           </a:bodyPr>
           <a:lstStyle>
-            <a:lvl1pPr indent="-342900" lvl="0" marL="457200" algn="ctr">
+            <a:lvl1pPr marL="457200" lvl="0" indent="-342900" algn="ctr">
               <a:spcBef>
                 <a:spcPts val="0"/>
               </a:spcBef>
@@ -3643,7 +3792,7 @@
               <a:buChar char="●"/>
               <a:defRPr/>
             </a:lvl1pPr>
-            <a:lvl2pPr indent="-317500" lvl="1" marL="914400" algn="ctr">
+            <a:lvl2pPr marL="914400" lvl="1" indent="-317500" algn="ctr">
               <a:spcBef>
                 <a:spcPts val="0"/>
               </a:spcBef>
@@ -3654,7 +3803,7 @@
               <a:buChar char="○"/>
               <a:defRPr/>
             </a:lvl2pPr>
-            <a:lvl3pPr indent="-317500" lvl="2" marL="1371600" algn="ctr">
+            <a:lvl3pPr marL="1371600" lvl="2" indent="-317500" algn="ctr">
               <a:spcBef>
                 <a:spcPts val="0"/>
               </a:spcBef>
@@ -3665,7 +3814,7 @@
               <a:buChar char="■"/>
               <a:defRPr/>
             </a:lvl3pPr>
-            <a:lvl4pPr indent="-317500" lvl="3" marL="1828800" algn="ctr">
+            <a:lvl4pPr marL="1828800" lvl="3" indent="-317500" algn="ctr">
               <a:spcBef>
                 <a:spcPts val="0"/>
               </a:spcBef>
@@ -3676,7 +3825,7 @@
               <a:buChar char="●"/>
               <a:defRPr/>
             </a:lvl4pPr>
-            <a:lvl5pPr indent="-317500" lvl="4" marL="2286000" algn="ctr">
+            <a:lvl5pPr marL="2286000" lvl="4" indent="-317500" algn="ctr">
               <a:spcBef>
                 <a:spcPts val="0"/>
               </a:spcBef>
@@ -3687,7 +3836,7 @@
               <a:buChar char="○"/>
               <a:defRPr/>
             </a:lvl5pPr>
-            <a:lvl6pPr indent="-317500" lvl="5" marL="2743200" algn="ctr">
+            <a:lvl6pPr marL="2743200" lvl="5" indent="-317500" algn="ctr">
               <a:spcBef>
                 <a:spcPts val="0"/>
               </a:spcBef>
@@ -3698,7 +3847,7 @@
               <a:buChar char="■"/>
               <a:defRPr/>
             </a:lvl6pPr>
-            <a:lvl7pPr indent="-317500" lvl="6" marL="3200400" algn="ctr">
+            <a:lvl7pPr marL="3200400" lvl="6" indent="-317500" algn="ctr">
               <a:spcBef>
                 <a:spcPts val="0"/>
               </a:spcBef>
@@ -3709,7 +3858,7 @@
               <a:buChar char="●"/>
               <a:defRPr/>
             </a:lvl7pPr>
-            <a:lvl8pPr indent="-317500" lvl="7" marL="3657600" algn="ctr">
+            <a:lvl8pPr marL="3657600" lvl="7" indent="-317500" algn="ctr">
               <a:spcBef>
                 <a:spcPts val="0"/>
               </a:spcBef>
@@ -3720,7 +3869,7 @@
               <a:buChar char="○"/>
               <a:defRPr/>
             </a:lvl8pPr>
-            <a:lvl9pPr indent="-317500" lvl="8" marL="4114800" algn="ctr">
+            <a:lvl9pPr marL="4114800" lvl="8" indent="-317500" algn="ctr">
               <a:spcBef>
                 <a:spcPts val="0"/>
               </a:spcBef>
@@ -3732,15 +3881,19 @@
               <a:defRPr/>
             </a:lvl9pPr>
           </a:lstStyle>
-          <a:p/>
+          <a:p>
+            <a:endParaRPr/>
+          </a:p>
         </p:txBody>
       </p:sp>
       <p:sp>
         <p:nvSpPr>
           <p:cNvPr id="47" name="Google Shape;47;p11"/>
-          <p:cNvSpPr txBox="1"/>
+          <p:cNvSpPr txBox="1">
+            <a:spLocks noGrp="1"/>
+          </p:cNvSpPr>
           <p:nvPr>
-            <p:ph idx="12" type="sldNum"/>
+            <p:ph type="sldNum" idx="12"/>
           </p:nvPr>
         </p:nvSpPr>
         <p:spPr>
@@ -3753,7 +3906,7 @@
           </a:prstGeom>
         </p:spPr>
         <p:txBody>
-          <a:bodyPr anchorCtr="0" anchor="ctr" bIns="91425" lIns="91425" spcFirstLastPara="1" rIns="91425" wrap="square" tIns="91425">
+          <a:bodyPr spcFirstLastPara="1" wrap="square" lIns="91425" tIns="91425" rIns="91425" bIns="91425" anchor="ctr" anchorCtr="0">
             <a:normAutofit/>
           </a:bodyPr>
           <a:lstStyle>
@@ -3795,7 +3948,7 @@
             </a:lvl9pPr>
           </a:lstStyle>
           <a:p>
-            <a:pPr indent="0" lvl="0" marL="0" rtl="0" algn="r">
+            <a:pPr marL="0" lvl="0" indent="0" algn="r" rtl="0">
               <a:spcBef>
                 <a:spcPts val="0"/>
               </a:spcBef>
@@ -3821,11 +3974,11 @@
 </file>
 
 <file path=ppt/slideLayouts/slideLayout11.xml><?xml version="1.0" encoding="utf-8"?>
-<p:sldLayout xmlns:a="http://schemas.openxmlformats.org/drawingml/2006/main" xmlns:r="http://schemas.openxmlformats.org/officeDocument/2006/relationships" xmlns:mc="http://schemas.openxmlformats.org/markup-compatibility/2006" xmlns:mv="urn:schemas-microsoft-com:mac:vml" xmlns:p="http://schemas.openxmlformats.org/presentationml/2006/main" xmlns:c="http://schemas.openxmlformats.org/drawingml/2006/chart" xmlns:dgm="http://schemas.openxmlformats.org/drawingml/2006/diagram" xmlns:o="urn:schemas-microsoft-com:office:office" xmlns:v="urn:schemas-microsoft-com:vml" xmlns:pvml="urn:schemas-microsoft-com:office:powerpoint" xmlns:com="http://schemas.openxmlformats.org/drawingml/2006/compatibility" xmlns:p14="http://schemas.microsoft.com/office/powerpoint/2010/main" xmlns:p15="http://schemas.microsoft.com/office/powerpoint/2012/main" xmlns:ahyp="http://schemas.microsoft.com/office/drawing/2018/hyperlinkcolor" matchingName="Blank" type="blank">
+<p:sldLayout xmlns:a="http://schemas.openxmlformats.org/drawingml/2006/main" xmlns:r="http://schemas.openxmlformats.org/officeDocument/2006/relationships" xmlns:p="http://schemas.openxmlformats.org/presentationml/2006/main" matchingName="Blank" type="blank">
   <p:cSld name="BLANK">
     <p:spTree>
       <p:nvGrpSpPr>
-        <p:cNvPr id="48" name="Shape 48"/>
+        <p:cNvPr id="1" name="Shape 48"/>
         <p:cNvGrpSpPr/>
         <p:nvPr/>
       </p:nvGrpSpPr>
@@ -3840,9 +3993,11 @@
       <p:sp>
         <p:nvSpPr>
           <p:cNvPr id="49" name="Google Shape;49;p12"/>
-          <p:cNvSpPr txBox="1"/>
+          <p:cNvSpPr txBox="1">
+            <a:spLocks noGrp="1"/>
+          </p:cNvSpPr>
           <p:nvPr>
-            <p:ph idx="12" type="sldNum"/>
+            <p:ph type="sldNum" idx="12"/>
           </p:nvPr>
         </p:nvSpPr>
         <p:spPr>
@@ -3855,7 +4010,7 @@
           </a:prstGeom>
         </p:spPr>
         <p:txBody>
-          <a:bodyPr anchorCtr="0" anchor="ctr" bIns="91425" lIns="91425" spcFirstLastPara="1" rIns="91425" wrap="square" tIns="91425">
+          <a:bodyPr spcFirstLastPara="1" wrap="square" lIns="91425" tIns="91425" rIns="91425" bIns="91425" anchor="ctr" anchorCtr="0">
             <a:normAutofit/>
           </a:bodyPr>
           <a:lstStyle>
@@ -3897,7 +4052,7 @@
             </a:lvl9pPr>
           </a:lstStyle>
           <a:p>
-            <a:pPr indent="0" lvl="0" marL="0" rtl="0" algn="r">
+            <a:pPr marL="0" lvl="0" indent="0" algn="r" rtl="0">
               <a:spcBef>
                 <a:spcPts val="0"/>
               </a:spcBef>
@@ -3923,11 +4078,11 @@
 </file>
 
 <file path=ppt/slideLayouts/slideLayout2.xml><?xml version="1.0" encoding="utf-8"?>
-<p:sldLayout xmlns:a="http://schemas.openxmlformats.org/drawingml/2006/main" xmlns:r="http://schemas.openxmlformats.org/officeDocument/2006/relationships" xmlns:mc="http://schemas.openxmlformats.org/markup-compatibility/2006" xmlns:mv="urn:schemas-microsoft-com:mac:vml" xmlns:p="http://schemas.openxmlformats.org/presentationml/2006/main" xmlns:c="http://schemas.openxmlformats.org/drawingml/2006/chart" xmlns:dgm="http://schemas.openxmlformats.org/drawingml/2006/diagram" xmlns:o="urn:schemas-microsoft-com:office:office" xmlns:v="urn:schemas-microsoft-com:vml" xmlns:pvml="urn:schemas-microsoft-com:office:powerpoint" xmlns:com="http://schemas.openxmlformats.org/drawingml/2006/compatibility" xmlns:p14="http://schemas.microsoft.com/office/powerpoint/2010/main" xmlns:p15="http://schemas.microsoft.com/office/powerpoint/2012/main" xmlns:ahyp="http://schemas.microsoft.com/office/drawing/2018/hyperlinkcolor" matchingName="Section header" type="secHead">
+<p:sldLayout xmlns:a="http://schemas.openxmlformats.org/drawingml/2006/main" xmlns:r="http://schemas.openxmlformats.org/officeDocument/2006/relationships" xmlns:p="http://schemas.openxmlformats.org/presentationml/2006/main" matchingName="Section header" type="secHead">
   <p:cSld name="SECTION_HEADER">
     <p:spTree>
       <p:nvGrpSpPr>
-        <p:cNvPr id="13" name="Shape 13"/>
+        <p:cNvPr id="1" name="Shape 13"/>
         <p:cNvGrpSpPr/>
         <p:nvPr/>
       </p:nvGrpSpPr>
@@ -3942,7 +4097,9 @@
       <p:sp>
         <p:nvSpPr>
           <p:cNvPr id="14" name="Google Shape;14;p3"/>
-          <p:cNvSpPr txBox="1"/>
+          <p:cNvSpPr txBox="1">
+            <a:spLocks noGrp="1"/>
+          </p:cNvSpPr>
           <p:nvPr>
             <p:ph type="title"/>
           </p:nvPr>
@@ -3957,7 +4114,7 @@
           </a:prstGeom>
         </p:spPr>
         <p:txBody>
-          <a:bodyPr anchorCtr="0" anchor="ctr" bIns="91425" lIns="91425" spcFirstLastPara="1" rIns="91425" wrap="square" tIns="91425">
+          <a:bodyPr spcFirstLastPara="1" wrap="square" lIns="91425" tIns="91425" rIns="91425" bIns="91425" anchor="ctr" anchorCtr="0">
             <a:normAutofit/>
           </a:bodyPr>
           <a:lstStyle>
@@ -4061,15 +4218,19 @@
               <a:defRPr sz="3600"/>
             </a:lvl9pPr>
           </a:lstStyle>
-          <a:p/>
+          <a:p>
+            <a:endParaRPr/>
+          </a:p>
         </p:txBody>
       </p:sp>
       <p:sp>
         <p:nvSpPr>
           <p:cNvPr id="15" name="Google Shape;15;p3"/>
-          <p:cNvSpPr txBox="1"/>
+          <p:cNvSpPr txBox="1">
+            <a:spLocks noGrp="1"/>
+          </p:cNvSpPr>
           <p:nvPr>
-            <p:ph idx="12" type="sldNum"/>
+            <p:ph type="sldNum" idx="12"/>
           </p:nvPr>
         </p:nvSpPr>
         <p:spPr>
@@ -4082,7 +4243,7 @@
           </a:prstGeom>
         </p:spPr>
         <p:txBody>
-          <a:bodyPr anchorCtr="0" anchor="ctr" bIns="91425" lIns="91425" spcFirstLastPara="1" rIns="91425" wrap="square" tIns="91425">
+          <a:bodyPr spcFirstLastPara="1" wrap="square" lIns="91425" tIns="91425" rIns="91425" bIns="91425" anchor="ctr" anchorCtr="0">
             <a:normAutofit/>
           </a:bodyPr>
           <a:lstStyle>
@@ -4124,7 +4285,7 @@
             </a:lvl9pPr>
           </a:lstStyle>
           <a:p>
-            <a:pPr indent="0" lvl="0" marL="0" rtl="0" algn="r">
+            <a:pPr marL="0" lvl="0" indent="0" algn="r" rtl="0">
               <a:spcBef>
                 <a:spcPts val="0"/>
               </a:spcBef>
@@ -4150,11 +4311,11 @@
 </file>
 
 <file path=ppt/slideLayouts/slideLayout3.xml><?xml version="1.0" encoding="utf-8"?>
-<p:sldLayout xmlns:a="http://schemas.openxmlformats.org/drawingml/2006/main" xmlns:r="http://schemas.openxmlformats.org/officeDocument/2006/relationships" xmlns:mc="http://schemas.openxmlformats.org/markup-compatibility/2006" xmlns:mv="urn:schemas-microsoft-com:mac:vml" xmlns:p="http://schemas.openxmlformats.org/presentationml/2006/main" xmlns:c="http://schemas.openxmlformats.org/drawingml/2006/chart" xmlns:dgm="http://schemas.openxmlformats.org/drawingml/2006/diagram" xmlns:o="urn:schemas-microsoft-com:office:office" xmlns:v="urn:schemas-microsoft-com:vml" xmlns:pvml="urn:schemas-microsoft-com:office:powerpoint" xmlns:com="http://schemas.openxmlformats.org/drawingml/2006/compatibility" xmlns:p14="http://schemas.microsoft.com/office/powerpoint/2010/main" xmlns:p15="http://schemas.microsoft.com/office/powerpoint/2012/main" xmlns:ahyp="http://schemas.microsoft.com/office/drawing/2018/hyperlinkcolor" matchingName="Title and body" type="tx">
+<p:sldLayout xmlns:a="http://schemas.openxmlformats.org/drawingml/2006/main" xmlns:r="http://schemas.openxmlformats.org/officeDocument/2006/relationships" xmlns:p="http://schemas.openxmlformats.org/presentationml/2006/main" matchingName="Title and body" type="tx">
   <p:cSld name="TITLE_AND_BODY">
     <p:spTree>
       <p:nvGrpSpPr>
-        <p:cNvPr id="16" name="Shape 16"/>
+        <p:cNvPr id="1" name="Shape 16"/>
         <p:cNvGrpSpPr/>
         <p:nvPr/>
       </p:nvGrpSpPr>
@@ -4169,7 +4330,9 @@
       <p:sp>
         <p:nvSpPr>
           <p:cNvPr id="17" name="Google Shape;17;p4"/>
-          <p:cNvSpPr txBox="1"/>
+          <p:cNvSpPr txBox="1">
+            <a:spLocks noGrp="1"/>
+          </p:cNvSpPr>
           <p:nvPr>
             <p:ph type="title"/>
           </p:nvPr>
@@ -4184,7 +4347,7 @@
           </a:prstGeom>
         </p:spPr>
         <p:txBody>
-          <a:bodyPr anchorCtr="0" anchor="t" bIns="91425" lIns="91425" spcFirstLastPara="1" rIns="91425" wrap="square" tIns="91425">
+          <a:bodyPr spcFirstLastPara="1" wrap="square" lIns="91425" tIns="91425" rIns="91425" bIns="91425" anchor="t" anchorCtr="0">
             <a:normAutofit/>
           </a:bodyPr>
           <a:lstStyle>
@@ -4288,15 +4451,19 @@
               <a:defRPr/>
             </a:lvl9pPr>
           </a:lstStyle>
-          <a:p/>
+          <a:p>
+            <a:endParaRPr/>
+          </a:p>
         </p:txBody>
       </p:sp>
       <p:sp>
         <p:nvSpPr>
           <p:cNvPr id="18" name="Google Shape;18;p4"/>
-          <p:cNvSpPr txBox="1"/>
+          <p:cNvSpPr txBox="1">
+            <a:spLocks noGrp="1"/>
+          </p:cNvSpPr>
           <p:nvPr>
-            <p:ph idx="1" type="body"/>
+            <p:ph type="body" idx="1"/>
           </p:nvPr>
         </p:nvSpPr>
         <p:spPr>
@@ -4309,11 +4476,11 @@
           </a:prstGeom>
         </p:spPr>
         <p:txBody>
-          <a:bodyPr anchorCtr="0" anchor="t" bIns="91425" lIns="91425" spcFirstLastPara="1" rIns="91425" wrap="square" tIns="91425">
+          <a:bodyPr spcFirstLastPara="1" wrap="square" lIns="91425" tIns="91425" rIns="91425" bIns="91425" anchor="t" anchorCtr="0">
             <a:normAutofit/>
           </a:bodyPr>
           <a:lstStyle>
-            <a:lvl1pPr indent="-342900" lvl="0" marL="457200">
+            <a:lvl1pPr marL="457200" lvl="0" indent="-342900">
               <a:spcBef>
                 <a:spcPts val="0"/>
               </a:spcBef>
@@ -4324,7 +4491,7 @@
               <a:buChar char="●"/>
               <a:defRPr/>
             </a:lvl1pPr>
-            <a:lvl2pPr indent="-317500" lvl="1" marL="914400">
+            <a:lvl2pPr marL="914400" lvl="1" indent="-317500">
               <a:spcBef>
                 <a:spcPts val="0"/>
               </a:spcBef>
@@ -4335,7 +4502,7 @@
               <a:buChar char="○"/>
               <a:defRPr/>
             </a:lvl2pPr>
-            <a:lvl3pPr indent="-317500" lvl="2" marL="1371600">
+            <a:lvl3pPr marL="1371600" lvl="2" indent="-317500">
               <a:spcBef>
                 <a:spcPts val="0"/>
               </a:spcBef>
@@ -4346,7 +4513,7 @@
               <a:buChar char="■"/>
               <a:defRPr/>
             </a:lvl3pPr>
-            <a:lvl4pPr indent="-317500" lvl="3" marL="1828800">
+            <a:lvl4pPr marL="1828800" lvl="3" indent="-317500">
               <a:spcBef>
                 <a:spcPts val="0"/>
               </a:spcBef>
@@ -4357,7 +4524,7 @@
               <a:buChar char="●"/>
               <a:defRPr/>
             </a:lvl4pPr>
-            <a:lvl5pPr indent="-317500" lvl="4" marL="2286000">
+            <a:lvl5pPr marL="2286000" lvl="4" indent="-317500">
               <a:spcBef>
                 <a:spcPts val="0"/>
               </a:spcBef>
@@ -4368,7 +4535,7 @@
               <a:buChar char="○"/>
               <a:defRPr/>
             </a:lvl5pPr>
-            <a:lvl6pPr indent="-317500" lvl="5" marL="2743200">
+            <a:lvl6pPr marL="2743200" lvl="5" indent="-317500">
               <a:spcBef>
                 <a:spcPts val="0"/>
               </a:spcBef>
@@ -4379,7 +4546,7 @@
               <a:buChar char="■"/>
               <a:defRPr/>
             </a:lvl6pPr>
-            <a:lvl7pPr indent="-317500" lvl="6" marL="3200400">
+            <a:lvl7pPr marL="3200400" lvl="6" indent="-317500">
               <a:spcBef>
                 <a:spcPts val="0"/>
               </a:spcBef>
@@ -4390,7 +4557,7 @@
               <a:buChar char="●"/>
               <a:defRPr/>
             </a:lvl7pPr>
-            <a:lvl8pPr indent="-317500" lvl="7" marL="3657600">
+            <a:lvl8pPr marL="3657600" lvl="7" indent="-317500">
               <a:spcBef>
                 <a:spcPts val="0"/>
               </a:spcBef>
@@ -4401,7 +4568,7 @@
               <a:buChar char="○"/>
               <a:defRPr/>
             </a:lvl8pPr>
-            <a:lvl9pPr indent="-317500" lvl="8" marL="4114800">
+            <a:lvl9pPr marL="4114800" lvl="8" indent="-317500">
               <a:spcBef>
                 <a:spcPts val="0"/>
               </a:spcBef>
@@ -4413,15 +4580,19 @@
               <a:defRPr/>
             </a:lvl9pPr>
           </a:lstStyle>
-          <a:p/>
+          <a:p>
+            <a:endParaRPr/>
+          </a:p>
         </p:txBody>
       </p:sp>
       <p:sp>
         <p:nvSpPr>
           <p:cNvPr id="19" name="Google Shape;19;p4"/>
-          <p:cNvSpPr txBox="1"/>
+          <p:cNvSpPr txBox="1">
+            <a:spLocks noGrp="1"/>
+          </p:cNvSpPr>
           <p:nvPr>
-            <p:ph idx="12" type="sldNum"/>
+            <p:ph type="sldNum" idx="12"/>
           </p:nvPr>
         </p:nvSpPr>
         <p:spPr>
@@ -4434,7 +4605,7 @@
           </a:prstGeom>
         </p:spPr>
         <p:txBody>
-          <a:bodyPr anchorCtr="0" anchor="ctr" bIns="91425" lIns="91425" spcFirstLastPara="1" rIns="91425" wrap="square" tIns="91425">
+          <a:bodyPr spcFirstLastPara="1" wrap="square" lIns="91425" tIns="91425" rIns="91425" bIns="91425" anchor="ctr" anchorCtr="0">
             <a:normAutofit/>
           </a:bodyPr>
           <a:lstStyle>
@@ -4476,7 +4647,7 @@
             </a:lvl9pPr>
           </a:lstStyle>
           <a:p>
-            <a:pPr indent="0" lvl="0" marL="0" rtl="0" algn="r">
+            <a:pPr marL="0" lvl="0" indent="0" algn="r" rtl="0">
               <a:spcBef>
                 <a:spcPts val="0"/>
               </a:spcBef>
@@ -4502,11 +4673,11 @@
 </file>
 
 <file path=ppt/slideLayouts/slideLayout4.xml><?xml version="1.0" encoding="utf-8"?>
-<p:sldLayout xmlns:a="http://schemas.openxmlformats.org/drawingml/2006/main" xmlns:r="http://schemas.openxmlformats.org/officeDocument/2006/relationships" xmlns:mc="http://schemas.openxmlformats.org/markup-compatibility/2006" xmlns:mv="urn:schemas-microsoft-com:mac:vml" xmlns:p="http://schemas.openxmlformats.org/presentationml/2006/main" xmlns:c="http://schemas.openxmlformats.org/drawingml/2006/chart" xmlns:dgm="http://schemas.openxmlformats.org/drawingml/2006/diagram" xmlns:o="urn:schemas-microsoft-com:office:office" xmlns:v="urn:schemas-microsoft-com:vml" xmlns:pvml="urn:schemas-microsoft-com:office:powerpoint" xmlns:com="http://schemas.openxmlformats.org/drawingml/2006/compatibility" xmlns:p14="http://schemas.microsoft.com/office/powerpoint/2010/main" xmlns:p15="http://schemas.microsoft.com/office/powerpoint/2012/main" xmlns:ahyp="http://schemas.microsoft.com/office/drawing/2018/hyperlinkcolor" matchingName="Title and two columns" type="twoColTx">
+<p:sldLayout xmlns:a="http://schemas.openxmlformats.org/drawingml/2006/main" xmlns:r="http://schemas.openxmlformats.org/officeDocument/2006/relationships" xmlns:p="http://schemas.openxmlformats.org/presentationml/2006/main" matchingName="Title and two columns" type="twoColTx">
   <p:cSld name="TITLE_AND_TWO_COLUMNS">
     <p:spTree>
       <p:nvGrpSpPr>
-        <p:cNvPr id="20" name="Shape 20"/>
+        <p:cNvPr id="1" name="Shape 20"/>
         <p:cNvGrpSpPr/>
         <p:nvPr/>
       </p:nvGrpSpPr>
@@ -4521,7 +4692,9 @@
       <p:sp>
         <p:nvSpPr>
           <p:cNvPr id="21" name="Google Shape;21;p5"/>
-          <p:cNvSpPr txBox="1"/>
+          <p:cNvSpPr txBox="1">
+            <a:spLocks noGrp="1"/>
+          </p:cNvSpPr>
           <p:nvPr>
             <p:ph type="title"/>
           </p:nvPr>
@@ -4536,7 +4709,7 @@
           </a:prstGeom>
         </p:spPr>
         <p:txBody>
-          <a:bodyPr anchorCtr="0" anchor="t" bIns="91425" lIns="91425" spcFirstLastPara="1" rIns="91425" wrap="square" tIns="91425">
+          <a:bodyPr spcFirstLastPara="1" wrap="square" lIns="91425" tIns="91425" rIns="91425" bIns="91425" anchor="t" anchorCtr="0">
             <a:normAutofit/>
           </a:bodyPr>
           <a:lstStyle>
@@ -4640,15 +4813,19 @@
               <a:defRPr/>
             </a:lvl9pPr>
           </a:lstStyle>
-          <a:p/>
+          <a:p>
+            <a:endParaRPr/>
+          </a:p>
         </p:txBody>
       </p:sp>
       <p:sp>
         <p:nvSpPr>
           <p:cNvPr id="22" name="Google Shape;22;p5"/>
-          <p:cNvSpPr txBox="1"/>
+          <p:cNvSpPr txBox="1">
+            <a:spLocks noGrp="1"/>
+          </p:cNvSpPr>
           <p:nvPr>
-            <p:ph idx="1" type="body"/>
+            <p:ph type="body" idx="1"/>
           </p:nvPr>
         </p:nvSpPr>
         <p:spPr>
@@ -4661,11 +4838,11 @@
           </a:prstGeom>
         </p:spPr>
         <p:txBody>
-          <a:bodyPr anchorCtr="0" anchor="t" bIns="91425" lIns="91425" spcFirstLastPara="1" rIns="91425" wrap="square" tIns="91425">
+          <a:bodyPr spcFirstLastPara="1" wrap="square" lIns="91425" tIns="91425" rIns="91425" bIns="91425" anchor="t" anchorCtr="0">
             <a:normAutofit/>
           </a:bodyPr>
           <a:lstStyle>
-            <a:lvl1pPr indent="-317500" lvl="0" marL="457200">
+            <a:lvl1pPr marL="457200" lvl="0" indent="-317500">
               <a:spcBef>
                 <a:spcPts val="0"/>
               </a:spcBef>
@@ -4676,7 +4853,7 @@
               <a:buChar char="●"/>
               <a:defRPr sz="1400"/>
             </a:lvl1pPr>
-            <a:lvl2pPr indent="-304800" lvl="1" marL="914400">
+            <a:lvl2pPr marL="914400" lvl="1" indent="-304800">
               <a:spcBef>
                 <a:spcPts val="0"/>
               </a:spcBef>
@@ -4687,7 +4864,7 @@
               <a:buChar char="○"/>
               <a:defRPr sz="1200"/>
             </a:lvl2pPr>
-            <a:lvl3pPr indent="-304800" lvl="2" marL="1371600">
+            <a:lvl3pPr marL="1371600" lvl="2" indent="-304800">
               <a:spcBef>
                 <a:spcPts val="0"/>
               </a:spcBef>
@@ -4698,7 +4875,7 @@
               <a:buChar char="■"/>
               <a:defRPr sz="1200"/>
             </a:lvl3pPr>
-            <a:lvl4pPr indent="-304800" lvl="3" marL="1828800">
+            <a:lvl4pPr marL="1828800" lvl="3" indent="-304800">
               <a:spcBef>
                 <a:spcPts val="0"/>
               </a:spcBef>
@@ -4709,7 +4886,7 @@
               <a:buChar char="●"/>
               <a:defRPr sz="1200"/>
             </a:lvl4pPr>
-            <a:lvl5pPr indent="-304800" lvl="4" marL="2286000">
+            <a:lvl5pPr marL="2286000" lvl="4" indent="-304800">
               <a:spcBef>
                 <a:spcPts val="0"/>
               </a:spcBef>
@@ -4720,7 +4897,7 @@
               <a:buChar char="○"/>
               <a:defRPr sz="1200"/>
             </a:lvl5pPr>
-            <a:lvl6pPr indent="-304800" lvl="5" marL="2743200">
+            <a:lvl6pPr marL="2743200" lvl="5" indent="-304800">
               <a:spcBef>
                 <a:spcPts val="0"/>
               </a:spcBef>
@@ -4731,7 +4908,7 @@
               <a:buChar char="■"/>
               <a:defRPr sz="1200"/>
             </a:lvl6pPr>
-            <a:lvl7pPr indent="-304800" lvl="6" marL="3200400">
+            <a:lvl7pPr marL="3200400" lvl="6" indent="-304800">
               <a:spcBef>
                 <a:spcPts val="0"/>
               </a:spcBef>
@@ -4742,7 +4919,7 @@
               <a:buChar char="●"/>
               <a:defRPr sz="1200"/>
             </a:lvl7pPr>
-            <a:lvl8pPr indent="-304800" lvl="7" marL="3657600">
+            <a:lvl8pPr marL="3657600" lvl="7" indent="-304800">
               <a:spcBef>
                 <a:spcPts val="0"/>
               </a:spcBef>
@@ -4753,7 +4930,7 @@
               <a:buChar char="○"/>
               <a:defRPr sz="1200"/>
             </a:lvl8pPr>
-            <a:lvl9pPr indent="-304800" lvl="8" marL="4114800">
+            <a:lvl9pPr marL="4114800" lvl="8" indent="-304800">
               <a:spcBef>
                 <a:spcPts val="0"/>
               </a:spcBef>
@@ -4765,15 +4942,19 @@
               <a:defRPr sz="1200"/>
             </a:lvl9pPr>
           </a:lstStyle>
-          <a:p/>
+          <a:p>
+            <a:endParaRPr/>
+          </a:p>
         </p:txBody>
       </p:sp>
       <p:sp>
         <p:nvSpPr>
           <p:cNvPr id="23" name="Google Shape;23;p5"/>
-          <p:cNvSpPr txBox="1"/>
+          <p:cNvSpPr txBox="1">
+            <a:spLocks noGrp="1"/>
+          </p:cNvSpPr>
           <p:nvPr>
-            <p:ph idx="2" type="body"/>
+            <p:ph type="body" idx="2"/>
           </p:nvPr>
         </p:nvSpPr>
         <p:spPr>
@@ -4786,11 +4967,11 @@
           </a:prstGeom>
         </p:spPr>
         <p:txBody>
-          <a:bodyPr anchorCtr="0" anchor="t" bIns="91425" lIns="91425" spcFirstLastPara="1" rIns="91425" wrap="square" tIns="91425">
+          <a:bodyPr spcFirstLastPara="1" wrap="square" lIns="91425" tIns="91425" rIns="91425" bIns="91425" anchor="t" anchorCtr="0">
             <a:normAutofit/>
           </a:bodyPr>
           <a:lstStyle>
-            <a:lvl1pPr indent="-317500" lvl="0" marL="457200">
+            <a:lvl1pPr marL="457200" lvl="0" indent="-317500">
               <a:spcBef>
                 <a:spcPts val="0"/>
               </a:spcBef>
@@ -4801,7 +4982,7 @@
               <a:buChar char="●"/>
               <a:defRPr sz="1400"/>
             </a:lvl1pPr>
-            <a:lvl2pPr indent="-304800" lvl="1" marL="914400">
+            <a:lvl2pPr marL="914400" lvl="1" indent="-304800">
               <a:spcBef>
                 <a:spcPts val="0"/>
               </a:spcBef>
@@ -4812,7 +4993,7 @@
               <a:buChar char="○"/>
               <a:defRPr sz="1200"/>
             </a:lvl2pPr>
-            <a:lvl3pPr indent="-304800" lvl="2" marL="1371600">
+            <a:lvl3pPr marL="1371600" lvl="2" indent="-304800">
               <a:spcBef>
                 <a:spcPts val="0"/>
               </a:spcBef>
@@ -4823,7 +5004,7 @@
               <a:buChar char="■"/>
               <a:defRPr sz="1200"/>
             </a:lvl3pPr>
-            <a:lvl4pPr indent="-304800" lvl="3" marL="1828800">
+            <a:lvl4pPr marL="1828800" lvl="3" indent="-304800">
               <a:spcBef>
                 <a:spcPts val="0"/>
               </a:spcBef>
@@ -4834,7 +5015,7 @@
               <a:buChar char="●"/>
               <a:defRPr sz="1200"/>
             </a:lvl4pPr>
-            <a:lvl5pPr indent="-304800" lvl="4" marL="2286000">
+            <a:lvl5pPr marL="2286000" lvl="4" indent="-304800">
               <a:spcBef>
                 <a:spcPts val="0"/>
               </a:spcBef>
@@ -4845,7 +5026,7 @@
               <a:buChar char="○"/>
               <a:defRPr sz="1200"/>
             </a:lvl5pPr>
-            <a:lvl6pPr indent="-304800" lvl="5" marL="2743200">
+            <a:lvl6pPr marL="2743200" lvl="5" indent="-304800">
               <a:spcBef>
                 <a:spcPts val="0"/>
               </a:spcBef>
@@ -4856,7 +5037,7 @@
               <a:buChar char="■"/>
               <a:defRPr sz="1200"/>
             </a:lvl6pPr>
-            <a:lvl7pPr indent="-304800" lvl="6" marL="3200400">
+            <a:lvl7pPr marL="3200400" lvl="6" indent="-304800">
               <a:spcBef>
                 <a:spcPts val="0"/>
               </a:spcBef>
@@ -4867,7 +5048,7 @@
               <a:buChar char="●"/>
               <a:defRPr sz="1200"/>
             </a:lvl7pPr>
-            <a:lvl8pPr indent="-304800" lvl="7" marL="3657600">
+            <a:lvl8pPr marL="3657600" lvl="7" indent="-304800">
               <a:spcBef>
                 <a:spcPts val="0"/>
               </a:spcBef>
@@ -4878,7 +5059,7 @@
               <a:buChar char="○"/>
               <a:defRPr sz="1200"/>
             </a:lvl8pPr>
-            <a:lvl9pPr indent="-304800" lvl="8" marL="4114800">
+            <a:lvl9pPr marL="4114800" lvl="8" indent="-304800">
               <a:spcBef>
                 <a:spcPts val="0"/>
               </a:spcBef>
@@ -4890,15 +5071,19 @@
               <a:defRPr sz="1200"/>
             </a:lvl9pPr>
           </a:lstStyle>
-          <a:p/>
+          <a:p>
+            <a:endParaRPr/>
+          </a:p>
         </p:txBody>
       </p:sp>
       <p:sp>
         <p:nvSpPr>
           <p:cNvPr id="24" name="Google Shape;24;p5"/>
-          <p:cNvSpPr txBox="1"/>
+          <p:cNvSpPr txBox="1">
+            <a:spLocks noGrp="1"/>
+          </p:cNvSpPr>
           <p:nvPr>
-            <p:ph idx="12" type="sldNum"/>
+            <p:ph type="sldNum" idx="12"/>
           </p:nvPr>
         </p:nvSpPr>
         <p:spPr>
@@ -4911,7 +5096,7 @@
           </a:prstGeom>
         </p:spPr>
         <p:txBody>
-          <a:bodyPr anchorCtr="0" anchor="ctr" bIns="91425" lIns="91425" spcFirstLastPara="1" rIns="91425" wrap="square" tIns="91425">
+          <a:bodyPr spcFirstLastPara="1" wrap="square" lIns="91425" tIns="91425" rIns="91425" bIns="91425" anchor="ctr" anchorCtr="0">
             <a:normAutofit/>
           </a:bodyPr>
           <a:lstStyle>
@@ -4953,7 +5138,7 @@
             </a:lvl9pPr>
           </a:lstStyle>
           <a:p>
-            <a:pPr indent="0" lvl="0" marL="0" rtl="0" algn="r">
+            <a:pPr marL="0" lvl="0" indent="0" algn="r" rtl="0">
               <a:spcBef>
                 <a:spcPts val="0"/>
               </a:spcBef>
@@ -4979,11 +5164,11 @@
 </file>
 
 <file path=ppt/slideLayouts/slideLayout5.xml><?xml version="1.0" encoding="utf-8"?>
-<p:sldLayout xmlns:a="http://schemas.openxmlformats.org/drawingml/2006/main" xmlns:r="http://schemas.openxmlformats.org/officeDocument/2006/relationships" xmlns:mc="http://schemas.openxmlformats.org/markup-compatibility/2006" xmlns:mv="urn:schemas-microsoft-com:mac:vml" xmlns:p="http://schemas.openxmlformats.org/presentationml/2006/main" xmlns:c="http://schemas.openxmlformats.org/drawingml/2006/chart" xmlns:dgm="http://schemas.openxmlformats.org/drawingml/2006/diagram" xmlns:o="urn:schemas-microsoft-com:office:office" xmlns:v="urn:schemas-microsoft-com:vml" xmlns:pvml="urn:schemas-microsoft-com:office:powerpoint" xmlns:com="http://schemas.openxmlformats.org/drawingml/2006/compatibility" xmlns:p14="http://schemas.microsoft.com/office/powerpoint/2010/main" xmlns:p15="http://schemas.microsoft.com/office/powerpoint/2012/main" xmlns:ahyp="http://schemas.microsoft.com/office/drawing/2018/hyperlinkcolor" matchingName="Title only" type="titleOnly">
+<p:sldLayout xmlns:a="http://schemas.openxmlformats.org/drawingml/2006/main" xmlns:r="http://schemas.openxmlformats.org/officeDocument/2006/relationships" xmlns:p="http://schemas.openxmlformats.org/presentationml/2006/main" matchingName="Title only" type="titleOnly">
   <p:cSld name="TITLE_ONLY">
     <p:spTree>
       <p:nvGrpSpPr>
-        <p:cNvPr id="25" name="Shape 25"/>
+        <p:cNvPr id="1" name="Shape 25"/>
         <p:cNvGrpSpPr/>
         <p:nvPr/>
       </p:nvGrpSpPr>
@@ -4998,7 +5183,9 @@
       <p:sp>
         <p:nvSpPr>
           <p:cNvPr id="26" name="Google Shape;26;p6"/>
-          <p:cNvSpPr txBox="1"/>
+          <p:cNvSpPr txBox="1">
+            <a:spLocks noGrp="1"/>
+          </p:cNvSpPr>
           <p:nvPr>
             <p:ph type="title"/>
           </p:nvPr>
@@ -5013,7 +5200,7 @@
           </a:prstGeom>
         </p:spPr>
         <p:txBody>
-          <a:bodyPr anchorCtr="0" anchor="t" bIns="91425" lIns="91425" spcFirstLastPara="1" rIns="91425" wrap="square" tIns="91425">
+          <a:bodyPr spcFirstLastPara="1" wrap="square" lIns="91425" tIns="91425" rIns="91425" bIns="91425" anchor="t" anchorCtr="0">
             <a:normAutofit/>
           </a:bodyPr>
           <a:lstStyle>
@@ -5117,15 +5304,19 @@
               <a:defRPr/>
             </a:lvl9pPr>
           </a:lstStyle>
-          <a:p/>
+          <a:p>
+            <a:endParaRPr/>
+          </a:p>
         </p:txBody>
       </p:sp>
       <p:sp>
         <p:nvSpPr>
           <p:cNvPr id="27" name="Google Shape;27;p6"/>
-          <p:cNvSpPr txBox="1"/>
+          <p:cNvSpPr txBox="1">
+            <a:spLocks noGrp="1"/>
+          </p:cNvSpPr>
           <p:nvPr>
-            <p:ph idx="12" type="sldNum"/>
+            <p:ph type="sldNum" idx="12"/>
           </p:nvPr>
         </p:nvSpPr>
         <p:spPr>
@@ -5138,7 +5329,7 @@
           </a:prstGeom>
         </p:spPr>
         <p:txBody>
-          <a:bodyPr anchorCtr="0" anchor="ctr" bIns="91425" lIns="91425" spcFirstLastPara="1" rIns="91425" wrap="square" tIns="91425">
+          <a:bodyPr spcFirstLastPara="1" wrap="square" lIns="91425" tIns="91425" rIns="91425" bIns="91425" anchor="ctr" anchorCtr="0">
             <a:normAutofit/>
           </a:bodyPr>
           <a:lstStyle>
@@ -5180,7 +5371,7 @@
             </a:lvl9pPr>
           </a:lstStyle>
           <a:p>
-            <a:pPr indent="0" lvl="0" marL="0" rtl="0" algn="r">
+            <a:pPr marL="0" lvl="0" indent="0" algn="r" rtl="0">
               <a:spcBef>
                 <a:spcPts val="0"/>
               </a:spcBef>
@@ -5206,11 +5397,11 @@
 </file>
 
 <file path=ppt/slideLayouts/slideLayout6.xml><?xml version="1.0" encoding="utf-8"?>
-<p:sldLayout xmlns:a="http://schemas.openxmlformats.org/drawingml/2006/main" xmlns:r="http://schemas.openxmlformats.org/officeDocument/2006/relationships" xmlns:mc="http://schemas.openxmlformats.org/markup-compatibility/2006" xmlns:mv="urn:schemas-microsoft-com:mac:vml" xmlns:p="http://schemas.openxmlformats.org/presentationml/2006/main" xmlns:c="http://schemas.openxmlformats.org/drawingml/2006/chart" xmlns:dgm="http://schemas.openxmlformats.org/drawingml/2006/diagram" xmlns:o="urn:schemas-microsoft-com:office:office" xmlns:v="urn:schemas-microsoft-com:vml" xmlns:pvml="urn:schemas-microsoft-com:office:powerpoint" xmlns:com="http://schemas.openxmlformats.org/drawingml/2006/compatibility" xmlns:p14="http://schemas.microsoft.com/office/powerpoint/2010/main" xmlns:p15="http://schemas.microsoft.com/office/powerpoint/2012/main" xmlns:ahyp="http://schemas.microsoft.com/office/drawing/2018/hyperlinkcolor" matchingName="One column text">
+<p:sldLayout xmlns:a="http://schemas.openxmlformats.org/drawingml/2006/main" xmlns:r="http://schemas.openxmlformats.org/officeDocument/2006/relationships" xmlns:p="http://schemas.openxmlformats.org/presentationml/2006/main" matchingName="One column text">
   <p:cSld name="ONE_COLUMN_TEXT">
     <p:spTree>
       <p:nvGrpSpPr>
-        <p:cNvPr id="28" name="Shape 28"/>
+        <p:cNvPr id="1" name="Shape 28"/>
         <p:cNvGrpSpPr/>
         <p:nvPr/>
       </p:nvGrpSpPr>
@@ -5225,7 +5416,9 @@
       <p:sp>
         <p:nvSpPr>
           <p:cNvPr id="29" name="Google Shape;29;p7"/>
-          <p:cNvSpPr txBox="1"/>
+          <p:cNvSpPr txBox="1">
+            <a:spLocks noGrp="1"/>
+          </p:cNvSpPr>
           <p:nvPr>
             <p:ph type="title"/>
           </p:nvPr>
@@ -5240,7 +5433,7 @@
           </a:prstGeom>
         </p:spPr>
         <p:txBody>
-          <a:bodyPr anchorCtr="0" anchor="b" bIns="91425" lIns="91425" spcFirstLastPara="1" rIns="91425" wrap="square" tIns="91425">
+          <a:bodyPr spcFirstLastPara="1" wrap="square" lIns="91425" tIns="91425" rIns="91425" bIns="91425" anchor="b" anchorCtr="0">
             <a:normAutofit/>
           </a:bodyPr>
           <a:lstStyle>
@@ -5344,15 +5537,19 @@
               <a:defRPr sz="2400"/>
             </a:lvl9pPr>
           </a:lstStyle>
-          <a:p/>
+          <a:p>
+            <a:endParaRPr/>
+          </a:p>
         </p:txBody>
       </p:sp>
       <p:sp>
         <p:nvSpPr>
           <p:cNvPr id="30" name="Google Shape;30;p7"/>
-          <p:cNvSpPr txBox="1"/>
+          <p:cNvSpPr txBox="1">
+            <a:spLocks noGrp="1"/>
+          </p:cNvSpPr>
           <p:nvPr>
-            <p:ph idx="1" type="body"/>
+            <p:ph type="body" idx="1"/>
           </p:nvPr>
         </p:nvSpPr>
         <p:spPr>
@@ -5365,11 +5562,11 @@
           </a:prstGeom>
         </p:spPr>
         <p:txBody>
-          <a:bodyPr anchorCtr="0" anchor="t" bIns="91425" lIns="91425" spcFirstLastPara="1" rIns="91425" wrap="square" tIns="91425">
+          <a:bodyPr spcFirstLastPara="1" wrap="square" lIns="91425" tIns="91425" rIns="91425" bIns="91425" anchor="t" anchorCtr="0">
             <a:normAutofit/>
           </a:bodyPr>
           <a:lstStyle>
-            <a:lvl1pPr indent="-304800" lvl="0" marL="457200">
+            <a:lvl1pPr marL="457200" lvl="0" indent="-304800">
               <a:spcBef>
                 <a:spcPts val="0"/>
               </a:spcBef>
@@ -5380,7 +5577,7 @@
               <a:buChar char="●"/>
               <a:defRPr sz="1200"/>
             </a:lvl1pPr>
-            <a:lvl2pPr indent="-304800" lvl="1" marL="914400">
+            <a:lvl2pPr marL="914400" lvl="1" indent="-304800">
               <a:spcBef>
                 <a:spcPts val="0"/>
               </a:spcBef>
@@ -5391,7 +5588,7 @@
               <a:buChar char="○"/>
               <a:defRPr sz="1200"/>
             </a:lvl2pPr>
-            <a:lvl3pPr indent="-304800" lvl="2" marL="1371600">
+            <a:lvl3pPr marL="1371600" lvl="2" indent="-304800">
               <a:spcBef>
                 <a:spcPts val="0"/>
               </a:spcBef>
@@ -5402,7 +5599,7 @@
               <a:buChar char="■"/>
               <a:defRPr sz="1200"/>
             </a:lvl3pPr>
-            <a:lvl4pPr indent="-304800" lvl="3" marL="1828800">
+            <a:lvl4pPr marL="1828800" lvl="3" indent="-304800">
               <a:spcBef>
                 <a:spcPts val="0"/>
               </a:spcBef>
@@ -5413,7 +5610,7 @@
               <a:buChar char="●"/>
               <a:defRPr sz="1200"/>
             </a:lvl4pPr>
-            <a:lvl5pPr indent="-304800" lvl="4" marL="2286000">
+            <a:lvl5pPr marL="2286000" lvl="4" indent="-304800">
               <a:spcBef>
                 <a:spcPts val="0"/>
               </a:spcBef>
@@ -5424,7 +5621,7 @@
               <a:buChar char="○"/>
               <a:defRPr sz="1200"/>
             </a:lvl5pPr>
-            <a:lvl6pPr indent="-304800" lvl="5" marL="2743200">
+            <a:lvl6pPr marL="2743200" lvl="5" indent="-304800">
               <a:spcBef>
                 <a:spcPts val="0"/>
               </a:spcBef>
@@ -5435,7 +5632,7 @@
               <a:buChar char="■"/>
               <a:defRPr sz="1200"/>
             </a:lvl6pPr>
-            <a:lvl7pPr indent="-304800" lvl="6" marL="3200400">
+            <a:lvl7pPr marL="3200400" lvl="6" indent="-304800">
               <a:spcBef>
                 <a:spcPts val="0"/>
               </a:spcBef>
@@ -5446,7 +5643,7 @@
               <a:buChar char="●"/>
               <a:defRPr sz="1200"/>
             </a:lvl7pPr>
-            <a:lvl8pPr indent="-304800" lvl="7" marL="3657600">
+            <a:lvl8pPr marL="3657600" lvl="7" indent="-304800">
               <a:spcBef>
                 <a:spcPts val="0"/>
               </a:spcBef>
@@ -5457,7 +5654,7 @@
               <a:buChar char="○"/>
               <a:defRPr sz="1200"/>
             </a:lvl8pPr>
-            <a:lvl9pPr indent="-304800" lvl="8" marL="4114800">
+            <a:lvl9pPr marL="4114800" lvl="8" indent="-304800">
               <a:spcBef>
                 <a:spcPts val="0"/>
               </a:spcBef>
@@ -5469,15 +5666,19 @@
               <a:defRPr sz="1200"/>
             </a:lvl9pPr>
           </a:lstStyle>
-          <a:p/>
+          <a:p>
+            <a:endParaRPr/>
+          </a:p>
         </p:txBody>
       </p:sp>
       <p:sp>
         <p:nvSpPr>
           <p:cNvPr id="31" name="Google Shape;31;p7"/>
-          <p:cNvSpPr txBox="1"/>
+          <p:cNvSpPr txBox="1">
+            <a:spLocks noGrp="1"/>
+          </p:cNvSpPr>
           <p:nvPr>
-            <p:ph idx="12" type="sldNum"/>
+            <p:ph type="sldNum" idx="12"/>
           </p:nvPr>
         </p:nvSpPr>
         <p:spPr>
@@ -5490,7 +5691,7 @@
           </a:prstGeom>
         </p:spPr>
         <p:txBody>
-          <a:bodyPr anchorCtr="0" anchor="ctr" bIns="91425" lIns="91425" spcFirstLastPara="1" rIns="91425" wrap="square" tIns="91425">
+          <a:bodyPr spcFirstLastPara="1" wrap="square" lIns="91425" tIns="91425" rIns="91425" bIns="91425" anchor="ctr" anchorCtr="0">
             <a:normAutofit/>
           </a:bodyPr>
           <a:lstStyle>
@@ -5532,7 +5733,7 @@
             </a:lvl9pPr>
           </a:lstStyle>
           <a:p>
-            <a:pPr indent="0" lvl="0" marL="0" rtl="0" algn="r">
+            <a:pPr marL="0" lvl="0" indent="0" algn="r" rtl="0">
               <a:spcBef>
                 <a:spcPts val="0"/>
               </a:spcBef>
@@ -5558,11 +5759,11 @@
 </file>
 
 <file path=ppt/slideLayouts/slideLayout7.xml><?xml version="1.0" encoding="utf-8"?>
-<p:sldLayout xmlns:a="http://schemas.openxmlformats.org/drawingml/2006/main" xmlns:r="http://schemas.openxmlformats.org/officeDocument/2006/relationships" xmlns:mc="http://schemas.openxmlformats.org/markup-compatibility/2006" xmlns:mv="urn:schemas-microsoft-com:mac:vml" xmlns:p="http://schemas.openxmlformats.org/presentationml/2006/main" xmlns:c="http://schemas.openxmlformats.org/drawingml/2006/chart" xmlns:dgm="http://schemas.openxmlformats.org/drawingml/2006/diagram" xmlns:o="urn:schemas-microsoft-com:office:office" xmlns:v="urn:schemas-microsoft-com:vml" xmlns:pvml="urn:schemas-microsoft-com:office:powerpoint" xmlns:com="http://schemas.openxmlformats.org/drawingml/2006/compatibility" xmlns:p14="http://schemas.microsoft.com/office/powerpoint/2010/main" xmlns:p15="http://schemas.microsoft.com/office/powerpoint/2012/main" xmlns:ahyp="http://schemas.microsoft.com/office/drawing/2018/hyperlinkcolor" matchingName="Main point">
+<p:sldLayout xmlns:a="http://schemas.openxmlformats.org/drawingml/2006/main" xmlns:r="http://schemas.openxmlformats.org/officeDocument/2006/relationships" xmlns:p="http://schemas.openxmlformats.org/presentationml/2006/main" matchingName="Main point">
   <p:cSld name="MAIN_POINT">
     <p:spTree>
       <p:nvGrpSpPr>
-        <p:cNvPr id="32" name="Shape 32"/>
+        <p:cNvPr id="1" name="Shape 32"/>
         <p:cNvGrpSpPr/>
         <p:nvPr/>
       </p:nvGrpSpPr>
@@ -5577,7 +5778,9 @@
       <p:sp>
         <p:nvSpPr>
           <p:cNvPr id="33" name="Google Shape;33;p8"/>
-          <p:cNvSpPr txBox="1"/>
+          <p:cNvSpPr txBox="1">
+            <a:spLocks noGrp="1"/>
+          </p:cNvSpPr>
           <p:nvPr>
             <p:ph type="title"/>
           </p:nvPr>
@@ -5592,7 +5795,7 @@
           </a:prstGeom>
         </p:spPr>
         <p:txBody>
-          <a:bodyPr anchorCtr="0" anchor="ctr" bIns="91425" lIns="91425" spcFirstLastPara="1" rIns="91425" wrap="square" tIns="91425">
+          <a:bodyPr spcFirstLastPara="1" wrap="square" lIns="91425" tIns="91425" rIns="91425" bIns="91425" anchor="ctr" anchorCtr="0">
             <a:normAutofit/>
           </a:bodyPr>
           <a:lstStyle>
@@ -5696,15 +5899,19 @@
               <a:defRPr sz="4800"/>
             </a:lvl9pPr>
           </a:lstStyle>
-          <a:p/>
+          <a:p>
+            <a:endParaRPr/>
+          </a:p>
         </p:txBody>
       </p:sp>
       <p:sp>
         <p:nvSpPr>
           <p:cNvPr id="34" name="Google Shape;34;p8"/>
-          <p:cNvSpPr txBox="1"/>
+          <p:cNvSpPr txBox="1">
+            <a:spLocks noGrp="1"/>
+          </p:cNvSpPr>
           <p:nvPr>
-            <p:ph idx="12" type="sldNum"/>
+            <p:ph type="sldNum" idx="12"/>
           </p:nvPr>
         </p:nvSpPr>
         <p:spPr>
@@ -5717,7 +5924,7 @@
           </a:prstGeom>
         </p:spPr>
         <p:txBody>
-          <a:bodyPr anchorCtr="0" anchor="ctr" bIns="91425" lIns="91425" spcFirstLastPara="1" rIns="91425" wrap="square" tIns="91425">
+          <a:bodyPr spcFirstLastPara="1" wrap="square" lIns="91425" tIns="91425" rIns="91425" bIns="91425" anchor="ctr" anchorCtr="0">
             <a:normAutofit/>
           </a:bodyPr>
           <a:lstStyle>
@@ -5759,7 +5966,7 @@
             </a:lvl9pPr>
           </a:lstStyle>
           <a:p>
-            <a:pPr indent="0" lvl="0" marL="0" rtl="0" algn="r">
+            <a:pPr marL="0" lvl="0" indent="0" algn="r" rtl="0">
               <a:spcBef>
                 <a:spcPts val="0"/>
               </a:spcBef>
@@ -5785,11 +5992,11 @@
 </file>
 
 <file path=ppt/slideLayouts/slideLayout8.xml><?xml version="1.0" encoding="utf-8"?>
-<p:sldLayout xmlns:a="http://schemas.openxmlformats.org/drawingml/2006/main" xmlns:r="http://schemas.openxmlformats.org/officeDocument/2006/relationships" xmlns:mc="http://schemas.openxmlformats.org/markup-compatibility/2006" xmlns:mv="urn:schemas-microsoft-com:mac:vml" xmlns:p="http://schemas.openxmlformats.org/presentationml/2006/main" xmlns:c="http://schemas.openxmlformats.org/drawingml/2006/chart" xmlns:dgm="http://schemas.openxmlformats.org/drawingml/2006/diagram" xmlns:o="urn:schemas-microsoft-com:office:office" xmlns:v="urn:schemas-microsoft-com:vml" xmlns:pvml="urn:schemas-microsoft-com:office:powerpoint" xmlns:com="http://schemas.openxmlformats.org/drawingml/2006/compatibility" xmlns:p14="http://schemas.microsoft.com/office/powerpoint/2010/main" xmlns:p15="http://schemas.microsoft.com/office/powerpoint/2012/main" xmlns:ahyp="http://schemas.microsoft.com/office/drawing/2018/hyperlinkcolor" matchingName="Section title and description">
+<p:sldLayout xmlns:a="http://schemas.openxmlformats.org/drawingml/2006/main" xmlns:r="http://schemas.openxmlformats.org/officeDocument/2006/relationships" xmlns:p="http://schemas.openxmlformats.org/presentationml/2006/main" matchingName="Section title and description">
   <p:cSld name="SECTION_TITLE_AND_DESCRIPTION">
     <p:spTree>
       <p:nvGrpSpPr>
-        <p:cNvPr id="35" name="Shape 35"/>
+        <p:cNvPr id="1" name="Shape 35"/>
         <p:cNvGrpSpPr/>
         <p:nvPr/>
       </p:nvGrpSpPr>
@@ -5823,23 +6030,20 @@
           </a:ln>
         </p:spPr>
         <p:txBody>
-          <a:bodyPr anchorCtr="0" anchor="ctr" bIns="91425" lIns="91425" spcFirstLastPara="1" rIns="91425" wrap="square" tIns="91425">
+          <a:bodyPr spcFirstLastPara="1" wrap="square" lIns="91425" tIns="91425" rIns="91425" bIns="91425" anchor="ctr" anchorCtr="0">
             <a:noAutofit/>
           </a:bodyPr>
           <a:lstStyle/>
           <a:p>
-            <a:pPr indent="0" lvl="0" marL="0" rtl="0" algn="l">
-              <a:spcBef>
-                <a:spcPts val="0"/>
-              </a:spcBef>
-              <a:spcAft>
-                <a:spcPts val="0"/>
-              </a:spcAft>
-              <a:buNone/>
-            </a:pPr>
-            <a:r>
-              <a:t/>
-            </a:r>
+            <a:pPr marL="0" lvl="0" indent="0" algn="l" rtl="0">
+              <a:spcBef>
+                <a:spcPts val="0"/>
+              </a:spcBef>
+              <a:spcAft>
+                <a:spcPts val="0"/>
+              </a:spcAft>
+              <a:buNone/>
+            </a:pPr>
             <a:endParaRPr/>
           </a:p>
         </p:txBody>
@@ -5847,7 +6051,9 @@
       <p:sp>
         <p:nvSpPr>
           <p:cNvPr id="37" name="Google Shape;37;p9"/>
-          <p:cNvSpPr txBox="1"/>
+          <p:cNvSpPr txBox="1">
+            <a:spLocks noGrp="1"/>
+          </p:cNvSpPr>
           <p:nvPr>
             <p:ph type="title"/>
           </p:nvPr>
@@ -5862,7 +6068,7 @@
           </a:prstGeom>
         </p:spPr>
         <p:txBody>
-          <a:bodyPr anchorCtr="0" anchor="b" bIns="91425" lIns="91425" spcFirstLastPara="1" rIns="91425" wrap="square" tIns="91425">
+          <a:bodyPr spcFirstLastPara="1" wrap="square" lIns="91425" tIns="91425" rIns="91425" bIns="91425" anchor="b" anchorCtr="0">
             <a:normAutofit/>
           </a:bodyPr>
           <a:lstStyle>
@@ -5966,15 +6172,19 @@
               <a:defRPr sz="4200"/>
             </a:lvl9pPr>
           </a:lstStyle>
-          <a:p/>
+          <a:p>
+            <a:endParaRPr/>
+          </a:p>
         </p:txBody>
       </p:sp>
       <p:sp>
         <p:nvSpPr>
           <p:cNvPr id="38" name="Google Shape;38;p9"/>
-          <p:cNvSpPr txBox="1"/>
+          <p:cNvSpPr txBox="1">
+            <a:spLocks noGrp="1"/>
+          </p:cNvSpPr>
           <p:nvPr>
-            <p:ph idx="1" type="subTitle"/>
+            <p:ph type="subTitle" idx="1"/>
           </p:nvPr>
         </p:nvSpPr>
         <p:spPr>
@@ -5987,7 +6197,7 @@
           </a:prstGeom>
         </p:spPr>
         <p:txBody>
-          <a:bodyPr anchorCtr="0" anchor="t" bIns="91425" lIns="91425" spcFirstLastPara="1" rIns="91425" wrap="square" tIns="91425">
+          <a:bodyPr spcFirstLastPara="1" wrap="square" lIns="91425" tIns="91425" rIns="91425" bIns="91425" anchor="t" anchorCtr="0">
             <a:normAutofit/>
           </a:bodyPr>
           <a:lstStyle>
@@ -6118,15 +6328,19 @@
               <a:defRPr sz="2100"/>
             </a:lvl9pPr>
           </a:lstStyle>
-          <a:p/>
+          <a:p>
+            <a:endParaRPr/>
+          </a:p>
         </p:txBody>
       </p:sp>
       <p:sp>
         <p:nvSpPr>
           <p:cNvPr id="39" name="Google Shape;39;p9"/>
-          <p:cNvSpPr txBox="1"/>
+          <p:cNvSpPr txBox="1">
+            <a:spLocks noGrp="1"/>
+          </p:cNvSpPr>
           <p:nvPr>
-            <p:ph idx="2" type="body"/>
+            <p:ph type="body" idx="2"/>
           </p:nvPr>
         </p:nvSpPr>
         <p:spPr>
@@ -6139,11 +6353,11 @@
           </a:prstGeom>
         </p:spPr>
         <p:txBody>
-          <a:bodyPr anchorCtr="0" anchor="ctr" bIns="91425" lIns="91425" spcFirstLastPara="1" rIns="91425" wrap="square" tIns="91425">
+          <a:bodyPr spcFirstLastPara="1" wrap="square" lIns="91425" tIns="91425" rIns="91425" bIns="91425" anchor="ctr" anchorCtr="0">
             <a:normAutofit/>
           </a:bodyPr>
           <a:lstStyle>
-            <a:lvl1pPr indent="-342900" lvl="0" marL="457200">
+            <a:lvl1pPr marL="457200" lvl="0" indent="-342900">
               <a:spcBef>
                 <a:spcPts val="0"/>
               </a:spcBef>
@@ -6154,7 +6368,7 @@
               <a:buChar char="●"/>
               <a:defRPr/>
             </a:lvl1pPr>
-            <a:lvl2pPr indent="-317500" lvl="1" marL="914400">
+            <a:lvl2pPr marL="914400" lvl="1" indent="-317500">
               <a:spcBef>
                 <a:spcPts val="0"/>
               </a:spcBef>
@@ -6165,7 +6379,7 @@
               <a:buChar char="○"/>
               <a:defRPr/>
             </a:lvl2pPr>
-            <a:lvl3pPr indent="-317500" lvl="2" marL="1371600">
+            <a:lvl3pPr marL="1371600" lvl="2" indent="-317500">
               <a:spcBef>
                 <a:spcPts val="0"/>
               </a:spcBef>
@@ -6176,7 +6390,7 @@
               <a:buChar char="■"/>
               <a:defRPr/>
             </a:lvl3pPr>
-            <a:lvl4pPr indent="-317500" lvl="3" marL="1828800">
+            <a:lvl4pPr marL="1828800" lvl="3" indent="-317500">
               <a:spcBef>
                 <a:spcPts val="0"/>
               </a:spcBef>
@@ -6187,7 +6401,7 @@
               <a:buChar char="●"/>
               <a:defRPr/>
             </a:lvl4pPr>
-            <a:lvl5pPr indent="-317500" lvl="4" marL="2286000">
+            <a:lvl5pPr marL="2286000" lvl="4" indent="-317500">
               <a:spcBef>
                 <a:spcPts val="0"/>
               </a:spcBef>
@@ -6198,7 +6412,7 @@
               <a:buChar char="○"/>
               <a:defRPr/>
             </a:lvl5pPr>
-            <a:lvl6pPr indent="-317500" lvl="5" marL="2743200">
+            <a:lvl6pPr marL="2743200" lvl="5" indent="-317500">
               <a:spcBef>
                 <a:spcPts val="0"/>
               </a:spcBef>
@@ -6209,7 +6423,7 @@
               <a:buChar char="■"/>
               <a:defRPr/>
             </a:lvl6pPr>
-            <a:lvl7pPr indent="-317500" lvl="6" marL="3200400">
+            <a:lvl7pPr marL="3200400" lvl="6" indent="-317500">
               <a:spcBef>
                 <a:spcPts val="0"/>
               </a:spcBef>
@@ -6220,7 +6434,7 @@
               <a:buChar char="●"/>
               <a:defRPr/>
             </a:lvl7pPr>
-            <a:lvl8pPr indent="-317500" lvl="7" marL="3657600">
+            <a:lvl8pPr marL="3657600" lvl="7" indent="-317500">
               <a:spcBef>
                 <a:spcPts val="0"/>
               </a:spcBef>
@@ -6231,7 +6445,7 @@
               <a:buChar char="○"/>
               <a:defRPr/>
             </a:lvl8pPr>
-            <a:lvl9pPr indent="-317500" lvl="8" marL="4114800">
+            <a:lvl9pPr marL="4114800" lvl="8" indent="-317500">
               <a:spcBef>
                 <a:spcPts val="0"/>
               </a:spcBef>
@@ -6243,15 +6457,19 @@
               <a:defRPr/>
             </a:lvl9pPr>
           </a:lstStyle>
-          <a:p/>
+          <a:p>
+            <a:endParaRPr/>
+          </a:p>
         </p:txBody>
       </p:sp>
       <p:sp>
         <p:nvSpPr>
           <p:cNvPr id="40" name="Google Shape;40;p9"/>
-          <p:cNvSpPr txBox="1"/>
+          <p:cNvSpPr txBox="1">
+            <a:spLocks noGrp="1"/>
+          </p:cNvSpPr>
           <p:nvPr>
-            <p:ph idx="12" type="sldNum"/>
+            <p:ph type="sldNum" idx="12"/>
           </p:nvPr>
         </p:nvSpPr>
         <p:spPr>
@@ -6264,7 +6482,7 @@
           </a:prstGeom>
         </p:spPr>
         <p:txBody>
-          <a:bodyPr anchorCtr="0" anchor="ctr" bIns="91425" lIns="91425" spcFirstLastPara="1" rIns="91425" wrap="square" tIns="91425">
+          <a:bodyPr spcFirstLastPara="1" wrap="square" lIns="91425" tIns="91425" rIns="91425" bIns="91425" anchor="ctr" anchorCtr="0">
             <a:normAutofit/>
           </a:bodyPr>
           <a:lstStyle>
@@ -6306,7 +6524,7 @@
             </a:lvl9pPr>
           </a:lstStyle>
           <a:p>
-            <a:pPr indent="0" lvl="0" marL="0" rtl="0" algn="r">
+            <a:pPr marL="0" lvl="0" indent="0" algn="r" rtl="0">
               <a:spcBef>
                 <a:spcPts val="0"/>
               </a:spcBef>
@@ -6332,11 +6550,11 @@
 </file>
 
 <file path=ppt/slideLayouts/slideLayout9.xml><?xml version="1.0" encoding="utf-8"?>
-<p:sldLayout xmlns:a="http://schemas.openxmlformats.org/drawingml/2006/main" xmlns:r="http://schemas.openxmlformats.org/officeDocument/2006/relationships" xmlns:mc="http://schemas.openxmlformats.org/markup-compatibility/2006" xmlns:mv="urn:schemas-microsoft-com:mac:vml" xmlns:p="http://schemas.openxmlformats.org/presentationml/2006/main" xmlns:c="http://schemas.openxmlformats.org/drawingml/2006/chart" xmlns:dgm="http://schemas.openxmlformats.org/drawingml/2006/diagram" xmlns:o="urn:schemas-microsoft-com:office:office" xmlns:v="urn:schemas-microsoft-com:vml" xmlns:pvml="urn:schemas-microsoft-com:office:powerpoint" xmlns:com="http://schemas.openxmlformats.org/drawingml/2006/compatibility" xmlns:p14="http://schemas.microsoft.com/office/powerpoint/2010/main" xmlns:p15="http://schemas.microsoft.com/office/powerpoint/2012/main" xmlns:ahyp="http://schemas.microsoft.com/office/drawing/2018/hyperlinkcolor" matchingName="Caption">
+<p:sldLayout xmlns:a="http://schemas.openxmlformats.org/drawingml/2006/main" xmlns:r="http://schemas.openxmlformats.org/officeDocument/2006/relationships" xmlns:p="http://schemas.openxmlformats.org/presentationml/2006/main" matchingName="Caption">
   <p:cSld name="CAPTION_ONLY">
     <p:spTree>
       <p:nvGrpSpPr>
-        <p:cNvPr id="41" name="Shape 41"/>
+        <p:cNvPr id="1" name="Shape 41"/>
         <p:cNvGrpSpPr/>
         <p:nvPr/>
       </p:nvGrpSpPr>
@@ -6351,9 +6569,11 @@
       <p:sp>
         <p:nvSpPr>
           <p:cNvPr id="42" name="Google Shape;42;p10"/>
-          <p:cNvSpPr txBox="1"/>
+          <p:cNvSpPr txBox="1">
+            <a:spLocks noGrp="1"/>
+          </p:cNvSpPr>
           <p:nvPr>
-            <p:ph idx="1" type="body"/>
+            <p:ph type="body" idx="1"/>
           </p:nvPr>
         </p:nvSpPr>
         <p:spPr>
@@ -6366,11 +6586,11 @@
           </a:prstGeom>
         </p:spPr>
         <p:txBody>
-          <a:bodyPr anchorCtr="0" anchor="ctr" bIns="91425" lIns="91425" spcFirstLastPara="1" rIns="91425" wrap="square" tIns="91425">
+          <a:bodyPr spcFirstLastPara="1" wrap="square" lIns="91425" tIns="91425" rIns="91425" bIns="91425" anchor="ctr" anchorCtr="0">
             <a:normAutofit/>
           </a:bodyPr>
           <a:lstStyle>
-            <a:lvl1pPr indent="-228600" lvl="0" marL="457200">
+            <a:lvl1pPr marL="457200" lvl="0" indent="-228600">
               <a:lnSpc>
                 <a:spcPct val="100000"/>
               </a:lnSpc>
@@ -6385,15 +6605,19 @@
               <a:defRPr/>
             </a:lvl1pPr>
           </a:lstStyle>
-          <a:p/>
+          <a:p>
+            <a:endParaRPr/>
+          </a:p>
         </p:txBody>
       </p:sp>
       <p:sp>
         <p:nvSpPr>
           <p:cNvPr id="43" name="Google Shape;43;p10"/>
-          <p:cNvSpPr txBox="1"/>
+          <p:cNvSpPr txBox="1">
+            <a:spLocks noGrp="1"/>
+          </p:cNvSpPr>
           <p:nvPr>
-            <p:ph idx="12" type="sldNum"/>
+            <p:ph type="sldNum" idx="12"/>
           </p:nvPr>
         </p:nvSpPr>
         <p:spPr>
@@ -6406,7 +6630,7 @@
           </a:prstGeom>
         </p:spPr>
         <p:txBody>
-          <a:bodyPr anchorCtr="0" anchor="ctr" bIns="91425" lIns="91425" spcFirstLastPara="1" rIns="91425" wrap="square" tIns="91425">
+          <a:bodyPr spcFirstLastPara="1" wrap="square" lIns="91425" tIns="91425" rIns="91425" bIns="91425" anchor="ctr" anchorCtr="0">
             <a:normAutofit/>
           </a:bodyPr>
           <a:lstStyle>
@@ -6448,7 +6672,7 @@
             </a:lvl9pPr>
           </a:lstStyle>
           <a:p>
-            <a:pPr indent="0" lvl="0" marL="0" rtl="0" algn="r">
+            <a:pPr marL="0" lvl="0" indent="0" algn="r" rtl="0">
               <a:spcBef>
                 <a:spcPts val="0"/>
               </a:spcBef>
@@ -6474,18 +6698,19 @@
 </file>
 
 <file path=ppt/slideMasters/slideMaster1.xml><?xml version="1.0" encoding="utf-8"?>
-<p:sldMaster xmlns:a="http://schemas.openxmlformats.org/drawingml/2006/main" xmlns:r="http://schemas.openxmlformats.org/officeDocument/2006/relationships" xmlns:mc="http://schemas.openxmlformats.org/markup-compatibility/2006" xmlns:mv="urn:schemas-microsoft-com:mac:vml" xmlns:p="http://schemas.openxmlformats.org/presentationml/2006/main" xmlns:c="http://schemas.openxmlformats.org/drawingml/2006/chart" xmlns:dgm="http://schemas.openxmlformats.org/drawingml/2006/diagram" xmlns:o="urn:schemas-microsoft-com:office:office" xmlns:v="urn:schemas-microsoft-com:vml" xmlns:pvml="urn:schemas-microsoft-com:office:powerpoint" xmlns:com="http://schemas.openxmlformats.org/drawingml/2006/compatibility" xmlns:p14="http://schemas.microsoft.com/office/powerpoint/2010/main" xmlns:p15="http://schemas.microsoft.com/office/powerpoint/2012/main" xmlns:ahyp="http://schemas.microsoft.com/office/drawing/2018/hyperlinkcolor">
+<p:sldMaster xmlns:a="http://schemas.openxmlformats.org/drawingml/2006/main" xmlns:r="http://schemas.openxmlformats.org/officeDocument/2006/relationships" xmlns:p="http://schemas.openxmlformats.org/presentationml/2006/main">
   <p:cSld name="simple-light-2">
     <p:bg>
       <p:bgPr>
         <a:solidFill>
           <a:schemeClr val="lt1"/>
         </a:solidFill>
+        <a:effectLst/>
       </p:bgPr>
     </p:bg>
     <p:spTree>
       <p:nvGrpSpPr>
-        <p:cNvPr id="5" name="Shape 5"/>
+        <p:cNvPr id="1" name="Shape 5"/>
         <p:cNvGrpSpPr/>
         <p:nvPr/>
       </p:nvGrpSpPr>
@@ -6500,7 +6725,9 @@
       <p:sp>
         <p:nvSpPr>
           <p:cNvPr id="6" name="Google Shape;6;p1"/>
-          <p:cNvSpPr txBox="1"/>
+          <p:cNvSpPr txBox="1">
+            <a:spLocks noGrp="1"/>
+          </p:cNvSpPr>
           <p:nvPr>
             <p:ph type="title"/>
           </p:nvPr>
@@ -6519,7 +6746,7 @@
           </a:ln>
         </p:spPr>
         <p:txBody>
-          <a:bodyPr anchorCtr="0" anchor="t" bIns="91425" lIns="91425" spcFirstLastPara="1" rIns="91425" wrap="square" tIns="91425">
+          <a:bodyPr spcFirstLastPara="1" wrap="square" lIns="91425" tIns="91425" rIns="91425" bIns="91425" anchor="t" anchorCtr="0">
             <a:normAutofit/>
           </a:bodyPr>
           <a:lstStyle>
@@ -6686,15 +6913,19 @@
               </a:defRPr>
             </a:lvl9pPr>
           </a:lstStyle>
-          <a:p/>
+          <a:p>
+            <a:endParaRPr/>
+          </a:p>
         </p:txBody>
       </p:sp>
       <p:sp>
         <p:nvSpPr>
           <p:cNvPr id="7" name="Google Shape;7;p1"/>
-          <p:cNvSpPr txBox="1"/>
+          <p:cNvSpPr txBox="1">
+            <a:spLocks noGrp="1"/>
+          </p:cNvSpPr>
           <p:nvPr>
-            <p:ph idx="1" type="body"/>
+            <p:ph type="body" idx="1"/>
           </p:nvPr>
         </p:nvSpPr>
         <p:spPr>
@@ -6711,11 +6942,11 @@
           </a:ln>
         </p:spPr>
         <p:txBody>
-          <a:bodyPr anchorCtr="0" anchor="t" bIns="91425" lIns="91425" spcFirstLastPara="1" rIns="91425" wrap="square" tIns="91425">
+          <a:bodyPr spcFirstLastPara="1" wrap="square" lIns="91425" tIns="91425" rIns="91425" bIns="91425" anchor="t" anchorCtr="0">
             <a:normAutofit/>
           </a:bodyPr>
           <a:lstStyle>
-            <a:lvl1pPr indent="-342900" lvl="0" marL="457200">
+            <a:lvl1pPr marL="457200" lvl="0" indent="-342900">
               <a:lnSpc>
                 <a:spcPct val="115000"/>
               </a:lnSpc>
@@ -6736,7 +6967,7 @@
                 </a:solidFill>
               </a:defRPr>
             </a:lvl1pPr>
-            <a:lvl2pPr indent="-317500" lvl="1" marL="914400">
+            <a:lvl2pPr marL="914400" lvl="1" indent="-317500">
               <a:lnSpc>
                 <a:spcPct val="115000"/>
               </a:lnSpc>
@@ -6757,7 +6988,7 @@
                 </a:solidFill>
               </a:defRPr>
             </a:lvl2pPr>
-            <a:lvl3pPr indent="-317500" lvl="2" marL="1371600">
+            <a:lvl3pPr marL="1371600" lvl="2" indent="-317500">
               <a:lnSpc>
                 <a:spcPct val="115000"/>
               </a:lnSpc>
@@ -6778,7 +7009,7 @@
                 </a:solidFill>
               </a:defRPr>
             </a:lvl3pPr>
-            <a:lvl4pPr indent="-317500" lvl="3" marL="1828800">
+            <a:lvl4pPr marL="1828800" lvl="3" indent="-317500">
               <a:lnSpc>
                 <a:spcPct val="115000"/>
               </a:lnSpc>
@@ -6799,7 +7030,7 @@
                 </a:solidFill>
               </a:defRPr>
             </a:lvl4pPr>
-            <a:lvl5pPr indent="-317500" lvl="4" marL="2286000">
+            <a:lvl5pPr marL="2286000" lvl="4" indent="-317500">
               <a:lnSpc>
                 <a:spcPct val="115000"/>
               </a:lnSpc>
@@ -6820,7 +7051,7 @@
                 </a:solidFill>
               </a:defRPr>
             </a:lvl5pPr>
-            <a:lvl6pPr indent="-317500" lvl="5" marL="2743200">
+            <a:lvl6pPr marL="2743200" lvl="5" indent="-317500">
               <a:lnSpc>
                 <a:spcPct val="115000"/>
               </a:lnSpc>
@@ -6841,7 +7072,7 @@
                 </a:solidFill>
               </a:defRPr>
             </a:lvl6pPr>
-            <a:lvl7pPr indent="-317500" lvl="6" marL="3200400">
+            <a:lvl7pPr marL="3200400" lvl="6" indent="-317500">
               <a:lnSpc>
                 <a:spcPct val="115000"/>
               </a:lnSpc>
@@ -6862,7 +7093,7 @@
                 </a:solidFill>
               </a:defRPr>
             </a:lvl7pPr>
-            <a:lvl8pPr indent="-317500" lvl="7" marL="3657600">
+            <a:lvl8pPr marL="3657600" lvl="7" indent="-317500">
               <a:lnSpc>
                 <a:spcPct val="115000"/>
               </a:lnSpc>
@@ -6883,7 +7114,7 @@
                 </a:solidFill>
               </a:defRPr>
             </a:lvl8pPr>
-            <a:lvl9pPr indent="-317500" lvl="8" marL="4114800">
+            <a:lvl9pPr marL="4114800" lvl="8" indent="-317500">
               <a:lnSpc>
                 <a:spcPct val="115000"/>
               </a:lnSpc>
@@ -6905,15 +7136,19 @@
               </a:defRPr>
             </a:lvl9pPr>
           </a:lstStyle>
-          <a:p/>
+          <a:p>
+            <a:endParaRPr/>
+          </a:p>
         </p:txBody>
       </p:sp>
       <p:sp>
         <p:nvSpPr>
           <p:cNvPr id="8" name="Google Shape;8;p1"/>
-          <p:cNvSpPr txBox="1"/>
+          <p:cNvSpPr txBox="1">
+            <a:spLocks noGrp="1"/>
+          </p:cNvSpPr>
           <p:nvPr>
-            <p:ph idx="12" type="sldNum"/>
+            <p:ph type="sldNum" idx="12"/>
           </p:nvPr>
         </p:nvSpPr>
         <p:spPr>
@@ -6930,7 +7165,7 @@
           </a:ln>
         </p:spPr>
         <p:txBody>
-          <a:bodyPr anchorCtr="0" anchor="ctr" bIns="91425" lIns="91425" spcFirstLastPara="1" rIns="91425" wrap="square" tIns="91425">
+          <a:bodyPr spcFirstLastPara="1" wrap="square" lIns="91425" tIns="91425" rIns="91425" bIns="91425" anchor="ctr" anchorCtr="0">
             <a:normAutofit/>
           </a:bodyPr>
           <a:lstStyle>
@@ -7008,7 +7243,7 @@
             </a:lvl9pPr>
           </a:lstStyle>
           <a:p>
-            <a:pPr indent="0" lvl="0" marL="0" rtl="0" algn="r">
+            <a:pPr marL="0" lvl="0" indent="0" algn="r" rtl="0">
               <a:spcBef>
                 <a:spcPts val="0"/>
               </a:spcBef>
@@ -7027,7 +7262,7 @@
       </p:sp>
     </p:spTree>
   </p:cSld>
-  <p:clrMap accent1="accent1" accent2="accent2" accent3="accent3" accent4="accent4" accent5="accent5" accent6="accent6" bg1="lt1" bg2="dk2" tx1="dk1" tx2="lt2" folHlink="folHlink" hlink="hlink"/>
+  <p:clrMap bg1="lt1" tx1="dk1" bg2="dk2" tx2="lt2" accent1="accent1" accent2="accent2" accent3="accent3" accent4="accent4" accent5="accent5" accent6="accent6" hlink="hlink" folHlink="folHlink"/>
   <p:sldLayoutIdLst>
     <p:sldLayoutId id="2147483648" r:id="rId1"/>
     <p:sldLayoutId id="2147483649" r:id="rId2"/>
@@ -7041,10 +7276,10 @@
     <p:sldLayoutId id="2147483657" r:id="rId10"/>
     <p:sldLayoutId id="2147483658" r:id="rId11"/>
   </p:sldLayoutIdLst>
-  <p:hf dt="0" ftr="0" hdr="0" sldNum="0"/>
+  <p:hf sldNum="0" hdr="0" ftr="0" dt="0"/>
   <p:txStyles>
     <p:titleStyle>
-      <a:defPPr lvl="0" marR="0" rtl="0" algn="l">
+      <a:defPPr marR="0" lvl="0" algn="l" rtl="0">
         <a:lnSpc>
           <a:spcPct val="100000"/>
         </a:lnSpc>
@@ -7055,7 +7290,7 @@
           <a:spcPts val="0"/>
         </a:spcAft>
       </a:defPPr>
-      <a:lvl1pPr lvl="0" marR="0" rtl="0" algn="l">
+      <a:lvl1pPr marR="0" lvl="0" algn="l" rtl="0">
         <a:lnSpc>
           <a:spcPct val="100000"/>
         </a:lnSpc>
@@ -7069,7 +7304,7 @@
           <a:srgbClr val="000000"/>
         </a:buClr>
         <a:buFont typeface="Arial"/>
-        <a:defRPr b="0" i="0" sz="1400" u="none" cap="none" strike="noStrike">
+        <a:defRPr sz="1400" b="0" i="0" u="none" strike="noStrike" cap="none">
           <a:solidFill>
             <a:srgbClr val="000000"/>
           </a:solidFill>
@@ -7079,7 +7314,7 @@
           <a:sym typeface="Arial"/>
         </a:defRPr>
       </a:lvl1pPr>
-      <a:lvl2pPr lvl="1" marR="0" rtl="0" algn="l">
+      <a:lvl2pPr marR="0" lvl="1" algn="l" rtl="0">
         <a:lnSpc>
           <a:spcPct val="100000"/>
         </a:lnSpc>
@@ -7093,7 +7328,7 @@
           <a:srgbClr val="000000"/>
         </a:buClr>
         <a:buFont typeface="Arial"/>
-        <a:defRPr b="0" i="0" sz="1400" u="none" cap="none" strike="noStrike">
+        <a:defRPr sz="1400" b="0" i="0" u="none" strike="noStrike" cap="none">
           <a:solidFill>
             <a:srgbClr val="000000"/>
           </a:solidFill>
@@ -7103,7 +7338,7 @@
           <a:sym typeface="Arial"/>
         </a:defRPr>
       </a:lvl2pPr>
-      <a:lvl3pPr lvl="2" marR="0" rtl="0" algn="l">
+      <a:lvl3pPr marR="0" lvl="2" algn="l" rtl="0">
         <a:lnSpc>
           <a:spcPct val="100000"/>
         </a:lnSpc>
@@ -7117,7 +7352,7 @@
           <a:srgbClr val="000000"/>
         </a:buClr>
         <a:buFont typeface="Arial"/>
-        <a:defRPr b="0" i="0" sz="1400" u="none" cap="none" strike="noStrike">
+        <a:defRPr sz="1400" b="0" i="0" u="none" strike="noStrike" cap="none">
           <a:solidFill>
             <a:srgbClr val="000000"/>
           </a:solidFill>
@@ -7127,7 +7362,7 @@
           <a:sym typeface="Arial"/>
         </a:defRPr>
       </a:lvl3pPr>
-      <a:lvl4pPr lvl="3" marR="0" rtl="0" algn="l">
+      <a:lvl4pPr marR="0" lvl="3" algn="l" rtl="0">
         <a:lnSpc>
           <a:spcPct val="100000"/>
         </a:lnSpc>
@@ -7141,7 +7376,7 @@
           <a:srgbClr val="000000"/>
         </a:buClr>
         <a:buFont typeface="Arial"/>
-        <a:defRPr b="0" i="0" sz="1400" u="none" cap="none" strike="noStrike">
+        <a:defRPr sz="1400" b="0" i="0" u="none" strike="noStrike" cap="none">
           <a:solidFill>
             <a:srgbClr val="000000"/>
           </a:solidFill>
@@ -7151,7 +7386,7 @@
           <a:sym typeface="Arial"/>
         </a:defRPr>
       </a:lvl4pPr>
-      <a:lvl5pPr lvl="4" marR="0" rtl="0" algn="l">
+      <a:lvl5pPr marR="0" lvl="4" algn="l" rtl="0">
         <a:lnSpc>
           <a:spcPct val="100000"/>
         </a:lnSpc>
@@ -7165,7 +7400,7 @@
           <a:srgbClr val="000000"/>
         </a:buClr>
         <a:buFont typeface="Arial"/>
-        <a:defRPr b="0" i="0" sz="1400" u="none" cap="none" strike="noStrike">
+        <a:defRPr sz="1400" b="0" i="0" u="none" strike="noStrike" cap="none">
           <a:solidFill>
             <a:srgbClr val="000000"/>
           </a:solidFill>
@@ -7175,7 +7410,7 @@
           <a:sym typeface="Arial"/>
         </a:defRPr>
       </a:lvl5pPr>
-      <a:lvl6pPr lvl="5" marR="0" rtl="0" algn="l">
+      <a:lvl6pPr marR="0" lvl="5" algn="l" rtl="0">
         <a:lnSpc>
           <a:spcPct val="100000"/>
         </a:lnSpc>
@@ -7189,7 +7424,7 @@
           <a:srgbClr val="000000"/>
         </a:buClr>
         <a:buFont typeface="Arial"/>
-        <a:defRPr b="0" i="0" sz="1400" u="none" cap="none" strike="noStrike">
+        <a:defRPr sz="1400" b="0" i="0" u="none" strike="noStrike" cap="none">
           <a:solidFill>
             <a:srgbClr val="000000"/>
           </a:solidFill>
@@ -7199,7 +7434,7 @@
           <a:sym typeface="Arial"/>
         </a:defRPr>
       </a:lvl6pPr>
-      <a:lvl7pPr lvl="6" marR="0" rtl="0" algn="l">
+      <a:lvl7pPr marR="0" lvl="6" algn="l" rtl="0">
         <a:lnSpc>
           <a:spcPct val="100000"/>
         </a:lnSpc>
@@ -7213,7 +7448,7 @@
           <a:srgbClr val="000000"/>
         </a:buClr>
         <a:buFont typeface="Arial"/>
-        <a:defRPr b="0" i="0" sz="1400" u="none" cap="none" strike="noStrike">
+        <a:defRPr sz="1400" b="0" i="0" u="none" strike="noStrike" cap="none">
           <a:solidFill>
             <a:srgbClr val="000000"/>
           </a:solidFill>
@@ -7223,7 +7458,7 @@
           <a:sym typeface="Arial"/>
         </a:defRPr>
       </a:lvl7pPr>
-      <a:lvl8pPr lvl="7" marR="0" rtl="0" algn="l">
+      <a:lvl8pPr marR="0" lvl="7" algn="l" rtl="0">
         <a:lnSpc>
           <a:spcPct val="100000"/>
         </a:lnSpc>
@@ -7237,7 +7472,7 @@
           <a:srgbClr val="000000"/>
         </a:buClr>
         <a:buFont typeface="Arial"/>
-        <a:defRPr b="0" i="0" sz="1400" u="none" cap="none" strike="noStrike">
+        <a:defRPr sz="1400" b="0" i="0" u="none" strike="noStrike" cap="none">
           <a:solidFill>
             <a:srgbClr val="000000"/>
           </a:solidFill>
@@ -7247,7 +7482,7 @@
           <a:sym typeface="Arial"/>
         </a:defRPr>
       </a:lvl8pPr>
-      <a:lvl9pPr lvl="8" marR="0" rtl="0" algn="l">
+      <a:lvl9pPr marR="0" lvl="8" algn="l" rtl="0">
         <a:lnSpc>
           <a:spcPct val="100000"/>
         </a:lnSpc>
@@ -7261,7 +7496,7 @@
           <a:srgbClr val="000000"/>
         </a:buClr>
         <a:buFont typeface="Arial"/>
-        <a:defRPr b="0" i="0" sz="1400" u="none" cap="none" strike="noStrike">
+        <a:defRPr sz="1400" b="0" i="0" u="none" strike="noStrike" cap="none">
           <a:solidFill>
             <a:srgbClr val="000000"/>
           </a:solidFill>
@@ -7273,7 +7508,7 @@
       </a:lvl9pPr>
     </p:titleStyle>
     <p:bodyStyle>
-      <a:defPPr lvl="0" marR="0" rtl="0" algn="l">
+      <a:defPPr marR="0" lvl="0" algn="l" rtl="0">
         <a:lnSpc>
           <a:spcPct val="100000"/>
         </a:lnSpc>
@@ -7284,7 +7519,7 @@
           <a:spcPts val="0"/>
         </a:spcAft>
       </a:defPPr>
-      <a:lvl1pPr lvl="0" marR="0" rtl="0" algn="l">
+      <a:lvl1pPr marR="0" lvl="0" algn="l" rtl="0">
         <a:lnSpc>
           <a:spcPct val="100000"/>
         </a:lnSpc>
@@ -7298,7 +7533,7 @@
           <a:srgbClr val="000000"/>
         </a:buClr>
         <a:buFont typeface="Arial"/>
-        <a:defRPr b="0" i="0" sz="1400" u="none" cap="none" strike="noStrike">
+        <a:defRPr sz="1400" b="0" i="0" u="none" strike="noStrike" cap="none">
           <a:solidFill>
             <a:srgbClr val="000000"/>
           </a:solidFill>
@@ -7308,7 +7543,7 @@
           <a:sym typeface="Arial"/>
         </a:defRPr>
       </a:lvl1pPr>
-      <a:lvl2pPr lvl="1" marR="0" rtl="0" algn="l">
+      <a:lvl2pPr marR="0" lvl="1" algn="l" rtl="0">
         <a:lnSpc>
           <a:spcPct val="100000"/>
         </a:lnSpc>
@@ -7322,7 +7557,7 @@
           <a:srgbClr val="000000"/>
         </a:buClr>
         <a:buFont typeface="Arial"/>
-        <a:defRPr b="0" i="0" sz="1400" u="none" cap="none" strike="noStrike">
+        <a:defRPr sz="1400" b="0" i="0" u="none" strike="noStrike" cap="none">
           <a:solidFill>
             <a:srgbClr val="000000"/>
           </a:solidFill>
@@ -7332,7 +7567,7 @@
           <a:sym typeface="Arial"/>
         </a:defRPr>
       </a:lvl2pPr>
-      <a:lvl3pPr lvl="2" marR="0" rtl="0" algn="l">
+      <a:lvl3pPr marR="0" lvl="2" algn="l" rtl="0">
         <a:lnSpc>
           <a:spcPct val="100000"/>
         </a:lnSpc>
@@ -7346,7 +7581,7 @@
           <a:srgbClr val="000000"/>
         </a:buClr>
         <a:buFont typeface="Arial"/>
-        <a:defRPr b="0" i="0" sz="1400" u="none" cap="none" strike="noStrike">
+        <a:defRPr sz="1400" b="0" i="0" u="none" strike="noStrike" cap="none">
           <a:solidFill>
             <a:srgbClr val="000000"/>
           </a:solidFill>
@@ -7356,7 +7591,7 @@
           <a:sym typeface="Arial"/>
         </a:defRPr>
       </a:lvl3pPr>
-      <a:lvl4pPr lvl="3" marR="0" rtl="0" algn="l">
+      <a:lvl4pPr marR="0" lvl="3" algn="l" rtl="0">
         <a:lnSpc>
           <a:spcPct val="100000"/>
         </a:lnSpc>
@@ -7370,7 +7605,7 @@
           <a:srgbClr val="000000"/>
         </a:buClr>
         <a:buFont typeface="Arial"/>
-        <a:defRPr b="0" i="0" sz="1400" u="none" cap="none" strike="noStrike">
+        <a:defRPr sz="1400" b="0" i="0" u="none" strike="noStrike" cap="none">
           <a:solidFill>
             <a:srgbClr val="000000"/>
           </a:solidFill>
@@ -7380,7 +7615,7 @@
           <a:sym typeface="Arial"/>
         </a:defRPr>
       </a:lvl4pPr>
-      <a:lvl5pPr lvl="4" marR="0" rtl="0" algn="l">
+      <a:lvl5pPr marR="0" lvl="4" algn="l" rtl="0">
         <a:lnSpc>
           <a:spcPct val="100000"/>
         </a:lnSpc>
@@ -7394,7 +7629,7 @@
           <a:srgbClr val="000000"/>
         </a:buClr>
         <a:buFont typeface="Arial"/>
-        <a:defRPr b="0" i="0" sz="1400" u="none" cap="none" strike="noStrike">
+        <a:defRPr sz="1400" b="0" i="0" u="none" strike="noStrike" cap="none">
           <a:solidFill>
             <a:srgbClr val="000000"/>
           </a:solidFill>
@@ -7404,7 +7639,7 @@
           <a:sym typeface="Arial"/>
         </a:defRPr>
       </a:lvl5pPr>
-      <a:lvl6pPr lvl="5" marR="0" rtl="0" algn="l">
+      <a:lvl6pPr marR="0" lvl="5" algn="l" rtl="0">
         <a:lnSpc>
           <a:spcPct val="100000"/>
         </a:lnSpc>
@@ -7418,7 +7653,7 @@
           <a:srgbClr val="000000"/>
         </a:buClr>
         <a:buFont typeface="Arial"/>
-        <a:defRPr b="0" i="0" sz="1400" u="none" cap="none" strike="noStrike">
+        <a:defRPr sz="1400" b="0" i="0" u="none" strike="noStrike" cap="none">
           <a:solidFill>
             <a:srgbClr val="000000"/>
           </a:solidFill>
@@ -7428,7 +7663,7 @@
           <a:sym typeface="Arial"/>
         </a:defRPr>
       </a:lvl6pPr>
-      <a:lvl7pPr lvl="6" marR="0" rtl="0" algn="l">
+      <a:lvl7pPr marR="0" lvl="6" algn="l" rtl="0">
         <a:lnSpc>
           <a:spcPct val="100000"/>
         </a:lnSpc>
@@ -7442,7 +7677,7 @@
           <a:srgbClr val="000000"/>
         </a:buClr>
         <a:buFont typeface="Arial"/>
-        <a:defRPr b="0" i="0" sz="1400" u="none" cap="none" strike="noStrike">
+        <a:defRPr sz="1400" b="0" i="0" u="none" strike="noStrike" cap="none">
           <a:solidFill>
             <a:srgbClr val="000000"/>
           </a:solidFill>
@@ -7452,7 +7687,7 @@
           <a:sym typeface="Arial"/>
         </a:defRPr>
       </a:lvl7pPr>
-      <a:lvl8pPr lvl="7" marR="0" rtl="0" algn="l">
+      <a:lvl8pPr marR="0" lvl="7" algn="l" rtl="0">
         <a:lnSpc>
           <a:spcPct val="100000"/>
         </a:lnSpc>
@@ -7466,7 +7701,7 @@
           <a:srgbClr val="000000"/>
         </a:buClr>
         <a:buFont typeface="Arial"/>
-        <a:defRPr b="0" i="0" sz="1400" u="none" cap="none" strike="noStrike">
+        <a:defRPr sz="1400" b="0" i="0" u="none" strike="noStrike" cap="none">
           <a:solidFill>
             <a:srgbClr val="000000"/>
           </a:solidFill>
@@ -7476,7 +7711,7 @@
           <a:sym typeface="Arial"/>
         </a:defRPr>
       </a:lvl8pPr>
-      <a:lvl9pPr lvl="8" marR="0" rtl="0" algn="l">
+      <a:lvl9pPr marR="0" lvl="8" algn="l" rtl="0">
         <a:lnSpc>
           <a:spcPct val="100000"/>
         </a:lnSpc>
@@ -7490,7 +7725,7 @@
           <a:srgbClr val="000000"/>
         </a:buClr>
         <a:buFont typeface="Arial"/>
-        <a:defRPr b="0" i="0" sz="1400" u="none" cap="none" strike="noStrike">
+        <a:defRPr sz="1400" b="0" i="0" u="none" strike="noStrike" cap="none">
           <a:solidFill>
             <a:srgbClr val="000000"/>
           </a:solidFill>
@@ -7502,7 +7737,7 @@
       </a:lvl9pPr>
     </p:bodyStyle>
     <p:otherStyle>
-      <a:defPPr lvl="0" marR="0" rtl="0" algn="l">
+      <a:defPPr marR="0" lvl="0" algn="l" rtl="0">
         <a:lnSpc>
           <a:spcPct val="100000"/>
         </a:lnSpc>
@@ -7513,7 +7748,7 @@
           <a:spcPts val="0"/>
         </a:spcAft>
       </a:defPPr>
-      <a:lvl1pPr lvl="0" marR="0" rtl="0" algn="l">
+      <a:lvl1pPr marR="0" lvl="0" algn="l" rtl="0">
         <a:lnSpc>
           <a:spcPct val="100000"/>
         </a:lnSpc>
@@ -7527,7 +7762,7 @@
           <a:srgbClr val="000000"/>
         </a:buClr>
         <a:buFont typeface="Arial"/>
-        <a:defRPr b="0" i="0" sz="1400" u="none" cap="none" strike="noStrike">
+        <a:defRPr sz="1400" b="0" i="0" u="none" strike="noStrike" cap="none">
           <a:solidFill>
             <a:srgbClr val="000000"/>
           </a:solidFill>
@@ -7537,7 +7772,7 @@
           <a:sym typeface="Arial"/>
         </a:defRPr>
       </a:lvl1pPr>
-      <a:lvl2pPr lvl="1" marR="0" rtl="0" algn="l">
+      <a:lvl2pPr marR="0" lvl="1" algn="l" rtl="0">
         <a:lnSpc>
           <a:spcPct val="100000"/>
         </a:lnSpc>
@@ -7551,7 +7786,7 @@
           <a:srgbClr val="000000"/>
         </a:buClr>
         <a:buFont typeface="Arial"/>
-        <a:defRPr b="0" i="0" sz="1400" u="none" cap="none" strike="noStrike">
+        <a:defRPr sz="1400" b="0" i="0" u="none" strike="noStrike" cap="none">
           <a:solidFill>
             <a:srgbClr val="000000"/>
           </a:solidFill>
@@ -7561,7 +7796,7 @@
           <a:sym typeface="Arial"/>
         </a:defRPr>
       </a:lvl2pPr>
-      <a:lvl3pPr lvl="2" marR="0" rtl="0" algn="l">
+      <a:lvl3pPr marR="0" lvl="2" algn="l" rtl="0">
         <a:lnSpc>
           <a:spcPct val="100000"/>
         </a:lnSpc>
@@ -7575,7 +7810,7 @@
           <a:srgbClr val="000000"/>
         </a:buClr>
         <a:buFont typeface="Arial"/>
-        <a:defRPr b="0" i="0" sz="1400" u="none" cap="none" strike="noStrike">
+        <a:defRPr sz="1400" b="0" i="0" u="none" strike="noStrike" cap="none">
           <a:solidFill>
             <a:srgbClr val="000000"/>
           </a:solidFill>
@@ -7585,7 +7820,7 @@
           <a:sym typeface="Arial"/>
         </a:defRPr>
       </a:lvl3pPr>
-      <a:lvl4pPr lvl="3" marR="0" rtl="0" algn="l">
+      <a:lvl4pPr marR="0" lvl="3" algn="l" rtl="0">
         <a:lnSpc>
           <a:spcPct val="100000"/>
         </a:lnSpc>
@@ -7599,7 +7834,7 @@
           <a:srgbClr val="000000"/>
         </a:buClr>
         <a:buFont typeface="Arial"/>
-        <a:defRPr b="0" i="0" sz="1400" u="none" cap="none" strike="noStrike">
+        <a:defRPr sz="1400" b="0" i="0" u="none" strike="noStrike" cap="none">
           <a:solidFill>
             <a:srgbClr val="000000"/>
           </a:solidFill>
@@ -7609,7 +7844,7 @@
           <a:sym typeface="Arial"/>
         </a:defRPr>
       </a:lvl4pPr>
-      <a:lvl5pPr lvl="4" marR="0" rtl="0" algn="l">
+      <a:lvl5pPr marR="0" lvl="4" algn="l" rtl="0">
         <a:lnSpc>
           <a:spcPct val="100000"/>
         </a:lnSpc>
@@ -7623,7 +7858,7 @@
           <a:srgbClr val="000000"/>
         </a:buClr>
         <a:buFont typeface="Arial"/>
-        <a:defRPr b="0" i="0" sz="1400" u="none" cap="none" strike="noStrike">
+        <a:defRPr sz="1400" b="0" i="0" u="none" strike="noStrike" cap="none">
           <a:solidFill>
             <a:srgbClr val="000000"/>
           </a:solidFill>
@@ -7633,7 +7868,7 @@
           <a:sym typeface="Arial"/>
         </a:defRPr>
       </a:lvl5pPr>
-      <a:lvl6pPr lvl="5" marR="0" rtl="0" algn="l">
+      <a:lvl6pPr marR="0" lvl="5" algn="l" rtl="0">
         <a:lnSpc>
           <a:spcPct val="100000"/>
         </a:lnSpc>
@@ -7647,7 +7882,7 @@
           <a:srgbClr val="000000"/>
         </a:buClr>
         <a:buFont typeface="Arial"/>
-        <a:defRPr b="0" i="0" sz="1400" u="none" cap="none" strike="noStrike">
+        <a:defRPr sz="1400" b="0" i="0" u="none" strike="noStrike" cap="none">
           <a:solidFill>
             <a:srgbClr val="000000"/>
           </a:solidFill>
@@ -7657,7 +7892,7 @@
           <a:sym typeface="Arial"/>
         </a:defRPr>
       </a:lvl6pPr>
-      <a:lvl7pPr lvl="6" marR="0" rtl="0" algn="l">
+      <a:lvl7pPr marR="0" lvl="6" algn="l" rtl="0">
         <a:lnSpc>
           <a:spcPct val="100000"/>
         </a:lnSpc>
@@ -7671,7 +7906,7 @@
           <a:srgbClr val="000000"/>
         </a:buClr>
         <a:buFont typeface="Arial"/>
-        <a:defRPr b="0" i="0" sz="1400" u="none" cap="none" strike="noStrike">
+        <a:defRPr sz="1400" b="0" i="0" u="none" strike="noStrike" cap="none">
           <a:solidFill>
             <a:srgbClr val="000000"/>
           </a:solidFill>
@@ -7681,7 +7916,7 @@
           <a:sym typeface="Arial"/>
         </a:defRPr>
       </a:lvl7pPr>
-      <a:lvl8pPr lvl="7" marR="0" rtl="0" algn="l">
+      <a:lvl8pPr marR="0" lvl="7" algn="l" rtl="0">
         <a:lnSpc>
           <a:spcPct val="100000"/>
         </a:lnSpc>
@@ -7695,7 +7930,7 @@
           <a:srgbClr val="000000"/>
         </a:buClr>
         <a:buFont typeface="Arial"/>
-        <a:defRPr b="0" i="0" sz="1400" u="none" cap="none" strike="noStrike">
+        <a:defRPr sz="1400" b="0" i="0" u="none" strike="noStrike" cap="none">
           <a:solidFill>
             <a:srgbClr val="000000"/>
           </a:solidFill>
@@ -7705,7 +7940,7 @@
           <a:sym typeface="Arial"/>
         </a:defRPr>
       </a:lvl8pPr>
-      <a:lvl9pPr lvl="8" marR="0" rtl="0" algn="l">
+      <a:lvl9pPr marR="0" lvl="8" algn="l" rtl="0">
         <a:lnSpc>
           <a:spcPct val="100000"/>
         </a:lnSpc>
@@ -7719,7 +7954,7 @@
           <a:srgbClr val="000000"/>
         </a:buClr>
         <a:buFont typeface="Arial"/>
-        <a:defRPr b="0" i="0" sz="1400" u="none" cap="none" strike="noStrike">
+        <a:defRPr sz="1400" b="0" i="0" u="none" strike="noStrike" cap="none">
           <a:solidFill>
             <a:srgbClr val="000000"/>
           </a:solidFill>
@@ -7735,18 +7970,19 @@
 </file>
 
 <file path=ppt/slides/slide1.xml><?xml version="1.0" encoding="utf-8"?>
-<p:sld xmlns:a="http://schemas.openxmlformats.org/drawingml/2006/main" xmlns:r="http://schemas.openxmlformats.org/officeDocument/2006/relationships" xmlns:mc="http://schemas.openxmlformats.org/markup-compatibility/2006" xmlns:mv="urn:schemas-microsoft-com:mac:vml" xmlns:p="http://schemas.openxmlformats.org/presentationml/2006/main" xmlns:c="http://schemas.openxmlformats.org/drawingml/2006/chart" xmlns:dgm="http://schemas.openxmlformats.org/drawingml/2006/diagram" xmlns:o="urn:schemas-microsoft-com:office:office" xmlns:v="urn:schemas-microsoft-com:vml" xmlns:pvml="urn:schemas-microsoft-com:office:powerpoint" xmlns:com="http://schemas.openxmlformats.org/drawingml/2006/compatibility" xmlns:p14="http://schemas.microsoft.com/office/powerpoint/2010/main" xmlns:p15="http://schemas.microsoft.com/office/powerpoint/2012/main" xmlns:ahyp="http://schemas.microsoft.com/office/drawing/2018/hyperlinkcolor">
+<p:sld xmlns:a="http://schemas.openxmlformats.org/drawingml/2006/main" xmlns:r="http://schemas.openxmlformats.org/officeDocument/2006/relationships" xmlns:p="http://schemas.openxmlformats.org/presentationml/2006/main">
   <p:cSld>
     <p:bg>
       <p:bgPr>
         <a:solidFill>
           <a:srgbClr val="00979C"/>
         </a:solidFill>
+        <a:effectLst/>
       </p:bgPr>
     </p:bg>
     <p:spTree>
       <p:nvGrpSpPr>
-        <p:cNvPr id="53" name="Shape 53"/>
+        <p:cNvPr id="1" name="Shape 53"/>
         <p:cNvGrpSpPr/>
         <p:nvPr/>
       </p:nvGrpSpPr>
@@ -7789,7 +8025,9 @@
       <p:sp>
         <p:nvSpPr>
           <p:cNvPr id="55" name="Google Shape;55;p13"/>
-          <p:cNvSpPr txBox="1"/>
+          <p:cNvSpPr txBox="1">
+            <a:spLocks noGrp="1"/>
+          </p:cNvSpPr>
           <p:nvPr>
             <p:ph type="ctrTitle"/>
           </p:nvPr>
@@ -7804,12 +8042,12 @@
           </a:prstGeom>
         </p:spPr>
         <p:txBody>
-          <a:bodyPr anchorCtr="0" anchor="b" bIns="91425" lIns="91425" spcFirstLastPara="1" rIns="91425" wrap="square" tIns="91425">
+          <a:bodyPr spcFirstLastPara="1" wrap="square" lIns="91425" tIns="91425" rIns="91425" bIns="91425" anchor="b" anchorCtr="0">
             <a:normAutofit/>
           </a:bodyPr>
           <a:lstStyle/>
           <a:p>
-            <a:pPr indent="0" lvl="0" marL="0" rtl="0" algn="ctr">
+            <a:pPr marL="0" lvl="0" indent="0" algn="ctr" rtl="0">
               <a:spcBef>
                 <a:spcPts val="0"/>
               </a:spcBef>
@@ -7837,9 +8075,11 @@
       <p:sp>
         <p:nvSpPr>
           <p:cNvPr id="56" name="Google Shape;56;p13"/>
-          <p:cNvSpPr txBox="1"/>
+          <p:cNvSpPr txBox="1">
+            <a:spLocks noGrp="1"/>
+          </p:cNvSpPr>
           <p:nvPr>
-            <p:ph idx="1" type="subTitle"/>
+            <p:ph type="subTitle" idx="1"/>
           </p:nvPr>
         </p:nvSpPr>
         <p:spPr>
@@ -7852,12 +8092,12 @@
           </a:prstGeom>
         </p:spPr>
         <p:txBody>
-          <a:bodyPr anchorCtr="0" anchor="t" bIns="91425" lIns="91425" spcFirstLastPara="1" rIns="91425" wrap="square" tIns="91425">
+          <a:bodyPr spcFirstLastPara="1" wrap="square" lIns="91425" tIns="91425" rIns="91425" bIns="91425" anchor="t" anchorCtr="0">
             <a:normAutofit/>
           </a:bodyPr>
           <a:lstStyle/>
           <a:p>
-            <a:pPr indent="0" lvl="0" marL="0" rtl="0" algn="ctr">
+            <a:pPr marL="0" lvl="0" indent="0" algn="ctr" rtl="0">
               <a:spcBef>
                 <a:spcPts val="0"/>
               </a:spcBef>
@@ -7891,11 +8131,11 @@
 </file>
 
 <file path=ppt/slides/slide10.xml><?xml version="1.0" encoding="utf-8"?>
-<p:sld xmlns:a="http://schemas.openxmlformats.org/drawingml/2006/main" xmlns:r="http://schemas.openxmlformats.org/officeDocument/2006/relationships" xmlns:mc="http://schemas.openxmlformats.org/markup-compatibility/2006" xmlns:mv="urn:schemas-microsoft-com:mac:vml" xmlns:p="http://schemas.openxmlformats.org/presentationml/2006/main" xmlns:c="http://schemas.openxmlformats.org/drawingml/2006/chart" xmlns:dgm="http://schemas.openxmlformats.org/drawingml/2006/diagram" xmlns:o="urn:schemas-microsoft-com:office:office" xmlns:v="urn:schemas-microsoft-com:vml" xmlns:pvml="urn:schemas-microsoft-com:office:powerpoint" xmlns:com="http://schemas.openxmlformats.org/drawingml/2006/compatibility" xmlns:p14="http://schemas.microsoft.com/office/powerpoint/2010/main" xmlns:p15="http://schemas.microsoft.com/office/powerpoint/2012/main" xmlns:ahyp="http://schemas.microsoft.com/office/drawing/2018/hyperlinkcolor">
+<p:sld xmlns:a="http://schemas.openxmlformats.org/drawingml/2006/main" xmlns:r="http://schemas.openxmlformats.org/officeDocument/2006/relationships" xmlns:p="http://schemas.openxmlformats.org/presentationml/2006/main">
   <p:cSld>
     <p:spTree>
       <p:nvGrpSpPr>
-        <p:cNvPr id="113" name="Shape 113"/>
+        <p:cNvPr id="1" name="Shape 113"/>
         <p:cNvGrpSpPr/>
         <p:nvPr/>
       </p:nvGrpSpPr>
@@ -7938,7 +8178,9 @@
       <p:sp>
         <p:nvSpPr>
           <p:cNvPr id="115" name="Google Shape;115;p22"/>
-          <p:cNvSpPr txBox="1"/>
+          <p:cNvSpPr txBox="1">
+            <a:spLocks noGrp="1"/>
+          </p:cNvSpPr>
           <p:nvPr>
             <p:ph type="title"/>
           </p:nvPr>
@@ -7953,12 +8195,12 @@
           </a:prstGeom>
         </p:spPr>
         <p:txBody>
-          <a:bodyPr anchorCtr="0" anchor="t" bIns="91425" lIns="91425" spcFirstLastPara="1" rIns="91425" wrap="square" tIns="91425">
+          <a:bodyPr spcFirstLastPara="1" wrap="square" lIns="91425" tIns="91425" rIns="91425" bIns="91425" anchor="t" anchorCtr="0">
             <a:normAutofit fontScale="90000"/>
           </a:bodyPr>
           <a:lstStyle/>
           <a:p>
-            <a:pPr indent="0" lvl="0" marL="0" rtl="0" algn="l">
+            <a:pPr marL="0" lvl="0" indent="0" algn="l" rtl="0">
               <a:spcBef>
                 <a:spcPts val="0"/>
               </a:spcBef>
@@ -7978,9 +8220,11 @@
       <p:sp>
         <p:nvSpPr>
           <p:cNvPr id="116" name="Google Shape;116;p22"/>
-          <p:cNvSpPr txBox="1"/>
+          <p:cNvSpPr txBox="1">
+            <a:spLocks noGrp="1"/>
+          </p:cNvSpPr>
           <p:nvPr>
-            <p:ph idx="1" type="body"/>
+            <p:ph type="body" idx="1"/>
           </p:nvPr>
         </p:nvSpPr>
         <p:spPr>
@@ -7993,12 +8237,12 @@
           </a:prstGeom>
         </p:spPr>
         <p:txBody>
-          <a:bodyPr anchorCtr="0" anchor="t" bIns="91425" lIns="91425" spcFirstLastPara="1" rIns="91425" wrap="square" tIns="91425">
+          <a:bodyPr spcFirstLastPara="1" wrap="square" lIns="91425" tIns="91425" rIns="91425" bIns="91425" anchor="t" anchorCtr="0">
             <a:normAutofit fontScale="92500"/>
           </a:bodyPr>
           <a:lstStyle/>
           <a:p>
-            <a:pPr indent="0" lvl="0" marL="0" rtl="0" algn="ctr">
+            <a:pPr marL="0" lvl="0" indent="0" algn="ctr" rtl="0">
               <a:spcBef>
                 <a:spcPts val="0"/>
               </a:spcBef>
@@ -8024,11 +8268,11 @@
 </file>
 
 <file path=ppt/slides/slide11.xml><?xml version="1.0" encoding="utf-8"?>
-<p:sld xmlns:a="http://schemas.openxmlformats.org/drawingml/2006/main" xmlns:r="http://schemas.openxmlformats.org/officeDocument/2006/relationships" xmlns:mc="http://schemas.openxmlformats.org/markup-compatibility/2006" xmlns:mv="urn:schemas-microsoft-com:mac:vml" xmlns:p="http://schemas.openxmlformats.org/presentationml/2006/main" xmlns:c="http://schemas.openxmlformats.org/drawingml/2006/chart" xmlns:dgm="http://schemas.openxmlformats.org/drawingml/2006/diagram" xmlns:o="urn:schemas-microsoft-com:office:office" xmlns:v="urn:schemas-microsoft-com:vml" xmlns:pvml="urn:schemas-microsoft-com:office:powerpoint" xmlns:com="http://schemas.openxmlformats.org/drawingml/2006/compatibility" xmlns:p14="http://schemas.microsoft.com/office/powerpoint/2010/main" xmlns:p15="http://schemas.microsoft.com/office/powerpoint/2012/main" xmlns:ahyp="http://schemas.microsoft.com/office/drawing/2018/hyperlinkcolor">
+<p:sld xmlns:a="http://schemas.openxmlformats.org/drawingml/2006/main" xmlns:r="http://schemas.openxmlformats.org/officeDocument/2006/relationships" xmlns:p="http://schemas.openxmlformats.org/presentationml/2006/main">
   <p:cSld>
     <p:spTree>
       <p:nvGrpSpPr>
-        <p:cNvPr id="120" name="Shape 120"/>
+        <p:cNvPr id="1" name="Shape 120"/>
         <p:cNvGrpSpPr/>
         <p:nvPr/>
       </p:nvGrpSpPr>
@@ -8043,7 +8287,9 @@
       <p:sp>
         <p:nvSpPr>
           <p:cNvPr id="121" name="Google Shape;121;p23"/>
-          <p:cNvSpPr txBox="1"/>
+          <p:cNvSpPr txBox="1">
+            <a:spLocks noGrp="1"/>
+          </p:cNvSpPr>
           <p:nvPr>
             <p:ph type="title"/>
           </p:nvPr>
@@ -8058,12 +8304,12 @@
           </a:prstGeom>
         </p:spPr>
         <p:txBody>
-          <a:bodyPr anchorCtr="0" anchor="t" bIns="91425" lIns="91425" spcFirstLastPara="1" rIns="91425" wrap="square" tIns="91425">
+          <a:bodyPr spcFirstLastPara="1" wrap="square" lIns="91425" tIns="91425" rIns="91425" bIns="91425" anchor="t" anchorCtr="0">
             <a:normAutofit fontScale="90000"/>
           </a:bodyPr>
           <a:lstStyle/>
           <a:p>
-            <a:pPr indent="0" lvl="0" marL="0" rtl="0" algn="l">
+            <a:pPr marL="0" lvl="0" indent="0" algn="l" rtl="0">
               <a:spcBef>
                 <a:spcPts val="0"/>
               </a:spcBef>
@@ -8083,9 +8329,11 @@
       <p:sp>
         <p:nvSpPr>
           <p:cNvPr id="122" name="Google Shape;122;p23"/>
-          <p:cNvSpPr txBox="1"/>
+          <p:cNvSpPr txBox="1">
+            <a:spLocks noGrp="1"/>
+          </p:cNvSpPr>
           <p:nvPr>
-            <p:ph idx="1" type="body"/>
+            <p:ph type="body" idx="1"/>
           </p:nvPr>
         </p:nvSpPr>
         <p:spPr>
@@ -8098,12 +8346,12 @@
           </a:prstGeom>
         </p:spPr>
         <p:txBody>
-          <a:bodyPr anchorCtr="0" anchor="t" bIns="91425" lIns="91425" spcFirstLastPara="1" rIns="91425" wrap="square" tIns="91425">
+          <a:bodyPr spcFirstLastPara="1" wrap="square" lIns="91425" tIns="91425" rIns="91425" bIns="91425" anchor="t" anchorCtr="0">
             <a:normAutofit/>
           </a:bodyPr>
           <a:lstStyle/>
           <a:p>
-            <a:pPr indent="0" lvl="0" marL="0" rtl="0" algn="l">
+            <a:pPr marL="0" lvl="0" indent="0" algn="l" rtl="0">
               <a:spcBef>
                 <a:spcPts val="0"/>
               </a:spcBef>
@@ -8112,9 +8360,6 @@
               </a:spcAft>
               <a:buNone/>
             </a:pPr>
-            <a:r>
-              <a:t/>
-            </a:r>
             <a:endParaRPr/>
           </a:p>
         </p:txBody>
@@ -8156,11 +8401,11 @@
 </file>
 
 <file path=ppt/slides/slide12.xml><?xml version="1.0" encoding="utf-8"?>
-<p:sld xmlns:a="http://schemas.openxmlformats.org/drawingml/2006/main" xmlns:r="http://schemas.openxmlformats.org/officeDocument/2006/relationships" xmlns:mc="http://schemas.openxmlformats.org/markup-compatibility/2006" xmlns:mv="urn:schemas-microsoft-com:mac:vml" xmlns:p="http://schemas.openxmlformats.org/presentationml/2006/main" xmlns:c="http://schemas.openxmlformats.org/drawingml/2006/chart" xmlns:dgm="http://schemas.openxmlformats.org/drawingml/2006/diagram" xmlns:o="urn:schemas-microsoft-com:office:office" xmlns:v="urn:schemas-microsoft-com:vml" xmlns:pvml="urn:schemas-microsoft-com:office:powerpoint" xmlns:com="http://schemas.openxmlformats.org/drawingml/2006/compatibility" xmlns:p14="http://schemas.microsoft.com/office/powerpoint/2010/main" xmlns:p15="http://schemas.microsoft.com/office/powerpoint/2012/main" xmlns:ahyp="http://schemas.microsoft.com/office/drawing/2018/hyperlinkcolor">
+<p:sld xmlns:a="http://schemas.openxmlformats.org/drawingml/2006/main" xmlns:r="http://schemas.openxmlformats.org/officeDocument/2006/relationships" xmlns:p="http://schemas.openxmlformats.org/presentationml/2006/main">
   <p:cSld>
     <p:spTree>
       <p:nvGrpSpPr>
-        <p:cNvPr id="127" name="Shape 127"/>
+        <p:cNvPr id="1" name="Shape 127"/>
         <p:cNvGrpSpPr/>
         <p:nvPr/>
       </p:nvGrpSpPr>
@@ -8175,7 +8420,9 @@
       <p:sp>
         <p:nvSpPr>
           <p:cNvPr id="128" name="Google Shape;128;p24"/>
-          <p:cNvSpPr txBox="1"/>
+          <p:cNvSpPr txBox="1">
+            <a:spLocks noGrp="1"/>
+          </p:cNvSpPr>
           <p:nvPr>
             <p:ph type="title"/>
           </p:nvPr>
@@ -8190,12 +8437,12 @@
           </a:prstGeom>
         </p:spPr>
         <p:txBody>
-          <a:bodyPr anchorCtr="0" anchor="t" bIns="91425" lIns="91425" spcFirstLastPara="1" rIns="91425" wrap="square" tIns="91425">
+          <a:bodyPr spcFirstLastPara="1" wrap="square" lIns="91425" tIns="91425" rIns="91425" bIns="91425" anchor="t" anchorCtr="0">
             <a:normAutofit fontScale="90000"/>
           </a:bodyPr>
           <a:lstStyle/>
           <a:p>
-            <a:pPr indent="0" lvl="0" marL="0" rtl="0" algn="l">
+            <a:pPr marL="0" lvl="0" indent="0" algn="l" rtl="0">
               <a:spcBef>
                 <a:spcPts val="0"/>
               </a:spcBef>
@@ -8215,9 +8462,11 @@
       <p:sp>
         <p:nvSpPr>
           <p:cNvPr id="129" name="Google Shape;129;p24"/>
-          <p:cNvSpPr txBox="1"/>
+          <p:cNvSpPr txBox="1">
+            <a:spLocks noGrp="1"/>
+          </p:cNvSpPr>
           <p:nvPr>
-            <p:ph idx="1" type="body"/>
+            <p:ph type="body" idx="1"/>
           </p:nvPr>
         </p:nvSpPr>
         <p:spPr>
@@ -8230,12 +8479,12 @@
           </a:prstGeom>
         </p:spPr>
         <p:txBody>
-          <a:bodyPr anchorCtr="0" anchor="t" bIns="91425" lIns="91425" spcFirstLastPara="1" rIns="91425" wrap="square" tIns="91425">
+          <a:bodyPr spcFirstLastPara="1" wrap="square" lIns="91425" tIns="91425" rIns="91425" bIns="91425" anchor="t" anchorCtr="0">
             <a:normAutofit lnSpcReduction="20000"/>
           </a:bodyPr>
           <a:lstStyle/>
           <a:p>
-            <a:pPr indent="0" lvl="0" marL="0" rtl="0" algn="l">
+            <a:pPr marL="0" lvl="0" indent="0" algn="l" rtl="0">
               <a:spcBef>
                 <a:spcPts val="0"/>
               </a:spcBef>
@@ -8251,7 +8500,7 @@
             <a:endParaRPr/>
           </a:p>
           <a:p>
-            <a:pPr indent="0" lvl="0" marL="0" rtl="0" algn="l">
+            <a:pPr marL="0" lvl="0" indent="0" algn="l" rtl="0">
               <a:spcBef>
                 <a:spcPts val="1200"/>
               </a:spcBef>
@@ -8260,13 +8509,10 @@
               </a:spcAft>
               <a:buNone/>
             </a:pPr>
-            <a:r>
-              <a:t/>
-            </a:r>
-            <a:endParaRPr/>
-          </a:p>
-          <a:p>
-            <a:pPr indent="0" lvl="0" marL="0" rtl="0" algn="l">
+            <a:endParaRPr/>
+          </a:p>
+          <a:p>
+            <a:pPr marL="0" lvl="0" indent="0" algn="l" rtl="0">
               <a:spcBef>
                 <a:spcPts val="1200"/>
               </a:spcBef>
@@ -8282,7 +8528,7 @@
             <a:endParaRPr/>
           </a:p>
           <a:p>
-            <a:pPr indent="0" lvl="0" marL="0" rtl="0" algn="l">
+            <a:pPr marL="0" lvl="0" indent="0" algn="l" rtl="0">
               <a:spcBef>
                 <a:spcPts val="1200"/>
               </a:spcBef>
@@ -8291,9 +8537,6 @@
               </a:spcAft>
               <a:buNone/>
             </a:pPr>
-            <a:r>
-              <a:t/>
-            </a:r>
             <a:endParaRPr/>
           </a:p>
         </p:txBody>
@@ -8335,11 +8578,11 @@
 </file>
 
 <file path=ppt/slides/slide13.xml><?xml version="1.0" encoding="utf-8"?>
-<p:sld xmlns:a="http://schemas.openxmlformats.org/drawingml/2006/main" xmlns:r="http://schemas.openxmlformats.org/officeDocument/2006/relationships" xmlns:mc="http://schemas.openxmlformats.org/markup-compatibility/2006" xmlns:mv="urn:schemas-microsoft-com:mac:vml" xmlns:p="http://schemas.openxmlformats.org/presentationml/2006/main" xmlns:c="http://schemas.openxmlformats.org/drawingml/2006/chart" xmlns:dgm="http://schemas.openxmlformats.org/drawingml/2006/diagram" xmlns:o="urn:schemas-microsoft-com:office:office" xmlns:v="urn:schemas-microsoft-com:vml" xmlns:pvml="urn:schemas-microsoft-com:office:powerpoint" xmlns:com="http://schemas.openxmlformats.org/drawingml/2006/compatibility" xmlns:p14="http://schemas.microsoft.com/office/powerpoint/2010/main" xmlns:p15="http://schemas.microsoft.com/office/powerpoint/2012/main" xmlns:ahyp="http://schemas.microsoft.com/office/drawing/2018/hyperlinkcolor">
+<p:sld xmlns:a="http://schemas.openxmlformats.org/drawingml/2006/main" xmlns:r="http://schemas.openxmlformats.org/officeDocument/2006/relationships" xmlns:p="http://schemas.openxmlformats.org/presentationml/2006/main">
   <p:cSld>
     <p:spTree>
       <p:nvGrpSpPr>
-        <p:cNvPr id="134" name="Shape 134"/>
+        <p:cNvPr id="1" name="Shape 134"/>
         <p:cNvGrpSpPr/>
         <p:nvPr/>
       </p:nvGrpSpPr>
@@ -8354,7 +8597,9 @@
       <p:sp>
         <p:nvSpPr>
           <p:cNvPr id="135" name="Google Shape;135;p25"/>
-          <p:cNvSpPr txBox="1"/>
+          <p:cNvSpPr txBox="1">
+            <a:spLocks noGrp="1"/>
+          </p:cNvSpPr>
           <p:nvPr>
             <p:ph type="title"/>
           </p:nvPr>
@@ -8369,12 +8614,12 @@
           </a:prstGeom>
         </p:spPr>
         <p:txBody>
-          <a:bodyPr anchorCtr="0" anchor="t" bIns="91425" lIns="91425" spcFirstLastPara="1" rIns="91425" wrap="square" tIns="91425">
+          <a:bodyPr spcFirstLastPara="1" wrap="square" lIns="91425" tIns="91425" rIns="91425" bIns="91425" anchor="t" anchorCtr="0">
             <a:normAutofit fontScale="90000"/>
           </a:bodyPr>
           <a:lstStyle/>
           <a:p>
-            <a:pPr indent="0" lvl="0" marL="0" rtl="0" algn="l">
+            <a:pPr marL="0" lvl="0" indent="0" algn="l" rtl="0">
               <a:spcBef>
                 <a:spcPts val="0"/>
               </a:spcBef>
@@ -8394,9 +8639,11 @@
       <p:sp>
         <p:nvSpPr>
           <p:cNvPr id="136" name="Google Shape;136;p25"/>
-          <p:cNvSpPr txBox="1"/>
+          <p:cNvSpPr txBox="1">
+            <a:spLocks noGrp="1"/>
+          </p:cNvSpPr>
           <p:nvPr>
-            <p:ph idx="1" type="body"/>
+            <p:ph type="body" idx="1"/>
           </p:nvPr>
         </p:nvSpPr>
         <p:spPr>
@@ -8409,12 +8656,12 @@
           </a:prstGeom>
         </p:spPr>
         <p:txBody>
-          <a:bodyPr anchorCtr="0" anchor="t" bIns="91425" lIns="91425" spcFirstLastPara="1" rIns="91425" wrap="square" tIns="91425">
+          <a:bodyPr spcFirstLastPara="1" wrap="square" lIns="91425" tIns="91425" rIns="91425" bIns="91425" anchor="t" anchorCtr="0">
             <a:normAutofit/>
           </a:bodyPr>
           <a:lstStyle/>
           <a:p>
-            <a:pPr indent="0" lvl="0" marL="0" rtl="0" algn="l">
+            <a:pPr marL="0" lvl="0" indent="0" algn="l" rtl="0">
               <a:spcBef>
                 <a:spcPts val="0"/>
               </a:spcBef>
@@ -8468,11 +8715,11 @@
 </file>
 
 <file path=ppt/slides/slide14.xml><?xml version="1.0" encoding="utf-8"?>
-<p:sld xmlns:a="http://schemas.openxmlformats.org/drawingml/2006/main" xmlns:r="http://schemas.openxmlformats.org/officeDocument/2006/relationships" xmlns:mc="http://schemas.openxmlformats.org/markup-compatibility/2006" xmlns:mv="urn:schemas-microsoft-com:mac:vml" xmlns:p="http://schemas.openxmlformats.org/presentationml/2006/main" xmlns:c="http://schemas.openxmlformats.org/drawingml/2006/chart" xmlns:dgm="http://schemas.openxmlformats.org/drawingml/2006/diagram" xmlns:o="urn:schemas-microsoft-com:office:office" xmlns:v="urn:schemas-microsoft-com:vml" xmlns:pvml="urn:schemas-microsoft-com:office:powerpoint" xmlns:com="http://schemas.openxmlformats.org/drawingml/2006/compatibility" xmlns:p14="http://schemas.microsoft.com/office/powerpoint/2010/main" xmlns:p15="http://schemas.microsoft.com/office/powerpoint/2012/main" xmlns:ahyp="http://schemas.microsoft.com/office/drawing/2018/hyperlinkcolor">
+<p:sld xmlns:a="http://schemas.openxmlformats.org/drawingml/2006/main" xmlns:r="http://schemas.openxmlformats.org/officeDocument/2006/relationships" xmlns:p="http://schemas.openxmlformats.org/presentationml/2006/main">
   <p:cSld>
     <p:spTree>
       <p:nvGrpSpPr>
-        <p:cNvPr id="141" name="Shape 141"/>
+        <p:cNvPr id="1" name="Shape 141"/>
         <p:cNvGrpSpPr/>
         <p:nvPr/>
       </p:nvGrpSpPr>
@@ -8487,7 +8734,9 @@
       <p:sp>
         <p:nvSpPr>
           <p:cNvPr id="142" name="Google Shape;142;p26"/>
-          <p:cNvSpPr txBox="1"/>
+          <p:cNvSpPr txBox="1">
+            <a:spLocks noGrp="1"/>
+          </p:cNvSpPr>
           <p:nvPr>
             <p:ph type="title"/>
           </p:nvPr>
@@ -8502,12 +8751,12 @@
           </a:prstGeom>
         </p:spPr>
         <p:txBody>
-          <a:bodyPr anchorCtr="0" anchor="t" bIns="91425" lIns="91425" spcFirstLastPara="1" rIns="91425" wrap="square" tIns="91425">
+          <a:bodyPr spcFirstLastPara="1" wrap="square" lIns="91425" tIns="91425" rIns="91425" bIns="91425" anchor="t" anchorCtr="0">
             <a:normAutofit fontScale="90000"/>
           </a:bodyPr>
           <a:lstStyle/>
           <a:p>
-            <a:pPr indent="0" lvl="0" marL="0" rtl="0" algn="l">
+            <a:pPr marL="0" lvl="0" indent="0" algn="l" rtl="0">
               <a:spcBef>
                 <a:spcPts val="0"/>
               </a:spcBef>
@@ -8527,9 +8776,11 @@
       <p:sp>
         <p:nvSpPr>
           <p:cNvPr id="143" name="Google Shape;143;p26"/>
-          <p:cNvSpPr txBox="1"/>
+          <p:cNvSpPr txBox="1">
+            <a:spLocks noGrp="1"/>
+          </p:cNvSpPr>
           <p:nvPr>
-            <p:ph idx="1" type="body"/>
+            <p:ph type="body" idx="1"/>
           </p:nvPr>
         </p:nvSpPr>
         <p:spPr>
@@ -8542,12 +8793,12 @@
           </a:prstGeom>
         </p:spPr>
         <p:txBody>
-          <a:bodyPr anchorCtr="0" anchor="t" bIns="91425" lIns="91425" spcFirstLastPara="1" rIns="91425" wrap="square" tIns="91425">
+          <a:bodyPr spcFirstLastPara="1" wrap="square" lIns="91425" tIns="91425" rIns="91425" bIns="91425" anchor="t" anchorCtr="0">
             <a:normAutofit/>
           </a:bodyPr>
           <a:lstStyle/>
           <a:p>
-            <a:pPr indent="0" lvl="0" marL="0" rtl="0" algn="l">
+            <a:pPr marL="0" lvl="0" indent="0" algn="l" rtl="0">
               <a:spcBef>
                 <a:spcPts val="0"/>
               </a:spcBef>
@@ -8563,7 +8814,7 @@
             <a:endParaRPr/>
           </a:p>
           <a:p>
-            <a:pPr indent="0" lvl="0" marL="0" rtl="0" algn="l">
+            <a:pPr marL="0" lvl="0" indent="0" algn="l" rtl="0">
               <a:spcBef>
                 <a:spcPts val="1200"/>
               </a:spcBef>
@@ -8572,13 +8823,10 @@
               </a:spcAft>
               <a:buNone/>
             </a:pPr>
-            <a:r>
-              <a:t/>
-            </a:r>
-            <a:endParaRPr/>
-          </a:p>
-          <a:p>
-            <a:pPr indent="0" lvl="0" marL="0" rtl="0" algn="l">
+            <a:endParaRPr/>
+          </a:p>
+          <a:p>
+            <a:pPr marL="0" lvl="0" indent="0" algn="l" rtl="0">
               <a:spcBef>
                 <a:spcPts val="1200"/>
               </a:spcBef>
@@ -8612,34 +8860,31 @@
           <a:solidFill>
             <a:schemeClr val="lt2"/>
           </a:solidFill>
-          <a:ln cap="flat" cmpd="sng" w="9525">
+          <a:ln w="9525" cap="flat" cmpd="sng">
             <a:solidFill>
               <a:schemeClr val="dk2"/>
             </a:solidFill>
             <a:prstDash val="solid"/>
             <a:round/>
-            <a:headEnd len="sm" w="sm" type="none"/>
-            <a:tailEnd len="sm" w="sm" type="none"/>
+            <a:headEnd type="none" w="sm" len="sm"/>
+            <a:tailEnd type="none" w="sm" len="sm"/>
           </a:ln>
         </p:spPr>
         <p:txBody>
-          <a:bodyPr anchorCtr="0" anchor="ctr" bIns="91425" lIns="91425" spcFirstLastPara="1" rIns="91425" wrap="square" tIns="91425">
+          <a:bodyPr spcFirstLastPara="1" wrap="square" lIns="91425" tIns="91425" rIns="91425" bIns="91425" anchor="ctr" anchorCtr="0">
             <a:noAutofit/>
           </a:bodyPr>
           <a:lstStyle/>
           <a:p>
-            <a:pPr indent="0" lvl="0" marL="0" rtl="0" algn="ctr">
-              <a:spcBef>
-                <a:spcPts val="0"/>
-              </a:spcBef>
-              <a:spcAft>
-                <a:spcPts val="0"/>
-              </a:spcAft>
-              <a:buNone/>
-            </a:pPr>
-            <a:r>
-              <a:t/>
-            </a:r>
+            <a:pPr marL="0" lvl="0" indent="0" algn="ctr" rtl="0">
+              <a:spcBef>
+                <a:spcPts val="0"/>
+              </a:spcBef>
+              <a:spcAft>
+                <a:spcPts val="0"/>
+              </a:spcAft>
+              <a:buNone/>
+            </a:pPr>
             <a:endParaRPr/>
           </a:p>
         </p:txBody>
@@ -8661,34 +8906,31 @@
           <a:solidFill>
             <a:schemeClr val="lt2"/>
           </a:solidFill>
-          <a:ln cap="flat" cmpd="sng" w="9525">
+          <a:ln w="9525" cap="flat" cmpd="sng">
             <a:solidFill>
               <a:schemeClr val="dk2"/>
             </a:solidFill>
             <a:prstDash val="solid"/>
             <a:round/>
-            <a:headEnd len="sm" w="sm" type="none"/>
-            <a:tailEnd len="sm" w="sm" type="none"/>
+            <a:headEnd type="none" w="sm" len="sm"/>
+            <a:tailEnd type="none" w="sm" len="sm"/>
           </a:ln>
         </p:spPr>
         <p:txBody>
-          <a:bodyPr anchorCtr="0" anchor="ctr" bIns="91425" lIns="91425" spcFirstLastPara="1" rIns="91425" wrap="square" tIns="91425">
+          <a:bodyPr spcFirstLastPara="1" wrap="square" lIns="91425" tIns="91425" rIns="91425" bIns="91425" anchor="ctr" anchorCtr="0">
             <a:noAutofit/>
           </a:bodyPr>
           <a:lstStyle/>
           <a:p>
-            <a:pPr indent="0" lvl="0" marL="0" rtl="0" algn="ctr">
-              <a:spcBef>
-                <a:spcPts val="0"/>
-              </a:spcBef>
-              <a:spcAft>
-                <a:spcPts val="0"/>
-              </a:spcAft>
-              <a:buNone/>
-            </a:pPr>
-            <a:r>
-              <a:t/>
-            </a:r>
+            <a:pPr marL="0" lvl="0" indent="0" algn="ctr" rtl="0">
+              <a:spcBef>
+                <a:spcPts val="0"/>
+              </a:spcBef>
+              <a:spcAft>
+                <a:spcPts val="0"/>
+              </a:spcAft>
+              <a:buNone/>
+            </a:pPr>
             <a:endParaRPr/>
           </a:p>
         </p:txBody>
@@ -8710,34 +8952,31 @@
           <a:solidFill>
             <a:schemeClr val="lt2"/>
           </a:solidFill>
-          <a:ln cap="flat" cmpd="sng" w="9525">
+          <a:ln w="9525" cap="flat" cmpd="sng">
             <a:solidFill>
               <a:schemeClr val="dk2"/>
             </a:solidFill>
             <a:prstDash val="solid"/>
             <a:round/>
-            <a:headEnd len="sm" w="sm" type="none"/>
-            <a:tailEnd len="sm" w="sm" type="none"/>
+            <a:headEnd type="none" w="sm" len="sm"/>
+            <a:tailEnd type="none" w="sm" len="sm"/>
           </a:ln>
         </p:spPr>
         <p:txBody>
-          <a:bodyPr anchorCtr="0" anchor="ctr" bIns="91425" lIns="91425" spcFirstLastPara="1" rIns="91425" wrap="square" tIns="91425">
+          <a:bodyPr spcFirstLastPara="1" wrap="square" lIns="91425" tIns="91425" rIns="91425" bIns="91425" anchor="ctr" anchorCtr="0">
             <a:noAutofit/>
           </a:bodyPr>
           <a:lstStyle/>
           <a:p>
-            <a:pPr indent="0" lvl="0" marL="0" rtl="0" algn="ctr">
-              <a:spcBef>
-                <a:spcPts val="0"/>
-              </a:spcBef>
-              <a:spcAft>
-                <a:spcPts val="0"/>
-              </a:spcAft>
-              <a:buNone/>
-            </a:pPr>
-            <a:r>
-              <a:t/>
-            </a:r>
+            <a:pPr marL="0" lvl="0" indent="0" algn="ctr" rtl="0">
+              <a:spcBef>
+                <a:spcPts val="0"/>
+              </a:spcBef>
+              <a:spcAft>
+                <a:spcPts val="0"/>
+              </a:spcAft>
+              <a:buNone/>
+            </a:pPr>
             <a:endParaRPr/>
           </a:p>
         </p:txBody>
@@ -8762,12 +9001,12 @@
           </a:ln>
         </p:spPr>
         <p:txBody>
-          <a:bodyPr anchorCtr="0" anchor="t" bIns="91425" lIns="91425" spcFirstLastPara="1" rIns="91425" wrap="square" tIns="91425">
+          <a:bodyPr spcFirstLastPara="1" wrap="square" lIns="91425" tIns="91425" rIns="91425" bIns="91425" anchor="t" anchorCtr="0">
             <a:spAutoFit/>
           </a:bodyPr>
           <a:lstStyle/>
           <a:p>
-            <a:pPr indent="0" lvl="0" marL="0" rtl="0" algn="ctr">
+            <a:pPr marL="0" lvl="0" indent="0" algn="ctr" rtl="0">
               <a:spcBef>
                 <a:spcPts val="0"/>
               </a:spcBef>
@@ -8777,14 +9016,14 @@
               <a:buNone/>
             </a:pPr>
             <a:r>
-              <a:rPr b="1" lang="en" sz="1800">
+              <a:rPr lang="en" sz="1800" b="1">
                 <a:solidFill>
                   <a:schemeClr val="dk2"/>
                 </a:solidFill>
               </a:rPr>
               <a:t>LED OFF</a:t>
             </a:r>
-            <a:endParaRPr b="1" sz="1800">
+            <a:endParaRPr sz="1800" b="1">
               <a:solidFill>
                 <a:schemeClr val="dk2"/>
               </a:solidFill>
@@ -8812,12 +9051,12 @@
           </a:ln>
         </p:spPr>
         <p:txBody>
-          <a:bodyPr anchorCtr="0" anchor="t" bIns="91425" lIns="91425" spcFirstLastPara="1" rIns="91425" wrap="square" tIns="91425">
+          <a:bodyPr spcFirstLastPara="1" wrap="square" lIns="91425" tIns="91425" rIns="91425" bIns="91425" anchor="t" anchorCtr="0">
             <a:spAutoFit/>
           </a:bodyPr>
           <a:lstStyle/>
           <a:p>
-            <a:pPr indent="0" lvl="0" marL="0" rtl="0" algn="ctr">
+            <a:pPr marL="0" lvl="0" indent="0" algn="ctr" rtl="0">
               <a:spcBef>
                 <a:spcPts val="0"/>
               </a:spcBef>
@@ -8827,14 +9066,14 @@
               <a:buNone/>
             </a:pPr>
             <a:r>
-              <a:rPr b="1" lang="en" sz="1800">
+              <a:rPr lang="en" sz="1800" b="1">
                 <a:solidFill>
                   <a:schemeClr val="dk2"/>
                 </a:solidFill>
               </a:rPr>
               <a:t>LED BLINKING</a:t>
             </a:r>
-            <a:endParaRPr b="1" sz="1800">
+            <a:endParaRPr sz="1800" b="1">
               <a:solidFill>
                 <a:schemeClr val="dk2"/>
               </a:solidFill>
@@ -8862,12 +9101,12 @@
           </a:ln>
         </p:spPr>
         <p:txBody>
-          <a:bodyPr anchorCtr="0" anchor="t" bIns="91425" lIns="91425" spcFirstLastPara="1" rIns="91425" wrap="square" tIns="91425">
+          <a:bodyPr spcFirstLastPara="1" wrap="square" lIns="91425" tIns="91425" rIns="91425" bIns="91425" anchor="t" anchorCtr="0">
             <a:spAutoFit/>
           </a:bodyPr>
           <a:lstStyle/>
           <a:p>
-            <a:pPr indent="0" lvl="0" marL="0" rtl="0" algn="ctr">
+            <a:pPr marL="0" lvl="0" indent="0" algn="ctr" rtl="0">
               <a:spcBef>
                 <a:spcPts val="0"/>
               </a:spcBef>
@@ -8877,14 +9116,14 @@
               <a:buNone/>
             </a:pPr>
             <a:r>
-              <a:rPr b="1" lang="en" sz="1800">
+              <a:rPr lang="en" sz="1800" b="1">
                 <a:solidFill>
                   <a:schemeClr val="dk2"/>
                 </a:solidFill>
               </a:rPr>
               <a:t>LED FLASHING</a:t>
             </a:r>
-            <a:endParaRPr b="1" sz="1800">
+            <a:endParaRPr sz="1800" b="1">
               <a:solidFill>
                 <a:schemeClr val="dk2"/>
               </a:solidFill>
@@ -8912,12 +9151,12 @@
           </a:ln>
         </p:spPr>
         <p:txBody>
-          <a:bodyPr anchorCtr="0" anchor="t" bIns="91425" lIns="91425" spcFirstLastPara="1" rIns="91425" wrap="square" tIns="91425">
+          <a:bodyPr spcFirstLastPara="1" wrap="square" lIns="91425" tIns="91425" rIns="91425" bIns="91425" anchor="t" anchorCtr="0">
             <a:spAutoFit/>
           </a:bodyPr>
           <a:lstStyle/>
           <a:p>
-            <a:pPr indent="0" lvl="0" marL="0" rtl="0" algn="ctr">
+            <a:pPr marL="0" lvl="0" indent="0" algn="ctr" rtl="0">
               <a:spcBef>
                 <a:spcPts val="0"/>
               </a:spcBef>
@@ -8927,14 +9166,14 @@
               <a:buNone/>
             </a:pPr>
             <a:r>
-              <a:rPr b="1" lang="en" sz="1800">
+              <a:rPr lang="en" sz="1800" b="1">
                 <a:solidFill>
                   <a:schemeClr val="dk2"/>
                 </a:solidFill>
               </a:rPr>
               <a:t>Start</a:t>
             </a:r>
-            <a:endParaRPr b="1" sz="1800">
+            <a:endParaRPr sz="1800" b="1">
               <a:solidFill>
                 <a:schemeClr val="dk2"/>
               </a:solidFill>
@@ -8962,12 +9201,12 @@
           </a:ln>
         </p:spPr>
         <p:txBody>
-          <a:bodyPr anchorCtr="0" anchor="t" bIns="91425" lIns="91425" spcFirstLastPara="1" rIns="91425" wrap="square" tIns="91425">
+          <a:bodyPr spcFirstLastPara="1" wrap="square" lIns="91425" tIns="91425" rIns="91425" bIns="91425" anchor="t" anchorCtr="0">
             <a:spAutoFit/>
           </a:bodyPr>
           <a:lstStyle/>
           <a:p>
-            <a:pPr indent="0" lvl="0" marL="0" rtl="0" algn="ctr">
+            <a:pPr marL="0" lvl="0" indent="0" algn="ctr" rtl="0">
               <a:spcBef>
                 <a:spcPts val="0"/>
               </a:spcBef>
@@ -8977,7 +9216,7 @@
               <a:buNone/>
             </a:pPr>
             <a:r>
-              <a:rPr b="1" lang="en">
+              <a:rPr lang="en" b="1">
                 <a:solidFill>
                   <a:schemeClr val="dk2"/>
                 </a:solidFill>
@@ -9012,12 +9251,12 @@
           </a:ln>
         </p:spPr>
         <p:txBody>
-          <a:bodyPr anchorCtr="0" anchor="t" bIns="91425" lIns="91425" spcFirstLastPara="1" rIns="91425" wrap="square" tIns="91425">
+          <a:bodyPr spcFirstLastPara="1" wrap="square" lIns="91425" tIns="91425" rIns="91425" bIns="91425" anchor="t" anchorCtr="0">
             <a:spAutoFit/>
           </a:bodyPr>
           <a:lstStyle/>
           <a:p>
-            <a:pPr indent="0" lvl="0" marL="0" rtl="0" algn="ctr">
+            <a:pPr marL="0" lvl="0" indent="0" algn="ctr" rtl="0">
               <a:spcBef>
                 <a:spcPts val="0"/>
               </a:spcBef>
@@ -9027,7 +9266,7 @@
               <a:buNone/>
             </a:pPr>
             <a:r>
-              <a:rPr b="1" lang="en">
+              <a:rPr lang="en" b="1">
                 <a:solidFill>
                   <a:schemeClr val="dk2"/>
                 </a:solidFill>
@@ -9062,12 +9301,12 @@
           </a:ln>
         </p:spPr>
         <p:txBody>
-          <a:bodyPr anchorCtr="0" anchor="t" bIns="91425" lIns="91425" spcFirstLastPara="1" rIns="91425" wrap="square" tIns="91425">
+          <a:bodyPr spcFirstLastPara="1" wrap="square" lIns="91425" tIns="91425" rIns="91425" bIns="91425" anchor="t" anchorCtr="0">
             <a:spAutoFit/>
           </a:bodyPr>
           <a:lstStyle/>
           <a:p>
-            <a:pPr indent="0" lvl="0" marL="0" rtl="0" algn="ctr">
+            <a:pPr marL="0" lvl="0" indent="0" algn="ctr" rtl="0">
               <a:spcBef>
                 <a:spcPts val="0"/>
               </a:spcBef>
@@ -9077,7 +9316,7 @@
               <a:buNone/>
             </a:pPr>
             <a:r>
-              <a:rPr b="1" lang="en">
+              <a:rPr lang="en" b="1">
                 <a:solidFill>
                   <a:schemeClr val="dk2"/>
                 </a:solidFill>
@@ -9105,41 +9344,38 @@
           </a:xfrm>
           <a:prstGeom prst="rightArrow">
             <a:avLst>
-              <a:gd fmla="val 50000" name="adj1"/>
-              <a:gd fmla="val 50000" name="adj2"/>
+              <a:gd name="adj1" fmla="val 50000"/>
+              <a:gd name="adj2" fmla="val 50000"/>
             </a:avLst>
           </a:prstGeom>
           <a:solidFill>
             <a:srgbClr val="FF0000"/>
           </a:solidFill>
-          <a:ln cap="flat" cmpd="sng" w="9525">
+          <a:ln w="9525" cap="flat" cmpd="sng">
             <a:solidFill>
               <a:schemeClr val="dk2"/>
             </a:solidFill>
             <a:prstDash val="solid"/>
             <a:round/>
-            <a:headEnd len="sm" w="sm" type="none"/>
-            <a:tailEnd len="sm" w="sm" type="none"/>
+            <a:headEnd type="none" w="sm" len="sm"/>
+            <a:tailEnd type="none" w="sm" len="sm"/>
           </a:ln>
         </p:spPr>
         <p:txBody>
-          <a:bodyPr anchorCtr="0" anchor="ctr" bIns="91425" lIns="91425" spcFirstLastPara="1" rIns="91425" wrap="square" tIns="91425">
+          <a:bodyPr spcFirstLastPara="1" wrap="square" lIns="91425" tIns="91425" rIns="91425" bIns="91425" anchor="ctr" anchorCtr="0">
             <a:noAutofit/>
           </a:bodyPr>
           <a:lstStyle/>
           <a:p>
-            <a:pPr indent="0" lvl="0" marL="0" rtl="0" algn="ctr">
-              <a:spcBef>
-                <a:spcPts val="0"/>
-              </a:spcBef>
-              <a:spcAft>
-                <a:spcPts val="0"/>
-              </a:spcAft>
-              <a:buNone/>
-            </a:pPr>
-            <a:r>
-              <a:t/>
-            </a:r>
+            <a:pPr marL="0" lvl="0" indent="0" algn="ctr" rtl="0">
+              <a:spcBef>
+                <a:spcPts val="0"/>
+              </a:spcBef>
+              <a:spcAft>
+                <a:spcPts val="0"/>
+              </a:spcAft>
+              <a:buNone/>
+            </a:pPr>
             <a:endParaRPr/>
           </a:p>
         </p:txBody>
@@ -9157,41 +9393,38 @@
           </a:xfrm>
           <a:prstGeom prst="rightArrow">
             <a:avLst>
-              <a:gd fmla="val 50000" name="adj1"/>
-              <a:gd fmla="val 50000" name="adj2"/>
+              <a:gd name="adj1" fmla="val 50000"/>
+              <a:gd name="adj2" fmla="val 50000"/>
             </a:avLst>
           </a:prstGeom>
           <a:solidFill>
             <a:srgbClr val="FF0000"/>
           </a:solidFill>
-          <a:ln cap="flat" cmpd="sng" w="9525">
+          <a:ln w="9525" cap="flat" cmpd="sng">
             <a:solidFill>
               <a:schemeClr val="dk2"/>
             </a:solidFill>
             <a:prstDash val="solid"/>
             <a:round/>
-            <a:headEnd len="sm" w="sm" type="none"/>
-            <a:tailEnd len="sm" w="sm" type="none"/>
+            <a:headEnd type="none" w="sm" len="sm"/>
+            <a:tailEnd type="none" w="sm" len="sm"/>
           </a:ln>
         </p:spPr>
         <p:txBody>
-          <a:bodyPr anchorCtr="0" anchor="ctr" bIns="91425" lIns="91425" spcFirstLastPara="1" rIns="91425" wrap="square" tIns="91425">
+          <a:bodyPr spcFirstLastPara="1" wrap="square" lIns="91425" tIns="91425" rIns="91425" bIns="91425" anchor="ctr" anchorCtr="0">
             <a:noAutofit/>
           </a:bodyPr>
           <a:lstStyle/>
           <a:p>
-            <a:pPr indent="0" lvl="0" marL="0" rtl="0" algn="ctr">
-              <a:spcBef>
-                <a:spcPts val="0"/>
-              </a:spcBef>
-              <a:spcAft>
-                <a:spcPts val="0"/>
-              </a:spcAft>
-              <a:buNone/>
-            </a:pPr>
-            <a:r>
-              <a:t/>
-            </a:r>
+            <a:pPr marL="0" lvl="0" indent="0" algn="ctr" rtl="0">
+              <a:spcBef>
+                <a:spcPts val="0"/>
+              </a:spcBef>
+              <a:spcAft>
+                <a:spcPts val="0"/>
+              </a:spcAft>
+              <a:buNone/>
+            </a:pPr>
             <a:endParaRPr/>
           </a:p>
         </p:txBody>
@@ -9209,41 +9442,38 @@
           </a:xfrm>
           <a:prstGeom prst="rightArrow">
             <a:avLst>
-              <a:gd fmla="val 50000" name="adj1"/>
-              <a:gd fmla="val 50000" name="adj2"/>
+              <a:gd name="adj1" fmla="val 50000"/>
+              <a:gd name="adj2" fmla="val 50000"/>
             </a:avLst>
           </a:prstGeom>
           <a:solidFill>
             <a:srgbClr val="FF0000"/>
           </a:solidFill>
-          <a:ln cap="flat" cmpd="sng" w="9525">
+          <a:ln w="9525" cap="flat" cmpd="sng">
             <a:solidFill>
               <a:schemeClr val="dk2"/>
             </a:solidFill>
             <a:prstDash val="solid"/>
             <a:round/>
-            <a:headEnd len="sm" w="sm" type="none"/>
-            <a:tailEnd len="sm" w="sm" type="none"/>
+            <a:headEnd type="none" w="sm" len="sm"/>
+            <a:tailEnd type="none" w="sm" len="sm"/>
           </a:ln>
         </p:spPr>
         <p:txBody>
-          <a:bodyPr anchorCtr="0" anchor="ctr" bIns="91425" lIns="91425" spcFirstLastPara="1" rIns="91425" wrap="square" tIns="91425">
+          <a:bodyPr spcFirstLastPara="1" wrap="square" lIns="91425" tIns="91425" rIns="91425" bIns="91425" anchor="ctr" anchorCtr="0">
             <a:noAutofit/>
           </a:bodyPr>
           <a:lstStyle/>
           <a:p>
-            <a:pPr indent="0" lvl="0" marL="0" rtl="0" algn="ctr">
-              <a:spcBef>
-                <a:spcPts val="0"/>
-              </a:spcBef>
-              <a:spcAft>
-                <a:spcPts val="0"/>
-              </a:spcAft>
-              <a:buNone/>
-            </a:pPr>
-            <a:r>
-              <a:t/>
-            </a:r>
+            <a:pPr marL="0" lvl="0" indent="0" algn="ctr" rtl="0">
+              <a:spcBef>
+                <a:spcPts val="0"/>
+              </a:spcBef>
+              <a:spcAft>
+                <a:spcPts val="0"/>
+              </a:spcAft>
+              <a:buNone/>
+            </a:pPr>
             <a:endParaRPr/>
           </a:p>
         </p:txBody>
@@ -9261,41 +9491,38 @@
           </a:xfrm>
           <a:prstGeom prst="downArrow">
             <a:avLst>
-              <a:gd fmla="val 50000" name="adj1"/>
-              <a:gd fmla="val 50000" name="adj2"/>
+              <a:gd name="adj1" fmla="val 50000"/>
+              <a:gd name="adj2" fmla="val 50000"/>
             </a:avLst>
           </a:prstGeom>
           <a:solidFill>
             <a:srgbClr val="FF0000"/>
           </a:solidFill>
-          <a:ln cap="flat" cmpd="sng" w="9525">
+          <a:ln w="9525" cap="flat" cmpd="sng">
             <a:solidFill>
               <a:schemeClr val="dk2"/>
             </a:solidFill>
             <a:prstDash val="solid"/>
             <a:round/>
-            <a:headEnd len="sm" w="sm" type="none"/>
-            <a:tailEnd len="sm" w="sm" type="none"/>
+            <a:headEnd type="none" w="sm" len="sm"/>
+            <a:tailEnd type="none" w="sm" len="sm"/>
           </a:ln>
         </p:spPr>
         <p:txBody>
-          <a:bodyPr anchorCtr="0" anchor="ctr" bIns="91425" lIns="91425" spcFirstLastPara="1" rIns="91425" wrap="square" tIns="91425">
+          <a:bodyPr spcFirstLastPara="1" wrap="square" lIns="91425" tIns="91425" rIns="91425" bIns="91425" anchor="ctr" anchorCtr="0">
             <a:noAutofit/>
           </a:bodyPr>
           <a:lstStyle/>
           <a:p>
-            <a:pPr indent="0" lvl="0" marL="0" rtl="0" algn="ctr">
-              <a:spcBef>
-                <a:spcPts val="0"/>
-              </a:spcBef>
-              <a:spcAft>
-                <a:spcPts val="0"/>
-              </a:spcAft>
-              <a:buNone/>
-            </a:pPr>
-            <a:r>
-              <a:t/>
-            </a:r>
+            <a:pPr marL="0" lvl="0" indent="0" algn="ctr" rtl="0">
+              <a:spcBef>
+                <a:spcPts val="0"/>
+              </a:spcBef>
+              <a:spcAft>
+                <a:spcPts val="0"/>
+              </a:spcAft>
+              <a:buNone/>
+            </a:pPr>
             <a:endParaRPr/>
           </a:p>
         </p:txBody>
@@ -9309,11 +9536,11 @@
 </file>
 
 <file path=ppt/slides/slide15.xml><?xml version="1.0" encoding="utf-8"?>
-<p:sld xmlns:a="http://schemas.openxmlformats.org/drawingml/2006/main" xmlns:r="http://schemas.openxmlformats.org/officeDocument/2006/relationships" xmlns:mc="http://schemas.openxmlformats.org/markup-compatibility/2006" xmlns:mv="urn:schemas-microsoft-com:mac:vml" xmlns:p="http://schemas.openxmlformats.org/presentationml/2006/main" xmlns:c="http://schemas.openxmlformats.org/drawingml/2006/chart" xmlns:dgm="http://schemas.openxmlformats.org/drawingml/2006/diagram" xmlns:o="urn:schemas-microsoft-com:office:office" xmlns:v="urn:schemas-microsoft-com:vml" xmlns:pvml="urn:schemas-microsoft-com:office:powerpoint" xmlns:com="http://schemas.openxmlformats.org/drawingml/2006/compatibility" xmlns:p14="http://schemas.microsoft.com/office/powerpoint/2010/main" xmlns:p15="http://schemas.microsoft.com/office/powerpoint/2012/main" xmlns:ahyp="http://schemas.microsoft.com/office/drawing/2018/hyperlinkcolor">
+<p:sld xmlns:a="http://schemas.openxmlformats.org/drawingml/2006/main" xmlns:r="http://schemas.openxmlformats.org/officeDocument/2006/relationships" xmlns:p="http://schemas.openxmlformats.org/presentationml/2006/main">
   <p:cSld>
     <p:spTree>
       <p:nvGrpSpPr>
-        <p:cNvPr id="161" name="Shape 161"/>
+        <p:cNvPr id="1" name="Shape 161"/>
         <p:cNvGrpSpPr/>
         <p:nvPr/>
       </p:nvGrpSpPr>
@@ -9328,7 +9555,9 @@
       <p:sp>
         <p:nvSpPr>
           <p:cNvPr id="162" name="Google Shape;162;p27"/>
-          <p:cNvSpPr txBox="1"/>
+          <p:cNvSpPr txBox="1">
+            <a:spLocks noGrp="1"/>
+          </p:cNvSpPr>
           <p:nvPr>
             <p:ph type="title"/>
           </p:nvPr>
@@ -9343,12 +9572,12 @@
           </a:prstGeom>
         </p:spPr>
         <p:txBody>
-          <a:bodyPr anchorCtr="0" anchor="t" bIns="91425" lIns="91425" spcFirstLastPara="1" rIns="91425" wrap="square" tIns="91425">
+          <a:bodyPr spcFirstLastPara="1" wrap="square" lIns="91425" tIns="91425" rIns="91425" bIns="91425" anchor="t" anchorCtr="0">
             <a:normAutofit fontScale="90000"/>
           </a:bodyPr>
           <a:lstStyle/>
           <a:p>
-            <a:pPr indent="0" lvl="0" marL="0" rtl="0" algn="l">
+            <a:pPr marL="0" lvl="0" indent="0" algn="l" rtl="0">
               <a:spcBef>
                 <a:spcPts val="0"/>
               </a:spcBef>
@@ -9368,9 +9597,11 @@
       <p:sp>
         <p:nvSpPr>
           <p:cNvPr id="163" name="Google Shape;163;p27"/>
-          <p:cNvSpPr txBox="1"/>
+          <p:cNvSpPr txBox="1">
+            <a:spLocks noGrp="1"/>
+          </p:cNvSpPr>
           <p:nvPr>
-            <p:ph idx="1" type="body"/>
+            <p:ph type="body" idx="1"/>
           </p:nvPr>
         </p:nvSpPr>
         <p:spPr>
@@ -9383,12 +9614,12 @@
           </a:prstGeom>
         </p:spPr>
         <p:txBody>
-          <a:bodyPr anchorCtr="0" anchor="t" bIns="91425" lIns="91425" spcFirstLastPara="1" rIns="91425" wrap="square" tIns="91425">
+          <a:bodyPr spcFirstLastPara="1" wrap="square" lIns="91425" tIns="91425" rIns="91425" bIns="91425" anchor="t" anchorCtr="0">
             <a:normAutofit/>
           </a:bodyPr>
           <a:lstStyle/>
           <a:p>
-            <a:pPr indent="0" lvl="0" marL="0" rtl="0" algn="l">
+            <a:pPr marL="0" lvl="0" indent="0" algn="l" rtl="0">
               <a:spcBef>
                 <a:spcPts val="0"/>
               </a:spcBef>
@@ -9436,9 +9667,11 @@
       <p:sp>
         <p:nvSpPr>
           <p:cNvPr id="165" name="Google Shape;165;p27"/>
-          <p:cNvSpPr txBox="1"/>
+          <p:cNvSpPr txBox="1">
+            <a:spLocks noGrp="1"/>
+          </p:cNvSpPr>
           <p:nvPr>
-            <p:ph idx="1" type="body"/>
+            <p:ph type="body" idx="1"/>
           </p:nvPr>
         </p:nvSpPr>
         <p:spPr>
@@ -9451,12 +9684,12 @@
           </a:prstGeom>
         </p:spPr>
         <p:txBody>
-          <a:bodyPr anchorCtr="0" anchor="t" bIns="91425" lIns="91425" spcFirstLastPara="1" rIns="91425" wrap="square" tIns="91425">
+          <a:bodyPr spcFirstLastPara="1" wrap="square" lIns="91425" tIns="91425" rIns="91425" bIns="91425" anchor="t" anchorCtr="0">
             <a:normAutofit lnSpcReduction="10000"/>
           </a:bodyPr>
           <a:lstStyle/>
           <a:p>
-            <a:pPr indent="0" lvl="0" marL="0" rtl="0" algn="l">
+            <a:pPr marL="0" lvl="0" indent="0" algn="l" rtl="0">
               <a:spcBef>
                 <a:spcPts val="0"/>
               </a:spcBef>
@@ -9510,11 +9743,11 @@
 </file>
 
 <file path=ppt/slides/slide16.xml><?xml version="1.0" encoding="utf-8"?>
-<p:sld xmlns:a="http://schemas.openxmlformats.org/drawingml/2006/main" xmlns:r="http://schemas.openxmlformats.org/officeDocument/2006/relationships" xmlns:mc="http://schemas.openxmlformats.org/markup-compatibility/2006" xmlns:mv="urn:schemas-microsoft-com:mac:vml" xmlns:p="http://schemas.openxmlformats.org/presentationml/2006/main" xmlns:c="http://schemas.openxmlformats.org/drawingml/2006/chart" xmlns:dgm="http://schemas.openxmlformats.org/drawingml/2006/diagram" xmlns:o="urn:schemas-microsoft-com:office:office" xmlns:v="urn:schemas-microsoft-com:vml" xmlns:pvml="urn:schemas-microsoft-com:office:powerpoint" xmlns:com="http://schemas.openxmlformats.org/drawingml/2006/compatibility" xmlns:p14="http://schemas.microsoft.com/office/powerpoint/2010/main" xmlns:p15="http://schemas.microsoft.com/office/powerpoint/2012/main" xmlns:ahyp="http://schemas.microsoft.com/office/drawing/2018/hyperlinkcolor">
+<p:sld xmlns:a="http://schemas.openxmlformats.org/drawingml/2006/main" xmlns:r="http://schemas.openxmlformats.org/officeDocument/2006/relationships" xmlns:p="http://schemas.openxmlformats.org/presentationml/2006/main">
   <p:cSld>
     <p:spTree>
       <p:nvGrpSpPr>
-        <p:cNvPr id="170" name="Shape 170"/>
+        <p:cNvPr id="1" name="Shape 170"/>
         <p:cNvGrpSpPr/>
         <p:nvPr/>
       </p:nvGrpSpPr>
@@ -9529,7 +9762,9 @@
       <p:sp>
         <p:nvSpPr>
           <p:cNvPr id="171" name="Google Shape;171;p28"/>
-          <p:cNvSpPr txBox="1"/>
+          <p:cNvSpPr txBox="1">
+            <a:spLocks noGrp="1"/>
+          </p:cNvSpPr>
           <p:nvPr>
             <p:ph type="title"/>
           </p:nvPr>
@@ -9544,12 +9779,12 @@
           </a:prstGeom>
         </p:spPr>
         <p:txBody>
-          <a:bodyPr anchorCtr="0" anchor="t" bIns="91425" lIns="91425" spcFirstLastPara="1" rIns="91425" wrap="square" tIns="91425">
+          <a:bodyPr spcFirstLastPara="1" wrap="square" lIns="91425" tIns="91425" rIns="91425" bIns="91425" anchor="t" anchorCtr="0">
             <a:normAutofit fontScale="90000"/>
           </a:bodyPr>
           <a:lstStyle/>
           <a:p>
-            <a:pPr indent="0" lvl="0" marL="0" rtl="0" algn="l">
+            <a:pPr marL="0" lvl="0" indent="0" algn="l" rtl="0">
               <a:spcBef>
                 <a:spcPts val="0"/>
               </a:spcBef>
@@ -9569,9 +9804,11 @@
       <p:sp>
         <p:nvSpPr>
           <p:cNvPr id="172" name="Google Shape;172;p28"/>
-          <p:cNvSpPr txBox="1"/>
+          <p:cNvSpPr txBox="1">
+            <a:spLocks noGrp="1"/>
+          </p:cNvSpPr>
           <p:nvPr>
-            <p:ph idx="1" type="body"/>
+            <p:ph type="body" idx="1"/>
           </p:nvPr>
         </p:nvSpPr>
         <p:spPr>
@@ -9584,27 +9821,24 @@
           </a:prstGeom>
         </p:spPr>
         <p:txBody>
-          <a:bodyPr anchorCtr="0" anchor="t" bIns="91425" lIns="91425" spcFirstLastPara="1" rIns="91425" wrap="square" tIns="91425">
+          <a:bodyPr spcFirstLastPara="1" wrap="square" lIns="91425" tIns="91425" rIns="91425" bIns="91425" anchor="t" anchorCtr="0">
             <a:normAutofit/>
           </a:bodyPr>
           <a:lstStyle/>
           <a:p>
-            <a:pPr indent="0" lvl="0" marL="0" rtl="0" algn="l">
-              <a:spcBef>
-                <a:spcPts val="0"/>
-              </a:spcBef>
-              <a:spcAft>
-                <a:spcPts val="0"/>
-              </a:spcAft>
-              <a:buNone/>
-            </a:pPr>
-            <a:r>
-              <a:t/>
-            </a:r>
-            <a:endParaRPr/>
-          </a:p>
-          <a:p>
-            <a:pPr indent="0" lvl="0" marL="0" rtl="0" algn="l">
+            <a:pPr marL="0" lvl="0" indent="0" algn="l" rtl="0">
+              <a:spcBef>
+                <a:spcPts val="0"/>
+              </a:spcBef>
+              <a:spcAft>
+                <a:spcPts val="0"/>
+              </a:spcAft>
+              <a:buNone/>
+            </a:pPr>
+            <a:endParaRPr/>
+          </a:p>
+          <a:p>
+            <a:pPr marL="0" lvl="0" indent="0" algn="l" rtl="0">
               <a:spcBef>
                 <a:spcPts val="1200"/>
               </a:spcBef>
@@ -9613,13 +9847,10 @@
               </a:spcAft>
               <a:buNone/>
             </a:pPr>
-            <a:r>
-              <a:t/>
-            </a:r>
-            <a:endParaRPr/>
-          </a:p>
-          <a:p>
-            <a:pPr indent="0" lvl="0" marL="0" rtl="0" algn="l">
+            <a:endParaRPr/>
+          </a:p>
+          <a:p>
+            <a:pPr marL="0" lvl="0" indent="0" algn="l" rtl="0">
               <a:spcBef>
                 <a:spcPts val="1200"/>
               </a:spcBef>
@@ -9628,9 +9859,6 @@
               </a:spcAft>
               <a:buNone/>
             </a:pPr>
-            <a:r>
-              <a:t/>
-            </a:r>
             <a:endParaRPr/>
           </a:p>
         </p:txBody>
@@ -9666,9 +9894,11 @@
       <p:sp>
         <p:nvSpPr>
           <p:cNvPr id="174" name="Google Shape;174;p28"/>
-          <p:cNvSpPr txBox="1"/>
+          <p:cNvSpPr txBox="1">
+            <a:spLocks noGrp="1"/>
+          </p:cNvSpPr>
           <p:nvPr>
-            <p:ph idx="1" type="body"/>
+            <p:ph type="body" idx="1"/>
           </p:nvPr>
         </p:nvSpPr>
         <p:spPr>
@@ -9681,12 +9911,12 @@
           </a:prstGeom>
         </p:spPr>
         <p:txBody>
-          <a:bodyPr anchorCtr="0" anchor="t" bIns="91425" lIns="91425" spcFirstLastPara="1" rIns="91425" wrap="square" tIns="91425">
+          <a:bodyPr spcFirstLastPara="1" wrap="square" lIns="91425" tIns="91425" rIns="91425" bIns="91425" anchor="t" anchorCtr="0">
             <a:normAutofit/>
           </a:bodyPr>
           <a:lstStyle/>
           <a:p>
-            <a:pPr indent="0" lvl="0" marL="0" rtl="0" algn="l">
+            <a:pPr marL="0" lvl="0" indent="0" algn="l" rtl="0">
               <a:spcBef>
                 <a:spcPts val="0"/>
               </a:spcBef>
@@ -9706,9 +9936,11 @@
       <p:sp>
         <p:nvSpPr>
           <p:cNvPr id="175" name="Google Shape;175;p28"/>
-          <p:cNvSpPr txBox="1"/>
+          <p:cNvSpPr txBox="1">
+            <a:spLocks noGrp="1"/>
+          </p:cNvSpPr>
           <p:nvPr>
-            <p:ph idx="1" type="body"/>
+            <p:ph type="body" idx="1"/>
           </p:nvPr>
         </p:nvSpPr>
         <p:spPr>
@@ -9721,12 +9953,12 @@
           </a:prstGeom>
         </p:spPr>
         <p:txBody>
-          <a:bodyPr anchorCtr="0" anchor="t" bIns="91425" lIns="91425" spcFirstLastPara="1" rIns="91425" wrap="square" tIns="91425">
+          <a:bodyPr spcFirstLastPara="1" wrap="square" lIns="91425" tIns="91425" rIns="91425" bIns="91425" anchor="t" anchorCtr="0">
             <a:normAutofit lnSpcReduction="10000"/>
           </a:bodyPr>
           <a:lstStyle/>
           <a:p>
-            <a:pPr indent="0" lvl="0" marL="0" rtl="0" algn="l">
+            <a:pPr marL="0" lvl="0" indent="0" algn="l" rtl="0">
               <a:spcBef>
                 <a:spcPts val="0"/>
               </a:spcBef>
@@ -9742,7 +9974,7 @@
             <a:endParaRPr/>
           </a:p>
           <a:p>
-            <a:pPr indent="0" lvl="0" marL="0" rtl="0" algn="l">
+            <a:pPr marL="0" lvl="0" indent="0" algn="l" rtl="0">
               <a:spcBef>
                 <a:spcPts val="1200"/>
               </a:spcBef>
@@ -9768,11 +10000,11 @@
 </file>
 
 <file path=ppt/slides/slide17.xml><?xml version="1.0" encoding="utf-8"?>
-<p:sld xmlns:a="http://schemas.openxmlformats.org/drawingml/2006/main" xmlns:r="http://schemas.openxmlformats.org/officeDocument/2006/relationships" xmlns:mc="http://schemas.openxmlformats.org/markup-compatibility/2006" xmlns:mv="urn:schemas-microsoft-com:mac:vml" xmlns:p="http://schemas.openxmlformats.org/presentationml/2006/main" xmlns:c="http://schemas.openxmlformats.org/drawingml/2006/chart" xmlns:dgm="http://schemas.openxmlformats.org/drawingml/2006/diagram" xmlns:o="urn:schemas-microsoft-com:office:office" xmlns:v="urn:schemas-microsoft-com:vml" xmlns:pvml="urn:schemas-microsoft-com:office:powerpoint" xmlns:com="http://schemas.openxmlformats.org/drawingml/2006/compatibility" xmlns:p14="http://schemas.microsoft.com/office/powerpoint/2010/main" xmlns:p15="http://schemas.microsoft.com/office/powerpoint/2012/main" xmlns:ahyp="http://schemas.microsoft.com/office/drawing/2018/hyperlinkcolor">
+<p:sld xmlns:a="http://schemas.openxmlformats.org/drawingml/2006/main" xmlns:r="http://schemas.openxmlformats.org/officeDocument/2006/relationships" xmlns:p="http://schemas.openxmlformats.org/presentationml/2006/main">
   <p:cSld>
     <p:spTree>
       <p:nvGrpSpPr>
-        <p:cNvPr id="179" name="Shape 179"/>
+        <p:cNvPr id="1" name="Shape 179"/>
         <p:cNvGrpSpPr/>
         <p:nvPr/>
       </p:nvGrpSpPr>
@@ -9787,7 +10019,9 @@
       <p:sp>
         <p:nvSpPr>
           <p:cNvPr id="180" name="Google Shape;180;p29"/>
-          <p:cNvSpPr txBox="1"/>
+          <p:cNvSpPr txBox="1">
+            <a:spLocks noGrp="1"/>
+          </p:cNvSpPr>
           <p:nvPr>
             <p:ph type="title"/>
           </p:nvPr>
@@ -9802,12 +10036,12 @@
           </a:prstGeom>
         </p:spPr>
         <p:txBody>
-          <a:bodyPr anchorCtr="0" anchor="t" bIns="91425" lIns="91425" spcFirstLastPara="1" rIns="91425" wrap="square" tIns="91425">
+          <a:bodyPr spcFirstLastPara="1" wrap="square" lIns="91425" tIns="91425" rIns="91425" bIns="91425" anchor="t" anchorCtr="0">
             <a:normAutofit fontScale="90000"/>
           </a:bodyPr>
           <a:lstStyle/>
           <a:p>
-            <a:pPr indent="0" lvl="0" marL="0" rtl="0" algn="l">
+            <a:pPr marL="0" lvl="0" indent="0" algn="l" rtl="0">
               <a:spcBef>
                 <a:spcPts val="0"/>
               </a:spcBef>
@@ -9827,9 +10061,11 @@
       <p:sp>
         <p:nvSpPr>
           <p:cNvPr id="181" name="Google Shape;181;p29"/>
-          <p:cNvSpPr txBox="1"/>
+          <p:cNvSpPr txBox="1">
+            <a:spLocks noGrp="1"/>
+          </p:cNvSpPr>
           <p:nvPr>
-            <p:ph idx="1" type="body"/>
+            <p:ph type="body" idx="1"/>
           </p:nvPr>
         </p:nvSpPr>
         <p:spPr>
@@ -9842,12 +10078,12 @@
           </a:prstGeom>
         </p:spPr>
         <p:txBody>
-          <a:bodyPr anchorCtr="0" anchor="t" bIns="91425" lIns="91425" spcFirstLastPara="1" rIns="91425" wrap="square" tIns="91425">
+          <a:bodyPr spcFirstLastPara="1" wrap="square" lIns="91425" tIns="91425" rIns="91425" bIns="91425" anchor="t" anchorCtr="0">
             <a:normAutofit/>
           </a:bodyPr>
           <a:lstStyle/>
           <a:p>
-            <a:pPr indent="0" lvl="0" marL="0" rtl="0" algn="l">
+            <a:pPr marL="0" lvl="0" indent="0" algn="l" rtl="0">
               <a:spcBef>
                 <a:spcPts val="0"/>
               </a:spcBef>
@@ -9863,7 +10099,7 @@
             <a:endParaRPr/>
           </a:p>
           <a:p>
-            <a:pPr indent="0" lvl="0" marL="0" rtl="0" algn="l">
+            <a:pPr marL="0" lvl="0" indent="0" algn="l" rtl="0">
               <a:spcBef>
                 <a:spcPts val="1200"/>
               </a:spcBef>
@@ -9872,13 +10108,10 @@
               </a:spcAft>
               <a:buNone/>
             </a:pPr>
-            <a:r>
-              <a:t/>
-            </a:r>
-            <a:endParaRPr/>
-          </a:p>
-          <a:p>
-            <a:pPr indent="0" lvl="0" marL="0" rtl="0" algn="l">
+            <a:endParaRPr/>
+          </a:p>
+          <a:p>
+            <a:pPr marL="0" lvl="0" indent="0" algn="l" rtl="0">
               <a:spcBef>
                 <a:spcPts val="1200"/>
               </a:spcBef>
@@ -9889,20 +10122,12 @@
             </a:pPr>
             <a:r>
               <a:rPr lang="en"/>
-              <a:t>Many programs need to be able to execute changes instantly without </a:t>
+              <a:t>Many programs need to be able to execute changes instantly without waiting for current processes to finish. These “instant” executions are called interrupts. </a:t>
             </a:r>
-            <a:r>
-              <a:rPr lang="en"/>
-              <a:t>waiting</a:t>
-            </a:r>
-            <a:r>
-              <a:rPr lang="en"/>
-              <a:t> for current processes to finish. These “instant” executions are called interrupts. </a:t>
-            </a:r>
-            <a:endParaRPr/>
-          </a:p>
-          <a:p>
-            <a:pPr indent="0" lvl="0" marL="0" rtl="0" algn="l">
+            <a:endParaRPr/>
+          </a:p>
+          <a:p>
+            <a:pPr marL="0" lvl="0" indent="0" algn="l" rtl="0">
               <a:spcBef>
                 <a:spcPts val="1200"/>
               </a:spcBef>
@@ -9911,13 +10136,10 @@
               </a:spcAft>
               <a:buNone/>
             </a:pPr>
-            <a:r>
-              <a:t/>
-            </a:r>
-            <a:endParaRPr/>
-          </a:p>
-          <a:p>
-            <a:pPr indent="0" lvl="0" marL="0" rtl="0" algn="l">
+            <a:endParaRPr/>
+          </a:p>
+          <a:p>
+            <a:pPr marL="0" lvl="0" indent="0" algn="l" rtl="0">
               <a:spcBef>
                 <a:spcPts val="1200"/>
               </a:spcBef>
@@ -9943,11 +10165,11 @@
 </file>
 
 <file path=ppt/slides/slide18.xml><?xml version="1.0" encoding="utf-8"?>
-<p:sld xmlns:a="http://schemas.openxmlformats.org/drawingml/2006/main" xmlns:r="http://schemas.openxmlformats.org/officeDocument/2006/relationships" xmlns:mc="http://schemas.openxmlformats.org/markup-compatibility/2006" xmlns:mv="urn:schemas-microsoft-com:mac:vml" xmlns:p="http://schemas.openxmlformats.org/presentationml/2006/main" xmlns:c="http://schemas.openxmlformats.org/drawingml/2006/chart" xmlns:dgm="http://schemas.openxmlformats.org/drawingml/2006/diagram" xmlns:o="urn:schemas-microsoft-com:office:office" xmlns:v="urn:schemas-microsoft-com:vml" xmlns:pvml="urn:schemas-microsoft-com:office:powerpoint" xmlns:com="http://schemas.openxmlformats.org/drawingml/2006/compatibility" xmlns:p14="http://schemas.microsoft.com/office/powerpoint/2010/main" xmlns:p15="http://schemas.microsoft.com/office/powerpoint/2012/main" xmlns:ahyp="http://schemas.microsoft.com/office/drawing/2018/hyperlinkcolor">
+<p:sld xmlns:a="http://schemas.openxmlformats.org/drawingml/2006/main" xmlns:r="http://schemas.openxmlformats.org/officeDocument/2006/relationships" xmlns:p="http://schemas.openxmlformats.org/presentationml/2006/main">
   <p:cSld>
     <p:spTree>
       <p:nvGrpSpPr>
-        <p:cNvPr id="185" name="Shape 185"/>
+        <p:cNvPr id="1" name="Shape 185"/>
         <p:cNvGrpSpPr/>
         <p:nvPr/>
       </p:nvGrpSpPr>
@@ -9962,7 +10184,9 @@
       <p:sp>
         <p:nvSpPr>
           <p:cNvPr id="186" name="Google Shape;186;p30"/>
-          <p:cNvSpPr txBox="1"/>
+          <p:cNvSpPr txBox="1">
+            <a:spLocks noGrp="1"/>
+          </p:cNvSpPr>
           <p:nvPr>
             <p:ph type="title"/>
           </p:nvPr>
@@ -9977,12 +10201,12 @@
           </a:prstGeom>
         </p:spPr>
         <p:txBody>
-          <a:bodyPr anchorCtr="0" anchor="t" bIns="91425" lIns="91425" spcFirstLastPara="1" rIns="91425" wrap="square" tIns="91425">
+          <a:bodyPr spcFirstLastPara="1" wrap="square" lIns="91425" tIns="91425" rIns="91425" bIns="91425" anchor="t" anchorCtr="0">
             <a:normAutofit fontScale="90000"/>
           </a:bodyPr>
           <a:lstStyle/>
           <a:p>
-            <a:pPr indent="0" lvl="0" marL="0" rtl="0" algn="l">
+            <a:pPr marL="0" lvl="0" indent="0" algn="l" rtl="0">
               <a:spcBef>
                 <a:spcPts val="0"/>
               </a:spcBef>
@@ -10002,9 +10226,11 @@
       <p:sp>
         <p:nvSpPr>
           <p:cNvPr id="187" name="Google Shape;187;p30"/>
-          <p:cNvSpPr txBox="1"/>
+          <p:cNvSpPr txBox="1">
+            <a:spLocks noGrp="1"/>
+          </p:cNvSpPr>
           <p:nvPr>
-            <p:ph idx="1" type="body"/>
+            <p:ph type="body" idx="1"/>
           </p:nvPr>
         </p:nvSpPr>
         <p:spPr>
@@ -10017,12 +10243,12 @@
           </a:prstGeom>
         </p:spPr>
         <p:txBody>
-          <a:bodyPr anchorCtr="0" anchor="t" bIns="91425" lIns="91425" spcFirstLastPara="1" rIns="91425" wrap="square" tIns="91425">
+          <a:bodyPr spcFirstLastPara="1" wrap="square" lIns="91425" tIns="91425" rIns="91425" bIns="91425" anchor="t" anchorCtr="0">
             <a:normAutofit/>
           </a:bodyPr>
           <a:lstStyle/>
           <a:p>
-            <a:pPr indent="0" lvl="0" marL="0" rtl="0" algn="l">
+            <a:pPr marL="0" lvl="0" indent="0" algn="l" rtl="0">
               <a:spcBef>
                 <a:spcPts val="0"/>
               </a:spcBef>
@@ -10038,7 +10264,7 @@
             <a:endParaRPr/>
           </a:p>
           <a:p>
-            <a:pPr indent="0" lvl="0" marL="0" rtl="0" algn="l">
+            <a:pPr marL="0" lvl="0" indent="0" algn="l" rtl="0">
               <a:spcBef>
                 <a:spcPts val="1200"/>
               </a:spcBef>
@@ -10047,9 +10273,6 @@
               </a:spcAft>
               <a:buNone/>
             </a:pPr>
-            <a:r>
-              <a:t/>
-            </a:r>
             <a:endParaRPr/>
           </a:p>
         </p:txBody>
@@ -10113,9 +10336,11 @@
       <p:sp>
         <p:nvSpPr>
           <p:cNvPr id="190" name="Google Shape;190;p30"/>
-          <p:cNvSpPr txBox="1"/>
+          <p:cNvSpPr txBox="1">
+            <a:spLocks noGrp="1"/>
+          </p:cNvSpPr>
           <p:nvPr>
-            <p:ph idx="1" type="body"/>
+            <p:ph type="body" idx="1"/>
           </p:nvPr>
         </p:nvSpPr>
         <p:spPr>
@@ -10128,12 +10353,12 @@
           </a:prstGeom>
         </p:spPr>
         <p:txBody>
-          <a:bodyPr anchorCtr="0" anchor="t" bIns="91425" lIns="91425" spcFirstLastPara="1" rIns="91425" wrap="square" tIns="91425">
+          <a:bodyPr spcFirstLastPara="1" wrap="square" lIns="91425" tIns="91425" rIns="91425" bIns="91425" anchor="t" anchorCtr="0">
             <a:normAutofit/>
           </a:bodyPr>
           <a:lstStyle/>
           <a:p>
-            <a:pPr indent="0" lvl="0" marL="0" rtl="0" algn="l">
+            <a:pPr marL="0" lvl="0" indent="0" algn="l" rtl="0">
               <a:spcBef>
                 <a:spcPts val="0"/>
               </a:spcBef>
@@ -10149,7 +10374,7 @@
             <a:endParaRPr/>
           </a:p>
           <a:p>
-            <a:pPr indent="0" lvl="0" marL="0" rtl="0" algn="l">
+            <a:pPr marL="0" lvl="0" indent="0" algn="l" rtl="0">
               <a:spcBef>
                 <a:spcPts val="1200"/>
               </a:spcBef>
@@ -10158,9 +10383,6 @@
               </a:spcAft>
               <a:buNone/>
             </a:pPr>
-            <a:r>
-              <a:t/>
-            </a:r>
             <a:endParaRPr/>
           </a:p>
         </p:txBody>
@@ -10174,11 +10396,11 @@
 </file>
 
 <file path=ppt/slides/slide19.xml><?xml version="1.0" encoding="utf-8"?>
-<p:sld xmlns:a="http://schemas.openxmlformats.org/drawingml/2006/main" xmlns:r="http://schemas.openxmlformats.org/officeDocument/2006/relationships" xmlns:mc="http://schemas.openxmlformats.org/markup-compatibility/2006" xmlns:mv="urn:schemas-microsoft-com:mac:vml" xmlns:p="http://schemas.openxmlformats.org/presentationml/2006/main" xmlns:c="http://schemas.openxmlformats.org/drawingml/2006/chart" xmlns:dgm="http://schemas.openxmlformats.org/drawingml/2006/diagram" xmlns:o="urn:schemas-microsoft-com:office:office" xmlns:v="urn:schemas-microsoft-com:vml" xmlns:pvml="urn:schemas-microsoft-com:office:powerpoint" xmlns:com="http://schemas.openxmlformats.org/drawingml/2006/compatibility" xmlns:p14="http://schemas.microsoft.com/office/powerpoint/2010/main" xmlns:p15="http://schemas.microsoft.com/office/powerpoint/2012/main" xmlns:ahyp="http://schemas.microsoft.com/office/drawing/2018/hyperlinkcolor">
+<p:sld xmlns:a="http://schemas.openxmlformats.org/drawingml/2006/main" xmlns:r="http://schemas.openxmlformats.org/officeDocument/2006/relationships" xmlns:p="http://schemas.openxmlformats.org/presentationml/2006/main">
   <p:cSld>
     <p:spTree>
       <p:nvGrpSpPr>
-        <p:cNvPr id="194" name="Shape 194"/>
+        <p:cNvPr id="1" name="Shape 194"/>
         <p:cNvGrpSpPr/>
         <p:nvPr/>
       </p:nvGrpSpPr>
@@ -10193,7 +10415,9 @@
       <p:sp>
         <p:nvSpPr>
           <p:cNvPr id="195" name="Google Shape;195;p31"/>
-          <p:cNvSpPr txBox="1"/>
+          <p:cNvSpPr txBox="1">
+            <a:spLocks noGrp="1"/>
+          </p:cNvSpPr>
           <p:nvPr>
             <p:ph type="title"/>
           </p:nvPr>
@@ -10208,12 +10432,12 @@
           </a:prstGeom>
         </p:spPr>
         <p:txBody>
-          <a:bodyPr anchorCtr="0" anchor="t" bIns="91425" lIns="91425" spcFirstLastPara="1" rIns="91425" wrap="square" tIns="91425">
+          <a:bodyPr spcFirstLastPara="1" wrap="square" lIns="91425" tIns="91425" rIns="91425" bIns="91425" anchor="t" anchorCtr="0">
             <a:normAutofit fontScale="90000"/>
           </a:bodyPr>
           <a:lstStyle/>
           <a:p>
-            <a:pPr indent="0" lvl="0" marL="0" rtl="0" algn="l">
+            <a:pPr marL="0" lvl="0" indent="0" algn="l" rtl="0">
               <a:spcBef>
                 <a:spcPts val="0"/>
               </a:spcBef>
@@ -10233,9 +10457,11 @@
       <p:sp>
         <p:nvSpPr>
           <p:cNvPr id="196" name="Google Shape;196;p31"/>
-          <p:cNvSpPr txBox="1"/>
+          <p:cNvSpPr txBox="1">
+            <a:spLocks noGrp="1"/>
+          </p:cNvSpPr>
           <p:nvPr>
-            <p:ph idx="1" type="body"/>
+            <p:ph type="body" idx="1"/>
           </p:nvPr>
         </p:nvSpPr>
         <p:spPr>
@@ -10248,12 +10474,12 @@
           </a:prstGeom>
         </p:spPr>
         <p:txBody>
-          <a:bodyPr anchorCtr="0" anchor="t" bIns="91425" lIns="91425" spcFirstLastPara="1" rIns="91425" wrap="square" tIns="91425">
+          <a:bodyPr spcFirstLastPara="1" wrap="square" lIns="91425" tIns="91425" rIns="91425" bIns="91425" anchor="t" anchorCtr="0">
             <a:normAutofit/>
           </a:bodyPr>
           <a:lstStyle/>
           <a:p>
-            <a:pPr indent="0" lvl="0" marL="0" rtl="0" algn="l">
+            <a:pPr marL="0" lvl="0" indent="0" algn="l" rtl="0">
               <a:spcBef>
                 <a:spcPts val="0"/>
               </a:spcBef>
@@ -10301,9 +10527,11 @@
       <p:sp>
         <p:nvSpPr>
           <p:cNvPr id="198" name="Google Shape;198;p31"/>
-          <p:cNvSpPr txBox="1"/>
+          <p:cNvSpPr txBox="1">
+            <a:spLocks noGrp="1"/>
+          </p:cNvSpPr>
           <p:nvPr>
-            <p:ph idx="1" type="body"/>
+            <p:ph type="body" idx="1"/>
           </p:nvPr>
         </p:nvSpPr>
         <p:spPr>
@@ -10316,27 +10544,24 @@
           </a:prstGeom>
         </p:spPr>
         <p:txBody>
-          <a:bodyPr anchorCtr="0" anchor="t" bIns="91425" lIns="91425" spcFirstLastPara="1" rIns="91425" wrap="square" tIns="91425">
+          <a:bodyPr spcFirstLastPara="1" wrap="square" lIns="91425" tIns="91425" rIns="91425" bIns="91425" anchor="t" anchorCtr="0">
             <a:normAutofit/>
           </a:bodyPr>
           <a:lstStyle/>
           <a:p>
-            <a:pPr indent="0" lvl="0" marL="0" rtl="0" algn="l">
-              <a:spcBef>
-                <a:spcPts val="0"/>
-              </a:spcBef>
-              <a:spcAft>
-                <a:spcPts val="0"/>
-              </a:spcAft>
-              <a:buNone/>
-            </a:pPr>
-            <a:r>
-              <a:t/>
-            </a:r>
-            <a:endParaRPr/>
-          </a:p>
-          <a:p>
-            <a:pPr indent="0" lvl="0" marL="0" rtl="0" algn="l">
+            <a:pPr marL="0" lvl="0" indent="0" algn="l" rtl="0">
+              <a:spcBef>
+                <a:spcPts val="0"/>
+              </a:spcBef>
+              <a:spcAft>
+                <a:spcPts val="0"/>
+              </a:spcAft>
+              <a:buNone/>
+            </a:pPr>
+            <a:endParaRPr/>
+          </a:p>
+          <a:p>
+            <a:pPr marL="0" lvl="0" indent="0" algn="l" rtl="0">
               <a:spcBef>
                 <a:spcPts val="1200"/>
               </a:spcBef>
@@ -10345,9 +10570,6 @@
               </a:spcAft>
               <a:buNone/>
             </a:pPr>
-            <a:r>
-              <a:t/>
-            </a:r>
             <a:endParaRPr/>
           </a:p>
         </p:txBody>
@@ -10361,11 +10583,11 @@
 </file>
 
 <file path=ppt/slides/slide2.xml><?xml version="1.0" encoding="utf-8"?>
-<p:sld xmlns:a="http://schemas.openxmlformats.org/drawingml/2006/main" xmlns:r="http://schemas.openxmlformats.org/officeDocument/2006/relationships" xmlns:mc="http://schemas.openxmlformats.org/markup-compatibility/2006" xmlns:mv="urn:schemas-microsoft-com:mac:vml" xmlns:p="http://schemas.openxmlformats.org/presentationml/2006/main" xmlns:c="http://schemas.openxmlformats.org/drawingml/2006/chart" xmlns:dgm="http://schemas.openxmlformats.org/drawingml/2006/diagram" xmlns:o="urn:schemas-microsoft-com:office:office" xmlns:v="urn:schemas-microsoft-com:vml" xmlns:pvml="urn:schemas-microsoft-com:office:powerpoint" xmlns:com="http://schemas.openxmlformats.org/drawingml/2006/compatibility" xmlns:p14="http://schemas.microsoft.com/office/powerpoint/2010/main" xmlns:p15="http://schemas.microsoft.com/office/powerpoint/2012/main" xmlns:ahyp="http://schemas.microsoft.com/office/drawing/2018/hyperlinkcolor">
+<p:sld xmlns:a="http://schemas.openxmlformats.org/drawingml/2006/main" xmlns:r="http://schemas.openxmlformats.org/officeDocument/2006/relationships" xmlns:p="http://schemas.openxmlformats.org/presentationml/2006/main">
   <p:cSld>
     <p:spTree>
       <p:nvGrpSpPr>
-        <p:cNvPr id="60" name="Shape 60"/>
+        <p:cNvPr id="1" name="Shape 60"/>
         <p:cNvGrpSpPr/>
         <p:nvPr/>
       </p:nvGrpSpPr>
@@ -10380,7 +10602,9 @@
       <p:sp>
         <p:nvSpPr>
           <p:cNvPr id="61" name="Google Shape;61;p14"/>
-          <p:cNvSpPr txBox="1"/>
+          <p:cNvSpPr txBox="1">
+            <a:spLocks noGrp="1"/>
+          </p:cNvSpPr>
           <p:nvPr>
             <p:ph type="title"/>
           </p:nvPr>
@@ -10395,12 +10619,12 @@
           </a:prstGeom>
         </p:spPr>
         <p:txBody>
-          <a:bodyPr anchorCtr="0" anchor="t" bIns="91425" lIns="91425" spcFirstLastPara="1" rIns="91425" wrap="square" tIns="91425">
+          <a:bodyPr spcFirstLastPara="1" wrap="square" lIns="91425" tIns="91425" rIns="91425" bIns="91425" anchor="t" anchorCtr="0">
             <a:normAutofit fontScale="90000"/>
           </a:bodyPr>
           <a:lstStyle/>
           <a:p>
-            <a:pPr indent="0" lvl="0" marL="0" rtl="0" algn="l">
+            <a:pPr marL="0" lvl="0" indent="0" algn="l" rtl="0">
               <a:spcBef>
                 <a:spcPts val="0"/>
               </a:spcBef>
@@ -10420,9 +10644,11 @@
       <p:sp>
         <p:nvSpPr>
           <p:cNvPr id="62" name="Google Shape;62;p14"/>
-          <p:cNvSpPr txBox="1"/>
+          <p:cNvSpPr txBox="1">
+            <a:spLocks noGrp="1"/>
+          </p:cNvSpPr>
           <p:nvPr>
-            <p:ph idx="1" type="body"/>
+            <p:ph type="body" idx="1"/>
           </p:nvPr>
         </p:nvSpPr>
         <p:spPr>
@@ -10435,12 +10661,12 @@
           </a:prstGeom>
         </p:spPr>
         <p:txBody>
-          <a:bodyPr anchorCtr="0" anchor="t" bIns="91425" lIns="91425" spcFirstLastPara="1" rIns="91425" wrap="square" tIns="91425">
+          <a:bodyPr spcFirstLastPara="1" wrap="square" lIns="91425" tIns="91425" rIns="91425" bIns="91425" anchor="t" anchorCtr="0">
             <a:normAutofit/>
           </a:bodyPr>
           <a:lstStyle/>
           <a:p>
-            <a:pPr indent="0" lvl="0" marL="0" rtl="0" algn="l">
+            <a:pPr marL="0" lvl="0" indent="0" algn="l" rtl="0">
               <a:spcBef>
                 <a:spcPts val="0"/>
               </a:spcBef>
@@ -10499,11 +10725,11 @@
 </file>
 
 <file path=ppt/slides/slide20.xml><?xml version="1.0" encoding="utf-8"?>
-<p:sld xmlns:a="http://schemas.openxmlformats.org/drawingml/2006/main" xmlns:r="http://schemas.openxmlformats.org/officeDocument/2006/relationships" xmlns:mc="http://schemas.openxmlformats.org/markup-compatibility/2006" xmlns:mv="urn:schemas-microsoft-com:mac:vml" xmlns:p="http://schemas.openxmlformats.org/presentationml/2006/main" xmlns:c="http://schemas.openxmlformats.org/drawingml/2006/chart" xmlns:dgm="http://schemas.openxmlformats.org/drawingml/2006/diagram" xmlns:o="urn:schemas-microsoft-com:office:office" xmlns:v="urn:schemas-microsoft-com:vml" xmlns:pvml="urn:schemas-microsoft-com:office:powerpoint" xmlns:com="http://schemas.openxmlformats.org/drawingml/2006/compatibility" xmlns:p14="http://schemas.microsoft.com/office/powerpoint/2010/main" xmlns:p15="http://schemas.microsoft.com/office/powerpoint/2012/main" xmlns:ahyp="http://schemas.microsoft.com/office/drawing/2018/hyperlinkcolor">
+<p:sld xmlns:a="http://schemas.openxmlformats.org/drawingml/2006/main" xmlns:r="http://schemas.openxmlformats.org/officeDocument/2006/relationships" xmlns:p="http://schemas.openxmlformats.org/presentationml/2006/main">
   <p:cSld>
     <p:spTree>
       <p:nvGrpSpPr>
-        <p:cNvPr id="202" name="Shape 202"/>
+        <p:cNvPr id="1" name="Shape 202"/>
         <p:cNvGrpSpPr/>
         <p:nvPr/>
       </p:nvGrpSpPr>
@@ -10518,7 +10744,9 @@
       <p:sp>
         <p:nvSpPr>
           <p:cNvPr id="203" name="Google Shape;203;p32"/>
-          <p:cNvSpPr txBox="1"/>
+          <p:cNvSpPr txBox="1">
+            <a:spLocks noGrp="1"/>
+          </p:cNvSpPr>
           <p:nvPr>
             <p:ph type="title"/>
           </p:nvPr>
@@ -10533,12 +10761,12 @@
           </a:prstGeom>
         </p:spPr>
         <p:txBody>
-          <a:bodyPr anchorCtr="0" anchor="t" bIns="91425" lIns="91425" spcFirstLastPara="1" rIns="91425" wrap="square" tIns="91425">
+          <a:bodyPr spcFirstLastPara="1" wrap="square" lIns="91425" tIns="91425" rIns="91425" bIns="91425" anchor="t" anchorCtr="0">
             <a:normAutofit fontScale="90000"/>
           </a:bodyPr>
           <a:lstStyle/>
           <a:p>
-            <a:pPr indent="0" lvl="0" marL="0" rtl="0" algn="l">
+            <a:pPr marL="0" lvl="0" indent="0" algn="l" rtl="0">
               <a:spcBef>
                 <a:spcPts val="0"/>
               </a:spcBef>
@@ -10558,9 +10786,11 @@
       <p:sp>
         <p:nvSpPr>
           <p:cNvPr id="204" name="Google Shape;204;p32"/>
-          <p:cNvSpPr txBox="1"/>
+          <p:cNvSpPr txBox="1">
+            <a:spLocks noGrp="1"/>
+          </p:cNvSpPr>
           <p:nvPr>
-            <p:ph idx="1" type="body"/>
+            <p:ph type="body" idx="1"/>
           </p:nvPr>
         </p:nvSpPr>
         <p:spPr>
@@ -10573,12 +10803,12 @@
           </a:prstGeom>
         </p:spPr>
         <p:txBody>
-          <a:bodyPr anchorCtr="0" anchor="t" bIns="91425" lIns="91425" spcFirstLastPara="1" rIns="91425" wrap="square" tIns="91425">
+          <a:bodyPr spcFirstLastPara="1" wrap="square" lIns="91425" tIns="91425" rIns="91425" bIns="91425" anchor="t" anchorCtr="0">
             <a:normAutofit/>
           </a:bodyPr>
           <a:lstStyle/>
           <a:p>
-            <a:pPr indent="0" lvl="0" marL="0" rtl="0" algn="l">
+            <a:pPr marL="0" lvl="0" indent="0" algn="l" rtl="0">
               <a:spcBef>
                 <a:spcPts val="0"/>
               </a:spcBef>
@@ -10594,7 +10824,7 @@
             <a:endParaRPr/>
           </a:p>
           <a:p>
-            <a:pPr indent="0" lvl="0" marL="0" rtl="0" algn="l">
+            <a:pPr marL="0" lvl="0" indent="0" algn="l" rtl="0">
               <a:spcBef>
                 <a:spcPts val="1200"/>
               </a:spcBef>
@@ -10603,13 +10833,10 @@
               </a:spcAft>
               <a:buNone/>
             </a:pPr>
-            <a:r>
-              <a:t/>
-            </a:r>
-            <a:endParaRPr/>
-          </a:p>
-          <a:p>
-            <a:pPr indent="0" lvl="0" marL="0" rtl="0" algn="l">
+            <a:endParaRPr/>
+          </a:p>
+          <a:p>
+            <a:pPr marL="0" lvl="0" indent="0" algn="l" rtl="0">
               <a:spcBef>
                 <a:spcPts val="1200"/>
               </a:spcBef>
@@ -10663,11 +10890,11 @@
 </file>
 
 <file path=ppt/slides/slide21.xml><?xml version="1.0" encoding="utf-8"?>
-<p:sld xmlns:a="http://schemas.openxmlformats.org/drawingml/2006/main" xmlns:r="http://schemas.openxmlformats.org/officeDocument/2006/relationships" xmlns:mc="http://schemas.openxmlformats.org/markup-compatibility/2006" xmlns:mv="urn:schemas-microsoft-com:mac:vml" xmlns:p="http://schemas.openxmlformats.org/presentationml/2006/main" xmlns:c="http://schemas.openxmlformats.org/drawingml/2006/chart" xmlns:dgm="http://schemas.openxmlformats.org/drawingml/2006/diagram" xmlns:o="urn:schemas-microsoft-com:office:office" xmlns:v="urn:schemas-microsoft-com:vml" xmlns:pvml="urn:schemas-microsoft-com:office:powerpoint" xmlns:com="http://schemas.openxmlformats.org/drawingml/2006/compatibility" xmlns:p14="http://schemas.microsoft.com/office/powerpoint/2010/main" xmlns:p15="http://schemas.microsoft.com/office/powerpoint/2012/main" xmlns:ahyp="http://schemas.microsoft.com/office/drawing/2018/hyperlinkcolor">
+<p:sld xmlns:a="http://schemas.openxmlformats.org/drawingml/2006/main" xmlns:r="http://schemas.openxmlformats.org/officeDocument/2006/relationships" xmlns:p="http://schemas.openxmlformats.org/presentationml/2006/main">
   <p:cSld>
     <p:spTree>
       <p:nvGrpSpPr>
-        <p:cNvPr id="209" name="Shape 209"/>
+        <p:cNvPr id="1" name="Shape 209"/>
         <p:cNvGrpSpPr/>
         <p:nvPr/>
       </p:nvGrpSpPr>
@@ -10682,7 +10909,9 @@
       <p:sp>
         <p:nvSpPr>
           <p:cNvPr id="210" name="Google Shape;210;p33"/>
-          <p:cNvSpPr txBox="1"/>
+          <p:cNvSpPr txBox="1">
+            <a:spLocks noGrp="1"/>
+          </p:cNvSpPr>
           <p:nvPr>
             <p:ph type="title"/>
           </p:nvPr>
@@ -10697,12 +10926,12 @@
           </a:prstGeom>
         </p:spPr>
         <p:txBody>
-          <a:bodyPr anchorCtr="0" anchor="t" bIns="91425" lIns="91425" spcFirstLastPara="1" rIns="91425" wrap="square" tIns="91425">
+          <a:bodyPr spcFirstLastPara="1" wrap="square" lIns="91425" tIns="91425" rIns="91425" bIns="91425" anchor="t" anchorCtr="0">
             <a:normAutofit fontScale="90000"/>
           </a:bodyPr>
           <a:lstStyle/>
           <a:p>
-            <a:pPr indent="0" lvl="0" marL="0" rtl="0" algn="l">
+            <a:pPr marL="0" lvl="0" indent="0" algn="l" rtl="0">
               <a:spcBef>
                 <a:spcPts val="0"/>
               </a:spcBef>
@@ -10722,9 +10951,11 @@
       <p:sp>
         <p:nvSpPr>
           <p:cNvPr id="211" name="Google Shape;211;p33"/>
-          <p:cNvSpPr txBox="1"/>
+          <p:cNvSpPr txBox="1">
+            <a:spLocks noGrp="1"/>
+          </p:cNvSpPr>
           <p:nvPr>
-            <p:ph idx="1" type="body"/>
+            <p:ph type="body" idx="1"/>
           </p:nvPr>
         </p:nvSpPr>
         <p:spPr>
@@ -10737,12 +10968,12 @@
           </a:prstGeom>
         </p:spPr>
         <p:txBody>
-          <a:bodyPr anchorCtr="0" anchor="t" bIns="91425" lIns="91425" spcFirstLastPara="1" rIns="91425" wrap="square" tIns="91425">
+          <a:bodyPr spcFirstLastPara="1" wrap="square" lIns="91425" tIns="91425" rIns="91425" bIns="91425" anchor="t" anchorCtr="0">
             <a:normAutofit/>
           </a:bodyPr>
           <a:lstStyle/>
           <a:p>
-            <a:pPr indent="0" lvl="0" marL="0" rtl="0" algn="l">
+            <a:pPr marL="0" lvl="0" indent="0" algn="l" rtl="0">
               <a:spcBef>
                 <a:spcPts val="0"/>
               </a:spcBef>
@@ -10758,7 +10989,7 @@
             <a:endParaRPr/>
           </a:p>
           <a:p>
-            <a:pPr indent="0" lvl="0" marL="0" rtl="0" algn="l">
+            <a:pPr marL="0" lvl="0" indent="0" algn="l" rtl="0">
               <a:spcBef>
                 <a:spcPts val="1200"/>
               </a:spcBef>
@@ -10806,9 +11037,11 @@
       <p:sp>
         <p:nvSpPr>
           <p:cNvPr id="213" name="Google Shape;213;p33"/>
-          <p:cNvSpPr txBox="1"/>
+          <p:cNvSpPr txBox="1">
+            <a:spLocks noGrp="1"/>
+          </p:cNvSpPr>
           <p:nvPr>
-            <p:ph idx="1" type="body"/>
+            <p:ph type="body" idx="1"/>
           </p:nvPr>
         </p:nvSpPr>
         <p:spPr>
@@ -10821,12 +11054,12 @@
           </a:prstGeom>
         </p:spPr>
         <p:txBody>
-          <a:bodyPr anchorCtr="0" anchor="t" bIns="91425" lIns="91425" spcFirstLastPara="1" rIns="91425" wrap="square" tIns="91425">
+          <a:bodyPr spcFirstLastPara="1" wrap="square" lIns="91425" tIns="91425" rIns="91425" bIns="91425" anchor="t" anchorCtr="0">
             <a:normAutofit/>
           </a:bodyPr>
           <a:lstStyle/>
           <a:p>
-            <a:pPr indent="0" lvl="0" marL="0" rtl="0" algn="l">
+            <a:pPr marL="0" lvl="0" indent="0" algn="l" rtl="0">
               <a:spcBef>
                 <a:spcPts val="0"/>
               </a:spcBef>
@@ -10842,7 +11075,7 @@
             <a:endParaRPr/>
           </a:p>
           <a:p>
-            <a:pPr indent="0" lvl="0" marL="0" rtl="0" algn="l">
+            <a:pPr marL="0" lvl="0" indent="0" algn="l" rtl="0">
               <a:spcBef>
                 <a:spcPts val="1200"/>
               </a:spcBef>
@@ -10851,9 +11084,6 @@
               </a:spcAft>
               <a:buNone/>
             </a:pPr>
-            <a:r>
-              <a:t/>
-            </a:r>
             <a:endParaRPr/>
           </a:p>
         </p:txBody>
@@ -10889,9 +11119,11 @@
       <p:sp>
         <p:nvSpPr>
           <p:cNvPr id="215" name="Google Shape;215;p33"/>
-          <p:cNvSpPr txBox="1"/>
+          <p:cNvSpPr txBox="1">
+            <a:spLocks noGrp="1"/>
+          </p:cNvSpPr>
           <p:nvPr>
-            <p:ph idx="1" type="body"/>
+            <p:ph type="body" idx="1"/>
           </p:nvPr>
         </p:nvSpPr>
         <p:spPr>
@@ -10904,12 +11136,12 @@
           </a:prstGeom>
         </p:spPr>
         <p:txBody>
-          <a:bodyPr anchorCtr="0" anchor="t" bIns="91425" lIns="91425" spcFirstLastPara="1" rIns="91425" wrap="square" tIns="91425">
+          <a:bodyPr spcFirstLastPara="1" wrap="square" lIns="91425" tIns="91425" rIns="91425" bIns="91425" anchor="t" anchorCtr="0">
             <a:normAutofit/>
           </a:bodyPr>
           <a:lstStyle/>
           <a:p>
-            <a:pPr indent="0" lvl="0" marL="0" rtl="0" algn="l">
+            <a:pPr marL="0" lvl="0" indent="0" algn="l" rtl="0">
               <a:spcBef>
                 <a:spcPts val="0"/>
               </a:spcBef>
@@ -10925,7 +11157,7 @@
             <a:endParaRPr/>
           </a:p>
           <a:p>
-            <a:pPr indent="0" lvl="0" marL="0" rtl="0" algn="l">
+            <a:pPr marL="0" lvl="0" indent="0" algn="l" rtl="0">
               <a:spcBef>
                 <a:spcPts val="1200"/>
               </a:spcBef>
@@ -10934,9 +11166,6 @@
               </a:spcAft>
               <a:buNone/>
             </a:pPr>
-            <a:r>
-              <a:t/>
-            </a:r>
             <a:endParaRPr/>
           </a:p>
         </p:txBody>
@@ -10978,11 +11207,11 @@
 </file>
 
 <file path=ppt/slides/slide22.xml><?xml version="1.0" encoding="utf-8"?>
-<p:sld xmlns:a="http://schemas.openxmlformats.org/drawingml/2006/main" xmlns:r="http://schemas.openxmlformats.org/officeDocument/2006/relationships" xmlns:mc="http://schemas.openxmlformats.org/markup-compatibility/2006" xmlns:mv="urn:schemas-microsoft-com:mac:vml" xmlns:p="http://schemas.openxmlformats.org/presentationml/2006/main" xmlns:c="http://schemas.openxmlformats.org/drawingml/2006/chart" xmlns:dgm="http://schemas.openxmlformats.org/drawingml/2006/diagram" xmlns:o="urn:schemas-microsoft-com:office:office" xmlns:v="urn:schemas-microsoft-com:vml" xmlns:pvml="urn:schemas-microsoft-com:office:powerpoint" xmlns:com="http://schemas.openxmlformats.org/drawingml/2006/compatibility" xmlns:p14="http://schemas.microsoft.com/office/powerpoint/2010/main" xmlns:p15="http://schemas.microsoft.com/office/powerpoint/2012/main" xmlns:ahyp="http://schemas.microsoft.com/office/drawing/2018/hyperlinkcolor">
+<p:sld xmlns:a="http://schemas.openxmlformats.org/drawingml/2006/main" xmlns:r="http://schemas.openxmlformats.org/officeDocument/2006/relationships" xmlns:p="http://schemas.openxmlformats.org/presentationml/2006/main">
   <p:cSld>
     <p:spTree>
       <p:nvGrpSpPr>
-        <p:cNvPr id="220" name="Shape 220"/>
+        <p:cNvPr id="1" name="Shape 220"/>
         <p:cNvGrpSpPr/>
         <p:nvPr/>
       </p:nvGrpSpPr>
@@ -10997,7 +11226,9 @@
       <p:sp>
         <p:nvSpPr>
           <p:cNvPr id="221" name="Google Shape;221;p34"/>
-          <p:cNvSpPr txBox="1"/>
+          <p:cNvSpPr txBox="1">
+            <a:spLocks noGrp="1"/>
+          </p:cNvSpPr>
           <p:nvPr>
             <p:ph type="title"/>
           </p:nvPr>
@@ -11012,12 +11243,12 @@
           </a:prstGeom>
         </p:spPr>
         <p:txBody>
-          <a:bodyPr anchorCtr="0" anchor="t" bIns="91425" lIns="91425" spcFirstLastPara="1" rIns="91425" wrap="square" tIns="91425">
+          <a:bodyPr spcFirstLastPara="1" wrap="square" lIns="91425" tIns="91425" rIns="91425" bIns="91425" anchor="t" anchorCtr="0">
             <a:normAutofit fontScale="90000"/>
           </a:bodyPr>
           <a:lstStyle/>
           <a:p>
-            <a:pPr indent="0" lvl="0" marL="0" rtl="0" algn="l">
+            <a:pPr marL="0" lvl="0" indent="0" algn="l" rtl="0">
               <a:spcBef>
                 <a:spcPts val="0"/>
               </a:spcBef>
@@ -11037,9 +11268,11 @@
       <p:sp>
         <p:nvSpPr>
           <p:cNvPr id="222" name="Google Shape;222;p34"/>
-          <p:cNvSpPr txBox="1"/>
+          <p:cNvSpPr txBox="1">
+            <a:spLocks noGrp="1"/>
+          </p:cNvSpPr>
           <p:nvPr>
-            <p:ph idx="1" type="body"/>
+            <p:ph type="body" idx="1"/>
           </p:nvPr>
         </p:nvSpPr>
         <p:spPr>
@@ -11052,12 +11285,12 @@
           </a:prstGeom>
         </p:spPr>
         <p:txBody>
-          <a:bodyPr anchorCtr="0" anchor="t" bIns="91425" lIns="91425" spcFirstLastPara="1" rIns="91425" wrap="square" tIns="91425">
+          <a:bodyPr spcFirstLastPara="1" wrap="square" lIns="91425" tIns="91425" rIns="91425" bIns="91425" anchor="t" anchorCtr="0">
             <a:normAutofit fontScale="92500" lnSpcReduction="10000"/>
           </a:bodyPr>
           <a:lstStyle/>
           <a:p>
-            <a:pPr indent="0" lvl="0" marL="0" rtl="0" algn="l">
+            <a:pPr marL="0" lvl="0" indent="0" algn="l" rtl="0">
               <a:spcBef>
                 <a:spcPts val="0"/>
               </a:spcBef>
@@ -11073,7 +11306,7 @@
             <a:endParaRPr/>
           </a:p>
           <a:p>
-            <a:pPr indent="0" lvl="0" marL="0" rtl="0" algn="l">
+            <a:pPr marL="0" lvl="0" indent="0" algn="l" rtl="0">
               <a:spcBef>
                 <a:spcPts val="1200"/>
               </a:spcBef>
@@ -11082,13 +11315,10 @@
               </a:spcAft>
               <a:buNone/>
             </a:pPr>
-            <a:r>
-              <a:t/>
-            </a:r>
-            <a:endParaRPr/>
-          </a:p>
-          <a:p>
-            <a:pPr indent="0" lvl="0" marL="0" rtl="0" algn="l">
+            <a:endParaRPr/>
+          </a:p>
+          <a:p>
+            <a:pPr marL="0" lvl="0" indent="0" algn="l" rtl="0">
               <a:spcBef>
                 <a:spcPts val="1200"/>
               </a:spcBef>
@@ -11104,7 +11334,7 @@
             <a:endParaRPr/>
           </a:p>
           <a:p>
-            <a:pPr indent="0" lvl="0" marL="0" rtl="0" algn="l">
+            <a:pPr marL="0" lvl="0" indent="0" algn="l" rtl="0">
               <a:spcBef>
                 <a:spcPts val="1200"/>
               </a:spcBef>
@@ -11113,13 +11343,10 @@
               </a:spcAft>
               <a:buNone/>
             </a:pPr>
-            <a:r>
-              <a:t/>
-            </a:r>
-            <a:endParaRPr/>
-          </a:p>
-          <a:p>
-            <a:pPr indent="0" lvl="0" marL="0" rtl="0" algn="l">
+            <a:endParaRPr/>
+          </a:p>
+          <a:p>
+            <a:pPr marL="0" lvl="0" indent="0" algn="l" rtl="0">
               <a:spcBef>
                 <a:spcPts val="1200"/>
               </a:spcBef>
@@ -11135,7 +11362,7 @@
             <a:endParaRPr/>
           </a:p>
           <a:p>
-            <a:pPr indent="0" lvl="0" marL="0" rtl="0" algn="l">
+            <a:pPr marL="0" lvl="0" indent="0" algn="l" rtl="0">
               <a:spcBef>
                 <a:spcPts val="1200"/>
               </a:spcBef>
@@ -11144,13 +11371,10 @@
               </a:spcAft>
               <a:buNone/>
             </a:pPr>
-            <a:r>
-              <a:t/>
-            </a:r>
-            <a:endParaRPr/>
-          </a:p>
-          <a:p>
-            <a:pPr indent="0" lvl="0" marL="0" rtl="0" algn="l">
+            <a:endParaRPr/>
+          </a:p>
+          <a:p>
+            <a:pPr marL="0" lvl="0" indent="0" algn="l" rtl="0">
               <a:spcBef>
                 <a:spcPts val="1200"/>
               </a:spcBef>
@@ -11232,11 +11456,11 @@
 </file>
 
 <file path=ppt/slides/slide23.xml><?xml version="1.0" encoding="utf-8"?>
-<p:sld xmlns:a="http://schemas.openxmlformats.org/drawingml/2006/main" xmlns:r="http://schemas.openxmlformats.org/officeDocument/2006/relationships" xmlns:mc="http://schemas.openxmlformats.org/markup-compatibility/2006" xmlns:mv="urn:schemas-microsoft-com:mac:vml" xmlns:p="http://schemas.openxmlformats.org/presentationml/2006/main" xmlns:c="http://schemas.openxmlformats.org/drawingml/2006/chart" xmlns:dgm="http://schemas.openxmlformats.org/drawingml/2006/diagram" xmlns:o="urn:schemas-microsoft-com:office:office" xmlns:v="urn:schemas-microsoft-com:vml" xmlns:pvml="urn:schemas-microsoft-com:office:powerpoint" xmlns:com="http://schemas.openxmlformats.org/drawingml/2006/compatibility" xmlns:p14="http://schemas.microsoft.com/office/powerpoint/2010/main" xmlns:p15="http://schemas.microsoft.com/office/powerpoint/2012/main" xmlns:ahyp="http://schemas.microsoft.com/office/drawing/2018/hyperlinkcolor">
+<p:sld xmlns:a="http://schemas.openxmlformats.org/drawingml/2006/main" xmlns:r="http://schemas.openxmlformats.org/officeDocument/2006/relationships" xmlns:p="http://schemas.openxmlformats.org/presentationml/2006/main">
   <p:cSld>
     <p:spTree>
       <p:nvGrpSpPr>
-        <p:cNvPr id="228" name="Shape 228"/>
+        <p:cNvPr id="1" name="Shape 228"/>
         <p:cNvGrpSpPr/>
         <p:nvPr/>
       </p:nvGrpSpPr>
@@ -11251,7 +11475,9 @@
       <p:sp>
         <p:nvSpPr>
           <p:cNvPr id="229" name="Google Shape;229;p35"/>
-          <p:cNvSpPr txBox="1"/>
+          <p:cNvSpPr txBox="1">
+            <a:spLocks noGrp="1"/>
+          </p:cNvSpPr>
           <p:nvPr>
             <p:ph type="title"/>
           </p:nvPr>
@@ -11266,12 +11492,12 @@
           </a:prstGeom>
         </p:spPr>
         <p:txBody>
-          <a:bodyPr anchorCtr="0" anchor="t" bIns="91425" lIns="91425" spcFirstLastPara="1" rIns="91425" wrap="square" tIns="91425">
+          <a:bodyPr spcFirstLastPara="1" wrap="square" lIns="91425" tIns="91425" rIns="91425" bIns="91425" anchor="t" anchorCtr="0">
             <a:normAutofit fontScale="90000"/>
           </a:bodyPr>
           <a:lstStyle/>
           <a:p>
-            <a:pPr indent="0" lvl="0" marL="0" rtl="0" algn="l">
+            <a:pPr marL="0" lvl="0" indent="0" algn="l" rtl="0">
               <a:spcBef>
                 <a:spcPts val="0"/>
               </a:spcBef>
@@ -11291,9 +11517,11 @@
       <p:sp>
         <p:nvSpPr>
           <p:cNvPr id="230" name="Google Shape;230;p35"/>
-          <p:cNvSpPr txBox="1"/>
+          <p:cNvSpPr txBox="1">
+            <a:spLocks noGrp="1"/>
+          </p:cNvSpPr>
           <p:nvPr>
-            <p:ph idx="1" type="body"/>
+            <p:ph type="body" idx="1"/>
           </p:nvPr>
         </p:nvSpPr>
         <p:spPr>
@@ -11306,12 +11534,12 @@
           </a:prstGeom>
         </p:spPr>
         <p:txBody>
-          <a:bodyPr anchorCtr="0" anchor="t" bIns="91425" lIns="91425" spcFirstLastPara="1" rIns="91425" wrap="square" tIns="91425">
+          <a:bodyPr spcFirstLastPara="1" wrap="square" lIns="91425" tIns="91425" rIns="91425" bIns="91425" anchor="t" anchorCtr="0">
             <a:normAutofit/>
           </a:bodyPr>
           <a:lstStyle/>
           <a:p>
-            <a:pPr indent="0" lvl="0" marL="0" rtl="0" algn="l">
+            <a:pPr marL="0" lvl="0" indent="0" algn="l" rtl="0">
               <a:spcBef>
                 <a:spcPts val="0"/>
               </a:spcBef>
@@ -11327,7 +11555,7 @@
             <a:endParaRPr/>
           </a:p>
           <a:p>
-            <a:pPr indent="0" lvl="0" marL="0" rtl="0" algn="l">
+            <a:pPr marL="0" lvl="0" indent="0" algn="l" rtl="0">
               <a:spcBef>
                 <a:spcPts val="1200"/>
               </a:spcBef>
@@ -11336,13 +11564,10 @@
               </a:spcAft>
               <a:buNone/>
             </a:pPr>
-            <a:r>
-              <a:t/>
-            </a:r>
-            <a:endParaRPr/>
-          </a:p>
-          <a:p>
-            <a:pPr indent="0" lvl="0" marL="0" rtl="0" algn="l">
+            <a:endParaRPr/>
+          </a:p>
+          <a:p>
+            <a:pPr marL="0" lvl="0" indent="0" algn="l" rtl="0">
               <a:spcBef>
                 <a:spcPts val="1200"/>
               </a:spcBef>
@@ -11358,7 +11583,7 @@
             <a:endParaRPr/>
           </a:p>
           <a:p>
-            <a:pPr indent="0" lvl="0" marL="0" rtl="0" algn="l">
+            <a:pPr marL="0" lvl="0" indent="0" algn="l" rtl="0">
               <a:spcBef>
                 <a:spcPts val="1200"/>
               </a:spcBef>
@@ -11367,13 +11592,10 @@
               </a:spcAft>
               <a:buNone/>
             </a:pPr>
-            <a:r>
-              <a:t/>
-            </a:r>
-            <a:endParaRPr/>
-          </a:p>
-          <a:p>
-            <a:pPr indent="0" lvl="0" marL="0" rtl="0" algn="l">
+            <a:endParaRPr/>
+          </a:p>
+          <a:p>
+            <a:pPr marL="0" lvl="0" indent="0" algn="l" rtl="0">
               <a:spcBef>
                 <a:spcPts val="1200"/>
               </a:spcBef>
@@ -11393,9 +11615,11 @@
       <p:sp>
         <p:nvSpPr>
           <p:cNvPr id="231" name="Google Shape;231;p35"/>
-          <p:cNvSpPr txBox="1"/>
+          <p:cNvSpPr txBox="1">
+            <a:spLocks noGrp="1"/>
+          </p:cNvSpPr>
           <p:nvPr>
-            <p:ph idx="1" type="body"/>
+            <p:ph type="body" idx="1"/>
           </p:nvPr>
         </p:nvSpPr>
         <p:spPr>
@@ -11408,12 +11632,12 @@
           </a:prstGeom>
         </p:spPr>
         <p:txBody>
-          <a:bodyPr anchorCtr="0" anchor="t" bIns="91425" lIns="91425" spcFirstLastPara="1" rIns="91425" wrap="square" tIns="91425">
+          <a:bodyPr spcFirstLastPara="1" wrap="square" lIns="91425" tIns="91425" rIns="91425" bIns="91425" anchor="t" anchorCtr="0">
             <a:normAutofit fontScale="70000" lnSpcReduction="20000"/>
           </a:bodyPr>
           <a:lstStyle/>
           <a:p>
-            <a:pPr indent="0" lvl="0" marL="0" rtl="0" algn="l">
+            <a:pPr marL="0" lvl="0" indent="0" algn="l" rtl="0">
               <a:lnSpc>
                 <a:spcPct val="100000"/>
               </a:lnSpc>
@@ -11431,23 +11655,7 @@
                   <a:srgbClr val="FF0000"/>
                 </a:solidFill>
               </a:rPr>
-              <a:t>- LED "flash" stuttering is </a:t>
-            </a:r>
-            <a:r>
-              <a:rPr lang="en">
-                <a:solidFill>
-                  <a:srgbClr val="FF0000"/>
-                </a:solidFill>
-              </a:rPr>
-              <a:t>noticeable</a:t>
-            </a:r>
-            <a:r>
-              <a:rPr lang="en">
-                <a:solidFill>
-                  <a:srgbClr val="FF0000"/>
-                </a:solidFill>
-              </a:rPr>
-              <a:t> (not true pulse-width modulation).</a:t>
+              <a:t>- LED "flash" stuttering is noticeable (not true pulse-width modulation).</a:t>
             </a:r>
             <a:endParaRPr>
               <a:solidFill>
@@ -11456,7 +11664,7 @@
             </a:endParaRPr>
           </a:p>
           <a:p>
-            <a:pPr indent="0" lvl="0" marL="0" rtl="0" algn="l">
+            <a:pPr marL="0" lvl="0" indent="0" algn="l" rtl="0">
               <a:lnSpc>
                 <a:spcPct val="100000"/>
               </a:lnSpc>
@@ -11487,9 +11695,11 @@
       <p:sp>
         <p:nvSpPr>
           <p:cNvPr id="232" name="Google Shape;232;p35"/>
-          <p:cNvSpPr txBox="1"/>
+          <p:cNvSpPr txBox="1">
+            <a:spLocks noGrp="1"/>
+          </p:cNvSpPr>
           <p:nvPr>
-            <p:ph idx="1" type="body"/>
+            <p:ph type="body" idx="1"/>
           </p:nvPr>
         </p:nvSpPr>
         <p:spPr>
@@ -11502,12 +11712,12 @@
           </a:prstGeom>
         </p:spPr>
         <p:txBody>
-          <a:bodyPr anchorCtr="0" anchor="t" bIns="91425" lIns="91425" spcFirstLastPara="1" rIns="91425" wrap="square" tIns="91425">
+          <a:bodyPr spcFirstLastPara="1" wrap="square" lIns="91425" tIns="91425" rIns="91425" bIns="91425" anchor="t" anchorCtr="0">
             <a:normAutofit fontScale="92500"/>
           </a:bodyPr>
           <a:lstStyle/>
           <a:p>
-            <a:pPr indent="0" lvl="0" marL="0" rtl="0" algn="l">
+            <a:pPr marL="0" lvl="0" indent="0" algn="l" rtl="0">
               <a:lnSpc>
                 <a:spcPct val="70000"/>
               </a:lnSpc>
@@ -11534,7 +11744,7 @@
             </a:endParaRPr>
           </a:p>
           <a:p>
-            <a:pPr indent="0" lvl="0" marL="0" rtl="0" algn="l">
+            <a:pPr marL="0" lvl="0" indent="0" algn="l" rtl="0">
               <a:lnSpc>
                 <a:spcPct val="70000"/>
               </a:lnSpc>
@@ -11565,9 +11775,11 @@
       <p:sp>
         <p:nvSpPr>
           <p:cNvPr id="233" name="Google Shape;233;p35"/>
-          <p:cNvSpPr txBox="1"/>
+          <p:cNvSpPr txBox="1">
+            <a:spLocks noGrp="1"/>
+          </p:cNvSpPr>
           <p:nvPr>
-            <p:ph idx="1" type="body"/>
+            <p:ph type="body" idx="1"/>
           </p:nvPr>
         </p:nvSpPr>
         <p:spPr>
@@ -11580,12 +11792,12 @@
           </a:prstGeom>
         </p:spPr>
         <p:txBody>
-          <a:bodyPr anchorCtr="0" anchor="t" bIns="91425" lIns="91425" spcFirstLastPara="1" rIns="91425" wrap="square" tIns="91425">
+          <a:bodyPr spcFirstLastPara="1" wrap="square" lIns="91425" tIns="91425" rIns="91425" bIns="91425" anchor="t" anchorCtr="0">
             <a:normAutofit/>
           </a:bodyPr>
           <a:lstStyle/>
           <a:p>
-            <a:pPr indent="0" lvl="0" marL="0" rtl="0" algn="l">
+            <a:pPr marL="0" lvl="0" indent="0" algn="l" rtl="0">
               <a:lnSpc>
                 <a:spcPct val="100000"/>
               </a:lnSpc>
@@ -11621,32 +11833,32 @@
   <p:timing>
     <p:tnLst>
       <p:par>
-        <p:cTn dur="indefinite" nodeType="tmRoot" restart="never">
+        <p:cTn id="1" dur="indefinite" restart="never" nodeType="tmRoot">
           <p:childTnLst>
             <p:seq concurrent="1" nextAc="seek">
-              <p:cTn dur="indefinite" id="2" nodeType="mainSeq">
+              <p:cTn id="2" dur="indefinite" nodeType="mainSeq">
                 <p:childTnLst>
                   <p:par>
-                    <p:cTn fill="hold">
+                    <p:cTn id="3" fill="hold">
                       <p:stCondLst>
                         <p:cond delay="indefinite"/>
                       </p:stCondLst>
                       <p:childTnLst>
                         <p:par>
-                          <p:cTn fill="hold">
+                          <p:cTn id="4" fill="hold">
                             <p:stCondLst>
                               <p:cond delay="0"/>
                             </p:stCondLst>
                             <p:childTnLst>
                               <p:par>
-                                <p:cTn fill="hold" nodeType="clickEffect" presetClass="entr" presetID="1" presetSubtype="0">
+                                <p:cTn id="5" presetID="1" presetClass="entr" presetSubtype="0" fill="hold" nodeType="clickEffect">
                                   <p:stCondLst>
                                     <p:cond delay="0"/>
                                   </p:stCondLst>
                                   <p:childTnLst>
                                     <p:set>
                                       <p:cBhvr>
-                                        <p:cTn dur="1" fill="hold">
+                                        <p:cTn id="6" dur="1" fill="hold">
                                           <p:stCondLst>
                                             <p:cond delay="0"/>
                                           </p:stCondLst>
@@ -11672,26 +11884,26 @@
                     </p:cTn>
                   </p:par>
                   <p:par>
-                    <p:cTn fill="hold">
+                    <p:cTn id="7" fill="hold">
                       <p:stCondLst>
                         <p:cond delay="indefinite"/>
                       </p:stCondLst>
                       <p:childTnLst>
                         <p:par>
-                          <p:cTn fill="hold">
+                          <p:cTn id="8" fill="hold">
                             <p:stCondLst>
                               <p:cond delay="0"/>
                             </p:stCondLst>
                             <p:childTnLst>
                               <p:par>
-                                <p:cTn fill="hold" nodeType="clickEffect" presetClass="entr" presetID="1" presetSubtype="0">
+                                <p:cTn id="9" presetID="1" presetClass="entr" presetSubtype="0" fill="hold" nodeType="clickEffect">
                                   <p:stCondLst>
                                     <p:cond delay="0"/>
                                   </p:stCondLst>
                                   <p:childTnLst>
                                     <p:set>
                                       <p:cBhvr>
-                                        <p:cTn dur="1" fill="hold">
+                                        <p:cTn id="10" dur="1" fill="hold">
                                           <p:stCondLst>
                                             <p:cond delay="0"/>
                                           </p:stCondLst>
@@ -11717,26 +11929,26 @@
                     </p:cTn>
                   </p:par>
                   <p:par>
-                    <p:cTn fill="hold">
+                    <p:cTn id="11" fill="hold">
                       <p:stCondLst>
                         <p:cond delay="indefinite"/>
                       </p:stCondLst>
                       <p:childTnLst>
                         <p:par>
-                          <p:cTn fill="hold">
+                          <p:cTn id="12" fill="hold">
                             <p:stCondLst>
                               <p:cond delay="0"/>
                             </p:stCondLst>
                             <p:childTnLst>
                               <p:par>
-                                <p:cTn fill="hold" nodeType="clickEffect" presetClass="entr" presetID="1" presetSubtype="0">
+                                <p:cTn id="13" presetID="1" presetClass="entr" presetSubtype="0" fill="hold" nodeType="clickEffect">
                                   <p:stCondLst>
                                     <p:cond delay="0"/>
                                   </p:stCondLst>
                                   <p:childTnLst>
                                     <p:set>
                                       <p:cBhvr>
-                                        <p:cTn dur="1" fill="hold">
+                                        <p:cTn id="14" dur="1" fill="hold">
                                           <p:stCondLst>
                                             <p:cond delay="0"/>
                                           </p:stCondLst>
@@ -11764,14 +11976,14 @@
                 </p:childTnLst>
               </p:cTn>
               <p:prevCondLst>
-                <p:cond evt="onPrev">
+                <p:cond evt="onPrev" delay="0">
                   <p:tgtEl>
                     <p:sldTgt/>
                   </p:tgtEl>
                 </p:cond>
               </p:prevCondLst>
               <p:nextCondLst>
-                <p:cond evt="onNext">
+                <p:cond evt="onNext" delay="0">
                   <p:tgtEl>
                     <p:sldTgt/>
                   </p:tgtEl>
@@ -11787,11 +11999,11 @@
 </file>
 
 <file path=ppt/slides/slide24.xml><?xml version="1.0" encoding="utf-8"?>
-<p:sld xmlns:a="http://schemas.openxmlformats.org/drawingml/2006/main" xmlns:r="http://schemas.openxmlformats.org/officeDocument/2006/relationships" xmlns:mc="http://schemas.openxmlformats.org/markup-compatibility/2006" xmlns:mv="urn:schemas-microsoft-com:mac:vml" xmlns:p="http://schemas.openxmlformats.org/presentationml/2006/main" xmlns:c="http://schemas.openxmlformats.org/drawingml/2006/chart" xmlns:dgm="http://schemas.openxmlformats.org/drawingml/2006/diagram" xmlns:o="urn:schemas-microsoft-com:office:office" xmlns:v="urn:schemas-microsoft-com:vml" xmlns:pvml="urn:schemas-microsoft-com:office:powerpoint" xmlns:com="http://schemas.openxmlformats.org/drawingml/2006/compatibility" xmlns:p14="http://schemas.microsoft.com/office/powerpoint/2010/main" xmlns:p15="http://schemas.microsoft.com/office/powerpoint/2012/main" xmlns:ahyp="http://schemas.microsoft.com/office/drawing/2018/hyperlinkcolor">
+<p:sld xmlns:a="http://schemas.openxmlformats.org/drawingml/2006/main" xmlns:r="http://schemas.openxmlformats.org/officeDocument/2006/relationships" xmlns:p="http://schemas.openxmlformats.org/presentationml/2006/main">
   <p:cSld>
     <p:spTree>
       <p:nvGrpSpPr>
-        <p:cNvPr id="237" name="Shape 237"/>
+        <p:cNvPr id="1" name="Shape 237"/>
         <p:cNvGrpSpPr/>
         <p:nvPr/>
       </p:nvGrpSpPr>
@@ -11834,7 +12046,9 @@
       <p:sp>
         <p:nvSpPr>
           <p:cNvPr id="239" name="Google Shape;239;p36"/>
-          <p:cNvSpPr txBox="1"/>
+          <p:cNvSpPr txBox="1">
+            <a:spLocks noGrp="1"/>
+          </p:cNvSpPr>
           <p:nvPr>
             <p:ph type="title"/>
           </p:nvPr>
@@ -11849,12 +12063,12 @@
           </a:prstGeom>
         </p:spPr>
         <p:txBody>
-          <a:bodyPr anchorCtr="0" anchor="t" bIns="91425" lIns="91425" spcFirstLastPara="1" rIns="91425" wrap="square" tIns="91425">
+          <a:bodyPr spcFirstLastPara="1" wrap="square" lIns="91425" tIns="91425" rIns="91425" bIns="91425" anchor="t" anchorCtr="0">
             <a:normAutofit fontScale="90000"/>
           </a:bodyPr>
           <a:lstStyle/>
           <a:p>
-            <a:pPr indent="0" lvl="0" marL="0" rtl="0" algn="l">
+            <a:pPr marL="0" lvl="0" indent="0" algn="l" rtl="0">
               <a:spcBef>
                 <a:spcPts val="0"/>
               </a:spcBef>
@@ -11874,9 +12088,11 @@
       <p:sp>
         <p:nvSpPr>
           <p:cNvPr id="240" name="Google Shape;240;p36"/>
-          <p:cNvSpPr txBox="1"/>
+          <p:cNvSpPr txBox="1">
+            <a:spLocks noGrp="1"/>
+          </p:cNvSpPr>
           <p:nvPr>
-            <p:ph idx="1" type="body"/>
+            <p:ph type="body" idx="1"/>
           </p:nvPr>
         </p:nvSpPr>
         <p:spPr>
@@ -11889,12 +12105,12 @@
           </a:prstGeom>
         </p:spPr>
         <p:txBody>
-          <a:bodyPr anchorCtr="0" anchor="t" bIns="91425" lIns="91425" spcFirstLastPara="1" rIns="91425" wrap="square" tIns="91425">
+          <a:bodyPr spcFirstLastPara="1" wrap="square" lIns="91425" tIns="91425" rIns="91425" bIns="91425" anchor="t" anchorCtr="0">
             <a:normAutofit/>
           </a:bodyPr>
           <a:lstStyle/>
           <a:p>
-            <a:pPr indent="0" lvl="0" marL="0" rtl="0" algn="l">
+            <a:pPr marL="0" lvl="0" indent="0" algn="l" rtl="0">
               <a:spcBef>
                 <a:spcPts val="0"/>
               </a:spcBef>
@@ -11903,9 +12119,6 @@
               </a:spcAft>
               <a:buNone/>
             </a:pPr>
-            <a:r>
-              <a:t/>
-            </a:r>
             <a:endParaRPr/>
           </a:p>
         </p:txBody>
@@ -11919,11 +12132,11 @@
 </file>
 
 <file path=ppt/slides/slide3.xml><?xml version="1.0" encoding="utf-8"?>
-<p:sld xmlns:a="http://schemas.openxmlformats.org/drawingml/2006/main" xmlns:r="http://schemas.openxmlformats.org/officeDocument/2006/relationships" xmlns:mc="http://schemas.openxmlformats.org/markup-compatibility/2006" xmlns:mv="urn:schemas-microsoft-com:mac:vml" xmlns:p="http://schemas.openxmlformats.org/presentationml/2006/main" xmlns:c="http://schemas.openxmlformats.org/drawingml/2006/chart" xmlns:dgm="http://schemas.openxmlformats.org/drawingml/2006/diagram" xmlns:o="urn:schemas-microsoft-com:office:office" xmlns:v="urn:schemas-microsoft-com:vml" xmlns:pvml="urn:schemas-microsoft-com:office:powerpoint" xmlns:com="http://schemas.openxmlformats.org/drawingml/2006/compatibility" xmlns:p14="http://schemas.microsoft.com/office/powerpoint/2010/main" xmlns:p15="http://schemas.microsoft.com/office/powerpoint/2012/main" xmlns:ahyp="http://schemas.microsoft.com/office/drawing/2018/hyperlinkcolor">
+<p:sld xmlns:a="http://schemas.openxmlformats.org/drawingml/2006/main" xmlns:r="http://schemas.openxmlformats.org/officeDocument/2006/relationships" xmlns:p="http://schemas.openxmlformats.org/presentationml/2006/main">
   <p:cSld>
     <p:spTree>
       <p:nvGrpSpPr>
-        <p:cNvPr id="67" name="Shape 67"/>
+        <p:cNvPr id="1" name="Shape 67"/>
         <p:cNvGrpSpPr/>
         <p:nvPr/>
       </p:nvGrpSpPr>
@@ -11938,7 +12151,9 @@
       <p:sp>
         <p:nvSpPr>
           <p:cNvPr id="68" name="Google Shape;68;p15"/>
-          <p:cNvSpPr txBox="1"/>
+          <p:cNvSpPr txBox="1">
+            <a:spLocks noGrp="1"/>
+          </p:cNvSpPr>
           <p:nvPr>
             <p:ph type="title"/>
           </p:nvPr>
@@ -11953,12 +12168,12 @@
           </a:prstGeom>
         </p:spPr>
         <p:txBody>
-          <a:bodyPr anchorCtr="0" anchor="t" bIns="91425" lIns="91425" spcFirstLastPara="1" rIns="91425" wrap="square" tIns="91425">
+          <a:bodyPr spcFirstLastPara="1" wrap="square" lIns="91425" tIns="91425" rIns="91425" bIns="91425" anchor="t" anchorCtr="0">
             <a:normAutofit fontScale="90000"/>
           </a:bodyPr>
           <a:lstStyle/>
           <a:p>
-            <a:pPr indent="0" lvl="0" marL="0" rtl="0" algn="l">
+            <a:pPr marL="0" lvl="0" indent="0" algn="l" rtl="0">
               <a:spcBef>
                 <a:spcPts val="0"/>
               </a:spcBef>
@@ -11978,9 +12193,11 @@
       <p:sp>
         <p:nvSpPr>
           <p:cNvPr id="69" name="Google Shape;69;p15"/>
-          <p:cNvSpPr txBox="1"/>
+          <p:cNvSpPr txBox="1">
+            <a:spLocks noGrp="1"/>
+          </p:cNvSpPr>
           <p:nvPr>
-            <p:ph idx="1" type="body"/>
+            <p:ph type="body" idx="1"/>
           </p:nvPr>
         </p:nvSpPr>
         <p:spPr>
@@ -11993,12 +12210,12 @@
           </a:prstGeom>
         </p:spPr>
         <p:txBody>
-          <a:bodyPr anchorCtr="0" anchor="t" bIns="91425" lIns="91425" spcFirstLastPara="1" rIns="91425" wrap="square" tIns="91425">
+          <a:bodyPr spcFirstLastPara="1" wrap="square" lIns="91425" tIns="91425" rIns="91425" bIns="91425" anchor="t" anchorCtr="0">
             <a:normAutofit/>
           </a:bodyPr>
           <a:lstStyle/>
           <a:p>
-            <a:pPr indent="0" lvl="0" marL="0" rtl="0" algn="l">
+            <a:pPr marL="0" lvl="0" indent="0" algn="l" rtl="0">
               <a:spcBef>
                 <a:spcPts val="0"/>
               </a:spcBef>
@@ -12014,7 +12231,7 @@
             <a:endParaRPr/>
           </a:p>
           <a:p>
-            <a:pPr indent="-342900" lvl="0" marL="457200" rtl="0" algn="l">
+            <a:pPr marL="457200" lvl="0" indent="-342900" algn="l" rtl="0">
               <a:spcBef>
                 <a:spcPts val="1200"/>
               </a:spcBef>
@@ -12031,7 +12248,7 @@
             <a:endParaRPr/>
           </a:p>
           <a:p>
-            <a:pPr indent="-342900" lvl="0" marL="457200" rtl="0" algn="l">
+            <a:pPr marL="457200" lvl="0" indent="-342900" algn="l" rtl="0">
               <a:spcBef>
                 <a:spcPts val="0"/>
               </a:spcBef>
@@ -12048,7 +12265,7 @@
             <a:endParaRPr/>
           </a:p>
           <a:p>
-            <a:pPr indent="0" lvl="0" marL="0" rtl="0" algn="l">
+            <a:pPr marL="0" lvl="0" indent="0" algn="l" rtl="0">
               <a:spcBef>
                 <a:spcPts val="1200"/>
               </a:spcBef>
@@ -12057,13 +12274,10 @@
               </a:spcAft>
               <a:buNone/>
             </a:pPr>
-            <a:r>
-              <a:t/>
-            </a:r>
-            <a:endParaRPr/>
-          </a:p>
-          <a:p>
-            <a:pPr indent="-342900" lvl="0" marL="457200" rtl="0" algn="l">
+            <a:endParaRPr/>
+          </a:p>
+          <a:p>
+            <a:pPr marL="457200" lvl="0" indent="-342900" algn="l" rtl="0">
               <a:spcBef>
                 <a:spcPts val="1200"/>
               </a:spcBef>
@@ -12126,11 +12340,11 @@
 </file>
 
 <file path=ppt/slides/slide4.xml><?xml version="1.0" encoding="utf-8"?>
-<p:sld xmlns:a="http://schemas.openxmlformats.org/drawingml/2006/main" xmlns:r="http://schemas.openxmlformats.org/officeDocument/2006/relationships" xmlns:mc="http://schemas.openxmlformats.org/markup-compatibility/2006" xmlns:mv="urn:schemas-microsoft-com:mac:vml" xmlns:p="http://schemas.openxmlformats.org/presentationml/2006/main" xmlns:c="http://schemas.openxmlformats.org/drawingml/2006/chart" xmlns:dgm="http://schemas.openxmlformats.org/drawingml/2006/diagram" xmlns:o="urn:schemas-microsoft-com:office:office" xmlns:v="urn:schemas-microsoft-com:vml" xmlns:pvml="urn:schemas-microsoft-com:office:powerpoint" xmlns:com="http://schemas.openxmlformats.org/drawingml/2006/compatibility" xmlns:p14="http://schemas.microsoft.com/office/powerpoint/2010/main" xmlns:p15="http://schemas.microsoft.com/office/powerpoint/2012/main" xmlns:ahyp="http://schemas.microsoft.com/office/drawing/2018/hyperlinkcolor">
+<p:sld xmlns:a="http://schemas.openxmlformats.org/drawingml/2006/main" xmlns:r="http://schemas.openxmlformats.org/officeDocument/2006/relationships" xmlns:p="http://schemas.openxmlformats.org/presentationml/2006/main">
   <p:cSld>
     <p:spTree>
       <p:nvGrpSpPr>
-        <p:cNvPr id="74" name="Shape 74"/>
+        <p:cNvPr id="1" name="Shape 74"/>
         <p:cNvGrpSpPr/>
         <p:nvPr/>
       </p:nvGrpSpPr>
@@ -12145,7 +12359,9 @@
       <p:sp>
         <p:nvSpPr>
           <p:cNvPr id="75" name="Google Shape;75;p16"/>
-          <p:cNvSpPr txBox="1"/>
+          <p:cNvSpPr txBox="1">
+            <a:spLocks noGrp="1"/>
+          </p:cNvSpPr>
           <p:nvPr>
             <p:ph type="title"/>
           </p:nvPr>
@@ -12160,12 +12376,12 @@
           </a:prstGeom>
         </p:spPr>
         <p:txBody>
-          <a:bodyPr anchorCtr="0" anchor="t" bIns="91425" lIns="91425" spcFirstLastPara="1" rIns="91425" wrap="square" tIns="91425">
+          <a:bodyPr spcFirstLastPara="1" wrap="square" lIns="91425" tIns="91425" rIns="91425" bIns="91425" anchor="t" anchorCtr="0">
             <a:normAutofit fontScale="90000"/>
           </a:bodyPr>
           <a:lstStyle/>
           <a:p>
-            <a:pPr indent="0" lvl="0" marL="0" rtl="0" algn="l">
+            <a:pPr marL="0" lvl="0" indent="0" algn="l" rtl="0">
               <a:spcBef>
                 <a:spcPts val="0"/>
               </a:spcBef>
@@ -12175,19 +12391,21 @@
               <a:buNone/>
             </a:pPr>
             <a:r>
-              <a:rPr lang="en"/>
+              <a:rPr lang="en" dirty="0"/>
               <a:t>What We’re Doing Today</a:t>
             </a:r>
-            <a:endParaRPr/>
+            <a:endParaRPr dirty="0"/>
           </a:p>
         </p:txBody>
       </p:sp>
       <p:sp>
         <p:nvSpPr>
           <p:cNvPr id="76" name="Google Shape;76;p16"/>
-          <p:cNvSpPr txBox="1"/>
+          <p:cNvSpPr txBox="1">
+            <a:spLocks noGrp="1"/>
+          </p:cNvSpPr>
           <p:nvPr>
-            <p:ph idx="1" type="body"/>
+            <p:ph type="body" idx="1"/>
           </p:nvPr>
         </p:nvSpPr>
         <p:spPr>
@@ -12200,12 +12418,12 @@
           </a:prstGeom>
         </p:spPr>
         <p:txBody>
-          <a:bodyPr anchorCtr="0" anchor="t" bIns="91425" lIns="91425" spcFirstLastPara="1" rIns="91425" wrap="square" tIns="91425">
+          <a:bodyPr spcFirstLastPara="1" wrap="square" lIns="91425" tIns="91425" rIns="91425" bIns="91425" anchor="t" anchorCtr="0">
             <a:normAutofit/>
           </a:bodyPr>
           <a:lstStyle/>
           <a:p>
-            <a:pPr indent="0" lvl="0" marL="0" rtl="0" algn="l">
+            <a:pPr marL="0" lvl="0" indent="0" algn="l" rtl="0">
               <a:spcBef>
                 <a:spcPts val="0"/>
               </a:spcBef>
@@ -12215,13 +12433,13 @@
               <a:buNone/>
             </a:pPr>
             <a:r>
-              <a:rPr lang="en"/>
+              <a:rPr lang="en" dirty="0"/>
               <a:t>In this workshop, we will make a “blinky” that flashes a light. We will need to:</a:t>
             </a:r>
-            <a:endParaRPr/>
-          </a:p>
-          <a:p>
-            <a:pPr indent="-342900" lvl="0" marL="457200" rtl="0" algn="l">
+            <a:endParaRPr dirty="0"/>
+          </a:p>
+          <a:p>
+            <a:pPr marL="457200" lvl="0" indent="-342900" algn="l" rtl="0">
               <a:spcBef>
                 <a:spcPts val="1200"/>
               </a:spcBef>
@@ -12232,13 +12450,13 @@
               <a:buAutoNum type="arabicParenR"/>
             </a:pPr>
             <a:r>
-              <a:rPr lang="en"/>
+              <a:rPr lang="en" dirty="0"/>
               <a:t>Wire up an electrical circuit</a:t>
             </a:r>
-            <a:endParaRPr/>
-          </a:p>
-          <a:p>
-            <a:pPr indent="-342900" lvl="0" marL="457200" rtl="0" algn="l">
+            <a:endParaRPr dirty="0"/>
+          </a:p>
+          <a:p>
+            <a:pPr marL="457200" lvl="0" indent="-342900" algn="l" rtl="0">
               <a:spcBef>
                 <a:spcPts val="0"/>
               </a:spcBef>
@@ -12249,13 +12467,13 @@
               <a:buAutoNum type="arabicParenR"/>
             </a:pPr>
             <a:r>
-              <a:rPr lang="en"/>
+              <a:rPr lang="en" dirty="0"/>
               <a:t>Connect the circuit to the Arduino externally (wires) and internally (code)</a:t>
             </a:r>
-            <a:endParaRPr/>
-          </a:p>
-          <a:p>
-            <a:pPr indent="-342900" lvl="0" marL="457200" rtl="0" algn="l">
+            <a:endParaRPr dirty="0"/>
+          </a:p>
+          <a:p>
+            <a:pPr marL="457200" lvl="0" indent="-342900" algn="l" rtl="0">
               <a:spcBef>
                 <a:spcPts val="0"/>
               </a:spcBef>
@@ -12266,13 +12484,13 @@
               <a:buAutoNum type="arabicParenR"/>
             </a:pPr>
             <a:r>
-              <a:rPr lang="en"/>
-              <a:t>Write the program to control the Arduino (C Language)</a:t>
+              <a:rPr lang="en" dirty="0"/>
+              <a:t>Write the program to control the Arduino (C++ Language)</a:t>
             </a:r>
-            <a:endParaRPr/>
-          </a:p>
-          <a:p>
-            <a:pPr indent="-342900" lvl="0" marL="457200" rtl="0" algn="l">
+            <a:endParaRPr dirty="0"/>
+          </a:p>
+          <a:p>
+            <a:pPr marL="457200" lvl="0" indent="-342900" algn="l" rtl="0">
               <a:spcBef>
                 <a:spcPts val="0"/>
               </a:spcBef>
@@ -12283,10 +12501,10 @@
               <a:buAutoNum type="arabicParenR"/>
             </a:pPr>
             <a:r>
-              <a:rPr lang="en"/>
+              <a:rPr lang="en" dirty="0"/>
               <a:t>Run it</a:t>
             </a:r>
-            <a:endParaRPr/>
+            <a:endParaRPr dirty="0"/>
           </a:p>
         </p:txBody>
       </p:sp>
@@ -12299,11 +12517,11 @@
 </file>
 
 <file path=ppt/slides/slide5.xml><?xml version="1.0" encoding="utf-8"?>
-<p:sld xmlns:a="http://schemas.openxmlformats.org/drawingml/2006/main" xmlns:r="http://schemas.openxmlformats.org/officeDocument/2006/relationships" xmlns:mc="http://schemas.openxmlformats.org/markup-compatibility/2006" xmlns:mv="urn:schemas-microsoft-com:mac:vml" xmlns:p="http://schemas.openxmlformats.org/presentationml/2006/main" xmlns:c="http://schemas.openxmlformats.org/drawingml/2006/chart" xmlns:dgm="http://schemas.openxmlformats.org/drawingml/2006/diagram" xmlns:o="urn:schemas-microsoft-com:office:office" xmlns:v="urn:schemas-microsoft-com:vml" xmlns:pvml="urn:schemas-microsoft-com:office:powerpoint" xmlns:com="http://schemas.openxmlformats.org/drawingml/2006/compatibility" xmlns:p14="http://schemas.microsoft.com/office/powerpoint/2010/main" xmlns:p15="http://schemas.microsoft.com/office/powerpoint/2012/main" xmlns:ahyp="http://schemas.microsoft.com/office/drawing/2018/hyperlinkcolor">
+<p:sld xmlns:a="http://schemas.openxmlformats.org/drawingml/2006/main" xmlns:r="http://schemas.openxmlformats.org/officeDocument/2006/relationships" xmlns:p="http://schemas.openxmlformats.org/presentationml/2006/main">
   <p:cSld>
     <p:spTree>
       <p:nvGrpSpPr>
-        <p:cNvPr id="80" name="Shape 80"/>
+        <p:cNvPr id="1" name="Shape 80"/>
         <p:cNvGrpSpPr/>
         <p:nvPr/>
       </p:nvGrpSpPr>
@@ -12318,7 +12536,9 @@
       <p:sp>
         <p:nvSpPr>
           <p:cNvPr id="81" name="Google Shape;81;p17"/>
-          <p:cNvSpPr txBox="1"/>
+          <p:cNvSpPr txBox="1">
+            <a:spLocks noGrp="1"/>
+          </p:cNvSpPr>
           <p:nvPr>
             <p:ph type="title"/>
           </p:nvPr>
@@ -12333,12 +12553,12 @@
           </a:prstGeom>
         </p:spPr>
         <p:txBody>
-          <a:bodyPr anchorCtr="0" anchor="t" bIns="91425" lIns="91425" spcFirstLastPara="1" rIns="91425" wrap="square" tIns="91425">
+          <a:bodyPr spcFirstLastPara="1" wrap="square" lIns="91425" tIns="91425" rIns="91425" bIns="91425" anchor="t" anchorCtr="0">
             <a:normAutofit fontScale="90000"/>
           </a:bodyPr>
           <a:lstStyle/>
           <a:p>
-            <a:pPr indent="0" lvl="0" marL="0" rtl="0" algn="l">
+            <a:pPr marL="0" lvl="0" indent="0" algn="l" rtl="0">
               <a:spcBef>
                 <a:spcPts val="0"/>
               </a:spcBef>
@@ -12358,9 +12578,11 @@
       <p:sp>
         <p:nvSpPr>
           <p:cNvPr id="82" name="Google Shape;82;p17"/>
-          <p:cNvSpPr txBox="1"/>
+          <p:cNvSpPr txBox="1">
+            <a:spLocks noGrp="1"/>
+          </p:cNvSpPr>
           <p:nvPr>
-            <p:ph idx="1" type="body"/>
+            <p:ph type="body" idx="1"/>
           </p:nvPr>
         </p:nvSpPr>
         <p:spPr>
@@ -12373,12 +12595,12 @@
           </a:prstGeom>
         </p:spPr>
         <p:txBody>
-          <a:bodyPr anchorCtr="0" anchor="t" bIns="91425" lIns="91425" spcFirstLastPara="1" rIns="91425" wrap="square" tIns="91425">
+          <a:bodyPr spcFirstLastPara="1" wrap="square" lIns="91425" tIns="91425" rIns="91425" bIns="91425" anchor="t" anchorCtr="0">
             <a:normAutofit/>
           </a:bodyPr>
           <a:lstStyle/>
           <a:p>
-            <a:pPr indent="-342900" lvl="0" marL="457200" rtl="0" algn="l">
+            <a:pPr marL="457200" lvl="0" indent="-342900" algn="l" rtl="0">
               <a:spcBef>
                 <a:spcPts val="0"/>
               </a:spcBef>
@@ -12395,7 +12617,7 @@
             <a:endParaRPr/>
           </a:p>
           <a:p>
-            <a:pPr indent="-342900" lvl="0" marL="457200" rtl="0" algn="l">
+            <a:pPr marL="457200" lvl="0" indent="-342900" algn="l" rtl="0">
               <a:spcBef>
                 <a:spcPts val="0"/>
               </a:spcBef>
@@ -12412,7 +12634,7 @@
             <a:endParaRPr/>
           </a:p>
           <a:p>
-            <a:pPr indent="-342900" lvl="0" marL="457200" rtl="0" algn="l">
+            <a:pPr marL="457200" lvl="0" indent="-342900" algn="l" rtl="0">
               <a:spcBef>
                 <a:spcPts val="0"/>
               </a:spcBef>
@@ -12429,7 +12651,7 @@
             <a:endParaRPr/>
           </a:p>
           <a:p>
-            <a:pPr indent="0" lvl="0" marL="0" rtl="0" algn="l">
+            <a:pPr marL="0" lvl="0" indent="0" algn="l" rtl="0">
               <a:spcBef>
                 <a:spcPts val="1200"/>
               </a:spcBef>
@@ -12438,13 +12660,10 @@
               </a:spcAft>
               <a:buNone/>
             </a:pPr>
-            <a:r>
-              <a:t/>
-            </a:r>
-            <a:endParaRPr/>
-          </a:p>
-          <a:p>
-            <a:pPr indent="-342900" lvl="0" marL="457200" rtl="0" algn="l">
+            <a:endParaRPr/>
+          </a:p>
+          <a:p>
+            <a:pPr marL="457200" lvl="0" indent="-342900" algn="l" rtl="0">
               <a:spcBef>
                 <a:spcPts val="1200"/>
               </a:spcBef>
@@ -12471,11 +12690,11 @@
 </file>
 
 <file path=ppt/slides/slide6.xml><?xml version="1.0" encoding="utf-8"?>
-<p:sld xmlns:a="http://schemas.openxmlformats.org/drawingml/2006/main" xmlns:r="http://schemas.openxmlformats.org/officeDocument/2006/relationships" xmlns:mc="http://schemas.openxmlformats.org/markup-compatibility/2006" xmlns:mv="urn:schemas-microsoft-com:mac:vml" xmlns:p="http://schemas.openxmlformats.org/presentationml/2006/main" xmlns:c="http://schemas.openxmlformats.org/drawingml/2006/chart" xmlns:dgm="http://schemas.openxmlformats.org/drawingml/2006/diagram" xmlns:o="urn:schemas-microsoft-com:office:office" xmlns:v="urn:schemas-microsoft-com:vml" xmlns:pvml="urn:schemas-microsoft-com:office:powerpoint" xmlns:com="http://schemas.openxmlformats.org/drawingml/2006/compatibility" xmlns:p14="http://schemas.microsoft.com/office/powerpoint/2010/main" xmlns:p15="http://schemas.microsoft.com/office/powerpoint/2012/main" xmlns:ahyp="http://schemas.microsoft.com/office/drawing/2018/hyperlinkcolor">
+<p:sld xmlns:a="http://schemas.openxmlformats.org/drawingml/2006/main" xmlns:r="http://schemas.openxmlformats.org/officeDocument/2006/relationships" xmlns:p="http://schemas.openxmlformats.org/presentationml/2006/main">
   <p:cSld>
     <p:spTree>
       <p:nvGrpSpPr>
-        <p:cNvPr id="86" name="Shape 86"/>
+        <p:cNvPr id="1" name="Shape 86"/>
         <p:cNvGrpSpPr/>
         <p:nvPr/>
       </p:nvGrpSpPr>
@@ -12490,7 +12709,9 @@
       <p:sp>
         <p:nvSpPr>
           <p:cNvPr id="87" name="Google Shape;87;p18"/>
-          <p:cNvSpPr txBox="1"/>
+          <p:cNvSpPr txBox="1">
+            <a:spLocks noGrp="1"/>
+          </p:cNvSpPr>
           <p:nvPr>
             <p:ph type="title"/>
           </p:nvPr>
@@ -12505,12 +12726,12 @@
           </a:prstGeom>
         </p:spPr>
         <p:txBody>
-          <a:bodyPr anchorCtr="0" anchor="t" bIns="91425" lIns="91425" spcFirstLastPara="1" rIns="91425" wrap="square" tIns="91425">
+          <a:bodyPr spcFirstLastPara="1" wrap="square" lIns="91425" tIns="91425" rIns="91425" bIns="91425" anchor="t" anchorCtr="0">
             <a:normAutofit fontScale="90000"/>
           </a:bodyPr>
           <a:lstStyle/>
           <a:p>
-            <a:pPr indent="0" lvl="0" marL="0" rtl="0" algn="l">
+            <a:pPr marL="0" lvl="0" indent="0" algn="l" rtl="0">
               <a:spcBef>
                 <a:spcPts val="0"/>
               </a:spcBef>
@@ -12530,9 +12751,11 @@
       <p:sp>
         <p:nvSpPr>
           <p:cNvPr id="88" name="Google Shape;88;p18"/>
-          <p:cNvSpPr txBox="1"/>
+          <p:cNvSpPr txBox="1">
+            <a:spLocks noGrp="1"/>
+          </p:cNvSpPr>
           <p:nvPr>
-            <p:ph idx="1" type="body"/>
+            <p:ph type="body" idx="1"/>
           </p:nvPr>
         </p:nvSpPr>
         <p:spPr>
@@ -12545,12 +12768,12 @@
           </a:prstGeom>
         </p:spPr>
         <p:txBody>
-          <a:bodyPr anchorCtr="0" anchor="t" bIns="91425" lIns="91425" spcFirstLastPara="1" rIns="91425" wrap="square" tIns="91425">
+          <a:bodyPr spcFirstLastPara="1" wrap="square" lIns="91425" tIns="91425" rIns="91425" bIns="91425" anchor="t" anchorCtr="0">
             <a:normAutofit/>
           </a:bodyPr>
           <a:lstStyle/>
           <a:p>
-            <a:pPr indent="0" lvl="0" marL="0" rtl="0" algn="l">
+            <a:pPr marL="0" lvl="0" indent="0" algn="l" rtl="0">
               <a:spcBef>
                 <a:spcPts val="0"/>
               </a:spcBef>
@@ -12566,7 +12789,7 @@
             <a:endParaRPr/>
           </a:p>
           <a:p>
-            <a:pPr indent="-342900" lvl="0" marL="457200" rtl="0" algn="l">
+            <a:pPr marL="457200" lvl="0" indent="-342900" algn="l" rtl="0">
               <a:spcBef>
                 <a:spcPts val="1200"/>
               </a:spcBef>
@@ -12583,7 +12806,7 @@
             <a:endParaRPr/>
           </a:p>
           <a:p>
-            <a:pPr indent="-342900" lvl="0" marL="457200" rtl="0" algn="l">
+            <a:pPr marL="457200" lvl="0" indent="-342900" algn="l" rtl="0">
               <a:spcBef>
                 <a:spcPts val="0"/>
               </a:spcBef>
@@ -12600,7 +12823,7 @@
             <a:endParaRPr/>
           </a:p>
           <a:p>
-            <a:pPr indent="-342900" lvl="0" marL="457200" rtl="0" algn="l">
+            <a:pPr marL="457200" lvl="0" indent="-342900" algn="l" rtl="0">
               <a:spcBef>
                 <a:spcPts val="0"/>
               </a:spcBef>
@@ -12617,7 +12840,7 @@
             <a:endParaRPr/>
           </a:p>
           <a:p>
-            <a:pPr indent="0" lvl="0" marL="0" rtl="0" algn="l">
+            <a:pPr marL="0" lvl="0" indent="0" algn="l" rtl="0">
               <a:spcBef>
                 <a:spcPts val="1200"/>
               </a:spcBef>
@@ -12633,7 +12856,7 @@
             <a:endParaRPr sz="2500"/>
           </a:p>
           <a:p>
-            <a:pPr indent="0" lvl="0" marL="0" rtl="0" algn="l">
+            <a:pPr marL="0" lvl="0" indent="0" algn="l" rtl="0">
               <a:spcBef>
                 <a:spcPts val="1200"/>
               </a:spcBef>
@@ -12642,13 +12865,10 @@
               </a:spcAft>
               <a:buNone/>
             </a:pPr>
-            <a:r>
-              <a:t/>
-            </a:r>
             <a:endParaRPr sz="1600"/>
           </a:p>
           <a:p>
-            <a:pPr indent="0" lvl="0" marL="0" rtl="0" algn="l">
+            <a:pPr marL="0" lvl="0" indent="0" algn="l" rtl="0">
               <a:lnSpc>
                 <a:spcPct val="100000"/>
               </a:lnSpc>
@@ -12667,7 +12887,7 @@
             <a:endParaRPr sz="1600"/>
           </a:p>
           <a:p>
-            <a:pPr indent="0" lvl="0" marL="0" rtl="0" algn="l">
+            <a:pPr marL="0" lvl="0" indent="0" algn="l" rtl="0">
               <a:lnSpc>
                 <a:spcPct val="100000"/>
               </a:lnSpc>
@@ -12724,11 +12944,11 @@
 </file>
 
 <file path=ppt/slides/slide7.xml><?xml version="1.0" encoding="utf-8"?>
-<p:sld xmlns:a="http://schemas.openxmlformats.org/drawingml/2006/main" xmlns:r="http://schemas.openxmlformats.org/officeDocument/2006/relationships" xmlns:mc="http://schemas.openxmlformats.org/markup-compatibility/2006" xmlns:mv="urn:schemas-microsoft-com:mac:vml" xmlns:p="http://schemas.openxmlformats.org/presentationml/2006/main" xmlns:c="http://schemas.openxmlformats.org/drawingml/2006/chart" xmlns:dgm="http://schemas.openxmlformats.org/drawingml/2006/diagram" xmlns:o="urn:schemas-microsoft-com:office:office" xmlns:v="urn:schemas-microsoft-com:vml" xmlns:pvml="urn:schemas-microsoft-com:office:powerpoint" xmlns:com="http://schemas.openxmlformats.org/drawingml/2006/compatibility" xmlns:p14="http://schemas.microsoft.com/office/powerpoint/2010/main" xmlns:p15="http://schemas.microsoft.com/office/powerpoint/2012/main" xmlns:ahyp="http://schemas.microsoft.com/office/drawing/2018/hyperlinkcolor">
+<p:sld xmlns:a="http://schemas.openxmlformats.org/drawingml/2006/main" xmlns:r="http://schemas.openxmlformats.org/officeDocument/2006/relationships" xmlns:p="http://schemas.openxmlformats.org/presentationml/2006/main">
   <p:cSld>
     <p:spTree>
       <p:nvGrpSpPr>
-        <p:cNvPr id="93" name="Shape 93"/>
+        <p:cNvPr id="1" name="Shape 93"/>
         <p:cNvGrpSpPr/>
         <p:nvPr/>
       </p:nvGrpSpPr>
@@ -12743,7 +12963,9 @@
       <p:sp>
         <p:nvSpPr>
           <p:cNvPr id="94" name="Google Shape;94;p19"/>
-          <p:cNvSpPr txBox="1"/>
+          <p:cNvSpPr txBox="1">
+            <a:spLocks noGrp="1"/>
+          </p:cNvSpPr>
           <p:nvPr>
             <p:ph type="title"/>
           </p:nvPr>
@@ -12758,12 +12980,12 @@
           </a:prstGeom>
         </p:spPr>
         <p:txBody>
-          <a:bodyPr anchorCtr="0" anchor="t" bIns="91425" lIns="91425" spcFirstLastPara="1" rIns="91425" wrap="square" tIns="91425">
+          <a:bodyPr spcFirstLastPara="1" wrap="square" lIns="91425" tIns="91425" rIns="91425" bIns="91425" anchor="t" anchorCtr="0">
             <a:normAutofit fontScale="90000"/>
           </a:bodyPr>
           <a:lstStyle/>
           <a:p>
-            <a:pPr indent="0" lvl="0" marL="0" rtl="0" algn="l">
+            <a:pPr marL="0" lvl="0" indent="0" algn="l" rtl="0">
               <a:spcBef>
                 <a:spcPts val="0"/>
               </a:spcBef>
@@ -12783,9 +13005,11 @@
       <p:sp>
         <p:nvSpPr>
           <p:cNvPr id="95" name="Google Shape;95;p19"/>
-          <p:cNvSpPr txBox="1"/>
+          <p:cNvSpPr txBox="1">
+            <a:spLocks noGrp="1"/>
+          </p:cNvSpPr>
           <p:nvPr>
-            <p:ph idx="1" type="body"/>
+            <p:ph type="body" idx="1"/>
           </p:nvPr>
         </p:nvSpPr>
         <p:spPr>
@@ -12798,12 +13022,12 @@
           </a:prstGeom>
         </p:spPr>
         <p:txBody>
-          <a:bodyPr anchorCtr="0" anchor="t" bIns="91425" lIns="91425" spcFirstLastPara="1" rIns="91425" wrap="square" tIns="91425">
+          <a:bodyPr spcFirstLastPara="1" wrap="square" lIns="91425" tIns="91425" rIns="91425" bIns="91425" anchor="t" anchorCtr="0">
             <a:normAutofit/>
           </a:bodyPr>
           <a:lstStyle/>
           <a:p>
-            <a:pPr indent="0" lvl="0" marL="0" rtl="0" algn="l">
+            <a:pPr marL="0" lvl="0" indent="0" algn="l" rtl="0">
               <a:spcBef>
                 <a:spcPts val="0"/>
               </a:spcBef>
@@ -12857,11 +13081,11 @@
 </file>
 
 <file path=ppt/slides/slide8.xml><?xml version="1.0" encoding="utf-8"?>
-<p:sld xmlns:a="http://schemas.openxmlformats.org/drawingml/2006/main" xmlns:r="http://schemas.openxmlformats.org/officeDocument/2006/relationships" xmlns:mc="http://schemas.openxmlformats.org/markup-compatibility/2006" xmlns:mv="urn:schemas-microsoft-com:mac:vml" xmlns:p="http://schemas.openxmlformats.org/presentationml/2006/main" xmlns:c="http://schemas.openxmlformats.org/drawingml/2006/chart" xmlns:dgm="http://schemas.openxmlformats.org/drawingml/2006/diagram" xmlns:o="urn:schemas-microsoft-com:office:office" xmlns:v="urn:schemas-microsoft-com:vml" xmlns:pvml="urn:schemas-microsoft-com:office:powerpoint" xmlns:com="http://schemas.openxmlformats.org/drawingml/2006/compatibility" xmlns:p14="http://schemas.microsoft.com/office/powerpoint/2010/main" xmlns:p15="http://schemas.microsoft.com/office/powerpoint/2012/main" xmlns:ahyp="http://schemas.microsoft.com/office/drawing/2018/hyperlinkcolor">
+<p:sld xmlns:a="http://schemas.openxmlformats.org/drawingml/2006/main" xmlns:r="http://schemas.openxmlformats.org/officeDocument/2006/relationships" xmlns:p="http://schemas.openxmlformats.org/presentationml/2006/main">
   <p:cSld>
     <p:spTree>
       <p:nvGrpSpPr>
-        <p:cNvPr id="100" name="Shape 100"/>
+        <p:cNvPr id="1" name="Shape 100"/>
         <p:cNvGrpSpPr/>
         <p:nvPr/>
       </p:nvGrpSpPr>
@@ -12876,7 +13100,9 @@
       <p:sp>
         <p:nvSpPr>
           <p:cNvPr id="101" name="Google Shape;101;p20"/>
-          <p:cNvSpPr txBox="1"/>
+          <p:cNvSpPr txBox="1">
+            <a:spLocks noGrp="1"/>
+          </p:cNvSpPr>
           <p:nvPr>
             <p:ph type="title"/>
           </p:nvPr>
@@ -12891,12 +13117,12 @@
           </a:prstGeom>
         </p:spPr>
         <p:txBody>
-          <a:bodyPr anchorCtr="0" anchor="t" bIns="91425" lIns="91425" spcFirstLastPara="1" rIns="91425" wrap="square" tIns="91425">
+          <a:bodyPr spcFirstLastPara="1" wrap="square" lIns="91425" tIns="91425" rIns="91425" bIns="91425" anchor="t" anchorCtr="0">
             <a:normAutofit fontScale="90000"/>
           </a:bodyPr>
           <a:lstStyle/>
           <a:p>
-            <a:pPr indent="0" lvl="0" marL="0" rtl="0" algn="l">
+            <a:pPr marL="0" lvl="0" indent="0" algn="l" rtl="0">
               <a:spcBef>
                 <a:spcPts val="0"/>
               </a:spcBef>
@@ -12916,9 +13142,11 @@
       <p:sp>
         <p:nvSpPr>
           <p:cNvPr id="102" name="Google Shape;102;p20"/>
-          <p:cNvSpPr txBox="1"/>
+          <p:cNvSpPr txBox="1">
+            <a:spLocks noGrp="1"/>
+          </p:cNvSpPr>
           <p:nvPr>
-            <p:ph idx="1" type="body"/>
+            <p:ph type="body" idx="1"/>
           </p:nvPr>
         </p:nvSpPr>
         <p:spPr>
@@ -12931,12 +13159,12 @@
           </a:prstGeom>
         </p:spPr>
         <p:txBody>
-          <a:bodyPr anchorCtr="0" anchor="t" bIns="91425" lIns="91425" spcFirstLastPara="1" rIns="91425" wrap="square" tIns="91425">
+          <a:bodyPr spcFirstLastPara="1" wrap="square" lIns="91425" tIns="91425" rIns="91425" bIns="91425" anchor="t" anchorCtr="0">
             <a:normAutofit/>
           </a:bodyPr>
           <a:lstStyle/>
           <a:p>
-            <a:pPr indent="0" lvl="0" marL="0" rtl="0" algn="l">
+            <a:pPr marL="0" lvl="0" indent="0" algn="l" rtl="0">
               <a:spcBef>
                 <a:spcPts val="0"/>
               </a:spcBef>
@@ -12952,7 +13180,7 @@
             <a:endParaRPr/>
           </a:p>
           <a:p>
-            <a:pPr indent="0" lvl="0" marL="0" rtl="0" algn="l">
+            <a:pPr marL="0" lvl="0" indent="0" algn="l" rtl="0">
               <a:spcBef>
                 <a:spcPts val="1200"/>
               </a:spcBef>
@@ -12968,7 +13196,7 @@
             <a:endParaRPr/>
           </a:p>
           <a:p>
-            <a:pPr indent="0" lvl="0" marL="0" rtl="0" algn="l">
+            <a:pPr marL="0" lvl="0" indent="0" algn="l" rtl="0">
               <a:spcBef>
                 <a:spcPts val="1200"/>
               </a:spcBef>
@@ -12984,7 +13212,7 @@
             <a:endParaRPr/>
           </a:p>
           <a:p>
-            <a:pPr indent="0" lvl="0" marL="0" rtl="0" algn="l">
+            <a:pPr marL="0" lvl="0" indent="0" algn="l" rtl="0">
               <a:spcBef>
                 <a:spcPts val="1200"/>
               </a:spcBef>
@@ -13000,7 +13228,7 @@
             <a:endParaRPr/>
           </a:p>
           <a:p>
-            <a:pPr indent="0" lvl="0" marL="0" rtl="0" algn="l">
+            <a:pPr marL="0" lvl="0" indent="0" algn="l" rtl="0">
               <a:spcBef>
                 <a:spcPts val="1200"/>
               </a:spcBef>
@@ -13016,7 +13244,7 @@
             <a:endParaRPr/>
           </a:p>
           <a:p>
-            <a:pPr indent="0" lvl="0" marL="0" rtl="0" algn="l">
+            <a:pPr marL="0" lvl="0" indent="0" algn="l" rtl="0">
               <a:spcBef>
                 <a:spcPts val="1200"/>
               </a:spcBef>
@@ -13042,11 +13270,11 @@
 </file>
 
 <file path=ppt/slides/slide9.xml><?xml version="1.0" encoding="utf-8"?>
-<p:sld xmlns:a="http://schemas.openxmlformats.org/drawingml/2006/main" xmlns:r="http://schemas.openxmlformats.org/officeDocument/2006/relationships" xmlns:mc="http://schemas.openxmlformats.org/markup-compatibility/2006" xmlns:mv="urn:schemas-microsoft-com:mac:vml" xmlns:p="http://schemas.openxmlformats.org/presentationml/2006/main" xmlns:c="http://schemas.openxmlformats.org/drawingml/2006/chart" xmlns:dgm="http://schemas.openxmlformats.org/drawingml/2006/diagram" xmlns:o="urn:schemas-microsoft-com:office:office" xmlns:v="urn:schemas-microsoft-com:vml" xmlns:pvml="urn:schemas-microsoft-com:office:powerpoint" xmlns:com="http://schemas.openxmlformats.org/drawingml/2006/compatibility" xmlns:p14="http://schemas.microsoft.com/office/powerpoint/2010/main" xmlns:p15="http://schemas.microsoft.com/office/powerpoint/2012/main" xmlns:ahyp="http://schemas.microsoft.com/office/drawing/2018/hyperlinkcolor">
+<p:sld xmlns:a="http://schemas.openxmlformats.org/drawingml/2006/main" xmlns:r="http://schemas.openxmlformats.org/officeDocument/2006/relationships" xmlns:p="http://schemas.openxmlformats.org/presentationml/2006/main">
   <p:cSld>
     <p:spTree>
       <p:nvGrpSpPr>
-        <p:cNvPr id="106" name="Shape 106"/>
+        <p:cNvPr id="1" name="Shape 106"/>
         <p:cNvGrpSpPr/>
         <p:nvPr/>
       </p:nvGrpSpPr>
@@ -13061,7 +13289,9 @@
       <p:sp>
         <p:nvSpPr>
           <p:cNvPr id="107" name="Google Shape;107;p21"/>
-          <p:cNvSpPr txBox="1"/>
+          <p:cNvSpPr txBox="1">
+            <a:spLocks noGrp="1"/>
+          </p:cNvSpPr>
           <p:nvPr>
             <p:ph type="title"/>
           </p:nvPr>
@@ -13076,12 +13306,12 @@
           </a:prstGeom>
         </p:spPr>
         <p:txBody>
-          <a:bodyPr anchorCtr="0" anchor="t" bIns="91425" lIns="91425" spcFirstLastPara="1" rIns="91425" wrap="square" tIns="91425">
+          <a:bodyPr spcFirstLastPara="1" wrap="square" lIns="91425" tIns="91425" rIns="91425" bIns="91425" anchor="t" anchorCtr="0">
             <a:normAutofit fontScale="90000"/>
           </a:bodyPr>
           <a:lstStyle/>
           <a:p>
-            <a:pPr indent="0" lvl="0" marL="0" rtl="0" algn="l">
+            <a:pPr marL="0" lvl="0" indent="0" algn="l" rtl="0">
               <a:spcBef>
                 <a:spcPts val="0"/>
               </a:spcBef>
@@ -13101,9 +13331,11 @@
       <p:sp>
         <p:nvSpPr>
           <p:cNvPr id="108" name="Google Shape;108;p21"/>
-          <p:cNvSpPr txBox="1"/>
+          <p:cNvSpPr txBox="1">
+            <a:spLocks noGrp="1"/>
+          </p:cNvSpPr>
           <p:nvPr>
-            <p:ph idx="1" type="body"/>
+            <p:ph type="body" idx="1"/>
           </p:nvPr>
         </p:nvSpPr>
         <p:spPr>
@@ -13116,12 +13348,12 @@
           </a:prstGeom>
         </p:spPr>
         <p:txBody>
-          <a:bodyPr anchorCtr="0" anchor="t" bIns="91425" lIns="91425" spcFirstLastPara="1" rIns="91425" wrap="square" tIns="91425">
+          <a:bodyPr spcFirstLastPara="1" wrap="square" lIns="91425" tIns="91425" rIns="91425" bIns="91425" anchor="t" anchorCtr="0">
             <a:normAutofit lnSpcReduction="10000"/>
           </a:bodyPr>
           <a:lstStyle/>
           <a:p>
-            <a:pPr indent="0" lvl="0" marL="0" rtl="0" algn="l">
+            <a:pPr marL="0" lvl="0" indent="0" algn="l" rtl="0">
               <a:spcBef>
                 <a:spcPts val="0"/>
               </a:spcBef>
@@ -13137,7 +13369,7 @@
             <a:endParaRPr/>
           </a:p>
           <a:p>
-            <a:pPr indent="0" lvl="0" marL="0" rtl="0" algn="l">
+            <a:pPr marL="0" lvl="0" indent="0" algn="l" rtl="0">
               <a:spcBef>
                 <a:spcPts val="1200"/>
               </a:spcBef>
@@ -13146,13 +13378,10 @@
               </a:spcAft>
               <a:buNone/>
             </a:pPr>
-            <a:r>
-              <a:t/>
-            </a:r>
-            <a:endParaRPr/>
-          </a:p>
-          <a:p>
-            <a:pPr indent="0" lvl="0" marL="0" rtl="0" algn="l">
+            <a:endParaRPr/>
+          </a:p>
+          <a:p>
+            <a:pPr marL="0" lvl="0" indent="0" algn="l" rtl="0">
               <a:spcBef>
                 <a:spcPts val="1200"/>
               </a:spcBef>
@@ -13168,7 +13397,7 @@
             <a:endParaRPr/>
           </a:p>
           <a:p>
-            <a:pPr indent="-342900" lvl="0" marL="457200" rtl="0" algn="l">
+            <a:pPr marL="457200" lvl="0" indent="-342900" algn="l" rtl="0">
               <a:spcBef>
                 <a:spcPts val="1200"/>
               </a:spcBef>
@@ -13185,7 +13414,7 @@
             <a:endParaRPr/>
           </a:p>
           <a:p>
-            <a:pPr indent="-342900" lvl="0" marL="457200" rtl="0" algn="l">
+            <a:pPr marL="457200" lvl="0" indent="-342900" algn="l" rtl="0">
               <a:spcBef>
                 <a:spcPts val="0"/>
               </a:spcBef>
@@ -13240,7 +13469,288 @@
 </file>
 
 <file path=ppt/theme/theme1.xml><?xml version="1.0" encoding="utf-8"?>
-<a:theme xmlns:a="http://schemas.openxmlformats.org/drawingml/2006/main" xmlns:r="http://schemas.openxmlformats.org/officeDocument/2006/relationships">
+<a:theme xmlns:a="http://schemas.openxmlformats.org/drawingml/2006/main" name="Simple Light">
+  <a:themeElements>
+    <a:clrScheme name="Simple Light">
+      <a:dk1>
+        <a:srgbClr val="000000"/>
+      </a:dk1>
+      <a:lt1>
+        <a:srgbClr val="FFFFFF"/>
+      </a:lt1>
+      <a:dk2>
+        <a:srgbClr val="595959"/>
+      </a:dk2>
+      <a:lt2>
+        <a:srgbClr val="EEEEEE"/>
+      </a:lt2>
+      <a:accent1>
+        <a:srgbClr val="4285F4"/>
+      </a:accent1>
+      <a:accent2>
+        <a:srgbClr val="212121"/>
+      </a:accent2>
+      <a:accent3>
+        <a:srgbClr val="78909C"/>
+      </a:accent3>
+      <a:accent4>
+        <a:srgbClr val="FFAB40"/>
+      </a:accent4>
+      <a:accent5>
+        <a:srgbClr val="0097A7"/>
+      </a:accent5>
+      <a:accent6>
+        <a:srgbClr val="EEFF41"/>
+      </a:accent6>
+      <a:hlink>
+        <a:srgbClr val="0097A7"/>
+      </a:hlink>
+      <a:folHlink>
+        <a:srgbClr val="0097A7"/>
+      </a:folHlink>
+    </a:clrScheme>
+    <a:fontScheme name="Office">
+      <a:majorFont>
+        <a:latin typeface="Arial"/>
+        <a:ea typeface=""/>
+        <a:cs typeface=""/>
+        <a:font script="Jpan" typeface="ＭＳ Ｐゴシック"/>
+        <a:font script="Hang" typeface="맑은 고딕"/>
+        <a:font script="Hans" typeface="宋体"/>
+        <a:font script="Hant" typeface="新細明體"/>
+        <a:font script="Arab" typeface="Times New Roman"/>
+        <a:font script="Hebr" typeface="Times New Roman"/>
+        <a:font script="Thai" typeface="Angsana New"/>
+        <a:font script="Ethi" typeface="Nyala"/>
+        <a:font script="Beng" typeface="Vrinda"/>
+        <a:font script="Gujr" typeface="Shruti"/>
+        <a:font script="Khmr" typeface="MoolBoran"/>
+        <a:font script="Knda" typeface="Tunga"/>
+        <a:font script="Guru" typeface="Raavi"/>
+        <a:font script="Cans" typeface="Euphemia"/>
+        <a:font script="Cher" typeface="Plantagenet Cherokee"/>
+        <a:font script="Yiii" typeface="Microsoft Yi Baiti"/>
+        <a:font script="Tibt" typeface="Microsoft Himalaya"/>
+        <a:font script="Thaa" typeface="MV Boli"/>
+        <a:font script="Deva" typeface="Mangal"/>
+        <a:font script="Telu" typeface="Gautami"/>
+        <a:font script="Taml" typeface="Latha"/>
+        <a:font script="Syrc" typeface="Estrangelo Edessa"/>
+        <a:font script="Orya" typeface="Kalinga"/>
+        <a:font script="Mlym" typeface="Kartika"/>
+        <a:font script="Laoo" typeface="DokChampa"/>
+        <a:font script="Sinh" typeface="Iskoola Pota"/>
+        <a:font script="Mong" typeface="Mongolian Baiti"/>
+        <a:font script="Viet" typeface="Times New Roman"/>
+        <a:font script="Uigh" typeface="Microsoft Uighur"/>
+        <a:font script="Geor" typeface="Sylfaen"/>
+      </a:majorFont>
+      <a:minorFont>
+        <a:latin typeface="Arial"/>
+        <a:ea typeface=""/>
+        <a:cs typeface=""/>
+        <a:font script="Jpan" typeface="ＭＳ Ｐゴシック"/>
+        <a:font script="Hang" typeface="맑은 고딕"/>
+        <a:font script="Hans" typeface="宋体"/>
+        <a:font script="Hant" typeface="新細明體"/>
+        <a:font script="Arab" typeface="Arial"/>
+        <a:font script="Hebr" typeface="Arial"/>
+        <a:font script="Thai" typeface="Cordia New"/>
+        <a:font script="Ethi" typeface="Nyala"/>
+        <a:font script="Beng" typeface="Vrinda"/>
+        <a:font script="Gujr" typeface="Shruti"/>
+        <a:font script="Khmr" typeface="DaunPenh"/>
+        <a:font script="Knda" typeface="Tunga"/>
+        <a:font script="Guru" typeface="Raavi"/>
+        <a:font script="Cans" typeface="Euphemia"/>
+        <a:font script="Cher" typeface="Plantagenet Cherokee"/>
+        <a:font script="Yiii" typeface="Microsoft Yi Baiti"/>
+        <a:font script="Tibt" typeface="Microsoft Himalaya"/>
+        <a:font script="Thaa" typeface="MV Boli"/>
+        <a:font script="Deva" typeface="Mangal"/>
+        <a:font script="Telu" typeface="Gautami"/>
+        <a:font script="Taml" typeface="Latha"/>
+        <a:font script="Syrc" typeface="Estrangelo Edessa"/>
+        <a:font script="Orya" typeface="Kalinga"/>
+        <a:font script="Mlym" typeface="Kartika"/>
+        <a:font script="Laoo" typeface="DokChampa"/>
+        <a:font script="Sinh" typeface="Iskoola Pota"/>
+        <a:font script="Mong" typeface="Mongolian Baiti"/>
+        <a:font script="Viet" typeface="Arial"/>
+        <a:font script="Uigh" typeface="Microsoft Uighur"/>
+        <a:font script="Geor" typeface="Sylfaen"/>
+      </a:minorFont>
+    </a:fontScheme>
+    <a:fmtScheme name="Office">
+      <a:fillStyleLst>
+        <a:solidFill>
+          <a:schemeClr val="phClr"/>
+        </a:solidFill>
+        <a:gradFill rotWithShape="1">
+          <a:gsLst>
+            <a:gs pos="0">
+              <a:schemeClr val="phClr">
+                <a:tint val="50000"/>
+                <a:satMod val="300000"/>
+              </a:schemeClr>
+            </a:gs>
+            <a:gs pos="35000">
+              <a:schemeClr val="phClr">
+                <a:tint val="37000"/>
+                <a:satMod val="300000"/>
+              </a:schemeClr>
+            </a:gs>
+            <a:gs pos="100000">
+              <a:schemeClr val="phClr">
+                <a:tint val="15000"/>
+                <a:satMod val="350000"/>
+              </a:schemeClr>
+            </a:gs>
+          </a:gsLst>
+          <a:lin ang="16200000" scaled="1"/>
+        </a:gradFill>
+        <a:gradFill rotWithShape="1">
+          <a:gsLst>
+            <a:gs pos="0">
+              <a:schemeClr val="phClr">
+                <a:tint val="100000"/>
+                <a:shade val="100000"/>
+                <a:satMod val="130000"/>
+              </a:schemeClr>
+            </a:gs>
+            <a:gs pos="100000">
+              <a:schemeClr val="phClr">
+                <a:tint val="50000"/>
+                <a:shade val="100000"/>
+                <a:satMod val="350000"/>
+              </a:schemeClr>
+            </a:gs>
+          </a:gsLst>
+          <a:lin ang="16200000" scaled="0"/>
+        </a:gradFill>
+      </a:fillStyleLst>
+      <a:lnStyleLst>
+        <a:ln w="9525" cap="flat" cmpd="sng" algn="ctr">
+          <a:solidFill>
+            <a:schemeClr val="phClr">
+              <a:shade val="95000"/>
+              <a:satMod val="105000"/>
+            </a:schemeClr>
+          </a:solidFill>
+          <a:prstDash val="solid"/>
+        </a:ln>
+        <a:ln w="25400" cap="flat" cmpd="sng" algn="ctr">
+          <a:solidFill>
+            <a:schemeClr val="phClr"/>
+          </a:solidFill>
+          <a:prstDash val="solid"/>
+        </a:ln>
+        <a:ln w="38100" cap="flat" cmpd="sng" algn="ctr">
+          <a:solidFill>
+            <a:schemeClr val="phClr"/>
+          </a:solidFill>
+          <a:prstDash val="solid"/>
+        </a:ln>
+      </a:lnStyleLst>
+      <a:effectStyleLst>
+        <a:effectStyle>
+          <a:effectLst>
+            <a:outerShdw blurRad="40000" dist="20000" dir="5400000" rotWithShape="0">
+              <a:srgbClr val="000000">
+                <a:alpha val="38000"/>
+              </a:srgbClr>
+            </a:outerShdw>
+          </a:effectLst>
+        </a:effectStyle>
+        <a:effectStyle>
+          <a:effectLst>
+            <a:outerShdw blurRad="40000" dist="23000" dir="5400000" rotWithShape="0">
+              <a:srgbClr val="000000">
+                <a:alpha val="35000"/>
+              </a:srgbClr>
+            </a:outerShdw>
+          </a:effectLst>
+        </a:effectStyle>
+        <a:effectStyle>
+          <a:effectLst>
+            <a:outerShdw blurRad="40000" dist="23000" dir="5400000" rotWithShape="0">
+              <a:srgbClr val="000000">
+                <a:alpha val="35000"/>
+              </a:srgbClr>
+            </a:outerShdw>
+          </a:effectLst>
+          <a:scene3d>
+            <a:camera prst="orthographicFront">
+              <a:rot lat="0" lon="0" rev="0"/>
+            </a:camera>
+            <a:lightRig rig="threePt" dir="t">
+              <a:rot lat="0" lon="0" rev="1200000"/>
+            </a:lightRig>
+          </a:scene3d>
+          <a:sp3d>
+            <a:bevelT w="63500" h="25400"/>
+          </a:sp3d>
+        </a:effectStyle>
+      </a:effectStyleLst>
+      <a:bgFillStyleLst>
+        <a:solidFill>
+          <a:schemeClr val="phClr"/>
+        </a:solidFill>
+        <a:gradFill rotWithShape="1">
+          <a:gsLst>
+            <a:gs pos="0">
+              <a:schemeClr val="phClr">
+                <a:tint val="40000"/>
+                <a:satMod val="350000"/>
+              </a:schemeClr>
+            </a:gs>
+            <a:gs pos="40000">
+              <a:schemeClr val="phClr">
+                <a:tint val="45000"/>
+                <a:shade val="99000"/>
+                <a:satMod val="350000"/>
+              </a:schemeClr>
+            </a:gs>
+            <a:gs pos="100000">
+              <a:schemeClr val="phClr">
+                <a:shade val="20000"/>
+                <a:satMod val="255000"/>
+              </a:schemeClr>
+            </a:gs>
+          </a:gsLst>
+          <a:path path="circle">
+            <a:fillToRect l="50000" t="-80000" r="50000" b="180000"/>
+          </a:path>
+        </a:gradFill>
+        <a:gradFill rotWithShape="1">
+          <a:gsLst>
+            <a:gs pos="0">
+              <a:schemeClr val="phClr">
+                <a:tint val="80000"/>
+                <a:satMod val="300000"/>
+              </a:schemeClr>
+            </a:gs>
+            <a:gs pos="100000">
+              <a:schemeClr val="phClr">
+                <a:shade val="30000"/>
+                <a:satMod val="200000"/>
+              </a:schemeClr>
+            </a:gs>
+          </a:gsLst>
+          <a:path path="circle">
+            <a:fillToRect l="50000" t="50000" r="50000" b="50000"/>
+          </a:path>
+        </a:gradFill>
+      </a:bgFillStyleLst>
+    </a:fmtScheme>
+  </a:themeElements>
+  <a:objectDefaults/>
+  <a:extraClrSchemeLst/>
+</a:theme>
+</file>
+
+<file path=ppt/theme/theme2.xml><?xml version="1.0" encoding="utf-8"?>
+<a:theme xmlns:a="http://schemas.openxmlformats.org/drawingml/2006/main">
   <a:themeElements>
     <a:clrScheme name="Default">
       <a:dk1>
@@ -13515,284 +14025,7 @@
       </a:bgFillStyleLst>
     </a:fmtScheme>
   </a:themeElements>
-</a:theme>
-</file>
-
-<file path=ppt/theme/theme2.xml><?xml version="1.0" encoding="utf-8"?>
-<a:theme xmlns:a="http://schemas.openxmlformats.org/drawingml/2006/main" xmlns:r="http://schemas.openxmlformats.org/officeDocument/2006/relationships" name="Simple Light">
-  <a:themeElements>
-    <a:clrScheme name="Simple Light">
-      <a:dk1>
-        <a:srgbClr val="000000"/>
-      </a:dk1>
-      <a:lt1>
-        <a:srgbClr val="FFFFFF"/>
-      </a:lt1>
-      <a:dk2>
-        <a:srgbClr val="595959"/>
-      </a:dk2>
-      <a:lt2>
-        <a:srgbClr val="EEEEEE"/>
-      </a:lt2>
-      <a:accent1>
-        <a:srgbClr val="4285F4"/>
-      </a:accent1>
-      <a:accent2>
-        <a:srgbClr val="212121"/>
-      </a:accent2>
-      <a:accent3>
-        <a:srgbClr val="78909C"/>
-      </a:accent3>
-      <a:accent4>
-        <a:srgbClr val="FFAB40"/>
-      </a:accent4>
-      <a:accent5>
-        <a:srgbClr val="0097A7"/>
-      </a:accent5>
-      <a:accent6>
-        <a:srgbClr val="EEFF41"/>
-      </a:accent6>
-      <a:hlink>
-        <a:srgbClr val="0097A7"/>
-      </a:hlink>
-      <a:folHlink>
-        <a:srgbClr val="0097A7"/>
-      </a:folHlink>
-    </a:clrScheme>
-    <a:fontScheme name="Office">
-      <a:majorFont>
-        <a:latin typeface="Arial"/>
-        <a:ea typeface=""/>
-        <a:cs typeface=""/>
-        <a:font script="Jpan" typeface="ＭＳ Ｐゴシック"/>
-        <a:font script="Hang" typeface="맑은 고딕"/>
-        <a:font script="Hans" typeface="宋体"/>
-        <a:font script="Hant" typeface="新細明體"/>
-        <a:font script="Arab" typeface="Times New Roman"/>
-        <a:font script="Hebr" typeface="Times New Roman"/>
-        <a:font script="Thai" typeface="Angsana New"/>
-        <a:font script="Ethi" typeface="Nyala"/>
-        <a:font script="Beng" typeface="Vrinda"/>
-        <a:font script="Gujr" typeface="Shruti"/>
-        <a:font script="Khmr" typeface="MoolBoran"/>
-        <a:font script="Knda" typeface="Tunga"/>
-        <a:font script="Guru" typeface="Raavi"/>
-        <a:font script="Cans" typeface="Euphemia"/>
-        <a:font script="Cher" typeface="Plantagenet Cherokee"/>
-        <a:font script="Yiii" typeface="Microsoft Yi Baiti"/>
-        <a:font script="Tibt" typeface="Microsoft Himalaya"/>
-        <a:font script="Thaa" typeface="MV Boli"/>
-        <a:font script="Deva" typeface="Mangal"/>
-        <a:font script="Telu" typeface="Gautami"/>
-        <a:font script="Taml" typeface="Latha"/>
-        <a:font script="Syrc" typeface="Estrangelo Edessa"/>
-        <a:font script="Orya" typeface="Kalinga"/>
-        <a:font script="Mlym" typeface="Kartika"/>
-        <a:font script="Laoo" typeface="DokChampa"/>
-        <a:font script="Sinh" typeface="Iskoola Pota"/>
-        <a:font script="Mong" typeface="Mongolian Baiti"/>
-        <a:font script="Viet" typeface="Times New Roman"/>
-        <a:font script="Uigh" typeface="Microsoft Uighur"/>
-        <a:font script="Geor" typeface="Sylfaen"/>
-      </a:majorFont>
-      <a:minorFont>
-        <a:latin typeface="Arial"/>
-        <a:ea typeface=""/>
-        <a:cs typeface=""/>
-        <a:font script="Jpan" typeface="ＭＳ Ｐゴシック"/>
-        <a:font script="Hang" typeface="맑은 고딕"/>
-        <a:font script="Hans" typeface="宋体"/>
-        <a:font script="Hant" typeface="新細明體"/>
-        <a:font script="Arab" typeface="Arial"/>
-        <a:font script="Hebr" typeface="Arial"/>
-        <a:font script="Thai" typeface="Cordia New"/>
-        <a:font script="Ethi" typeface="Nyala"/>
-        <a:font script="Beng" typeface="Vrinda"/>
-        <a:font script="Gujr" typeface="Shruti"/>
-        <a:font script="Khmr" typeface="DaunPenh"/>
-        <a:font script="Knda" typeface="Tunga"/>
-        <a:font script="Guru" typeface="Raavi"/>
-        <a:font script="Cans" typeface="Euphemia"/>
-        <a:font script="Cher" typeface="Plantagenet Cherokee"/>
-        <a:font script="Yiii" typeface="Microsoft Yi Baiti"/>
-        <a:font script="Tibt" typeface="Microsoft Himalaya"/>
-        <a:font script="Thaa" typeface="MV Boli"/>
-        <a:font script="Deva" typeface="Mangal"/>
-        <a:font script="Telu" typeface="Gautami"/>
-        <a:font script="Taml" typeface="Latha"/>
-        <a:font script="Syrc" typeface="Estrangelo Edessa"/>
-        <a:font script="Orya" typeface="Kalinga"/>
-        <a:font script="Mlym" typeface="Kartika"/>
-        <a:font script="Laoo" typeface="DokChampa"/>
-        <a:font script="Sinh" typeface="Iskoola Pota"/>
-        <a:font script="Mong" typeface="Mongolian Baiti"/>
-        <a:font script="Viet" typeface="Arial"/>
-        <a:font script="Uigh" typeface="Microsoft Uighur"/>
-        <a:font script="Geor" typeface="Sylfaen"/>
-      </a:minorFont>
-    </a:fontScheme>
-    <a:fmtScheme name="Office">
-      <a:fillStyleLst>
-        <a:solidFill>
-          <a:schemeClr val="phClr"/>
-        </a:solidFill>
-        <a:gradFill rotWithShape="1">
-          <a:gsLst>
-            <a:gs pos="0">
-              <a:schemeClr val="phClr">
-                <a:tint val="50000"/>
-                <a:satMod val="300000"/>
-              </a:schemeClr>
-            </a:gs>
-            <a:gs pos="35000">
-              <a:schemeClr val="phClr">
-                <a:tint val="37000"/>
-                <a:satMod val="300000"/>
-              </a:schemeClr>
-            </a:gs>
-            <a:gs pos="100000">
-              <a:schemeClr val="phClr">
-                <a:tint val="15000"/>
-                <a:satMod val="350000"/>
-              </a:schemeClr>
-            </a:gs>
-          </a:gsLst>
-          <a:lin ang="16200000" scaled="1"/>
-        </a:gradFill>
-        <a:gradFill rotWithShape="1">
-          <a:gsLst>
-            <a:gs pos="0">
-              <a:schemeClr val="phClr">
-                <a:tint val="100000"/>
-                <a:shade val="100000"/>
-                <a:satMod val="130000"/>
-              </a:schemeClr>
-            </a:gs>
-            <a:gs pos="100000">
-              <a:schemeClr val="phClr">
-                <a:tint val="50000"/>
-                <a:shade val="100000"/>
-                <a:satMod val="350000"/>
-              </a:schemeClr>
-            </a:gs>
-          </a:gsLst>
-          <a:lin ang="16200000" scaled="0"/>
-        </a:gradFill>
-      </a:fillStyleLst>
-      <a:lnStyleLst>
-        <a:ln w="9525" cap="flat" cmpd="sng" algn="ctr">
-          <a:solidFill>
-            <a:schemeClr val="phClr">
-              <a:shade val="95000"/>
-              <a:satMod val="105000"/>
-            </a:schemeClr>
-          </a:solidFill>
-          <a:prstDash val="solid"/>
-        </a:ln>
-        <a:ln w="25400" cap="flat" cmpd="sng" algn="ctr">
-          <a:solidFill>
-            <a:schemeClr val="phClr"/>
-          </a:solidFill>
-          <a:prstDash val="solid"/>
-        </a:ln>
-        <a:ln w="38100" cap="flat" cmpd="sng" algn="ctr">
-          <a:solidFill>
-            <a:schemeClr val="phClr"/>
-          </a:solidFill>
-          <a:prstDash val="solid"/>
-        </a:ln>
-      </a:lnStyleLst>
-      <a:effectStyleLst>
-        <a:effectStyle>
-          <a:effectLst>
-            <a:outerShdw blurRad="40000" dist="20000" dir="5400000" rotWithShape="0">
-              <a:srgbClr val="000000">
-                <a:alpha val="38000"/>
-              </a:srgbClr>
-            </a:outerShdw>
-          </a:effectLst>
-        </a:effectStyle>
-        <a:effectStyle>
-          <a:effectLst>
-            <a:outerShdw blurRad="40000" dist="23000" dir="5400000" rotWithShape="0">
-              <a:srgbClr val="000000">
-                <a:alpha val="35000"/>
-              </a:srgbClr>
-            </a:outerShdw>
-          </a:effectLst>
-        </a:effectStyle>
-        <a:effectStyle>
-          <a:effectLst>
-            <a:outerShdw blurRad="40000" dist="23000" dir="5400000" rotWithShape="0">
-              <a:srgbClr val="000000">
-                <a:alpha val="35000"/>
-              </a:srgbClr>
-            </a:outerShdw>
-          </a:effectLst>
-          <a:scene3d>
-            <a:camera prst="orthographicFront">
-              <a:rot lat="0" lon="0" rev="0"/>
-            </a:camera>
-            <a:lightRig rig="threePt" dir="t">
-              <a:rot lat="0" lon="0" rev="1200000"/>
-            </a:lightRig>
-          </a:scene3d>
-          <a:sp3d>
-            <a:bevelT w="63500" h="25400"/>
-          </a:sp3d>
-        </a:effectStyle>
-      </a:effectStyleLst>
-      <a:bgFillStyleLst>
-        <a:solidFill>
-          <a:schemeClr val="phClr"/>
-        </a:solidFill>
-        <a:gradFill rotWithShape="1">
-          <a:gsLst>
-            <a:gs pos="0">
-              <a:schemeClr val="phClr">
-                <a:tint val="40000"/>
-                <a:satMod val="350000"/>
-              </a:schemeClr>
-            </a:gs>
-            <a:gs pos="40000">
-              <a:schemeClr val="phClr">
-                <a:tint val="45000"/>
-                <a:shade val="99000"/>
-                <a:satMod val="350000"/>
-              </a:schemeClr>
-            </a:gs>
-            <a:gs pos="100000">
-              <a:schemeClr val="phClr">
-                <a:shade val="20000"/>
-                <a:satMod val="255000"/>
-              </a:schemeClr>
-            </a:gs>
-          </a:gsLst>
-          <a:path path="circle">
-            <a:fillToRect l="50000" t="-80000" r="50000" b="180000"/>
-          </a:path>
-        </a:gradFill>
-        <a:gradFill rotWithShape="1">
-          <a:gsLst>
-            <a:gs pos="0">
-              <a:schemeClr val="phClr">
-                <a:tint val="80000"/>
-                <a:satMod val="300000"/>
-              </a:schemeClr>
-            </a:gs>
-            <a:gs pos="100000">
-              <a:schemeClr val="phClr">
-                <a:shade val="30000"/>
-                <a:satMod val="200000"/>
-              </a:schemeClr>
-            </a:gs>
-          </a:gsLst>
-          <a:path path="circle">
-            <a:fillToRect l="50000" t="50000" r="50000" b="50000"/>
-          </a:path>
-        </a:gradFill>
-      </a:bgFillStyleLst>
-    </a:fmtScheme>
-  </a:themeElements>
+  <a:objectDefaults/>
+  <a:extraClrSchemeLst/>
 </a:theme>
 </file>